--- a/Curso Gas B/16 - UNE 60670 - Instalaciones en servicio y control periodico/16 - UNE 60670 - Instalaciones en servicio y control periodico - Vídeo 2.pptx
+++ b/Curso Gas B/16 - UNE 60670 - Instalaciones en servicio y control periodico/16 - UNE 60670 - Instalaciones en servicio y control periodico - Vídeo 2.pptx
@@ -25,6 +25,7 @@
     <p:sldId id="273" r:id="rId25"/>
     <p:sldId id="274" r:id="rId26"/>
     <p:sldId id="275" r:id="rId27"/>
+    <p:sldId id="276" r:id="rId28"/>
   </p:sldIdLst>
   <p:sldSz cx="12191695" cy="6858000" type="screen4x3"/>
   <p:notesSz cx="6858000" cy="9144000"/>
@@ -606,22 +607,22 @@
           <a:lstStyle/>
           <a:p>
             <a:r>
-              <a:t>N1: ¿Por qué no puede haber un calentador en el baño o en el dormitorio?</a:t>
-            </a:r>
-          </a:p>
-          <a:p>
-            <a:r>
-              <a:t>N2: Esta es de las anomalías más preguntadas y de las que más matan, así que atención. Un aparato de tipo A o de tipo B, que son los que cogen el aire del propio local o evacuan los humos a él, no puede estar en un dormitorio ni en un baño, ducha o aseo. ¿La razón? Son estancias donde duermes o te encierras con la puerta cerrada. Si el aparato falla y suelta monóxido de carbono, ahí te intoxica sin que te des cuenta, porque estás dormido o aislado. Es intoxicación por CO esperando a pasar.</a:t>
-            </a:r>
-          </a:p>
-          <a:p>
-            <a:r>
-              <a:t>N1: ¿Y los aparatos estancos, los tipo C?</a:t>
-            </a:r>
-          </a:p>
-          <a:p>
-            <a:r>
-              <a:t>N2: Esos sí pueden, y esa es la clave. Un tipo C es estanco: coge el aire de fuera y echa los humos fuera, no intercambia aire con el cuarto. Como no respira el aire de la habitación ni le suelta humos, no hay riesgo de intoxicación por ese lado. Por eso la caldera estanca moderna sí puede ir en un baño y el viejo calentador de tiro natural no. Esta anomalía es principal: si te la encuentras, se corta. Y para no perderte, en el siguiente slide repasamos rápido los tipos de aparato.</a:t>
+              <a:t>N1: En una instalación pequeña, ¿toda fuga es grave?</a:t>
+            </a:r>
+          </a:p>
+          <a:p>
+            <a:r>
+              <a:t>N2: Sí, y esto es lo bueno de las individuales de hasta setenta kilovatios: no hay que andar midiendo litros por hora. Haces la comprobación de estanquidad de la instalación individual y de las conexiones de los aparatos, con los métodos del apartado seis punto uno de la Parte once, los que ya conoces: detector, agua jabonosa, manómetro. Y si detectas fuga, la instalación se considera siempre no apta para su uso, sin más. Eso es una anomalía principal, la IPa uno.</a:t>
+            </a:r>
+          </a:p>
+          <a:p>
+            <a:r>
+              <a:t>N1: ¿No hay ninguna excepción?</a:t>
+            </a:r>
+          </a:p>
+          <a:p>
+            <a:r>
+              <a:t>N2: Solo una: si la fuga está en un tramo aéreo exterior, es decir, un tubo al aire libre por fuera del edificio, entonces se aplican los criterios de las instalaciones de más de setenta kilovatios, que veremos en el siguiente vídeo con la escalera de litros por hora. Pero para lo normal, lo de dentro de la vivienda, quédate con la regla simple y potente: en una individual pequeña, fuga es igual a no apta y principal. Se corta.</a:t>
             </a:r>
           </a:p>
         </p:txBody>
@@ -691,22 +692,22 @@
           <a:lstStyle/>
           <a:p>
             <a:r>
-              <a:t>N1: ¿Me repasas los tipos de aparato sin líos?</a:t>
-            </a:r>
-          </a:p>
-          <a:p>
-            <a:r>
-              <a:t>N2: Claro, porque esta clasificación explica casi todas las anomalías de ventilación y evacuación, así que conviene tenerla clavada. Tipo A: no tiene conducto de evacuación, suelta los humos directamente al local. El ejemplo típico es una cocina de gas. Tipo B: coge el aire del propio local para quemar y evacúa los humos al exterior por un conducto. Piensa en un calentador o una caldera de tiro natural. Y tipo C: es estanco, coge el aire de fuera y echa los humos fuera; no intercambia aire con el local. Es la caldera estanca moderna.</a:t>
-            </a:r>
-          </a:p>
-          <a:p>
-            <a:r>
-              <a:t>N1: ¿Y cuál es el más seguro respecto al local?</a:t>
-            </a:r>
-          </a:p>
-          <a:p>
-            <a:r>
-              <a:t>N2: El tipo C, sin duda, porque no toca el aire de la habitación: ni se lo roba para quemar ni le mete humos. Por eso es el único que puede ir en sitios delicados como un baño. El tipo A y el tipo B sí «respiran» con el local, y ahí es donde aparecen los problemas de ventilación, de monóxido y de dónde se pueden colocar. Con esta chuleta de tres líneas entiendes el porqué de media Parte doce.</a:t>
+              <a:t>N1: ¿Por qué no puede haber un calentador en el baño o en el dormitorio?</a:t>
+            </a:r>
+          </a:p>
+          <a:p>
+            <a:r>
+              <a:t>N2: Esta es de las anomalías más preguntadas y de las que más matan, así que atención. Un aparato de tipo A o de tipo B, que son los que cogen el aire del propio local o evacuan los humos a él, no puede estar en un dormitorio ni en un baño, ducha o aseo. ¿La razón? Son estancias donde duermes o te encierras con la puerta cerrada. Si el aparato falla y suelta monóxido de carbono, ahí te intoxica sin que te des cuenta, porque estás dormido o aislado. Es intoxicación por CO esperando a pasar.</a:t>
+            </a:r>
+          </a:p>
+          <a:p>
+            <a:r>
+              <a:t>N1: ¿Y los aparatos estancos, los tipo C?</a:t>
+            </a:r>
+          </a:p>
+          <a:p>
+            <a:r>
+              <a:t>N2: Esos sí pueden, y esa es la clave. Un tipo C es estanco: coge el aire de fuera y echa los humos fuera, no intercambia aire con el cuarto. Como no respira el aire de la habitación ni le suelta humos, no hay riesgo de intoxicación por ese lado. Por eso la caldera estanca moderna sí puede ir en un baño y el viejo calentador de tiro natural no. Esta anomalía es principal: si te la encuentras, se corta. Y para no perderte, en el siguiente slide repasamos rápido los tipos de aparato.</a:t>
             </a:r>
           </a:p>
         </p:txBody>
@@ -776,22 +777,22 @@
           <a:lstStyle/>
           <a:p>
             <a:r>
-              <a:t>N1: ¿Cuándo un tubo flexible es anomalía principal?</a:t>
-            </a:r>
-          </a:p>
-          <a:p>
-            <a:r>
-              <a:t>N2: Cuando está visiblemente dañado. Si un tubo flexible, ya sea de elastómero, o sea de goma, con o sin armadura, o uno espirometálico, presenta grietas, fisuras o daños, es anomalía principal IPa tres. ¿Por qué principal? Porque un tubo agrietado puede reventar y soltar gas en cualquier momento; es un peligro inmediato, no algo que pueda esperar.</a:t>
-            </a:r>
-          </a:p>
-          <a:p>
-            <a:r>
-              <a:t>N1: ¿Y si el tubo toca la parte caliente del horno?</a:t>
-            </a:r>
-          </a:p>
-          <a:p>
-            <a:r>
-              <a:t>N2: Ese es el caso de la IPa cuatro: un tubo flexible de elastómero en contacto con las paredes calientes de un horno u otro aparato de cocción. El calor reseca y degrada la goma hasta que revienta, así que también es principal. La única salvedad es que la conexión tenga aislantes adecuados que impidan que el flexible toque la parte caliente; si están bien puestos, no es anomalía. Truco de campo: tubo roto o achicharrado por el horno, corto; es principal. Pero ojo, que el tubo flexible da también anomalías secundarias, y las vemos luego.</a:t>
+              <a:t>N1: ¿Me repasas los tipos de aparato sin líos?</a:t>
+            </a:r>
+          </a:p>
+          <a:p>
+            <a:r>
+              <a:t>N2: Claro, porque esta clasificación explica casi todas las anomalías de ventilación y evacuación, así que conviene tenerla clavada. Tipo A: no tiene conducto de evacuación, suelta los humos directamente al local. El ejemplo típico es una cocina de gas. Tipo B: coge el aire del propio local para quemar y evacúa los humos al exterior por un conducto. Piensa en un calentador o una caldera de tiro natural. Y tipo C: es estanco, coge el aire de fuera y echa los humos fuera; no intercambia aire con el local. Es la caldera estanca moderna.</a:t>
+            </a:r>
+          </a:p>
+          <a:p>
+            <a:r>
+              <a:t>N1: ¿Y cuál es el más seguro respecto al local?</a:t>
+            </a:r>
+          </a:p>
+          <a:p>
+            <a:r>
+              <a:t>N2: El tipo C, sin duda, porque no toca el aire de la habitación: ni se lo roba para quemar ni le mete humos. Por eso es el único que puede ir en sitios delicados como un baño. El tipo A y el tipo B sí «respiran» con el local, y ahí es donde aparecen los problemas de ventilación, de monóxido y de dónde se pueden colocar. Con esta chuleta de tres líneas entiendes el porqué de media Parte doce.</a:t>
             </a:r>
           </a:p>
         </p:txBody>
@@ -861,22 +862,22 @@
           <a:lstStyle/>
           <a:p>
             <a:r>
-              <a:t>N1: ¿Qué problemas de la salida de humos son principales?</a:t>
-            </a:r>
-          </a:p>
-          <a:p>
-            <a:r>
-              <a:t>N2: La IPa cinco recoge las deficiencias apreciables en los conductos de evacuación de los aparatos de tipo B y tipo C. Son varias: que falte el conducto de evacuación; que falte o esté deteriorado el deflector; que el conducto desemboque en un local que no sea zona exterior; un diámetro menor del adecuado; una estrangulación; materiales que no resistan la temperatura de los humos; una evidente falta de estanquidad; y, solo en aparatos de tiro natural, bordear obstáculos bajando de cota en el trazado. Todas tienen un problema común: devuelven los humos al local, y con ellos el monóxido.</a:t>
-            </a:r>
-          </a:p>
-          <a:p>
-            <a:r>
-              <a:t>N1: ¿Qué es el deflector y por qué importa tanto?</a:t>
-            </a:r>
-          </a:p>
-          <a:p>
-            <a:r>
-              <a:t>N2: El deflector es la pieza del extremo del conducto, el sombrerete, que evita que el viento meta aire dentro del tubo y provoque revocos, es decir, que los humos se devuelvan. Si falta o está roto de forma que no cumple su función, el aparato puede echar los humos hacia dentro cuando sopla el viento. Por eso un deflector roto es la causa típica del revoco y por eso todo esto es anomalía principal: se corta.</a:t>
+              <a:t>N1: ¿Cuándo un tubo flexible es anomalía principal?</a:t>
+            </a:r>
+          </a:p>
+          <a:p>
+            <a:r>
+              <a:t>N2: Cuando está visiblemente dañado. Si un tubo flexible, ya sea de elastómero, o sea de goma, con o sin armadura, o uno espirometálico, presenta grietas, fisuras o daños, es anomalía principal IPa tres. ¿Por qué principal? Porque un tubo agrietado puede reventar y soltar gas en cualquier momento; es un peligro inmediato, no algo que pueda esperar.</a:t>
+            </a:r>
+          </a:p>
+          <a:p>
+            <a:r>
+              <a:t>N1: ¿Y si el tubo toca la parte caliente del horno?</a:t>
+            </a:r>
+          </a:p>
+          <a:p>
+            <a:r>
+              <a:t>N2: Ese es el caso de la IPa cuatro: un tubo flexible de elastómero en contacto con las paredes calientes de un horno u otro aparato de cocción. El calor reseca y degrada la goma hasta que revienta, así que también es principal. La única salvedad es que la conexión tenga aislantes adecuados que impidan que el flexible toque la parte caliente; si están bien puestos, no es anomalía. Truco de campo: tubo roto o achicharrado por el horno, corto; es principal. Pero ojo, que el tubo flexible da también anomalías secundarias, y las vemos luego.</a:t>
             </a:r>
           </a:p>
         </p:txBody>
@@ -946,22 +947,22 @@
           <a:lstStyle/>
           <a:p>
             <a:r>
-              <a:t>N1: ¿Qué más cuenta como principal en una vivienda?</a:t>
-            </a:r>
-          </a:p>
-          <a:p>
-            <a:r>
-              <a:t>N2: Tres casos más. La IPa seis: que un extractor mecánico, una campana de cocina o un aparato con ayuda a la evacuación estén conectados a la misma chimenea por donde salen los humos de un aparato de tipo B de tiro natural; el extractor le roba el tiro y puede devolver los humos. La IPa siete: un aparato de tipo B en un local de volumen igual o menor de ocho metros cúbicos que no tenga ventilación suficiente. Y la IPa ocho: llaves de aparato sin conectar que no estén cerradas, bloqueadas, precintadas y taponadas; si la llave no es bloqueable, al menos cerrada, precintada y taponada.</a:t>
-            </a:r>
-          </a:p>
-          <a:p>
-            <a:r>
-              <a:t>N1: ¿Por qué esos ocho metros cúbicos son la frontera?</a:t>
-            </a:r>
-          </a:p>
-          <a:p>
-            <a:r>
-              <a:t>N2: Fíjate en el detalle finísimo, que cae en el examen. Un tipo B mal ventilado es anomalía principal, que corta, si el local es pequeño, de ocho metros cúbicos o menos; y solo secundaria si el local es grande, de más de ocho. La lógica es clarísima: en un cuartito pequeño y mal ventilado, el monóxido se acumula deprisa y mata; en uno grande hay más margen de aire. Mismo defecto, distinta gravedad según el volumen. Ese ocho es un número de oro.</a:t>
+              <a:t>N1: ¿Qué problemas de la salida de humos son principales?</a:t>
+            </a:r>
+          </a:p>
+          <a:p>
+            <a:r>
+              <a:t>N2: La IPa cinco recoge las deficiencias apreciables en los conductos de evacuación de los aparatos de tipo B y tipo C. Son varias: que falte el conducto de evacuación; que falte o esté deteriorado el deflector; que el conducto desemboque en un local que no sea zona exterior; un diámetro menor del adecuado; una estrangulación; materiales que no resistan la temperatura de los humos; una evidente falta de estanquidad; y, solo en aparatos de tiro natural, bordear obstáculos bajando de cota en el trazado. Todas tienen un problema común: devuelven los humos al local, y con ellos el monóxido.</a:t>
+            </a:r>
+          </a:p>
+          <a:p>
+            <a:r>
+              <a:t>N1: ¿Qué es el deflector y por qué importa tanto?</a:t>
+            </a:r>
+          </a:p>
+          <a:p>
+            <a:r>
+              <a:t>N2: El deflector es la pieza del extremo del conducto, el sombrerete, que evita que el viento meta aire dentro del tubo y provoque revocos, es decir, que los humos se devuelvan. Si falta o está roto de forma que no cumple su función, el aparato puede echar los humos hacia dentro cuando sopla el viento. Por eso un deflector roto es la causa típica del revoco y por eso todo esto es anomalía principal: se corta.</a:t>
             </a:r>
           </a:p>
         </p:txBody>
@@ -1031,22 +1032,22 @@
           <a:lstStyle/>
           <a:p>
             <a:r>
-              <a:t>N1: ¿Qué defectos son secundarios pero hay que arreglar?</a:t>
-            </a:r>
-          </a:p>
-          <a:p>
-            <a:r>
-              <a:t>N2: Empezamos con la ISa uno, que es la pareja de la anterior: un aparato de tipo B mal ventilado, pero ahora en un local grande, de más de ocho metros cúbicos. Como hay más margen de aire, no obliga a cortar, es secundaria, seis meses. Y la ISa dos recoge lo «feo pero no urgente» del estado de conservación: materiales de tuberías, soportes, protecciones o uniones en mal estado, por ejemplo con corrosión manifiesta; llaves de corte en malas condiciones, que falten o no sean accesibles, sea la de usuario, la de vivienda o la de aparato; y el regulador de usuario o la válvula de seguridad por mínima presión en mal estado.</a:t>
-            </a:r>
-          </a:p>
-          <a:p>
-            <a:r>
-              <a:t>N1: Entonces, ¿el óxido no corta el gas?</a:t>
-            </a:r>
-          </a:p>
-          <a:p>
-            <a:r>
-              <a:t>N2: No por sí solo. La corrosión, una llave que no cierra o un regulador viejo son cosas que hay que arreglar, pero no son un peligro inmediato: van a seis meses. Ahora, mucho ojo con un matiz: si una llave que falta acabara provocando una fuga, ya no es este cajón de conservación, sino el de fuga, que en individual pequeña es principal. La fuga siempre manda. Guarda la idea: ISa dos es lo feo pero con plazo.</a:t>
+              <a:t>N1: ¿Qué más cuenta como principal en una vivienda?</a:t>
+            </a:r>
+          </a:p>
+          <a:p>
+            <a:r>
+              <a:t>N2: Tres casos más. La IPa seis: que un extractor mecánico, una campana de cocina o un aparato con ayuda a la evacuación estén conectados a la misma chimenea por donde salen los humos de un aparato de tipo B de tiro natural; el extractor le roba el tiro y puede devolver los humos. La IPa siete: un aparato de tipo B en un local de volumen igual o menor de ocho metros cúbicos que no tenga ventilación suficiente. Y la IPa ocho: llaves de aparato sin conectar que no estén cerradas, bloqueadas, precintadas y taponadas; si la llave no es bloqueable, al menos cerrada, precintada y taponada.</a:t>
+            </a:r>
+          </a:p>
+          <a:p>
+            <a:r>
+              <a:t>N1: ¿Por qué esos ocho metros cúbicos son la frontera?</a:t>
+            </a:r>
+          </a:p>
+          <a:p>
+            <a:r>
+              <a:t>N2: Fíjate en el detalle finísimo, que cae en el examen. Un tipo B mal ventilado es anomalía principal, que corta, si el local es pequeño, de ocho metros cúbicos o menos; y solo secundaria si el local es grande, de más de ocho. La lógica es clarísima: en un cuartito pequeño y mal ventilado, el monóxido se acumula deprisa y mata; en uno grande hay más margen de aire. Mismo defecto, distinta gravedad según el volumen. Ese ocho es un número de oro.</a:t>
             </a:r>
           </a:p>
         </p:txBody>
@@ -1116,22 +1117,22 @@
           <a:lstStyle/>
           <a:p>
             <a:r>
-              <a:t>N1: ¿No habíamos visto ya el tubo flexible?</a:t>
-            </a:r>
-          </a:p>
-          <a:p>
-            <a:r>
-              <a:t>N2: Sí, pero el tubo flexible es un clásico que reúne principales y secundarias, y conviene separarlas. Roto, con grietas o fisuras, es principal IPa tres, peligro inmediato. En cambio, son secundarias ISa tres: un tubo caducado; sin identificación o sin fecha de caducidad; más largo de lo permitido por la Norma; con la unión defectuosa o floja, con riesgo de que se desconecte fácil; sin enchufe de seguridad en gases de la segunda familia; o en contacto con partes calientes pero con horno que tenga aislamiento térmico adecuado. Todo eso va a seis meses.</a:t>
-            </a:r>
-          </a:p>
-          <a:p>
-            <a:r>
-              <a:t>N1: ¿Qué es el enchufe de seguridad?</a:t>
-            </a:r>
-          </a:p>
-          <a:p>
-            <a:r>
-              <a:t>N2: Es esa conexión rápida que corta el gas automáticamente si el tubo se suelta del aparato. Es obligatorio con el gas natural, que es la segunda familia. Si un tubo de gas natural no lo lleva, es anomalía secundaria. Truco que no falla: tubo roto, corto, principal; tubo viejo o mal puesto, plazo, secundaria. Y verifica siempre a mano que la unión está firme y no se suelta de un tirón.</a:t>
+              <a:t>N1: ¿Qué defectos son secundarios pero hay que arreglar?</a:t>
+            </a:r>
+          </a:p>
+          <a:p>
+            <a:r>
+              <a:t>N2: Empezamos con la ISa uno, que es la pareja de la anterior: un aparato de tipo B mal ventilado, pero ahora en un local grande, de más de ocho metros cúbicos. Como hay más margen de aire, no obliga a cortar, es secundaria, seis meses. Y la ISa dos recoge lo «feo pero no urgente» del estado de conservación: materiales de tuberías, soportes, protecciones o uniones en mal estado, por ejemplo con corrosión manifiesta; llaves de corte en malas condiciones, que falten o no sean accesibles, sea la de usuario, la de vivienda o la de aparato; y el regulador de usuario o la válvula de seguridad por mínima presión en mal estado.</a:t>
+            </a:r>
+          </a:p>
+          <a:p>
+            <a:r>
+              <a:t>N1: Entonces, ¿el óxido no corta el gas?</a:t>
+            </a:r>
+          </a:p>
+          <a:p>
+            <a:r>
+              <a:t>N2: No por sí solo. La corrosión, una llave que no cierra o un regulador viejo son cosas que hay que arreglar, pero no son un peligro inmediato: van a seis meses. Ahora, mucho ojo con un matiz: si una llave que falta acabara provocando una fuga, ya no es este cajón de conservación, sino el de fuga, que en individual pequeña es principal. La fuga siempre manda. Guarda la idea: ISa dos es lo feo pero con plazo.</a:t>
             </a:r>
           </a:p>
         </p:txBody>
@@ -1201,22 +1202,22 @@
           <a:lstStyle/>
           <a:p>
             <a:r>
-              <a:t>N1: ¿Cuándo la ventilación de un local es anomalía?</a:t>
-            </a:r>
-          </a:p>
-          <a:p>
-            <a:r>
-              <a:t>N2: La ISa cinco dice que es anomalía secundaria que falte el orificio de ventilación, salvo para aparatos de tipo C que no lo necesitan, o que el orificio sea insuficiente, esté obstruido o a una altura distinta de la que marca la norma. Pero hay unos números muy preguntables cuando en vez de orificio hay un extractor mecánico que comunica con el exterior. Su sección libre de paso, con el extractor parado, debe ser de al menos ochenta centímetros cuadrados cuando la suma de los aparatos de tipo A del local sea de dieciséis kilovatios o menos; y de al menos cien centímetros cuadrados cuando esa suma supere los dieciséis kilovatios.</a:t>
-            </a:r>
-          </a:p>
-          <a:p>
-            <a:r>
-              <a:t>N1: ¿Y la altura del extractor importa?</a:t>
-            </a:r>
-          </a:p>
-          <a:p>
-            <a:r>
-              <a:t>N2: Mucho, y también cae. El extremo inferior del extractor debe estar a una altura de un metro con ochenta o más respecto al suelo, o bien a menos de cuarenta centímetros del techo. La excepción: si está dentro de una campana extractora, no hay límite de altura. Memoriza el bloque: ochenta centímetros cuadrados hasta dieciséis kilovatios, cien por encima; y altura, uno con ochenta del suelo o menos de cuarenta del techo. Son cifras de examen puro.</a:t>
+              <a:t>N1: ¿No habíamos visto ya el tubo flexible?</a:t>
+            </a:r>
+          </a:p>
+          <a:p>
+            <a:r>
+              <a:t>N2: Sí, pero el tubo flexible es un clásico que reúne principales y secundarias, y conviene separarlas. Roto, con grietas o fisuras, es principal IPa tres, peligro inmediato. En cambio, son secundarias ISa tres: un tubo caducado; sin identificación o sin fecha de caducidad; más largo de lo permitido por la Norma; con la unión defectuosa o floja, con riesgo de que se desconecte fácil; sin enchufe de seguridad en gases de la segunda familia; o en contacto con partes calientes pero con horno que tenga aislamiento térmico adecuado. Todo eso va a seis meses.</a:t>
+            </a:r>
+          </a:p>
+          <a:p>
+            <a:r>
+              <a:t>N1: ¿Qué es el enchufe de seguridad?</a:t>
+            </a:r>
+          </a:p>
+          <a:p>
+            <a:r>
+              <a:t>N2: Es esa conexión rápida que corta el gas automáticamente si el tubo se suelta del aparato. Es obligatorio con el gas natural, que es la segunda familia. Si un tubo de gas natural no lo lleva, es anomalía secundaria. Truco que no falla: tubo roto, corto, principal; tubo viejo o mal puesto, plazo, secundaria. Y verifica siempre a mano que la unión está firme y no se suelta de un tirón.</a:t>
             </a:r>
           </a:p>
         </p:txBody>
@@ -1286,22 +1287,22 @@
           <a:lstStyle/>
           <a:p>
             <a:r>
-              <a:t>N1: ¿Qué otras secundarias me quedan por ver en la vivienda?</a:t>
-            </a:r>
-          </a:p>
-          <a:p>
-            <a:r>
-              <a:t>N2: Tres que redondean el catálogo. La ISa seis: local con volumen insuficiente cuando el consumo total de los aparatos de cocción instalados supere los dieciséis kilovatios; si metes mucha potencia de cocción en un espacio pequeño, falta aire, y eso se valora según la Parte seis de la norma. La ISa siete: que falte el sistema de detección y corte de gas donde la norma lo exige; ese sistema es el que detecta una fuga y cierra solo. Y la ISa ocho: conducciones de otros servicios, como agua o electricidad, en contacto directo con las conducciones de gas.</a:t>
-            </a:r>
-          </a:p>
-          <a:p>
-            <a:r>
-              <a:t>N1: ¿Por qué molesta que un tubo de agua toque al del gas?</a:t>
-            </a:r>
-          </a:p>
-          <a:p>
-            <a:r>
-              <a:t>N2: Porque el contacto entre servicios distintos favorece problemas: corrosión donde se tocan un metal y otro, condensaciones, o que una corriente eléctrica de otra instalación llegue a la tubería de gas. Por eso las conducciones de gas deben ir separadas de las demás. Las tres son secundarias, seis meses, pero son defectos reales que un buen gasista anota sin pereza.</a:t>
+              <a:t>N1: ¿Cuándo la ventilación de un local es anomalía?</a:t>
+            </a:r>
+          </a:p>
+          <a:p>
+            <a:r>
+              <a:t>N2: La ISa cinco dice que es anomalía secundaria que falte el orificio de ventilación, salvo para aparatos de tipo C que no lo necesitan, o que el orificio sea insuficiente, esté obstruido o a una altura distinta de la que marca la norma. Pero hay unos números muy preguntables cuando en vez de orificio hay un extractor mecánico que comunica con el exterior. Su sección libre de paso, con el extractor parado, debe ser de al menos ochenta centímetros cuadrados cuando la suma de los aparatos de tipo A del local sea de dieciséis kilovatios o menos; y de al menos cien centímetros cuadrados cuando esa suma supere los dieciséis kilovatios.</a:t>
+            </a:r>
+          </a:p>
+          <a:p>
+            <a:r>
+              <a:t>N1: ¿Y la altura del extractor importa?</a:t>
+            </a:r>
+          </a:p>
+          <a:p>
+            <a:r>
+              <a:t>N2: Mucho, y también cae. El extremo inferior del extractor debe estar a una altura de un metro con ochenta o más respecto al suelo, o bien a menos de cuarenta centímetros del techo. La excepción: si está dentro de una campana extractora, no hay límite de altura. Memoriza el bloque: ochenta centímetros cuadrados hasta dieciséis kilovatios, cien por encima; y altura, uno con ochenta del suelo o menos de cuarenta del techo. Son cifras de examen puro.</a:t>
             </a:r>
           </a:p>
         </p:txBody>
@@ -1371,22 +1372,22 @@
           <a:lstStyle/>
           <a:p>
             <a:r>
-              <a:t>N1: ¿Quién puede hacer y firmar este control periódico?</a:t>
-            </a:r>
-          </a:p>
-          <a:p>
-            <a:r>
-              <a:t>N2: Lo realiza y lo firma la empresa habilitada, es decir, la empresa instaladora de gas que lo tiene encomendado. No es algo que haga cualquiera: hace falta la habilitación. El documento que salga, el certificado si todo va bien o el informe de anomalías si hay defectos, se entrega al titular o usuario de la instalación, que es quien tiene que corregir y guardar el papel.</a:t>
-            </a:r>
-          </a:p>
-          <a:p>
-            <a:r>
-              <a:t>N1: ¿Y cuándo entra la distribuidora?</a:t>
-            </a:r>
-          </a:p>
-          <a:p>
-            <a:r>
-              <a:t>N2: Cuando hay anomalías principales o la instalación queda no apta para uso, se informa a la empresa distribuidora, igual que veíamos en la Parte once. Recuerda el reparto: tú inspeccionas y firmas; el usuario recibe y corrige; la distribuidora se entera de lo grave y maneja la acometida y el cese. Y sin ese papel, la revisión no existe: es la prueba de que se hizo y de lo que se encontró. El papeleo, siempre claro.</a:t>
+              <a:t>N1: ¿Qué otras secundarias me quedan por ver en la vivienda?</a:t>
+            </a:r>
+          </a:p>
+          <a:p>
+            <a:r>
+              <a:t>N2: Tres que redondean el catálogo. La ISa seis: local con volumen insuficiente cuando el consumo total de los aparatos de cocción instalados supere los dieciséis kilovatios; si metes mucha potencia de cocción en un espacio pequeño, falta aire, y eso se valora según la Parte seis de la norma. La ISa siete: que falte el sistema de detección y corte de gas donde la norma lo exige; ese sistema es el que detecta una fuga y cierra solo. Y la ISa ocho: conducciones de otros servicios, como agua o electricidad, en contacto directo con las conducciones de gas.</a:t>
+            </a:r>
+          </a:p>
+          <a:p>
+            <a:r>
+              <a:t>N1: ¿Por qué molesta que un tubo de agua toque al del gas?</a:t>
+            </a:r>
+          </a:p>
+          <a:p>
+            <a:r>
+              <a:t>N2: Porque el contacto entre servicios distintos favorece problemas: corrosión donde se tocan un metal y otro, condensaciones, o que una corriente eléctrica de otra instalación llegue a la tubería de gas. Por eso las conducciones de gas deben ir separadas de las demás. Las tres son secundarias, seis meses, pero son defectos reales que un buen gasista anota sin pereza.</a:t>
             </a:r>
           </a:p>
         </p:txBody>
@@ -1531,6 +1532,91 @@
           <a:lstStyle/>
           <a:p>
             <a:r>
+              <a:t>N1: ¿Quién puede hacer y firmar este control periódico?</a:t>
+            </a:r>
+          </a:p>
+          <a:p>
+            <a:r>
+              <a:t>N2: Lo realiza y lo firma la empresa habilitada, es decir, la empresa instaladora de gas que lo tiene encomendado. No es algo que haga cualquiera: hace falta la habilitación. El documento que salga, el certificado si todo va bien o el informe de anomalías si hay defectos, se entrega al titular o usuario de la instalación, que es quien tiene que corregir y guardar el papel.</a:t>
+            </a:r>
+          </a:p>
+          <a:p>
+            <a:r>
+              <a:t>N1: ¿Y cuándo entra la distribuidora?</a:t>
+            </a:r>
+          </a:p>
+          <a:p>
+            <a:r>
+              <a:t>N2: Cuando hay anomalías principales o la instalación queda no apta para uso, se informa a la empresa distribuidora, igual que veíamos en la Parte once. Recuerda el reparto: tú inspeccionas y firmas; el usuario recibe y corrige; la distribuidora se entera de lo grave y maneja la acometida y el cese. Y sin ese papel, la revisión no existe: es la prueba de que se hizo y de lo que se encontró. El papeleo, siempre claro.</a:t>
+            </a:r>
+          </a:p>
+        </p:txBody>
+      </p:sp>
+      <p:sp>
+        <p:nvSpPr>
+          <p:cNvPr id="4" name="Slide Number Placeholder 3"/>
+          <p:cNvSpPr>
+            <a:spLocks noGrp="1"/>
+          </p:cNvSpPr>
+          <p:nvPr>
+            <p:ph type="sldNum" idx="5" sz="quarter"/>
+          </p:nvPr>
+        </p:nvSpPr>
+        <p:spPr/>
+      </p:sp>
+    </p:spTree>
+  </p:cSld>
+  <p:clrMapOvr>
+    <a:masterClrMapping/>
+  </p:clrMapOvr>
+</p:notes>
+</file>
+
+<file path=ppt/notesSlides/notesSlide21.xml><?xml version="1.0" encoding="utf-8"?>
+<p:notes xmlns:a="http://schemas.openxmlformats.org/drawingml/2006/main" xmlns:p="http://schemas.openxmlformats.org/presentationml/2006/main" xmlns:r="http://schemas.openxmlformats.org/officeDocument/2006/relationships">
+  <p:cSld>
+    <p:spTree>
+      <p:nvGrpSpPr>
+        <p:cNvPr id="1" name=""/>
+        <p:cNvGrpSpPr/>
+        <p:nvPr/>
+      </p:nvGrpSpPr>
+      <p:grpSpPr>
+        <a:xfrm>
+          <a:off x="0" y="0"/>
+          <a:ext cx="0" cy="0"/>
+          <a:chOff x="0" y="0"/>
+          <a:chExt cx="0" cy="0"/>
+        </a:xfrm>
+      </p:grpSpPr>
+      <p:sp>
+        <p:nvSpPr>
+          <p:cNvPr id="2" name="Slide Image Placeholder 1"/>
+          <p:cNvSpPr>
+            <a:spLocks noGrp="1"/>
+          </p:cNvSpPr>
+          <p:nvPr>
+            <p:ph type="sldImg" idx="2"/>
+          </p:nvPr>
+        </p:nvSpPr>
+        <p:spPr/>
+      </p:sp>
+      <p:sp>
+        <p:nvSpPr>
+          <p:cNvPr id="3" name="Notes Placeholder 2"/>
+          <p:cNvSpPr>
+            <a:spLocks noGrp="1"/>
+          </p:cNvSpPr>
+          <p:nvPr>
+            <p:ph type="body" idx="3" sz="quarter"/>
+          </p:nvPr>
+        </p:nvSpPr>
+        <p:spPr/>
+        <p:txBody>
+          <a:bodyPr/>
+          <a:lstStyle/>
+          <a:p>
+            <a:r>
               <a:t>N1: Hagamos el resumen grande. ¿Qué me llevo de la Parte doce en vivienda?</a:t>
             </a:r>
           </a:p>
@@ -1614,26 +1700,7 @@
         <p:txBody>
           <a:bodyPr/>
           <a:lstStyle/>
-          <a:p>
-            <a:r>
-              <a:t>N1: ¿La Parte doce revisa lo mismo que la once?</a:t>
-            </a:r>
-          </a:p>
-          <a:p>
-            <a:r>
-              <a:t>N2: No exactamente. La Parte once te decía cómo operar sobre una instalación en servicio: cómo tocarla sin liarla. La Parte doce da un paso más: establece los criterios técnicos básicos del control periódico de esas instalaciones. Es decir, cómo se hace la revisión que toca cada cierto tiempo para comprobar que la instalación sigue siendo segura. Y sigue jugando en el mismo terreno: instalaciones receptoras suministradas a cinco bar o menos.</a:t>
-            </a:r>
-          </a:p>
-          <a:p>
-            <a:r>
-              <a:t>N1: ¿Control periódico es como la ITV del coche?</a:t>
-            </a:r>
-          </a:p>
-          <a:p>
-            <a:r>
-              <a:t>N2: Es una comparación buenísima. Igual que el coche pasa la ITV cada cierto tiempo para seguir circulando, la instalación de gas pasa su control periódico. Y tú eres el que la inspecciona y decide si va bien, si tiene defectos con plazo, o si hay que dejarla fuera de servicio. La Parte doce es el manual de esa inspección para las tuberías.</a:t>
-            </a:r>
-          </a:p>
+          <a:p/>
         </p:txBody>
       </p:sp>
       <p:sp>
@@ -1701,22 +1768,22 @@
           <a:lstStyle/>
           <a:p>
             <a:r>
-              <a:t>N1: Cuando termino una revisión, ¿qué entrego?</a:t>
-            </a:r>
-          </a:p>
-          <a:p>
-            <a:r>
-              <a:t>N2: Sales de la visita con uno de dos documentos, no hay término medio. Si todo está bien, emites el certificado correspondiente, que es el resultado favorable. Si detectas alguna anomalía, emites el informe de anomalías, en el que tienes que indicar tres cosas: el alcance de las anomalías, la situación en que queda la instalación y el plazo de corrección. Y ojo, en los dos documentos, tanto en el certificado como en el informe, incluyes las recomendaciones de seguridad que consideres oportunas.</a:t>
-            </a:r>
-          </a:p>
-          <a:p>
-            <a:r>
-              <a:t>N1: ¿No existe un resultado a medias?</a:t>
-            </a:r>
-          </a:p>
-          <a:p>
-            <a:r>
-              <a:t>N2: No: o certificado, o informe. No hay «medio favorable». Piénsalo como un aprobado o un suspenso con deberes: si apruebas limpio, certificado; si hay algo que arreglar, informe donde queda escrito qué falla, cómo queda la cosa y cuándo hay que corregirlo. Ese papel es la prueba de que hiciste la revisión y de lo que encontraste.</a:t>
+              <a:t>N1: ¿La Parte doce revisa lo mismo que la once?</a:t>
+            </a:r>
+          </a:p>
+          <a:p>
+            <a:r>
+              <a:t>N2: No exactamente. La Parte once te decía cómo operar sobre una instalación en servicio: cómo tocarla sin liarla. La Parte doce da un paso más: establece los criterios técnicos básicos del control periódico de esas instalaciones. Es decir, cómo se hace la revisión que toca cada cierto tiempo para comprobar que la instalación sigue siendo segura. Y sigue jugando en el mismo terreno: instalaciones receptoras suministradas a cinco bar o menos.</a:t>
+            </a:r>
+          </a:p>
+          <a:p>
+            <a:r>
+              <a:t>N1: ¿Control periódico es como la ITV del coche?</a:t>
+            </a:r>
+          </a:p>
+          <a:p>
+            <a:r>
+              <a:t>N2: Es una comparación buenísima. Igual que el coche pasa la ITV cada cierto tiempo para seguir circulando, la instalación de gas pasa su control periódico. Y tú eres el que la inspecciona y decide si va bien, si tiene defectos con plazo, o si hay que dejarla fuera de servicio. La Parte doce es el manual de esa inspección para las tuberías.</a:t>
             </a:r>
           </a:p>
         </p:txBody>
@@ -1786,22 +1853,22 @@
           <a:lstStyle/>
           <a:p>
             <a:r>
-              <a:t>N1: ¿Tengo que picar la pared para revisar la tubería empotrada?</a:t>
-            </a:r>
-          </a:p>
-          <a:p>
-            <a:r>
-              <a:t>N2: No, para nada. El control periódico no es una obra: no se abren tabiques ni se rompen falsos techos. Se comprueba lo que se ve y se alcanza, o sea, las partes visibles y accesibles. Lo que discurre empotrado se valora por lo que asoma en los puntos visibles. Esto es puro sentido común: no puedes revisar lo que no ves sin destrozar la casa, así que la norma te pide que juzgues por lo que está a la vista.</a:t>
-            </a:r>
-          </a:p>
-          <a:p>
-            <a:r>
-              <a:t>N1: ¿Por eso algunas anomalías dicen «apreciable a través de las partes visibles»?</a:t>
-            </a:r>
-          </a:p>
-          <a:p>
-            <a:r>
-              <a:t>N2: Exacto, ese es el motivo. Verás varias anomalías redactadas así, «apreciable a través de las partes visibles». Te están recordando que solo valoras lo que se aprecia sin desmontar nada. Si un tubo empotrado tiene un problema que no se nota por fuera, no es objeto de esta inspección. Tú revisas lo accesible, con criterio, y lo dejas por escrito.</a:t>
+              <a:t>N1: Cuando termino una revisión, ¿qué entrego?</a:t>
+            </a:r>
+          </a:p>
+          <a:p>
+            <a:r>
+              <a:t>N2: Sales de la visita con uno de dos documentos, no hay término medio. Si todo está bien, emites el certificado correspondiente, que es el resultado favorable. Si detectas alguna anomalía, emites el informe de anomalías, en el que tienes que indicar tres cosas: el alcance de las anomalías, la situación en que queda la instalación y el plazo de corrección. Y ojo, en los dos documentos, tanto en el certificado como en el informe, incluyes las recomendaciones de seguridad que consideres oportunas.</a:t>
+            </a:r>
+          </a:p>
+          <a:p>
+            <a:r>
+              <a:t>N1: ¿No existe un resultado a medias?</a:t>
+            </a:r>
+          </a:p>
+          <a:p>
+            <a:r>
+              <a:t>N2: No: o certificado, o informe. No hay «medio favorable». Piénsalo como un aprobado o un suspenso con deberes: si apruebas limpio, certificado; si hay algo que arreglar, informe donde queda escrito qué falla, cómo queda la cosa y cuándo hay que corregirlo. Ese papel es la prueba de que hiciste la revisión y de lo que encontraste.</a:t>
             </a:r>
           </a:p>
         </p:txBody>
@@ -1871,22 +1938,22 @@
           <a:lstStyle/>
           <a:p>
             <a:r>
-              <a:t>N1: ¿Qué diferencia hay entre una anomalía principal y una secundaria?</a:t>
-            </a:r>
-          </a:p>
-          <a:p>
-            <a:r>
-              <a:t>N2: La diferencia práctica es brutal, y decide si cortas el gas o no. Una anomalía principal es tan grave que hay que subsanarla en el mismo momento de detectarla. Si no puedes arreglarla ahí mismo, cortas el suministro, a toda la instalación o solo al aparato afectado, según proceda. Es un peligro que no puede seguir ni un minuto más con gas. Una anomalía secundaria, en cambio, no obliga a cortar: el gas sigue funcionando, pero el usuario tiene que corregirla en un plazo.</a:t>
-            </a:r>
-          </a:p>
-          <a:p>
-            <a:r>
-              <a:t>N1: ¿Y por qué es tan importante clasificar bien?</a:t>
-            </a:r>
-          </a:p>
-          <a:p>
-            <a:r>
-              <a:t>N2: Porque esta clasificación es la que te protege a ti. Si etiquetas como secundaria algo que era principal y dejas con gas una instalación peligrosa, del accidente respondes tú, que firmaste. Por eso hay que tener el criterio muy afinado: ante la duda de la gravedad, tira por lo seguro. Ahora vemos los plazos exactos de las secundarias.</a:t>
+              <a:t>N1: ¿Tengo que picar la pared para revisar la tubería empotrada?</a:t>
+            </a:r>
+          </a:p>
+          <a:p>
+            <a:r>
+              <a:t>N2: No, para nada. El control periódico no es una obra: no se abren tabiques ni se rompen falsos techos. Se comprueba lo que se ve y se alcanza, o sea, las partes visibles y accesibles. Lo que discurre empotrado se valora por lo que asoma en los puntos visibles. Esto es puro sentido común: no puedes revisar lo que no ves sin destrozar la casa, así que la norma te pide que juzgues por lo que está a la vista.</a:t>
+            </a:r>
+          </a:p>
+          <a:p>
+            <a:r>
+              <a:t>N1: ¿Por eso algunas anomalías dicen «apreciable a través de las partes visibles»?</a:t>
+            </a:r>
+          </a:p>
+          <a:p>
+            <a:r>
+              <a:t>N2: Exacto, ese es el motivo. Verás varias anomalías redactadas así, «apreciable a través de las partes visibles». Te están recordando que solo valoras lo que se aprecia sin desmontar nada. Si un tubo empotrado tiene un problema que no se nota por fuera, no es objeto de esta inspección. Tú revisas lo accesible, con criterio, y lo dejas por escrito.</a:t>
             </a:r>
           </a:p>
         </p:txBody>
@@ -1956,22 +2023,22 @@
           <a:lstStyle/>
           <a:p>
             <a:r>
-              <a:t>N1: ¿Cuánto tiempo tiene el usuario para arreglar una anomalía secundaria?</a:t>
-            </a:r>
-          </a:p>
-          <a:p>
-            <a:r>
-              <a:t>N2: Como norma general, un máximo de seis meses. La anomalía no es urgente, el gas puede seguir, pero no se puede eternizar: seis meses y corregida. Ahora bien, hay una excepción muy importante. Si la anomalía secundaria es una falta de estanquidad, es decir, una fuga considerada secundaria, ese plazo se acorta muchísimo: hay que corregirla en el menor tiempo posible y siempre en un plazo inferior a quince días naturales.</a:t>
-            </a:r>
-          </a:p>
-          <a:p>
-            <a:r>
-              <a:t>N1: ¿Por qué la fuga baja tanto el plazo?</a:t>
-            </a:r>
-          </a:p>
-          <a:p>
-            <a:r>
-              <a:t>N2: Porque una fuga, aunque sea pequeña, es gas escapando, y eso no admite medio año de espera. Quédate con la chuleta completa: principal, ya o corto; secundaria, seis meses; y si la secundaria es una fuga, menos de quince días naturales. Fíjate que hablamos de días naturales, que cuentan fines de semana y festivos, no días laborables. Estos tres plazos caen fijo en el examen.</a:t>
+              <a:t>N1: ¿Qué diferencia hay entre una anomalía principal y una secundaria?</a:t>
+            </a:r>
+          </a:p>
+          <a:p>
+            <a:r>
+              <a:t>N2: La diferencia práctica es brutal, y decide si cortas el gas o no. Una anomalía principal es tan grave que hay que subsanarla en el mismo momento de detectarla. Si no puedes arreglarla ahí mismo, cortas el suministro, a toda la instalación o solo al aparato afectado, según proceda. Es un peligro que no puede seguir ni un minuto más con gas. Una anomalía secundaria, en cambio, no obliga a cortar: el gas sigue funcionando, pero el usuario tiene que corregirla en un plazo.</a:t>
+            </a:r>
+          </a:p>
+          <a:p>
+            <a:r>
+              <a:t>N1: ¿Y por qué es tan importante clasificar bien?</a:t>
+            </a:r>
+          </a:p>
+          <a:p>
+            <a:r>
+              <a:t>N2: Porque esta clasificación es la que te protege a ti. Si etiquetas como secundaria algo que era principal y dejas con gas una instalación peligrosa, del accidente respondes tú, que firmaste. Por eso hay que tener el criterio muy afinado: ante la duda de la gravedad, tira por lo seguro. Ahora vemos los plazos exactos de las secundarias.</a:t>
             </a:r>
           </a:p>
         </p:txBody>
@@ -2041,22 +2108,22 @@
           <a:lstStyle/>
           <a:p>
             <a:r>
-              <a:t>N1: ¿Qué es una instalación individual de setenta kilovatios o menos?</a:t>
-            </a:r>
-          </a:p>
-          <a:p>
-            <a:r>
-              <a:t>N2: Es el caso doméstico de toda la vida: la instalación de una vivienda o un pequeño comercio, con su caldera, su calentador y su cocina, cuya potencia útil nominal no pasa de setenta kilovatios. Es lo que más te vas a encontrar, con diferencia. Por eso la norma le dedica un catálogo completo de anomalías, que es el que vamos a recorrer.</a:t>
-            </a:r>
-          </a:p>
-          <a:p>
-            <a:r>
-              <a:t>N1: ¿Y esos códigos con letras qué son?</a:t>
-            </a:r>
-          </a:p>
-          <a:p>
-            <a:r>
-              <a:t>N2: Son la forma de nombrar cada anomalía para entenderse en los informes. En las individuales pequeñas, las principales llevan el código IPa y las secundarias el código ISa. La i de individual, la p de principal o la s de secundaria, y la a que las distingue de las grandes, que llevarán b en el siguiente vídeo. No te agobies con memorizar códigos: lo importante es saber qué defecto es principal, o sea que corta, y cuál es secundario, o sea con plazo.</a:t>
+              <a:t>N1: ¿Cuánto tiempo tiene el usuario para arreglar una anomalía secundaria?</a:t>
+            </a:r>
+          </a:p>
+          <a:p>
+            <a:r>
+              <a:t>N2: Como norma general, un máximo de seis meses. La anomalía no es urgente, el gas puede seguir, pero no se puede eternizar: seis meses y corregida. Ahora bien, hay una excepción muy importante. Si la anomalía secundaria es una falta de estanquidad, es decir, una fuga considerada secundaria, ese plazo se acorta muchísimo: hay que corregirla en el menor tiempo posible y siempre en un plazo inferior a quince días naturales.</a:t>
+            </a:r>
+          </a:p>
+          <a:p>
+            <a:r>
+              <a:t>N1: ¿Por qué la fuga baja tanto el plazo?</a:t>
+            </a:r>
+          </a:p>
+          <a:p>
+            <a:r>
+              <a:t>N2: Porque una fuga, aunque sea pequeña, es gas escapando, y eso no admite medio año de espera. Quédate con la chuleta completa: principal, ya o corto; secundaria, seis meses; y si la secundaria es una fuga, menos de quince días naturales. Fíjate que hablamos de días naturales, que cuentan fines de semana y festivos, no días laborables. Estos tres plazos caen fijo en el examen.</a:t>
             </a:r>
           </a:p>
         </p:txBody>
@@ -2126,22 +2193,22 @@
           <a:lstStyle/>
           <a:p>
             <a:r>
-              <a:t>N1: En una instalación pequeña, ¿toda fuga es grave?</a:t>
-            </a:r>
-          </a:p>
-          <a:p>
-            <a:r>
-              <a:t>N2: Sí, y esto es lo bueno de las individuales de hasta setenta kilovatios: no hay que andar midiendo litros por hora. Haces la comprobación de estanquidad de la instalación individual y de las conexiones de los aparatos, con los métodos del apartado seis punto uno de la Parte once, los que ya conoces: detector, agua jabonosa, manómetro. Y si detectas fuga, la instalación se considera siempre no apta para su uso, sin más. Eso es una anomalía principal, la IPa uno.</a:t>
-            </a:r>
-          </a:p>
-          <a:p>
-            <a:r>
-              <a:t>N1: ¿No hay ninguna excepción?</a:t>
-            </a:r>
-          </a:p>
-          <a:p>
-            <a:r>
-              <a:t>N2: Solo una: si la fuga está en un tramo aéreo exterior, es decir, un tubo al aire libre por fuera del edificio, entonces se aplican los criterios de las instalaciones de más de setenta kilovatios, que veremos en el siguiente vídeo con la escalera de litros por hora. Pero para lo normal, lo de dentro de la vivienda, quédate con la regla simple y potente: en una individual pequeña, fuga es igual a no apta y principal. Se corta.</a:t>
+              <a:t>N1: ¿Qué es una instalación individual de setenta kilovatios o menos?</a:t>
+            </a:r>
+          </a:p>
+          <a:p>
+            <a:r>
+              <a:t>N2: Es el caso doméstico de toda la vida: la instalación de una vivienda o un pequeño comercio, con su caldera, su calentador y su cocina, cuya potencia útil nominal no pasa de setenta kilovatios. Es lo que más te vas a encontrar, con diferencia. Por eso la norma le dedica un catálogo completo de anomalías, que es el que vamos a recorrer.</a:t>
+            </a:r>
+          </a:p>
+          <a:p>
+            <a:r>
+              <a:t>N1: ¿Y esos códigos con letras qué son?</a:t>
+            </a:r>
+          </a:p>
+          <a:p>
+            <a:r>
+              <a:t>N2: Son la forma de nombrar cada anomalía para entenderse en los informes. En las individuales pequeñas, las principales llevan el código IPa y las secundarias el código ISa. La i de individual, la p de principal o la s de secundaria, y la a que las distingue de las grandes, que llevarán b en el siguiente vídeo. No te agobies con memorizar códigos: lo importante es saber qué defecto es principal, o sea que corta, y cuál es secundario, o sea con plazo.</a:t>
             </a:r>
           </a:p>
         </p:txBody>
@@ -5216,7 +5283,7 @@
             <a:r>
               <a:rPr sz="1400" b="1" i="0">
                 <a:solidFill>
-                  <a:srgbClr val="CADCFC"/>
+                  <a:srgbClr val="F4A24C"/>
                 </a:solidFill>
                 <a:latin typeface="Montserrat"/>
               </a:rPr>
@@ -5227,13 +5294,57 @@
       </p:sp>
       <p:sp>
         <p:nvSpPr>
-          <p:cNvPr id="4" name="TextBox 3"/>
+          <p:cNvPr id="4" name="Rounded Rectangle 3"/>
+          <p:cNvSpPr/>
+          <p:nvPr/>
+        </p:nvSpPr>
+        <p:spPr>
+          <a:xfrm>
+            <a:off x="868680" y="2057400"/>
+            <a:ext cx="1463040" cy="82296"/>
+          </a:xfrm>
+          <a:prstGeom prst="roundRect">
+            <a:avLst/>
+          </a:prstGeom>
+          <a:solidFill>
+            <a:srgbClr val="E8801A"/>
+          </a:solidFill>
+          <a:ln>
+            <a:noFill/>
+          </a:ln>
+          <a:effectLst/>
+        </p:spPr>
+        <p:style>
+          <a:lnRef idx="1">
+            <a:schemeClr val="accent1"/>
+          </a:lnRef>
+          <a:fillRef idx="3">
+            <a:schemeClr val="accent1"/>
+          </a:fillRef>
+          <a:effectRef idx="2">
+            <a:schemeClr val="accent1"/>
+          </a:effectRef>
+          <a:fontRef idx="minor">
+            <a:schemeClr val="lt1"/>
+          </a:fontRef>
+        </p:style>
+        <p:txBody>
+          <a:bodyPr rtlCol="0" anchor="ctr"/>
+          <a:lstStyle/>
+          <a:p>
+            <a:pPr algn="ctr"/>
+          </a:p>
+        </p:txBody>
+      </p:sp>
+      <p:sp>
+        <p:nvSpPr>
+          <p:cNvPr id="5" name="TextBox 4"/>
           <p:cNvSpPr txBox="1"/>
           <p:nvPr/>
         </p:nvSpPr>
         <p:spPr>
           <a:xfrm>
-            <a:off x="822960" y="2194560"/>
+            <a:off x="822960" y="2286000"/>
             <a:ext cx="10515600" cy="2011680"/>
           </a:xfrm>
           <a:prstGeom prst="rect">
@@ -5272,7 +5383,7 @@
       </p:sp>
       <p:sp>
         <p:nvSpPr>
-          <p:cNvPr id="5" name="TextBox 4"/>
+          <p:cNvPr id="6" name="TextBox 5"/>
           <p:cNvSpPr txBox="1"/>
           <p:nvPr/>
         </p:nvSpPr>
@@ -5396,7 +5507,7 @@
                 </a:solidFill>
                 <a:latin typeface="Montserrat"/>
               </a:rPr>
-              <a:t>010 / 020</a:t>
+              <a:t>010 / 021</a:t>
             </a:r>
           </a:p>
         </p:txBody>
@@ -5444,7 +5555,7 @@
         <p:spPr>
           <a:xfrm>
             <a:off x="822960" y="457200"/>
-            <a:ext cx="8229600" cy="365760"/>
+            <a:ext cx="10058400" cy="365760"/>
           </a:xfrm>
           <a:prstGeom prst="rect">
             <a:avLst/>
@@ -5458,13 +5569,13 @@
           <a:lstStyle/>
           <a:p>
             <a:r>
-              <a:rPr sz="1200" b="1" i="0">
-                <a:solidFill>
-                  <a:srgbClr val="64748B"/>
-                </a:solidFill>
-                <a:latin typeface="Montserrat"/>
-              </a:rPr>
-              <a:t>PARTE 12 · IPA-2</a:t>
+              <a:rPr sz="1300" b="1" i="0">
+                <a:solidFill>
+                  <a:srgbClr val="E8801A"/>
+                </a:solidFill>
+                <a:latin typeface="Montserrat"/>
+              </a:rPr>
+              <a:t>PARTE 12 · IPA-1</a:t>
             </a:r>
           </a:p>
         </p:txBody>
@@ -5492,26 +5603,70 @@
           <a:lstStyle/>
           <a:p>
             <a:r>
-              <a:rPr sz="2700" b="1" i="0">
+              <a:rPr sz="2800" b="1" i="0">
                 <a:solidFill>
                   <a:srgbClr val="1E2761"/>
                 </a:solidFill>
                 <a:latin typeface="Montserrat"/>
               </a:rPr>
-              <a:t>Nada de tipo A o B en dormitorio ni baño</a:t>
-            </a:r>
-          </a:p>
-        </p:txBody>
-      </p:sp>
-      <p:sp>
-        <p:nvSpPr>
-          <p:cNvPr id="7" name="TextBox 6"/>
+              <a:t>Fuga de gas: siempre no apta</a:t>
+            </a:r>
+          </a:p>
+        </p:txBody>
+      </p:sp>
+      <p:sp>
+        <p:nvSpPr>
+          <p:cNvPr id="7" name="Rounded Rectangle 6"/>
+          <p:cNvSpPr/>
+          <p:nvPr/>
+        </p:nvSpPr>
+        <p:spPr>
+          <a:xfrm>
+            <a:off x="868680" y="1627632"/>
+            <a:ext cx="2011680" cy="73152"/>
+          </a:xfrm>
+          <a:prstGeom prst="roundRect">
+            <a:avLst/>
+          </a:prstGeom>
+          <a:solidFill>
+            <a:srgbClr val="E8801A"/>
+          </a:solidFill>
+          <a:ln>
+            <a:noFill/>
+          </a:ln>
+          <a:effectLst/>
+        </p:spPr>
+        <p:style>
+          <a:lnRef idx="1">
+            <a:schemeClr val="accent1"/>
+          </a:lnRef>
+          <a:fillRef idx="3">
+            <a:schemeClr val="accent1"/>
+          </a:fillRef>
+          <a:effectRef idx="2">
+            <a:schemeClr val="accent1"/>
+          </a:effectRef>
+          <a:fontRef idx="minor">
+            <a:schemeClr val="lt1"/>
+          </a:fontRef>
+        </p:style>
+        <p:txBody>
+          <a:bodyPr rtlCol="0" anchor="ctr"/>
+          <a:lstStyle/>
+          <a:p>
+            <a:pPr algn="ctr"/>
+          </a:p>
+        </p:txBody>
+      </p:sp>
+      <p:sp>
+        <p:nvSpPr>
+          <p:cNvPr id="8" name="TextBox 7"/>
           <p:cNvSpPr txBox="1"/>
           <p:nvPr/>
         </p:nvSpPr>
         <p:spPr>
           <a:xfrm>
-            <a:off x="822960" y="1920240"/>
+            <a:off x="822960" y="1965960"/>
             <a:ext cx="4983480" cy="4206240"/>
           </a:xfrm>
           <a:prstGeom prst="rect">
@@ -5527,17 +5682,17 @@
           <a:p>
             <a:pPr>
               <a:spcAft>
-                <a:spcPts val="1000"/>
+                <a:spcPts val="1100"/>
               </a:spcAft>
             </a:pPr>
             <a:r>
               <a:rPr sz="1600" b="1" i="0">
                 <a:solidFill>
-                  <a:srgbClr val="2E3A80"/>
-                </a:solidFill>
-                <a:latin typeface="Montserrat"/>
-              </a:rPr>
-              <a:t>•  </a:t>
+                  <a:srgbClr val="E8801A"/>
+                </a:solidFill>
+                <a:latin typeface="Montserrat"/>
+              </a:rPr>
+              <a:t>▸  </a:t>
             </a:r>
             <a:r>
               <a:rPr sz="1600" b="0" i="0">
@@ -5546,23 +5701,23 @@
                 </a:solidFill>
                 <a:latin typeface="Montserrat"/>
               </a:rPr>
-              <a:t>Prohibido en dormitorio</a:t>
+              <a:t>Comprobar estanquidad (métodos 6.1)</a:t>
             </a:r>
           </a:p>
           <a:p>
             <a:pPr>
               <a:spcAft>
-                <a:spcPts val="1000"/>
+                <a:spcPts val="1100"/>
               </a:spcAft>
             </a:pPr>
             <a:r>
               <a:rPr sz="1600" b="1" i="0">
                 <a:solidFill>
-                  <a:srgbClr val="2E3A80"/>
-                </a:solidFill>
-                <a:latin typeface="Montserrat"/>
-              </a:rPr>
-              <a:t>•  </a:t>
+                  <a:srgbClr val="E8801A"/>
+                </a:solidFill>
+                <a:latin typeface="Montserrat"/>
+              </a:rPr>
+              <a:t>▸  </a:t>
             </a:r>
             <a:r>
               <a:rPr sz="1600" b="0" i="0">
@@ -5571,23 +5726,23 @@
                 </a:solidFill>
                 <a:latin typeface="Montserrat"/>
               </a:rPr>
-              <a:t>Prohibido en baño, ducha o aseo</a:t>
+              <a:t>Si hay fuga: siempre no apta</a:t>
             </a:r>
           </a:p>
           <a:p>
             <a:pPr>
               <a:spcAft>
-                <a:spcPts val="1000"/>
+                <a:spcPts val="1100"/>
               </a:spcAft>
             </a:pPr>
             <a:r>
               <a:rPr sz="1600" b="1" i="0">
                 <a:solidFill>
-                  <a:srgbClr val="2E3A80"/>
-                </a:solidFill>
-                <a:latin typeface="Montserrat"/>
-              </a:rPr>
-              <a:t>•  </a:t>
+                  <a:srgbClr val="E8801A"/>
+                </a:solidFill>
+                <a:latin typeface="Montserrat"/>
+              </a:rPr>
+              <a:t>▸  </a:t>
             </a:r>
             <a:r>
               <a:rPr sz="1600" b="0" i="0">
@@ -5596,23 +5751,23 @@
                 </a:solidFill>
                 <a:latin typeface="Montserrat"/>
               </a:rPr>
-              <a:t>Los tipo C (estancos) sí pueden</a:t>
+              <a:t>Anomalía principal IPa-1</a:t>
             </a:r>
           </a:p>
           <a:p>
             <a:pPr>
               <a:spcAft>
-                <a:spcPts val="1000"/>
+                <a:spcPts val="1100"/>
               </a:spcAft>
             </a:pPr>
             <a:r>
               <a:rPr sz="1600" b="1" i="0">
                 <a:solidFill>
-                  <a:srgbClr val="2E3A80"/>
-                </a:solidFill>
-                <a:latin typeface="Montserrat"/>
-              </a:rPr>
-              <a:t>•  </a:t>
+                  <a:srgbClr val="E8801A"/>
+                </a:solidFill>
+                <a:latin typeface="Montserrat"/>
+              </a:rPr>
+              <a:t>▸  </a:t>
             </a:r>
             <a:r>
               <a:rPr sz="1600" b="0" i="0">
@@ -5621,14 +5776,14 @@
                 </a:solidFill>
                 <a:latin typeface="Montserrat"/>
               </a:rPr>
-              <a:t>Anomalía principal: se corta</a:t>
-            </a:r>
-          </a:p>
-        </p:txBody>
-      </p:sp>
-      <p:sp>
-        <p:nvSpPr>
-          <p:cNvPr id="8" name="imgph" descr="IMGQ:gas water heater in bathroom hazard"/>
+              <a:t>Tramo aéreo exterior: criterios &gt; 70 kW</a:t>
+            </a:r>
+          </a:p>
+        </p:txBody>
+      </p:sp>
+      <p:sp>
+        <p:nvSpPr>
+          <p:cNvPr id="9" name="imgph" descr="IMGQ:soapy water leak test on gas fitting bubbles"/>
           <p:cNvSpPr/>
           <p:nvPr/>
         </p:nvSpPr>
@@ -5674,7 +5829,7 @@
       </p:sp>
       <p:sp>
         <p:nvSpPr>
-          <p:cNvPr id="9" name="TextBox 8"/>
+          <p:cNvPr id="10" name="TextBox 9"/>
           <p:cNvSpPr txBox="1"/>
           <p:nvPr/>
         </p:nvSpPr>
@@ -5714,7 +5869,7 @@
                 </a:solidFill>
                 <a:latin typeface="Montserrat"/>
               </a:rPr>
-              <a:t>gas water heater in bathroom hazard</a:t>
+              <a:t>soapy water leak test on gas fitting bubbles</a:t>
             </a:r>
           </a:p>
         </p:txBody>
@@ -5811,7 +5966,7 @@
                 </a:solidFill>
                 <a:latin typeface="Montserrat"/>
               </a:rPr>
-              <a:t>011 / 020</a:t>
+              <a:t>011 / 021</a:t>
             </a:r>
           </a:p>
         </p:txBody>
@@ -5859,7 +6014,7 @@
         <p:spPr>
           <a:xfrm>
             <a:off x="822960" y="457200"/>
-            <a:ext cx="8229600" cy="365760"/>
+            <a:ext cx="10058400" cy="365760"/>
           </a:xfrm>
           <a:prstGeom prst="rect">
             <a:avLst/>
@@ -5873,13 +6028,13 @@
           <a:lstStyle/>
           <a:p>
             <a:r>
-              <a:rPr sz="1200" b="1" i="0">
-                <a:solidFill>
-                  <a:srgbClr val="64748B"/>
-                </a:solidFill>
-                <a:latin typeface="Montserrat"/>
-              </a:rPr>
-              <a:t>REPASO CLAVE</a:t>
+              <a:rPr sz="1300" b="1" i="0">
+                <a:solidFill>
+                  <a:srgbClr val="E8801A"/>
+                </a:solidFill>
+                <a:latin typeface="Montserrat"/>
+              </a:rPr>
+              <a:t>PARTE 12 · IPA-2</a:t>
             </a:r>
           </a:p>
         </p:txBody>
@@ -5907,26 +6062,70 @@
           <a:lstStyle/>
           <a:p>
             <a:r>
-              <a:rPr sz="2700" b="1" i="0">
+              <a:rPr sz="2800" b="1" i="0">
                 <a:solidFill>
                   <a:srgbClr val="1E2761"/>
                 </a:solidFill>
                 <a:latin typeface="Montserrat"/>
               </a:rPr>
-              <a:t>Tipos de aparato A, B y C</a:t>
-            </a:r>
-          </a:p>
-        </p:txBody>
-      </p:sp>
-      <p:sp>
-        <p:nvSpPr>
-          <p:cNvPr id="7" name="TextBox 6"/>
+              <a:t>Nada de tipo A o B en dormitorio ni baño</a:t>
+            </a:r>
+          </a:p>
+        </p:txBody>
+      </p:sp>
+      <p:sp>
+        <p:nvSpPr>
+          <p:cNvPr id="7" name="Rounded Rectangle 6"/>
+          <p:cNvSpPr/>
+          <p:nvPr/>
+        </p:nvSpPr>
+        <p:spPr>
+          <a:xfrm>
+            <a:off x="868680" y="1627632"/>
+            <a:ext cx="2011680" cy="73152"/>
+          </a:xfrm>
+          <a:prstGeom prst="roundRect">
+            <a:avLst/>
+          </a:prstGeom>
+          <a:solidFill>
+            <a:srgbClr val="E8801A"/>
+          </a:solidFill>
+          <a:ln>
+            <a:noFill/>
+          </a:ln>
+          <a:effectLst/>
+        </p:spPr>
+        <p:style>
+          <a:lnRef idx="1">
+            <a:schemeClr val="accent1"/>
+          </a:lnRef>
+          <a:fillRef idx="3">
+            <a:schemeClr val="accent1"/>
+          </a:fillRef>
+          <a:effectRef idx="2">
+            <a:schemeClr val="accent1"/>
+          </a:effectRef>
+          <a:fontRef idx="minor">
+            <a:schemeClr val="lt1"/>
+          </a:fontRef>
+        </p:style>
+        <p:txBody>
+          <a:bodyPr rtlCol="0" anchor="ctr"/>
+          <a:lstStyle/>
+          <a:p>
+            <a:pPr algn="ctr"/>
+          </a:p>
+        </p:txBody>
+      </p:sp>
+      <p:sp>
+        <p:nvSpPr>
+          <p:cNvPr id="8" name="TextBox 7"/>
           <p:cNvSpPr txBox="1"/>
           <p:nvPr/>
         </p:nvSpPr>
         <p:spPr>
           <a:xfrm>
-            <a:off x="822960" y="1920240"/>
+            <a:off x="822960" y="1965960"/>
             <a:ext cx="4983480" cy="4206240"/>
           </a:xfrm>
           <a:prstGeom prst="rect">
@@ -5942,17 +6141,17 @@
           <a:p>
             <a:pPr>
               <a:spcAft>
-                <a:spcPts val="1000"/>
+                <a:spcPts val="1100"/>
               </a:spcAft>
             </a:pPr>
             <a:r>
               <a:rPr sz="1600" b="1" i="0">
                 <a:solidFill>
-                  <a:srgbClr val="2E3A80"/>
-                </a:solidFill>
-                <a:latin typeface="Montserrat"/>
-              </a:rPr>
-              <a:t>•  </a:t>
+                  <a:srgbClr val="E8801A"/>
+                </a:solidFill>
+                <a:latin typeface="Montserrat"/>
+              </a:rPr>
+              <a:t>▸  </a:t>
             </a:r>
             <a:r>
               <a:rPr sz="1600" b="0" i="0">
@@ -5961,23 +6160,23 @@
                 </a:solidFill>
                 <a:latin typeface="Montserrat"/>
               </a:rPr>
-              <a:t>Tipo A: suelta los humos al local</a:t>
+              <a:t>Prohibido en dormitorio</a:t>
             </a:r>
           </a:p>
           <a:p>
             <a:pPr>
               <a:spcAft>
-                <a:spcPts val="1000"/>
+                <a:spcPts val="1100"/>
               </a:spcAft>
             </a:pPr>
             <a:r>
               <a:rPr sz="1600" b="1" i="0">
                 <a:solidFill>
-                  <a:srgbClr val="2E3A80"/>
-                </a:solidFill>
-                <a:latin typeface="Montserrat"/>
-              </a:rPr>
-              <a:t>•  </a:t>
+                  <a:srgbClr val="E8801A"/>
+                </a:solidFill>
+                <a:latin typeface="Montserrat"/>
+              </a:rPr>
+              <a:t>▸  </a:t>
             </a:r>
             <a:r>
               <a:rPr sz="1600" b="0" i="0">
@@ -5986,23 +6185,23 @@
                 </a:solidFill>
                 <a:latin typeface="Montserrat"/>
               </a:rPr>
-              <a:t>Tipo B: aire del local, humos fuera</a:t>
+              <a:t>Prohibido en baño, ducha o aseo</a:t>
             </a:r>
           </a:p>
           <a:p>
             <a:pPr>
               <a:spcAft>
-                <a:spcPts val="1000"/>
+                <a:spcPts val="1100"/>
               </a:spcAft>
             </a:pPr>
             <a:r>
               <a:rPr sz="1600" b="1" i="0">
                 <a:solidFill>
-                  <a:srgbClr val="2E3A80"/>
-                </a:solidFill>
-                <a:latin typeface="Montserrat"/>
-              </a:rPr>
-              <a:t>•  </a:t>
+                  <a:srgbClr val="E8801A"/>
+                </a:solidFill>
+                <a:latin typeface="Montserrat"/>
+              </a:rPr>
+              <a:t>▸  </a:t>
             </a:r>
             <a:r>
               <a:rPr sz="1600" b="0" i="0">
@@ -6011,14 +6210,39 @@
                 </a:solidFill>
                 <a:latin typeface="Montserrat"/>
               </a:rPr>
-              <a:t>Tipo C: estanco, aire y humos de fuera</a:t>
-            </a:r>
-          </a:p>
-        </p:txBody>
-      </p:sp>
-      <p:sp>
-        <p:nvSpPr>
-          <p:cNvPr id="8" name="imgph" descr="IMGQ:modern sealed gas boiler flue outside wall"/>
+              <a:t>Los tipo C (estancos) sí pueden</a:t>
+            </a:r>
+          </a:p>
+          <a:p>
+            <a:pPr>
+              <a:spcAft>
+                <a:spcPts val="1100"/>
+              </a:spcAft>
+            </a:pPr>
+            <a:r>
+              <a:rPr sz="1600" b="1" i="0">
+                <a:solidFill>
+                  <a:srgbClr val="E8801A"/>
+                </a:solidFill>
+                <a:latin typeface="Montserrat"/>
+              </a:rPr>
+              <a:t>▸  </a:t>
+            </a:r>
+            <a:r>
+              <a:rPr sz="1600" b="0" i="0">
+                <a:solidFill>
+                  <a:srgbClr val="1B2330"/>
+                </a:solidFill>
+                <a:latin typeface="Montserrat"/>
+              </a:rPr>
+              <a:t>Anomalía principal: se corta</a:t>
+            </a:r>
+          </a:p>
+        </p:txBody>
+      </p:sp>
+      <p:sp>
+        <p:nvSpPr>
+          <p:cNvPr id="9" name="imgph" descr="IMGQ:gas water heater in bathroom hazard"/>
           <p:cNvSpPr/>
           <p:nvPr/>
         </p:nvSpPr>
@@ -6064,7 +6288,7 @@
       </p:sp>
       <p:sp>
         <p:nvSpPr>
-          <p:cNvPr id="9" name="TextBox 8"/>
+          <p:cNvPr id="10" name="TextBox 9"/>
           <p:cNvSpPr txBox="1"/>
           <p:nvPr/>
         </p:nvSpPr>
@@ -6104,7 +6328,7 @@
                 </a:solidFill>
                 <a:latin typeface="Montserrat"/>
               </a:rPr>
-              <a:t>modern sealed gas boiler flue outside wall</a:t>
+              <a:t>gas water heater in bathroom hazard</a:t>
             </a:r>
           </a:p>
         </p:txBody>
@@ -6201,7 +6425,7 @@
                 </a:solidFill>
                 <a:latin typeface="Montserrat"/>
               </a:rPr>
-              <a:t>012 / 020</a:t>
+              <a:t>012 / 021</a:t>
             </a:r>
           </a:p>
         </p:txBody>
@@ -6249,7 +6473,7 @@
         <p:spPr>
           <a:xfrm>
             <a:off x="822960" y="457200"/>
-            <a:ext cx="8229600" cy="365760"/>
+            <a:ext cx="10058400" cy="365760"/>
           </a:xfrm>
           <a:prstGeom prst="rect">
             <a:avLst/>
@@ -6263,13 +6487,13 @@
           <a:lstStyle/>
           <a:p>
             <a:r>
-              <a:rPr sz="1200" b="1" i="0">
-                <a:solidFill>
-                  <a:srgbClr val="64748B"/>
-                </a:solidFill>
-                <a:latin typeface="Montserrat"/>
-              </a:rPr>
-              <a:t>PARTE 12 · IPA-3 Y IPA-4</a:t>
+              <a:rPr sz="1300" b="1" i="0">
+                <a:solidFill>
+                  <a:srgbClr val="E8801A"/>
+                </a:solidFill>
+                <a:latin typeface="Montserrat"/>
+              </a:rPr>
+              <a:t>REPASO CLAVE</a:t>
             </a:r>
           </a:p>
         </p:txBody>
@@ -6297,26 +6521,70 @@
           <a:lstStyle/>
           <a:p>
             <a:r>
-              <a:rPr sz="2700" b="1" i="0">
+              <a:rPr sz="2800" b="1" i="0">
                 <a:solidFill>
                   <a:srgbClr val="1E2761"/>
                 </a:solidFill>
                 <a:latin typeface="Montserrat"/>
               </a:rPr>
-              <a:t>Tubo flexible dañado o quemado</a:t>
-            </a:r>
-          </a:p>
-        </p:txBody>
-      </p:sp>
-      <p:sp>
-        <p:nvSpPr>
-          <p:cNvPr id="7" name="TextBox 6"/>
+              <a:t>Tipos de aparato A, B y C</a:t>
+            </a:r>
+          </a:p>
+        </p:txBody>
+      </p:sp>
+      <p:sp>
+        <p:nvSpPr>
+          <p:cNvPr id="7" name="Rounded Rectangle 6"/>
+          <p:cNvSpPr/>
+          <p:nvPr/>
+        </p:nvSpPr>
+        <p:spPr>
+          <a:xfrm>
+            <a:off x="868680" y="1627632"/>
+            <a:ext cx="2011680" cy="73152"/>
+          </a:xfrm>
+          <a:prstGeom prst="roundRect">
+            <a:avLst/>
+          </a:prstGeom>
+          <a:solidFill>
+            <a:srgbClr val="E8801A"/>
+          </a:solidFill>
+          <a:ln>
+            <a:noFill/>
+          </a:ln>
+          <a:effectLst/>
+        </p:spPr>
+        <p:style>
+          <a:lnRef idx="1">
+            <a:schemeClr val="accent1"/>
+          </a:lnRef>
+          <a:fillRef idx="3">
+            <a:schemeClr val="accent1"/>
+          </a:fillRef>
+          <a:effectRef idx="2">
+            <a:schemeClr val="accent1"/>
+          </a:effectRef>
+          <a:fontRef idx="minor">
+            <a:schemeClr val="lt1"/>
+          </a:fontRef>
+        </p:style>
+        <p:txBody>
+          <a:bodyPr rtlCol="0" anchor="ctr"/>
+          <a:lstStyle/>
+          <a:p>
+            <a:pPr algn="ctr"/>
+          </a:p>
+        </p:txBody>
+      </p:sp>
+      <p:sp>
+        <p:nvSpPr>
+          <p:cNvPr id="8" name="TextBox 7"/>
           <p:cNvSpPr txBox="1"/>
           <p:nvPr/>
         </p:nvSpPr>
         <p:spPr>
           <a:xfrm>
-            <a:off x="822960" y="1920240"/>
+            <a:off x="822960" y="1965960"/>
             <a:ext cx="4983480" cy="4206240"/>
           </a:xfrm>
           <a:prstGeom prst="rect">
@@ -6332,17 +6600,17 @@
           <a:p>
             <a:pPr>
               <a:spcAft>
-                <a:spcPts val="1000"/>
+                <a:spcPts val="1100"/>
               </a:spcAft>
             </a:pPr>
             <a:r>
               <a:rPr sz="1600" b="1" i="0">
                 <a:solidFill>
-                  <a:srgbClr val="2E3A80"/>
-                </a:solidFill>
-                <a:latin typeface="Montserrat"/>
-              </a:rPr>
-              <a:t>•  </a:t>
+                  <a:srgbClr val="E8801A"/>
+                </a:solidFill>
+                <a:latin typeface="Montserrat"/>
+              </a:rPr>
+              <a:t>▸  </a:t>
             </a:r>
             <a:r>
               <a:rPr sz="1600" b="0" i="0">
@@ -6351,23 +6619,23 @@
                 </a:solidFill>
                 <a:latin typeface="Montserrat"/>
               </a:rPr>
-              <a:t>Grietas, fisuras o daños: principal IPa-3</a:t>
+              <a:t>Tipo A: suelta los humos al local</a:t>
             </a:r>
           </a:p>
           <a:p>
             <a:pPr>
               <a:spcAft>
-                <a:spcPts val="1000"/>
+                <a:spcPts val="1100"/>
               </a:spcAft>
             </a:pPr>
             <a:r>
               <a:rPr sz="1600" b="1" i="0">
                 <a:solidFill>
-                  <a:srgbClr val="2E3A80"/>
-                </a:solidFill>
-                <a:latin typeface="Montserrat"/>
-              </a:rPr>
-              <a:t>•  </a:t>
+                  <a:srgbClr val="E8801A"/>
+                </a:solidFill>
+                <a:latin typeface="Montserrat"/>
+              </a:rPr>
+              <a:t>▸  </a:t>
             </a:r>
             <a:r>
               <a:rPr sz="1600" b="0" i="0">
@@ -6376,23 +6644,23 @@
                 </a:solidFill>
                 <a:latin typeface="Montserrat"/>
               </a:rPr>
-              <a:t>Elastómero o espirometálico</a:t>
+              <a:t>Tipo B: aire del local, humos fuera</a:t>
             </a:r>
           </a:p>
           <a:p>
             <a:pPr>
               <a:spcAft>
-                <a:spcPts val="1000"/>
+                <a:spcPts val="1100"/>
               </a:spcAft>
             </a:pPr>
             <a:r>
               <a:rPr sz="1600" b="1" i="0">
                 <a:solidFill>
-                  <a:srgbClr val="2E3A80"/>
-                </a:solidFill>
-                <a:latin typeface="Montserrat"/>
-              </a:rPr>
-              <a:t>•  </a:t>
+                  <a:srgbClr val="E8801A"/>
+                </a:solidFill>
+                <a:latin typeface="Montserrat"/>
+              </a:rPr>
+              <a:t>▸  </a:t>
             </a:r>
             <a:r>
               <a:rPr sz="1600" b="0" i="0">
@@ -6401,39 +6669,14 @@
                 </a:solidFill>
                 <a:latin typeface="Montserrat"/>
               </a:rPr>
-              <a:t>Pegado a partes calientes del horno: IPa-4</a:t>
-            </a:r>
-          </a:p>
-          <a:p>
-            <a:pPr>
-              <a:spcAft>
-                <a:spcPts val="1000"/>
-              </a:spcAft>
-            </a:pPr>
-            <a:r>
-              <a:rPr sz="1600" b="1" i="0">
-                <a:solidFill>
-                  <a:srgbClr val="2E3A80"/>
-                </a:solidFill>
-                <a:latin typeface="Montserrat"/>
-              </a:rPr>
-              <a:t>•  </a:t>
-            </a:r>
-            <a:r>
-              <a:rPr sz="1600" b="0" i="0">
-                <a:solidFill>
-                  <a:srgbClr val="1B2330"/>
-                </a:solidFill>
-                <a:latin typeface="Montserrat"/>
-              </a:rPr>
-              <a:t>Salvo aislante que impida el contacto</a:t>
-            </a:r>
-          </a:p>
-        </p:txBody>
-      </p:sp>
-      <p:sp>
-        <p:nvSpPr>
-          <p:cNvPr id="8" name="imgph" descr="IMGQ:damaged cracked rubber gas hose connection"/>
+              <a:t>Tipo C: estanco, aire y humos de fuera</a:t>
+            </a:r>
+          </a:p>
+        </p:txBody>
+      </p:sp>
+      <p:sp>
+        <p:nvSpPr>
+          <p:cNvPr id="9" name="imgph" descr="IMGQ:modern sealed gas boiler flue outside wall"/>
           <p:cNvSpPr/>
           <p:nvPr/>
         </p:nvSpPr>
@@ -6479,7 +6722,7 @@
       </p:sp>
       <p:sp>
         <p:nvSpPr>
-          <p:cNvPr id="9" name="TextBox 8"/>
+          <p:cNvPr id="10" name="TextBox 9"/>
           <p:cNvSpPr txBox="1"/>
           <p:nvPr/>
         </p:nvSpPr>
@@ -6519,7 +6762,7 @@
                 </a:solidFill>
                 <a:latin typeface="Montserrat"/>
               </a:rPr>
-              <a:t>damaged cracked rubber gas hose connection</a:t>
+              <a:t>modern sealed gas boiler flue outside wall</a:t>
             </a:r>
           </a:p>
         </p:txBody>
@@ -6616,7 +6859,7 @@
                 </a:solidFill>
                 <a:latin typeface="Montserrat"/>
               </a:rPr>
-              <a:t>013 / 020</a:t>
+              <a:t>013 / 021</a:t>
             </a:r>
           </a:p>
         </p:txBody>
@@ -6664,7 +6907,7 @@
         <p:spPr>
           <a:xfrm>
             <a:off x="822960" y="457200"/>
-            <a:ext cx="8229600" cy="365760"/>
+            <a:ext cx="10058400" cy="365760"/>
           </a:xfrm>
           <a:prstGeom prst="rect">
             <a:avLst/>
@@ -6678,13 +6921,13 @@
           <a:lstStyle/>
           <a:p>
             <a:r>
-              <a:rPr sz="1200" b="1" i="0">
-                <a:solidFill>
-                  <a:srgbClr val="64748B"/>
-                </a:solidFill>
-                <a:latin typeface="Montserrat"/>
-              </a:rPr>
-              <a:t>PARTE 12 · IPA-5</a:t>
+              <a:rPr sz="1300" b="1" i="0">
+                <a:solidFill>
+                  <a:srgbClr val="E8801A"/>
+                </a:solidFill>
+                <a:latin typeface="Montserrat"/>
+              </a:rPr>
+              <a:t>PARTE 12 · IPA-3 Y IPA-4</a:t>
             </a:r>
           </a:p>
         </p:txBody>
@@ -6712,26 +6955,70 @@
           <a:lstStyle/>
           <a:p>
             <a:r>
-              <a:rPr sz="2700" b="1" i="0">
+              <a:rPr sz="2800" b="1" i="0">
                 <a:solidFill>
                   <a:srgbClr val="1E2761"/>
                 </a:solidFill>
                 <a:latin typeface="Montserrat"/>
               </a:rPr>
-              <a:t>Conductos de evacuación y deflector</a:t>
-            </a:r>
-          </a:p>
-        </p:txBody>
-      </p:sp>
-      <p:sp>
-        <p:nvSpPr>
-          <p:cNvPr id="7" name="TextBox 6"/>
+              <a:t>Tubo flexible dañado o quemado</a:t>
+            </a:r>
+          </a:p>
+        </p:txBody>
+      </p:sp>
+      <p:sp>
+        <p:nvSpPr>
+          <p:cNvPr id="7" name="Rounded Rectangle 6"/>
+          <p:cNvSpPr/>
+          <p:nvPr/>
+        </p:nvSpPr>
+        <p:spPr>
+          <a:xfrm>
+            <a:off x="868680" y="1627632"/>
+            <a:ext cx="2011680" cy="73152"/>
+          </a:xfrm>
+          <a:prstGeom prst="roundRect">
+            <a:avLst/>
+          </a:prstGeom>
+          <a:solidFill>
+            <a:srgbClr val="E8801A"/>
+          </a:solidFill>
+          <a:ln>
+            <a:noFill/>
+          </a:ln>
+          <a:effectLst/>
+        </p:spPr>
+        <p:style>
+          <a:lnRef idx="1">
+            <a:schemeClr val="accent1"/>
+          </a:lnRef>
+          <a:fillRef idx="3">
+            <a:schemeClr val="accent1"/>
+          </a:fillRef>
+          <a:effectRef idx="2">
+            <a:schemeClr val="accent1"/>
+          </a:effectRef>
+          <a:fontRef idx="minor">
+            <a:schemeClr val="lt1"/>
+          </a:fontRef>
+        </p:style>
+        <p:txBody>
+          <a:bodyPr rtlCol="0" anchor="ctr"/>
+          <a:lstStyle/>
+          <a:p>
+            <a:pPr algn="ctr"/>
+          </a:p>
+        </p:txBody>
+      </p:sp>
+      <p:sp>
+        <p:nvSpPr>
+          <p:cNvPr id="8" name="TextBox 7"/>
           <p:cNvSpPr txBox="1"/>
           <p:nvPr/>
         </p:nvSpPr>
         <p:spPr>
           <a:xfrm>
-            <a:off x="822960" y="1920240"/>
+            <a:off x="822960" y="1965960"/>
             <a:ext cx="4983480" cy="4206240"/>
           </a:xfrm>
           <a:prstGeom prst="rect">
@@ -6747,17 +7034,17 @@
           <a:p>
             <a:pPr>
               <a:spcAft>
-                <a:spcPts val="1000"/>
+                <a:spcPts val="1100"/>
               </a:spcAft>
             </a:pPr>
             <a:r>
               <a:rPr sz="1600" b="1" i="0">
                 <a:solidFill>
-                  <a:srgbClr val="2E3A80"/>
-                </a:solidFill>
-                <a:latin typeface="Montserrat"/>
-              </a:rPr>
-              <a:t>•  </a:t>
+                  <a:srgbClr val="E8801A"/>
+                </a:solidFill>
+                <a:latin typeface="Montserrat"/>
+              </a:rPr>
+              <a:t>▸  </a:t>
             </a:r>
             <a:r>
               <a:rPr sz="1600" b="0" i="0">
@@ -6766,23 +7053,23 @@
                 </a:solidFill>
                 <a:latin typeface="Montserrat"/>
               </a:rPr>
-              <a:t>Falta de conducto o de deflector</a:t>
+              <a:t>Grietas, fisuras o daños: principal IPa-3</a:t>
             </a:r>
           </a:p>
           <a:p>
             <a:pPr>
               <a:spcAft>
-                <a:spcPts val="1000"/>
+                <a:spcPts val="1100"/>
               </a:spcAft>
             </a:pPr>
             <a:r>
               <a:rPr sz="1600" b="1" i="0">
                 <a:solidFill>
-                  <a:srgbClr val="2E3A80"/>
-                </a:solidFill>
-                <a:latin typeface="Montserrat"/>
-              </a:rPr>
-              <a:t>•  </a:t>
+                  <a:srgbClr val="E8801A"/>
+                </a:solidFill>
+                <a:latin typeface="Montserrat"/>
+              </a:rPr>
+              <a:t>▸  </a:t>
             </a:r>
             <a:r>
               <a:rPr sz="1600" b="0" i="0">
@@ -6791,23 +7078,23 @@
                 </a:solidFill>
                 <a:latin typeface="Montserrat"/>
               </a:rPr>
-              <a:t>Diámetro escaso o estrangulación</a:t>
+              <a:t>Elastómero o espirometálico</a:t>
             </a:r>
           </a:p>
           <a:p>
             <a:pPr>
               <a:spcAft>
-                <a:spcPts val="1000"/>
+                <a:spcPts val="1100"/>
               </a:spcAft>
             </a:pPr>
             <a:r>
               <a:rPr sz="1600" b="1" i="0">
                 <a:solidFill>
-                  <a:srgbClr val="2E3A80"/>
-                </a:solidFill>
-                <a:latin typeface="Montserrat"/>
-              </a:rPr>
-              <a:t>•  </a:t>
+                  <a:srgbClr val="E8801A"/>
+                </a:solidFill>
+                <a:latin typeface="Montserrat"/>
+              </a:rPr>
+              <a:t>▸  </a:t>
             </a:r>
             <a:r>
               <a:rPr sz="1600" b="0" i="0">
@@ -6816,23 +7103,23 @@
                 </a:solidFill>
                 <a:latin typeface="Montserrat"/>
               </a:rPr>
-              <a:t>Materiales que no aguantan la temperatura</a:t>
+              <a:t>Pegado a partes calientes del horno: IPa-4</a:t>
             </a:r>
           </a:p>
           <a:p>
             <a:pPr>
               <a:spcAft>
-                <a:spcPts val="1000"/>
+                <a:spcPts val="1100"/>
               </a:spcAft>
             </a:pPr>
             <a:r>
               <a:rPr sz="1600" b="1" i="0">
                 <a:solidFill>
-                  <a:srgbClr val="2E3A80"/>
-                </a:solidFill>
-                <a:latin typeface="Montserrat"/>
-              </a:rPr>
-              <a:t>•  </a:t>
+                  <a:srgbClr val="E8801A"/>
+                </a:solidFill>
+                <a:latin typeface="Montserrat"/>
+              </a:rPr>
+              <a:t>▸  </a:t>
             </a:r>
             <a:r>
               <a:rPr sz="1600" b="0" i="0">
@@ -6841,14 +7128,14 @@
                 </a:solidFill>
                 <a:latin typeface="Montserrat"/>
               </a:rPr>
-              <a:t>Devuelven los humos al local: principal</a:t>
-            </a:r>
-          </a:p>
-        </p:txBody>
-      </p:sp>
-      <p:sp>
-        <p:nvSpPr>
-          <p:cNvPr id="8" name="imgph" descr="IMGQ:damaged flue chimney cap on roof"/>
+              <a:t>Salvo aislante que impida el contacto</a:t>
+            </a:r>
+          </a:p>
+        </p:txBody>
+      </p:sp>
+      <p:sp>
+        <p:nvSpPr>
+          <p:cNvPr id="9" name="imgph" descr="IMGQ:damaged cracked rubber gas hose connection"/>
           <p:cNvSpPr/>
           <p:nvPr/>
         </p:nvSpPr>
@@ -6894,7 +7181,7 @@
       </p:sp>
       <p:sp>
         <p:nvSpPr>
-          <p:cNvPr id="9" name="TextBox 8"/>
+          <p:cNvPr id="10" name="TextBox 9"/>
           <p:cNvSpPr txBox="1"/>
           <p:nvPr/>
         </p:nvSpPr>
@@ -6934,7 +7221,7 @@
                 </a:solidFill>
                 <a:latin typeface="Montserrat"/>
               </a:rPr>
-              <a:t>damaged flue chimney cap on roof</a:t>
+              <a:t>damaged cracked rubber gas hose connection</a:t>
             </a:r>
           </a:p>
         </p:txBody>
@@ -7031,7 +7318,7 @@
                 </a:solidFill>
                 <a:latin typeface="Montserrat"/>
               </a:rPr>
-              <a:t>014 / 020</a:t>
+              <a:t>014 / 021</a:t>
             </a:r>
           </a:p>
         </p:txBody>
@@ -7079,7 +7366,7 @@
         <p:spPr>
           <a:xfrm>
             <a:off x="822960" y="457200"/>
-            <a:ext cx="8229600" cy="365760"/>
+            <a:ext cx="10058400" cy="365760"/>
           </a:xfrm>
           <a:prstGeom prst="rect">
             <a:avLst/>
@@ -7093,13 +7380,13 @@
           <a:lstStyle/>
           <a:p>
             <a:r>
-              <a:rPr sz="1200" b="1" i="0">
-                <a:solidFill>
-                  <a:srgbClr val="64748B"/>
-                </a:solidFill>
-                <a:latin typeface="Montserrat"/>
-              </a:rPr>
-              <a:t>PARTE 12 · IPA-6, IPA-7, IPA-8</a:t>
+              <a:rPr sz="1300" b="1" i="0">
+                <a:solidFill>
+                  <a:srgbClr val="E8801A"/>
+                </a:solidFill>
+                <a:latin typeface="Montserrat"/>
+              </a:rPr>
+              <a:t>PARTE 12 · IPA-5</a:t>
             </a:r>
           </a:p>
         </p:txBody>
@@ -7127,26 +7414,70 @@
           <a:lstStyle/>
           <a:p>
             <a:r>
-              <a:rPr sz="2700" b="1" i="0">
+              <a:rPr sz="2800" b="1" i="0">
                 <a:solidFill>
                   <a:srgbClr val="1E2761"/>
                 </a:solidFill>
                 <a:latin typeface="Montserrat"/>
               </a:rPr>
-              <a:t>Chimenea, volumen y llaves sueltas</a:t>
-            </a:r>
-          </a:p>
-        </p:txBody>
-      </p:sp>
-      <p:sp>
-        <p:nvSpPr>
-          <p:cNvPr id="7" name="TextBox 6"/>
+              <a:t>Conductos de evacuación y deflector</a:t>
+            </a:r>
+          </a:p>
+        </p:txBody>
+      </p:sp>
+      <p:sp>
+        <p:nvSpPr>
+          <p:cNvPr id="7" name="Rounded Rectangle 6"/>
+          <p:cNvSpPr/>
+          <p:nvPr/>
+        </p:nvSpPr>
+        <p:spPr>
+          <a:xfrm>
+            <a:off x="868680" y="1627632"/>
+            <a:ext cx="2011680" cy="73152"/>
+          </a:xfrm>
+          <a:prstGeom prst="roundRect">
+            <a:avLst/>
+          </a:prstGeom>
+          <a:solidFill>
+            <a:srgbClr val="E8801A"/>
+          </a:solidFill>
+          <a:ln>
+            <a:noFill/>
+          </a:ln>
+          <a:effectLst/>
+        </p:spPr>
+        <p:style>
+          <a:lnRef idx="1">
+            <a:schemeClr val="accent1"/>
+          </a:lnRef>
+          <a:fillRef idx="3">
+            <a:schemeClr val="accent1"/>
+          </a:fillRef>
+          <a:effectRef idx="2">
+            <a:schemeClr val="accent1"/>
+          </a:effectRef>
+          <a:fontRef idx="minor">
+            <a:schemeClr val="lt1"/>
+          </a:fontRef>
+        </p:style>
+        <p:txBody>
+          <a:bodyPr rtlCol="0" anchor="ctr"/>
+          <a:lstStyle/>
+          <a:p>
+            <a:pPr algn="ctr"/>
+          </a:p>
+        </p:txBody>
+      </p:sp>
+      <p:sp>
+        <p:nvSpPr>
+          <p:cNvPr id="8" name="TextBox 7"/>
           <p:cNvSpPr txBox="1"/>
           <p:nvPr/>
         </p:nvSpPr>
         <p:spPr>
           <a:xfrm>
-            <a:off x="822960" y="1920240"/>
+            <a:off x="822960" y="1965960"/>
             <a:ext cx="4983480" cy="4206240"/>
           </a:xfrm>
           <a:prstGeom prst="rect">
@@ -7162,17 +7493,17 @@
           <a:p>
             <a:pPr>
               <a:spcAft>
-                <a:spcPts val="1000"/>
+                <a:spcPts val="1100"/>
               </a:spcAft>
             </a:pPr>
             <a:r>
               <a:rPr sz="1600" b="1" i="0">
                 <a:solidFill>
-                  <a:srgbClr val="2E3A80"/>
-                </a:solidFill>
-                <a:latin typeface="Montserrat"/>
-              </a:rPr>
-              <a:t>•  </a:t>
+                  <a:srgbClr val="E8801A"/>
+                </a:solidFill>
+                <a:latin typeface="Montserrat"/>
+              </a:rPr>
+              <a:t>▸  </a:t>
             </a:r>
             <a:r>
               <a:rPr sz="1600" b="0" i="0">
@@ -7181,23 +7512,23 @@
                 </a:solidFill>
                 <a:latin typeface="Montserrat"/>
               </a:rPr>
-              <a:t>Extractor o campana en chimenea de tipo B</a:t>
+              <a:t>Falta de conducto o de deflector</a:t>
             </a:r>
           </a:p>
           <a:p>
             <a:pPr>
               <a:spcAft>
-                <a:spcPts val="1000"/>
+                <a:spcPts val="1100"/>
               </a:spcAft>
             </a:pPr>
             <a:r>
               <a:rPr sz="1600" b="1" i="0">
                 <a:solidFill>
-                  <a:srgbClr val="2E3A80"/>
-                </a:solidFill>
-                <a:latin typeface="Montserrat"/>
-              </a:rPr>
-              <a:t>•  </a:t>
+                  <a:srgbClr val="E8801A"/>
+                </a:solidFill>
+                <a:latin typeface="Montserrat"/>
+              </a:rPr>
+              <a:t>▸  </a:t>
             </a:r>
             <a:r>
               <a:rPr sz="1600" b="0" i="0">
@@ -7206,23 +7537,23 @@
                 </a:solidFill>
                 <a:latin typeface="Montserrat"/>
               </a:rPr>
-              <a:t>Tipo B en local V ≤ 8 m³ mal ventilado</a:t>
+              <a:t>Diámetro escaso o estrangulación</a:t>
             </a:r>
           </a:p>
           <a:p>
             <a:pPr>
               <a:spcAft>
-                <a:spcPts val="1000"/>
+                <a:spcPts val="1100"/>
               </a:spcAft>
             </a:pPr>
             <a:r>
               <a:rPr sz="1600" b="1" i="0">
                 <a:solidFill>
-                  <a:srgbClr val="2E3A80"/>
-                </a:solidFill>
-                <a:latin typeface="Montserrat"/>
-              </a:rPr>
-              <a:t>•  </a:t>
+                  <a:srgbClr val="E8801A"/>
+                </a:solidFill>
+                <a:latin typeface="Montserrat"/>
+              </a:rPr>
+              <a:t>▸  </a:t>
             </a:r>
             <a:r>
               <a:rPr sz="1600" b="0" i="0">
@@ -7231,14 +7562,39 @@
                 </a:solidFill>
                 <a:latin typeface="Montserrat"/>
               </a:rPr>
-              <a:t>Llaves sin conectar y sin cerrar/precintar</a:t>
-            </a:r>
-          </a:p>
-        </p:txBody>
-      </p:sp>
-      <p:sp>
-        <p:nvSpPr>
-          <p:cNvPr id="8" name="imgph" descr="IMGQ:small kitchen gas water heater ventilation grille"/>
+              <a:t>Materiales que no aguantan la temperatura</a:t>
+            </a:r>
+          </a:p>
+          <a:p>
+            <a:pPr>
+              <a:spcAft>
+                <a:spcPts val="1100"/>
+              </a:spcAft>
+            </a:pPr>
+            <a:r>
+              <a:rPr sz="1600" b="1" i="0">
+                <a:solidFill>
+                  <a:srgbClr val="E8801A"/>
+                </a:solidFill>
+                <a:latin typeface="Montserrat"/>
+              </a:rPr>
+              <a:t>▸  </a:t>
+            </a:r>
+            <a:r>
+              <a:rPr sz="1600" b="0" i="0">
+                <a:solidFill>
+                  <a:srgbClr val="1B2330"/>
+                </a:solidFill>
+                <a:latin typeface="Montserrat"/>
+              </a:rPr>
+              <a:t>Devuelven los humos al local: principal</a:t>
+            </a:r>
+          </a:p>
+        </p:txBody>
+      </p:sp>
+      <p:sp>
+        <p:nvSpPr>
+          <p:cNvPr id="9" name="imgph" descr="IMGQ:damaged flue chimney cap on roof"/>
           <p:cNvSpPr/>
           <p:nvPr/>
         </p:nvSpPr>
@@ -7284,7 +7640,7 @@
       </p:sp>
       <p:sp>
         <p:nvSpPr>
-          <p:cNvPr id="9" name="TextBox 8"/>
+          <p:cNvPr id="10" name="TextBox 9"/>
           <p:cNvSpPr txBox="1"/>
           <p:nvPr/>
         </p:nvSpPr>
@@ -7324,7 +7680,7 @@
                 </a:solidFill>
                 <a:latin typeface="Montserrat"/>
               </a:rPr>
-              <a:t>small kitchen gas water heater ventilation grille</a:t>
+              <a:t>damaged flue chimney cap on roof</a:t>
             </a:r>
           </a:p>
         </p:txBody>
@@ -7421,7 +7777,7 @@
                 </a:solidFill>
                 <a:latin typeface="Montserrat"/>
               </a:rPr>
-              <a:t>015 / 020</a:t>
+              <a:t>015 / 021</a:t>
             </a:r>
           </a:p>
         </p:txBody>
@@ -7469,7 +7825,7 @@
         <p:spPr>
           <a:xfrm>
             <a:off x="822960" y="457200"/>
-            <a:ext cx="8229600" cy="365760"/>
+            <a:ext cx="10058400" cy="365760"/>
           </a:xfrm>
           <a:prstGeom prst="rect">
             <a:avLst/>
@@ -7483,13 +7839,13 @@
           <a:lstStyle/>
           <a:p>
             <a:r>
-              <a:rPr sz="1200" b="1" i="0">
-                <a:solidFill>
-                  <a:srgbClr val="64748B"/>
-                </a:solidFill>
-                <a:latin typeface="Montserrat"/>
-              </a:rPr>
-              <a:t>PARTE 12 · ISA-1 Y ISA-2</a:t>
+              <a:rPr sz="1300" b="1" i="0">
+                <a:solidFill>
+                  <a:srgbClr val="E8801A"/>
+                </a:solidFill>
+                <a:latin typeface="Montserrat"/>
+              </a:rPr>
+              <a:t>PARTE 12 · IPA-6, IPA-7, IPA-8</a:t>
             </a:r>
           </a:p>
         </p:txBody>
@@ -7517,26 +7873,70 @@
           <a:lstStyle/>
           <a:p>
             <a:r>
-              <a:rPr sz="2700" b="1" i="0">
+              <a:rPr sz="2800" b="1" i="0">
                 <a:solidFill>
                   <a:srgbClr val="1E2761"/>
                 </a:solidFill>
                 <a:latin typeface="Montserrat"/>
               </a:rPr>
-              <a:t>Secundarias: ventilación y conservación</a:t>
-            </a:r>
-          </a:p>
-        </p:txBody>
-      </p:sp>
-      <p:sp>
-        <p:nvSpPr>
-          <p:cNvPr id="7" name="TextBox 6"/>
+              <a:t>Chimenea, volumen y llaves sueltas</a:t>
+            </a:r>
+          </a:p>
+        </p:txBody>
+      </p:sp>
+      <p:sp>
+        <p:nvSpPr>
+          <p:cNvPr id="7" name="Rounded Rectangle 6"/>
+          <p:cNvSpPr/>
+          <p:nvPr/>
+        </p:nvSpPr>
+        <p:spPr>
+          <a:xfrm>
+            <a:off x="868680" y="1627632"/>
+            <a:ext cx="2011680" cy="73152"/>
+          </a:xfrm>
+          <a:prstGeom prst="roundRect">
+            <a:avLst/>
+          </a:prstGeom>
+          <a:solidFill>
+            <a:srgbClr val="E8801A"/>
+          </a:solidFill>
+          <a:ln>
+            <a:noFill/>
+          </a:ln>
+          <a:effectLst/>
+        </p:spPr>
+        <p:style>
+          <a:lnRef idx="1">
+            <a:schemeClr val="accent1"/>
+          </a:lnRef>
+          <a:fillRef idx="3">
+            <a:schemeClr val="accent1"/>
+          </a:fillRef>
+          <a:effectRef idx="2">
+            <a:schemeClr val="accent1"/>
+          </a:effectRef>
+          <a:fontRef idx="minor">
+            <a:schemeClr val="lt1"/>
+          </a:fontRef>
+        </p:style>
+        <p:txBody>
+          <a:bodyPr rtlCol="0" anchor="ctr"/>
+          <a:lstStyle/>
+          <a:p>
+            <a:pPr algn="ctr"/>
+          </a:p>
+        </p:txBody>
+      </p:sp>
+      <p:sp>
+        <p:nvSpPr>
+          <p:cNvPr id="8" name="TextBox 7"/>
           <p:cNvSpPr txBox="1"/>
           <p:nvPr/>
         </p:nvSpPr>
         <p:spPr>
           <a:xfrm>
-            <a:off x="822960" y="1920240"/>
+            <a:off x="822960" y="1965960"/>
             <a:ext cx="4983480" cy="4206240"/>
           </a:xfrm>
           <a:prstGeom prst="rect">
@@ -7552,17 +7952,17 @@
           <a:p>
             <a:pPr>
               <a:spcAft>
-                <a:spcPts val="1000"/>
+                <a:spcPts val="1100"/>
               </a:spcAft>
             </a:pPr>
             <a:r>
               <a:rPr sz="1600" b="1" i="0">
                 <a:solidFill>
-                  <a:srgbClr val="2E3A80"/>
-                </a:solidFill>
-                <a:latin typeface="Montserrat"/>
-              </a:rPr>
-              <a:t>•  </a:t>
+                  <a:srgbClr val="E8801A"/>
+                </a:solidFill>
+                <a:latin typeface="Montserrat"/>
+              </a:rPr>
+              <a:t>▸  </a:t>
             </a:r>
             <a:r>
               <a:rPr sz="1600" b="0" i="0">
@@ -7571,23 +7971,23 @@
                 </a:solidFill>
                 <a:latin typeface="Montserrat"/>
               </a:rPr>
-              <a:t>Tipo B mal ventilado en V &gt; 8 m³: ISa-1</a:t>
+              <a:t>Extractor o campana en chimenea de tipo B</a:t>
             </a:r>
           </a:p>
           <a:p>
             <a:pPr>
               <a:spcAft>
-                <a:spcPts val="1000"/>
+                <a:spcPts val="1100"/>
               </a:spcAft>
             </a:pPr>
             <a:r>
               <a:rPr sz="1600" b="1" i="0">
                 <a:solidFill>
-                  <a:srgbClr val="2E3A80"/>
-                </a:solidFill>
-                <a:latin typeface="Montserrat"/>
-              </a:rPr>
-              <a:t>•  </a:t>
+                  <a:srgbClr val="E8801A"/>
+                </a:solidFill>
+                <a:latin typeface="Montserrat"/>
+              </a:rPr>
+              <a:t>▸  </a:t>
             </a:r>
             <a:r>
               <a:rPr sz="1600" b="0" i="0">
@@ -7596,23 +7996,23 @@
                 </a:solidFill>
                 <a:latin typeface="Montserrat"/>
               </a:rPr>
-              <a:t>Corrosión, soportes o uniones en mal estado</a:t>
+              <a:t>Tipo B en local V ≤ 8 m³ mal ventilado</a:t>
             </a:r>
           </a:p>
           <a:p>
             <a:pPr>
               <a:spcAft>
-                <a:spcPts val="1000"/>
+                <a:spcPts val="1100"/>
               </a:spcAft>
             </a:pPr>
             <a:r>
               <a:rPr sz="1600" b="1" i="0">
                 <a:solidFill>
-                  <a:srgbClr val="2E3A80"/>
-                </a:solidFill>
-                <a:latin typeface="Montserrat"/>
-              </a:rPr>
-              <a:t>•  </a:t>
+                  <a:srgbClr val="E8801A"/>
+                </a:solidFill>
+                <a:latin typeface="Montserrat"/>
+              </a:rPr>
+              <a:t>▸  </a:t>
             </a:r>
             <a:r>
               <a:rPr sz="1600" b="0" i="0">
@@ -7621,39 +8021,14 @@
                 </a:solidFill>
                 <a:latin typeface="Montserrat"/>
               </a:rPr>
-              <a:t>Llaves que faltan o no son accesibles</a:t>
-            </a:r>
-          </a:p>
-          <a:p>
-            <a:pPr>
-              <a:spcAft>
-                <a:spcPts val="1000"/>
-              </a:spcAft>
-            </a:pPr>
-            <a:r>
-              <a:rPr sz="1600" b="1" i="0">
-                <a:solidFill>
-                  <a:srgbClr val="2E3A80"/>
-                </a:solidFill>
-                <a:latin typeface="Montserrat"/>
-              </a:rPr>
-              <a:t>•  </a:t>
-            </a:r>
-            <a:r>
-              <a:rPr sz="1600" b="0" i="0">
-                <a:solidFill>
-                  <a:srgbClr val="1B2330"/>
-                </a:solidFill>
-                <a:latin typeface="Montserrat"/>
-              </a:rPr>
-              <a:t>Regulador o válvula de mínima defectuosos</a:t>
-            </a:r>
-          </a:p>
-        </p:txBody>
-      </p:sp>
-      <p:sp>
-        <p:nvSpPr>
-          <p:cNvPr id="8" name="imgph" descr="IMGQ:corroded rusty gas pipe fitting valve"/>
+              <a:t>Llaves sin conectar y sin cerrar/precintar</a:t>
+            </a:r>
+          </a:p>
+        </p:txBody>
+      </p:sp>
+      <p:sp>
+        <p:nvSpPr>
+          <p:cNvPr id="9" name="imgph" descr="IMGQ:small kitchen gas water heater ventilation grille"/>
           <p:cNvSpPr/>
           <p:nvPr/>
         </p:nvSpPr>
@@ -7699,7 +8074,7 @@
       </p:sp>
       <p:sp>
         <p:nvSpPr>
-          <p:cNvPr id="9" name="TextBox 8"/>
+          <p:cNvPr id="10" name="TextBox 9"/>
           <p:cNvSpPr txBox="1"/>
           <p:nvPr/>
         </p:nvSpPr>
@@ -7739,7 +8114,7 @@
                 </a:solidFill>
                 <a:latin typeface="Montserrat"/>
               </a:rPr>
-              <a:t>corroded rusty gas pipe fitting valve</a:t>
+              <a:t>small kitchen gas water heater ventilation grille</a:t>
             </a:r>
           </a:p>
         </p:txBody>
@@ -7836,7 +8211,7 @@
                 </a:solidFill>
                 <a:latin typeface="Montserrat"/>
               </a:rPr>
-              <a:t>016 / 020</a:t>
+              <a:t>016 / 021</a:t>
             </a:r>
           </a:p>
         </p:txBody>
@@ -7884,7 +8259,7 @@
         <p:spPr>
           <a:xfrm>
             <a:off x="822960" y="457200"/>
-            <a:ext cx="8229600" cy="365760"/>
+            <a:ext cx="10058400" cy="365760"/>
           </a:xfrm>
           <a:prstGeom prst="rect">
             <a:avLst/>
@@ -7898,13 +8273,13 @@
           <a:lstStyle/>
           <a:p>
             <a:r>
-              <a:rPr sz="1200" b="1" i="0">
-                <a:solidFill>
-                  <a:srgbClr val="64748B"/>
-                </a:solidFill>
-                <a:latin typeface="Montserrat"/>
-              </a:rPr>
-              <a:t>PARTE 12 · ISA-3</a:t>
+              <a:rPr sz="1300" b="1" i="0">
+                <a:solidFill>
+                  <a:srgbClr val="E8801A"/>
+                </a:solidFill>
+                <a:latin typeface="Montserrat"/>
+              </a:rPr>
+              <a:t>PARTE 12 · ISA-1 Y ISA-2</a:t>
             </a:r>
           </a:p>
         </p:txBody>
@@ -7932,26 +8307,70 @@
           <a:lstStyle/>
           <a:p>
             <a:r>
-              <a:rPr sz="2700" b="1" i="0">
+              <a:rPr sz="2800" b="1" i="0">
                 <a:solidFill>
                   <a:srgbClr val="1E2761"/>
                 </a:solidFill>
                 <a:latin typeface="Montserrat"/>
               </a:rPr>
-              <a:t>Tubo flexible: viejo o mal puesto</a:t>
-            </a:r>
-          </a:p>
-        </p:txBody>
-      </p:sp>
-      <p:sp>
-        <p:nvSpPr>
-          <p:cNvPr id="7" name="TextBox 6"/>
+              <a:t>Secundarias: ventilación y conservación</a:t>
+            </a:r>
+          </a:p>
+        </p:txBody>
+      </p:sp>
+      <p:sp>
+        <p:nvSpPr>
+          <p:cNvPr id="7" name="Rounded Rectangle 6"/>
+          <p:cNvSpPr/>
+          <p:nvPr/>
+        </p:nvSpPr>
+        <p:spPr>
+          <a:xfrm>
+            <a:off x="868680" y="1627632"/>
+            <a:ext cx="2011680" cy="73152"/>
+          </a:xfrm>
+          <a:prstGeom prst="roundRect">
+            <a:avLst/>
+          </a:prstGeom>
+          <a:solidFill>
+            <a:srgbClr val="E8801A"/>
+          </a:solidFill>
+          <a:ln>
+            <a:noFill/>
+          </a:ln>
+          <a:effectLst/>
+        </p:spPr>
+        <p:style>
+          <a:lnRef idx="1">
+            <a:schemeClr val="accent1"/>
+          </a:lnRef>
+          <a:fillRef idx="3">
+            <a:schemeClr val="accent1"/>
+          </a:fillRef>
+          <a:effectRef idx="2">
+            <a:schemeClr val="accent1"/>
+          </a:effectRef>
+          <a:fontRef idx="minor">
+            <a:schemeClr val="lt1"/>
+          </a:fontRef>
+        </p:style>
+        <p:txBody>
+          <a:bodyPr rtlCol="0" anchor="ctr"/>
+          <a:lstStyle/>
+          <a:p>
+            <a:pPr algn="ctr"/>
+          </a:p>
+        </p:txBody>
+      </p:sp>
+      <p:sp>
+        <p:nvSpPr>
+          <p:cNvPr id="8" name="TextBox 7"/>
           <p:cNvSpPr txBox="1"/>
           <p:nvPr/>
         </p:nvSpPr>
         <p:spPr>
           <a:xfrm>
-            <a:off x="822960" y="1920240"/>
+            <a:off x="822960" y="1965960"/>
             <a:ext cx="4983480" cy="4206240"/>
           </a:xfrm>
           <a:prstGeom prst="rect">
@@ -7967,17 +8386,17 @@
           <a:p>
             <a:pPr>
               <a:spcAft>
-                <a:spcPts val="1000"/>
+                <a:spcPts val="1100"/>
               </a:spcAft>
             </a:pPr>
             <a:r>
               <a:rPr sz="1600" b="1" i="0">
                 <a:solidFill>
-                  <a:srgbClr val="2E3A80"/>
-                </a:solidFill>
-                <a:latin typeface="Montserrat"/>
-              </a:rPr>
-              <a:t>•  </a:t>
+                  <a:srgbClr val="E8801A"/>
+                </a:solidFill>
+                <a:latin typeface="Montserrat"/>
+              </a:rPr>
+              <a:t>▸  </a:t>
             </a:r>
             <a:r>
               <a:rPr sz="1600" b="0" i="0">
@@ -7986,23 +8405,23 @@
                 </a:solidFill>
                 <a:latin typeface="Montserrat"/>
               </a:rPr>
-              <a:t>Caducado, sin identificación o muy largo</a:t>
+              <a:t>Tipo B mal ventilado en V &gt; 8 m³: ISa-1</a:t>
             </a:r>
           </a:p>
           <a:p>
             <a:pPr>
               <a:spcAft>
-                <a:spcPts val="1000"/>
+                <a:spcPts val="1100"/>
               </a:spcAft>
             </a:pPr>
             <a:r>
               <a:rPr sz="1600" b="1" i="0">
                 <a:solidFill>
-                  <a:srgbClr val="2E3A80"/>
-                </a:solidFill>
-                <a:latin typeface="Montserrat"/>
-              </a:rPr>
-              <a:t>•  </a:t>
+                  <a:srgbClr val="E8801A"/>
+                </a:solidFill>
+                <a:latin typeface="Montserrat"/>
+              </a:rPr>
+              <a:t>▸  </a:t>
             </a:r>
             <a:r>
               <a:rPr sz="1600" b="0" i="0">
@@ -8011,23 +8430,23 @@
                 </a:solidFill>
                 <a:latin typeface="Montserrat"/>
               </a:rPr>
-              <a:t>Sin enchufe de seguridad en 2.ª familia</a:t>
+              <a:t>Corrosión, soportes o uniones en mal estado</a:t>
             </a:r>
           </a:p>
           <a:p>
             <a:pPr>
               <a:spcAft>
-                <a:spcPts val="1000"/>
+                <a:spcPts val="1100"/>
               </a:spcAft>
             </a:pPr>
             <a:r>
               <a:rPr sz="1600" b="1" i="0">
                 <a:solidFill>
-                  <a:srgbClr val="2E3A80"/>
-                </a:solidFill>
-                <a:latin typeface="Montserrat"/>
-              </a:rPr>
-              <a:t>•  </a:t>
+                  <a:srgbClr val="E8801A"/>
+                </a:solidFill>
+                <a:latin typeface="Montserrat"/>
+              </a:rPr>
+              <a:t>▸  </a:t>
             </a:r>
             <a:r>
               <a:rPr sz="1600" b="0" i="0">
@@ -8036,23 +8455,23 @@
                 </a:solidFill>
                 <a:latin typeface="Montserrat"/>
               </a:rPr>
-              <a:t>Unión floja: riesgo de desconexión</a:t>
+              <a:t>Llaves que faltan o no son accesibles</a:t>
             </a:r>
           </a:p>
           <a:p>
             <a:pPr>
               <a:spcAft>
-                <a:spcPts val="1000"/>
+                <a:spcPts val="1100"/>
               </a:spcAft>
             </a:pPr>
             <a:r>
               <a:rPr sz="1600" b="1" i="0">
                 <a:solidFill>
-                  <a:srgbClr val="2E3A80"/>
-                </a:solidFill>
-                <a:latin typeface="Montserrat"/>
-              </a:rPr>
-              <a:t>•  </a:t>
+                  <a:srgbClr val="E8801A"/>
+                </a:solidFill>
+                <a:latin typeface="Montserrat"/>
+              </a:rPr>
+              <a:t>▸  </a:t>
             </a:r>
             <a:r>
               <a:rPr sz="1600" b="0" i="0">
@@ -8061,14 +8480,14 @@
                 </a:solidFill>
                 <a:latin typeface="Montserrat"/>
               </a:rPr>
-              <a:t>Roto es principal; viejo, secundario</a:t>
-            </a:r>
-          </a:p>
-        </p:txBody>
-      </p:sp>
-      <p:sp>
-        <p:nvSpPr>
-          <p:cNvPr id="8" name="imgph" descr="IMGQ:gas hose safety connector expiry date label"/>
+              <a:t>Regulador o válvula de mínima defectuosos</a:t>
+            </a:r>
+          </a:p>
+        </p:txBody>
+      </p:sp>
+      <p:sp>
+        <p:nvSpPr>
+          <p:cNvPr id="9" name="imgph" descr="IMGQ:corroded rusty gas pipe fitting valve"/>
           <p:cNvSpPr/>
           <p:nvPr/>
         </p:nvSpPr>
@@ -8114,7 +8533,7 @@
       </p:sp>
       <p:sp>
         <p:nvSpPr>
-          <p:cNvPr id="9" name="TextBox 8"/>
+          <p:cNvPr id="10" name="TextBox 9"/>
           <p:cNvSpPr txBox="1"/>
           <p:nvPr/>
         </p:nvSpPr>
@@ -8154,7 +8573,7 @@
                 </a:solidFill>
                 <a:latin typeface="Montserrat"/>
               </a:rPr>
-              <a:t>gas hose safety connector expiry date label</a:t>
+              <a:t>corroded rusty gas pipe fitting valve</a:t>
             </a:r>
           </a:p>
         </p:txBody>
@@ -8251,7 +8670,7 @@
                 </a:solidFill>
                 <a:latin typeface="Montserrat"/>
               </a:rPr>
-              <a:t>017 / 020</a:t>
+              <a:t>017 / 021</a:t>
             </a:r>
           </a:p>
         </p:txBody>
@@ -8299,7 +8718,7 @@
         <p:spPr>
           <a:xfrm>
             <a:off x="822960" y="457200"/>
-            <a:ext cx="8229600" cy="365760"/>
+            <a:ext cx="10058400" cy="365760"/>
           </a:xfrm>
           <a:prstGeom prst="rect">
             <a:avLst/>
@@ -8313,13 +8732,13 @@
           <a:lstStyle/>
           <a:p>
             <a:r>
-              <a:rPr sz="1200" b="1" i="0">
-                <a:solidFill>
-                  <a:srgbClr val="64748B"/>
-                </a:solidFill>
-                <a:latin typeface="Montserrat"/>
-              </a:rPr>
-              <a:t>PARTE 12 · ISA-5</a:t>
+              <a:rPr sz="1300" b="1" i="0">
+                <a:solidFill>
+                  <a:srgbClr val="E8801A"/>
+                </a:solidFill>
+                <a:latin typeface="Montserrat"/>
+              </a:rPr>
+              <a:t>PARTE 12 · ISA-3</a:t>
             </a:r>
           </a:p>
         </p:txBody>
@@ -8347,26 +8766,70 @@
           <a:lstStyle/>
           <a:p>
             <a:r>
-              <a:rPr sz="2700" b="1" i="0">
+              <a:rPr sz="2800" b="1" i="0">
                 <a:solidFill>
                   <a:srgbClr val="1E2761"/>
                 </a:solidFill>
                 <a:latin typeface="Montserrat"/>
               </a:rPr>
-              <a:t>Ventilación inadecuada: los números</a:t>
-            </a:r>
-          </a:p>
-        </p:txBody>
-      </p:sp>
-      <p:sp>
-        <p:nvSpPr>
-          <p:cNvPr id="7" name="TextBox 6"/>
+              <a:t>Tubo flexible: viejo o mal puesto</a:t>
+            </a:r>
+          </a:p>
+        </p:txBody>
+      </p:sp>
+      <p:sp>
+        <p:nvSpPr>
+          <p:cNvPr id="7" name="Rounded Rectangle 6"/>
+          <p:cNvSpPr/>
+          <p:nvPr/>
+        </p:nvSpPr>
+        <p:spPr>
+          <a:xfrm>
+            <a:off x="868680" y="1627632"/>
+            <a:ext cx="2011680" cy="73152"/>
+          </a:xfrm>
+          <a:prstGeom prst="roundRect">
+            <a:avLst/>
+          </a:prstGeom>
+          <a:solidFill>
+            <a:srgbClr val="E8801A"/>
+          </a:solidFill>
+          <a:ln>
+            <a:noFill/>
+          </a:ln>
+          <a:effectLst/>
+        </p:spPr>
+        <p:style>
+          <a:lnRef idx="1">
+            <a:schemeClr val="accent1"/>
+          </a:lnRef>
+          <a:fillRef idx="3">
+            <a:schemeClr val="accent1"/>
+          </a:fillRef>
+          <a:effectRef idx="2">
+            <a:schemeClr val="accent1"/>
+          </a:effectRef>
+          <a:fontRef idx="minor">
+            <a:schemeClr val="lt1"/>
+          </a:fontRef>
+        </p:style>
+        <p:txBody>
+          <a:bodyPr rtlCol="0" anchor="ctr"/>
+          <a:lstStyle/>
+          <a:p>
+            <a:pPr algn="ctr"/>
+          </a:p>
+        </p:txBody>
+      </p:sp>
+      <p:sp>
+        <p:nvSpPr>
+          <p:cNvPr id="8" name="TextBox 7"/>
           <p:cNvSpPr txBox="1"/>
           <p:nvPr/>
         </p:nvSpPr>
         <p:spPr>
           <a:xfrm>
-            <a:off x="822960" y="1920240"/>
+            <a:off x="822960" y="1965960"/>
             <a:ext cx="4983480" cy="4206240"/>
           </a:xfrm>
           <a:prstGeom prst="rect">
@@ -8382,17 +8845,17 @@
           <a:p>
             <a:pPr>
               <a:spcAft>
-                <a:spcPts val="1000"/>
+                <a:spcPts val="1100"/>
               </a:spcAft>
             </a:pPr>
             <a:r>
               <a:rPr sz="1600" b="1" i="0">
                 <a:solidFill>
-                  <a:srgbClr val="2E3A80"/>
-                </a:solidFill>
-                <a:latin typeface="Montserrat"/>
-              </a:rPr>
-              <a:t>•  </a:t>
+                  <a:srgbClr val="E8801A"/>
+                </a:solidFill>
+                <a:latin typeface="Montserrat"/>
+              </a:rPr>
+              <a:t>▸  </a:t>
             </a:r>
             <a:r>
               <a:rPr sz="1600" b="0" i="0">
@@ -8401,23 +8864,23 @@
                 </a:solidFill>
                 <a:latin typeface="Montserrat"/>
               </a:rPr>
-              <a:t>Falta o está obstruido el orificio</a:t>
+              <a:t>Caducado, sin identificación o muy largo</a:t>
             </a:r>
           </a:p>
           <a:p>
             <a:pPr>
               <a:spcAft>
-                <a:spcPts val="1000"/>
+                <a:spcPts val="1100"/>
               </a:spcAft>
             </a:pPr>
             <a:r>
               <a:rPr sz="1600" b="1" i="0">
                 <a:solidFill>
-                  <a:srgbClr val="2E3A80"/>
-                </a:solidFill>
-                <a:latin typeface="Montserrat"/>
-              </a:rPr>
-              <a:t>•  </a:t>
+                  <a:srgbClr val="E8801A"/>
+                </a:solidFill>
+                <a:latin typeface="Montserrat"/>
+              </a:rPr>
+              <a:t>▸  </a:t>
             </a:r>
             <a:r>
               <a:rPr sz="1600" b="0" i="0">
@@ -8426,23 +8889,23 @@
                 </a:solidFill>
                 <a:latin typeface="Montserrat"/>
               </a:rPr>
-              <a:t>Extractor: ≥ 80 cm² hasta 16 kW (tipo A)</a:t>
+              <a:t>Sin enchufe de seguridad en 2.ª familia</a:t>
             </a:r>
           </a:p>
           <a:p>
             <a:pPr>
               <a:spcAft>
-                <a:spcPts val="1000"/>
+                <a:spcPts val="1100"/>
               </a:spcAft>
             </a:pPr>
             <a:r>
               <a:rPr sz="1600" b="1" i="0">
                 <a:solidFill>
-                  <a:srgbClr val="2E3A80"/>
-                </a:solidFill>
-                <a:latin typeface="Montserrat"/>
-              </a:rPr>
-              <a:t>•  </a:t>
+                  <a:srgbClr val="E8801A"/>
+                </a:solidFill>
+                <a:latin typeface="Montserrat"/>
+              </a:rPr>
+              <a:t>▸  </a:t>
             </a:r>
             <a:r>
               <a:rPr sz="1600" b="0" i="0">
@@ -8451,23 +8914,23 @@
                 </a:solidFill>
                 <a:latin typeface="Montserrat"/>
               </a:rPr>
-              <a:t>≥ 100 cm² por encima de 16 kW</a:t>
+              <a:t>Unión floja: riesgo de desconexión</a:t>
             </a:r>
           </a:p>
           <a:p>
             <a:pPr>
               <a:spcAft>
-                <a:spcPts val="1000"/>
+                <a:spcPts val="1100"/>
               </a:spcAft>
             </a:pPr>
             <a:r>
               <a:rPr sz="1600" b="1" i="0">
                 <a:solidFill>
-                  <a:srgbClr val="2E3A80"/>
-                </a:solidFill>
-                <a:latin typeface="Montserrat"/>
-              </a:rPr>
-              <a:t>•  </a:t>
+                  <a:srgbClr val="E8801A"/>
+                </a:solidFill>
+                <a:latin typeface="Montserrat"/>
+              </a:rPr>
+              <a:t>▸  </a:t>
             </a:r>
             <a:r>
               <a:rPr sz="1600" b="0" i="0">
@@ -8476,14 +8939,14 @@
                 </a:solidFill>
                 <a:latin typeface="Montserrat"/>
               </a:rPr>
-              <a:t>Altura: ≥ 1,80 m o &lt; 0,40 m del techo</a:t>
-            </a:r>
-          </a:p>
-        </p:txBody>
-      </p:sp>
-      <p:sp>
-        <p:nvSpPr>
-          <p:cNvPr id="8" name="imgph" descr="IMGQ:kitchen ventilation grille air vent wall"/>
+              <a:t>Roto es principal; viejo, secundario</a:t>
+            </a:r>
+          </a:p>
+        </p:txBody>
+      </p:sp>
+      <p:sp>
+        <p:nvSpPr>
+          <p:cNvPr id="9" name="imgph" descr="IMGQ:gas hose safety connector expiry date label"/>
           <p:cNvSpPr/>
           <p:nvPr/>
         </p:nvSpPr>
@@ -8529,7 +8992,7 @@
       </p:sp>
       <p:sp>
         <p:nvSpPr>
-          <p:cNvPr id="9" name="TextBox 8"/>
+          <p:cNvPr id="10" name="TextBox 9"/>
           <p:cNvSpPr txBox="1"/>
           <p:nvPr/>
         </p:nvSpPr>
@@ -8569,7 +9032,7 @@
                 </a:solidFill>
                 <a:latin typeface="Montserrat"/>
               </a:rPr>
-              <a:t>kitchen ventilation grille air vent wall</a:t>
+              <a:t>gas hose safety connector expiry date label</a:t>
             </a:r>
           </a:p>
         </p:txBody>
@@ -8666,7 +9129,7 @@
                 </a:solidFill>
                 <a:latin typeface="Montserrat"/>
               </a:rPr>
-              <a:t>018 / 020</a:t>
+              <a:t>018 / 021</a:t>
             </a:r>
           </a:p>
         </p:txBody>
@@ -8714,7 +9177,7 @@
         <p:spPr>
           <a:xfrm>
             <a:off x="822960" y="457200"/>
-            <a:ext cx="8229600" cy="365760"/>
+            <a:ext cx="10058400" cy="365760"/>
           </a:xfrm>
           <a:prstGeom prst="rect">
             <a:avLst/>
@@ -8728,13 +9191,13 @@
           <a:lstStyle/>
           <a:p>
             <a:r>
-              <a:rPr sz="1200" b="1" i="0">
-                <a:solidFill>
-                  <a:srgbClr val="64748B"/>
-                </a:solidFill>
-                <a:latin typeface="Montserrat"/>
-              </a:rPr>
-              <a:t>PARTE 12 · ISA-6, ISA-7, ISA-8</a:t>
+              <a:rPr sz="1300" b="1" i="0">
+                <a:solidFill>
+                  <a:srgbClr val="E8801A"/>
+                </a:solidFill>
+                <a:latin typeface="Montserrat"/>
+              </a:rPr>
+              <a:t>PARTE 12 · ISA-5</a:t>
             </a:r>
           </a:p>
         </p:txBody>
@@ -8762,26 +9225,70 @@
           <a:lstStyle/>
           <a:p>
             <a:r>
-              <a:rPr sz="2700" b="1" i="0">
+              <a:rPr sz="2800" b="1" i="0">
                 <a:solidFill>
                   <a:srgbClr val="1E2761"/>
                 </a:solidFill>
                 <a:latin typeface="Montserrat"/>
               </a:rPr>
-              <a:t>Volumen, detección y otros servicios</a:t>
-            </a:r>
-          </a:p>
-        </p:txBody>
-      </p:sp>
-      <p:sp>
-        <p:nvSpPr>
-          <p:cNvPr id="7" name="TextBox 6"/>
+              <a:t>Ventilación inadecuada: los números</a:t>
+            </a:r>
+          </a:p>
+        </p:txBody>
+      </p:sp>
+      <p:sp>
+        <p:nvSpPr>
+          <p:cNvPr id="7" name="Rounded Rectangle 6"/>
+          <p:cNvSpPr/>
+          <p:nvPr/>
+        </p:nvSpPr>
+        <p:spPr>
+          <a:xfrm>
+            <a:off x="868680" y="1627632"/>
+            <a:ext cx="2011680" cy="73152"/>
+          </a:xfrm>
+          <a:prstGeom prst="roundRect">
+            <a:avLst/>
+          </a:prstGeom>
+          <a:solidFill>
+            <a:srgbClr val="E8801A"/>
+          </a:solidFill>
+          <a:ln>
+            <a:noFill/>
+          </a:ln>
+          <a:effectLst/>
+        </p:spPr>
+        <p:style>
+          <a:lnRef idx="1">
+            <a:schemeClr val="accent1"/>
+          </a:lnRef>
+          <a:fillRef idx="3">
+            <a:schemeClr val="accent1"/>
+          </a:fillRef>
+          <a:effectRef idx="2">
+            <a:schemeClr val="accent1"/>
+          </a:effectRef>
+          <a:fontRef idx="minor">
+            <a:schemeClr val="lt1"/>
+          </a:fontRef>
+        </p:style>
+        <p:txBody>
+          <a:bodyPr rtlCol="0" anchor="ctr"/>
+          <a:lstStyle/>
+          <a:p>
+            <a:pPr algn="ctr"/>
+          </a:p>
+        </p:txBody>
+      </p:sp>
+      <p:sp>
+        <p:nvSpPr>
+          <p:cNvPr id="8" name="TextBox 7"/>
           <p:cNvSpPr txBox="1"/>
           <p:nvPr/>
         </p:nvSpPr>
         <p:spPr>
           <a:xfrm>
-            <a:off x="822960" y="1920240"/>
+            <a:off x="822960" y="1965960"/>
             <a:ext cx="4983480" cy="4206240"/>
           </a:xfrm>
           <a:prstGeom prst="rect">
@@ -8797,17 +9304,17 @@
           <a:p>
             <a:pPr>
               <a:spcAft>
-                <a:spcPts val="1000"/>
+                <a:spcPts val="1100"/>
               </a:spcAft>
             </a:pPr>
             <a:r>
               <a:rPr sz="1600" b="1" i="0">
                 <a:solidFill>
-                  <a:srgbClr val="2E3A80"/>
-                </a:solidFill>
-                <a:latin typeface="Montserrat"/>
-              </a:rPr>
-              <a:t>•  </a:t>
+                  <a:srgbClr val="E8801A"/>
+                </a:solidFill>
+                <a:latin typeface="Montserrat"/>
+              </a:rPr>
+              <a:t>▸  </a:t>
             </a:r>
             <a:r>
               <a:rPr sz="1600" b="0" i="0">
@@ -8816,23 +9323,23 @@
                 </a:solidFill>
                 <a:latin typeface="Montserrat"/>
               </a:rPr>
-              <a:t>Cocción &gt; 16 kW: volumen insuficiente</a:t>
+              <a:t>Falta o está obstruido el orificio</a:t>
             </a:r>
           </a:p>
           <a:p>
             <a:pPr>
               <a:spcAft>
-                <a:spcPts val="1000"/>
+                <a:spcPts val="1100"/>
               </a:spcAft>
             </a:pPr>
             <a:r>
               <a:rPr sz="1600" b="1" i="0">
                 <a:solidFill>
-                  <a:srgbClr val="2E3A80"/>
-                </a:solidFill>
-                <a:latin typeface="Montserrat"/>
-              </a:rPr>
-              <a:t>•  </a:t>
+                  <a:srgbClr val="E8801A"/>
+                </a:solidFill>
+                <a:latin typeface="Montserrat"/>
+              </a:rPr>
+              <a:t>▸  </a:t>
             </a:r>
             <a:r>
               <a:rPr sz="1600" b="0" i="0">
@@ -8841,23 +9348,23 @@
                 </a:solidFill>
                 <a:latin typeface="Montserrat"/>
               </a:rPr>
-              <a:t>Falta el sistema de detección y corte</a:t>
+              <a:t>Extractor: ≥ 80 cm² hasta 16 kW (tipo A)</a:t>
             </a:r>
           </a:p>
           <a:p>
             <a:pPr>
               <a:spcAft>
-                <a:spcPts val="1000"/>
+                <a:spcPts val="1100"/>
               </a:spcAft>
             </a:pPr>
             <a:r>
               <a:rPr sz="1600" b="1" i="0">
                 <a:solidFill>
-                  <a:srgbClr val="2E3A80"/>
-                </a:solidFill>
-                <a:latin typeface="Montserrat"/>
-              </a:rPr>
-              <a:t>•  </a:t>
+                  <a:srgbClr val="E8801A"/>
+                </a:solidFill>
+                <a:latin typeface="Montserrat"/>
+              </a:rPr>
+              <a:t>▸  </a:t>
             </a:r>
             <a:r>
               <a:rPr sz="1600" b="0" i="0">
@@ -8866,14 +9373,39 @@
                 </a:solidFill>
                 <a:latin typeface="Montserrat"/>
               </a:rPr>
-              <a:t>Otras conducciones en contacto con el gas</a:t>
-            </a:r>
-          </a:p>
-        </p:txBody>
-      </p:sp>
-      <p:sp>
-        <p:nvSpPr>
-          <p:cNvPr id="8" name="imgph" descr="IMGQ:gas detection safety device kitchen wall"/>
+              <a:t>≥ 100 cm² por encima de 16 kW</a:t>
+            </a:r>
+          </a:p>
+          <a:p>
+            <a:pPr>
+              <a:spcAft>
+                <a:spcPts val="1100"/>
+              </a:spcAft>
+            </a:pPr>
+            <a:r>
+              <a:rPr sz="1600" b="1" i="0">
+                <a:solidFill>
+                  <a:srgbClr val="E8801A"/>
+                </a:solidFill>
+                <a:latin typeface="Montserrat"/>
+              </a:rPr>
+              <a:t>▸  </a:t>
+            </a:r>
+            <a:r>
+              <a:rPr sz="1600" b="0" i="0">
+                <a:solidFill>
+                  <a:srgbClr val="1B2330"/>
+                </a:solidFill>
+                <a:latin typeface="Montserrat"/>
+              </a:rPr>
+              <a:t>Altura: ≥ 1,80 m o &lt; 0,40 m del techo</a:t>
+            </a:r>
+          </a:p>
+        </p:txBody>
+      </p:sp>
+      <p:sp>
+        <p:nvSpPr>
+          <p:cNvPr id="9" name="imgph" descr="IMGQ:kitchen ventilation grille air vent wall"/>
           <p:cNvSpPr/>
           <p:nvPr/>
         </p:nvSpPr>
@@ -8919,7 +9451,7 @@
       </p:sp>
       <p:sp>
         <p:nvSpPr>
-          <p:cNvPr id="9" name="TextBox 8"/>
+          <p:cNvPr id="10" name="TextBox 9"/>
           <p:cNvSpPr txBox="1"/>
           <p:nvPr/>
         </p:nvSpPr>
@@ -8959,7 +9491,7 @@
                 </a:solidFill>
                 <a:latin typeface="Montserrat"/>
               </a:rPr>
-              <a:t>gas detection safety device kitchen wall</a:t>
+              <a:t>kitchen ventilation grille air vent wall</a:t>
             </a:r>
           </a:p>
         </p:txBody>
@@ -9056,7 +9588,7 @@
                 </a:solidFill>
                 <a:latin typeface="Montserrat"/>
               </a:rPr>
-              <a:t>019 / 020</a:t>
+              <a:t>019 / 021</a:t>
             </a:r>
           </a:p>
         </p:txBody>
@@ -9104,7 +9636,7 @@
         <p:spPr>
           <a:xfrm>
             <a:off x="822960" y="457200"/>
-            <a:ext cx="8229600" cy="365760"/>
+            <a:ext cx="10058400" cy="365760"/>
           </a:xfrm>
           <a:prstGeom prst="rect">
             <a:avLst/>
@@ -9118,13 +9650,13 @@
           <a:lstStyle/>
           <a:p>
             <a:r>
-              <a:rPr sz="1200" b="1" i="0">
-                <a:solidFill>
-                  <a:srgbClr val="64748B"/>
-                </a:solidFill>
-                <a:latin typeface="Montserrat"/>
-              </a:rPr>
-              <a:t>PARTE 12 · EL PAPELEO</a:t>
+              <a:rPr sz="1300" b="1" i="0">
+                <a:solidFill>
+                  <a:srgbClr val="E8801A"/>
+                </a:solidFill>
+                <a:latin typeface="Montserrat"/>
+              </a:rPr>
+              <a:t>PARTE 12 · ISA-6, ISA-7, ISA-8</a:t>
             </a:r>
           </a:p>
         </p:txBody>
@@ -9152,26 +9684,70 @@
           <a:lstStyle/>
           <a:p>
             <a:r>
-              <a:rPr sz="2700" b="1" i="0">
+              <a:rPr sz="2800" b="1" i="0">
                 <a:solidFill>
                   <a:srgbClr val="1E2761"/>
                 </a:solidFill>
                 <a:latin typeface="Montserrat"/>
               </a:rPr>
-              <a:t>Quién firma y a quién avisas</a:t>
-            </a:r>
-          </a:p>
-        </p:txBody>
-      </p:sp>
-      <p:sp>
-        <p:nvSpPr>
-          <p:cNvPr id="7" name="TextBox 6"/>
+              <a:t>Volumen, detección y otros servicios</a:t>
+            </a:r>
+          </a:p>
+        </p:txBody>
+      </p:sp>
+      <p:sp>
+        <p:nvSpPr>
+          <p:cNvPr id="7" name="Rounded Rectangle 6"/>
+          <p:cNvSpPr/>
+          <p:nvPr/>
+        </p:nvSpPr>
+        <p:spPr>
+          <a:xfrm>
+            <a:off x="868680" y="1627632"/>
+            <a:ext cx="2011680" cy="73152"/>
+          </a:xfrm>
+          <a:prstGeom prst="roundRect">
+            <a:avLst/>
+          </a:prstGeom>
+          <a:solidFill>
+            <a:srgbClr val="E8801A"/>
+          </a:solidFill>
+          <a:ln>
+            <a:noFill/>
+          </a:ln>
+          <a:effectLst/>
+        </p:spPr>
+        <p:style>
+          <a:lnRef idx="1">
+            <a:schemeClr val="accent1"/>
+          </a:lnRef>
+          <a:fillRef idx="3">
+            <a:schemeClr val="accent1"/>
+          </a:fillRef>
+          <a:effectRef idx="2">
+            <a:schemeClr val="accent1"/>
+          </a:effectRef>
+          <a:fontRef idx="minor">
+            <a:schemeClr val="lt1"/>
+          </a:fontRef>
+        </p:style>
+        <p:txBody>
+          <a:bodyPr rtlCol="0" anchor="ctr"/>
+          <a:lstStyle/>
+          <a:p>
+            <a:pPr algn="ctr"/>
+          </a:p>
+        </p:txBody>
+      </p:sp>
+      <p:sp>
+        <p:nvSpPr>
+          <p:cNvPr id="8" name="TextBox 7"/>
           <p:cNvSpPr txBox="1"/>
           <p:nvPr/>
         </p:nvSpPr>
         <p:spPr>
           <a:xfrm>
-            <a:off x="822960" y="1920240"/>
+            <a:off x="822960" y="1965960"/>
             <a:ext cx="4983480" cy="4206240"/>
           </a:xfrm>
           <a:prstGeom prst="rect">
@@ -9187,17 +9763,17 @@
           <a:p>
             <a:pPr>
               <a:spcAft>
-                <a:spcPts val="1000"/>
+                <a:spcPts val="1100"/>
               </a:spcAft>
             </a:pPr>
             <a:r>
               <a:rPr sz="1600" b="1" i="0">
                 <a:solidFill>
-                  <a:srgbClr val="2E3A80"/>
-                </a:solidFill>
-                <a:latin typeface="Montserrat"/>
-              </a:rPr>
-              <a:t>•  </a:t>
+                  <a:srgbClr val="E8801A"/>
+                </a:solidFill>
+                <a:latin typeface="Montserrat"/>
+              </a:rPr>
+              <a:t>▸  </a:t>
             </a:r>
             <a:r>
               <a:rPr sz="1600" b="0" i="0">
@@ -9206,23 +9782,23 @@
                 </a:solidFill>
                 <a:latin typeface="Montserrat"/>
               </a:rPr>
-              <a:t>Lo hace la empresa habilitada</a:t>
+              <a:t>Cocción &gt; 16 kW: volumen insuficiente</a:t>
             </a:r>
           </a:p>
           <a:p>
             <a:pPr>
               <a:spcAft>
-                <a:spcPts val="1000"/>
+                <a:spcPts val="1100"/>
               </a:spcAft>
             </a:pPr>
             <a:r>
               <a:rPr sz="1600" b="1" i="0">
                 <a:solidFill>
-                  <a:srgbClr val="2E3A80"/>
-                </a:solidFill>
-                <a:latin typeface="Montserrat"/>
-              </a:rPr>
-              <a:t>•  </a:t>
+                  <a:srgbClr val="E8801A"/>
+                </a:solidFill>
+                <a:latin typeface="Montserrat"/>
+              </a:rPr>
+              <a:t>▸  </a:t>
             </a:r>
             <a:r>
               <a:rPr sz="1600" b="0" i="0">
@@ -9231,23 +9807,23 @@
                 </a:solidFill>
                 <a:latin typeface="Montserrat"/>
               </a:rPr>
-              <a:t>Certificado o informe al titular</a:t>
+              <a:t>Falta el sistema de detección y corte</a:t>
             </a:r>
           </a:p>
           <a:p>
             <a:pPr>
               <a:spcAft>
-                <a:spcPts val="1000"/>
+                <a:spcPts val="1100"/>
               </a:spcAft>
             </a:pPr>
             <a:r>
               <a:rPr sz="1600" b="1" i="0">
                 <a:solidFill>
-                  <a:srgbClr val="2E3A80"/>
-                </a:solidFill>
-                <a:latin typeface="Montserrat"/>
-              </a:rPr>
-              <a:t>•  </a:t>
+                  <a:srgbClr val="E8801A"/>
+                </a:solidFill>
+                <a:latin typeface="Montserrat"/>
+              </a:rPr>
+              <a:t>▸  </a:t>
             </a:r>
             <a:r>
               <a:rPr sz="1600" b="0" i="0">
@@ -9256,14 +9832,14 @@
                 </a:solidFill>
                 <a:latin typeface="Montserrat"/>
               </a:rPr>
-              <a:t>Principales o no apta: avisar a distribuidora</a:t>
-            </a:r>
-          </a:p>
-        </p:txBody>
-      </p:sp>
-      <p:sp>
-        <p:nvSpPr>
-          <p:cNvPr id="8" name="imgph" descr="IMGQ:gas installer signing inspection report"/>
+              <a:t>Otras conducciones en contacto con el gas</a:t>
+            </a:r>
+          </a:p>
+        </p:txBody>
+      </p:sp>
+      <p:sp>
+        <p:nvSpPr>
+          <p:cNvPr id="9" name="imgph" descr="IMGQ:gas detection safety device kitchen wall"/>
           <p:cNvSpPr/>
           <p:nvPr/>
         </p:nvSpPr>
@@ -9309,7 +9885,7 @@
       </p:sp>
       <p:sp>
         <p:nvSpPr>
-          <p:cNvPr id="9" name="TextBox 8"/>
+          <p:cNvPr id="10" name="TextBox 9"/>
           <p:cNvSpPr txBox="1"/>
           <p:nvPr/>
         </p:nvSpPr>
@@ -9349,7 +9925,7 @@
                 </a:solidFill>
                 <a:latin typeface="Montserrat"/>
               </a:rPr>
-              <a:t>gas installer signing inspection report</a:t>
+              <a:t>gas detection safety device kitchen wall</a:t>
             </a:r>
           </a:p>
         </p:txBody>
@@ -9446,7 +10022,7 @@
                 </a:solidFill>
                 <a:latin typeface="Montserrat"/>
               </a:rPr>
-              <a:t>002 / 020</a:t>
+              <a:t>002 / 021</a:t>
             </a:r>
           </a:p>
         </p:txBody>
@@ -9510,7 +10086,7 @@
             <a:r>
               <a:rPr sz="2700" b="1" i="0">
                 <a:solidFill>
-                  <a:srgbClr val="1E2761"/>
+                  <a:srgbClr val="E8801A"/>
                 </a:solidFill>
                 <a:latin typeface="Montserrat"/>
               </a:rPr>
@@ -9522,6 +10098,50 @@
       <p:sp>
         <p:nvSpPr>
           <p:cNvPr id="6" name="Rounded Rectangle 5"/>
+          <p:cNvSpPr/>
+          <p:nvPr/>
+        </p:nvSpPr>
+        <p:spPr>
+          <a:xfrm>
+            <a:off x="868680" y="1234440"/>
+            <a:ext cx="1463040" cy="73152"/>
+          </a:xfrm>
+          <a:prstGeom prst="roundRect">
+            <a:avLst/>
+          </a:prstGeom>
+          <a:solidFill>
+            <a:srgbClr val="1E2761"/>
+          </a:solidFill>
+          <a:ln>
+            <a:noFill/>
+          </a:ln>
+          <a:effectLst/>
+        </p:spPr>
+        <p:style>
+          <a:lnRef idx="1">
+            <a:schemeClr val="accent1"/>
+          </a:lnRef>
+          <a:fillRef idx="3">
+            <a:schemeClr val="accent1"/>
+          </a:fillRef>
+          <a:effectRef idx="2">
+            <a:schemeClr val="accent1"/>
+          </a:effectRef>
+          <a:fontRef idx="minor">
+            <a:schemeClr val="lt1"/>
+          </a:fontRef>
+        </p:style>
+        <p:txBody>
+          <a:bodyPr rtlCol="0" anchor="ctr"/>
+          <a:lstStyle/>
+          <a:p>
+            <a:pPr algn="ctr"/>
+          </a:p>
+        </p:txBody>
+      </p:sp>
+      <p:sp>
+        <p:nvSpPr>
+          <p:cNvPr id="7" name="Rounded Rectangle 6"/>
           <p:cNvSpPr/>
           <p:nvPr/>
         </p:nvSpPr>
@@ -9567,7 +10187,7 @@
       </p:sp>
       <p:sp>
         <p:nvSpPr>
-          <p:cNvPr id="7" name="TextBox 6"/>
+          <p:cNvPr id="8" name="TextBox 7"/>
           <p:cNvSpPr txBox="1"/>
           <p:nvPr/>
         </p:nvSpPr>
@@ -9602,7 +10222,7 @@
       </p:sp>
       <p:sp>
         <p:nvSpPr>
-          <p:cNvPr id="8" name="TextBox 7"/>
+          <p:cNvPr id="9" name="TextBox 8"/>
           <p:cNvSpPr txBox="1"/>
           <p:nvPr/>
         </p:nvSpPr>
@@ -9637,7 +10257,7 @@
       </p:sp>
       <p:sp>
         <p:nvSpPr>
-          <p:cNvPr id="9" name="Rounded Rectangle 8"/>
+          <p:cNvPr id="10" name="Rounded Rectangle 9"/>
           <p:cNvSpPr/>
           <p:nvPr/>
         </p:nvSpPr>
@@ -9683,7 +10303,7 @@
       </p:sp>
       <p:sp>
         <p:nvSpPr>
-          <p:cNvPr id="10" name="TextBox 9"/>
+          <p:cNvPr id="11" name="TextBox 10"/>
           <p:cNvSpPr txBox="1"/>
           <p:nvPr/>
         </p:nvSpPr>
@@ -9718,7 +10338,7 @@
       </p:sp>
       <p:sp>
         <p:nvSpPr>
-          <p:cNvPr id="11" name="TextBox 10"/>
+          <p:cNvPr id="12" name="TextBox 11"/>
           <p:cNvSpPr txBox="1"/>
           <p:nvPr/>
         </p:nvSpPr>
@@ -9753,7 +10373,7 @@
       </p:sp>
       <p:sp>
         <p:nvSpPr>
-          <p:cNvPr id="12" name="Rounded Rectangle 11"/>
+          <p:cNvPr id="13" name="Rounded Rectangle 12"/>
           <p:cNvSpPr/>
           <p:nvPr/>
         </p:nvSpPr>
@@ -9799,7 +10419,7 @@
       </p:sp>
       <p:sp>
         <p:nvSpPr>
-          <p:cNvPr id="13" name="TextBox 12"/>
+          <p:cNvPr id="14" name="TextBox 13"/>
           <p:cNvSpPr txBox="1"/>
           <p:nvPr/>
         </p:nvSpPr>
@@ -9834,7 +10454,7 @@
       </p:sp>
       <p:sp>
         <p:nvSpPr>
-          <p:cNvPr id="14" name="TextBox 13"/>
+          <p:cNvPr id="15" name="TextBox 14"/>
           <p:cNvSpPr txBox="1"/>
           <p:nvPr/>
         </p:nvSpPr>
@@ -9900,6 +10520,440 @@
             <a:avLst/>
           </a:prstGeom>
           <a:solidFill>
+            <a:srgbClr val="FFFFFF"/>
+          </a:solidFill>
+          <a:ln>
+            <a:noFill/>
+          </a:ln>
+          <a:effectLst/>
+        </p:spPr>
+        <p:style>
+          <a:lnRef idx="1">
+            <a:schemeClr val="accent1"/>
+          </a:lnRef>
+          <a:fillRef idx="3">
+            <a:schemeClr val="accent1"/>
+          </a:fillRef>
+          <a:effectRef idx="2">
+            <a:schemeClr val="accent1"/>
+          </a:effectRef>
+          <a:fontRef idx="minor">
+            <a:schemeClr val="lt1"/>
+          </a:fontRef>
+        </p:style>
+        <p:txBody>
+          <a:bodyPr rtlCol="0" anchor="ctr"/>
+          <a:lstStyle/>
+          <a:p>
+            <a:pPr algn="ctr"/>
+          </a:p>
+        </p:txBody>
+      </p:sp>
+      <p:sp>
+        <p:nvSpPr>
+          <p:cNvPr id="3" name="TextBox 2"/>
+          <p:cNvSpPr txBox="1"/>
+          <p:nvPr/>
+        </p:nvSpPr>
+        <p:spPr>
+          <a:xfrm>
+            <a:off x="10607040" y="320040"/>
+            <a:ext cx="1371600" cy="365760"/>
+          </a:xfrm>
+          <a:prstGeom prst="rect">
+            <a:avLst/>
+          </a:prstGeom>
+          <a:noFill/>
+        </p:spPr>
+        <p:txBody>
+          <a:bodyPr wrap="square">
+            <a:spAutoFit/>
+          </a:bodyPr>
+          <a:lstStyle/>
+          <a:p>
+            <a:pPr algn="r"/>
+            <a:r>
+              <a:rPr sz="1000" b="1" i="0">
+                <a:solidFill>
+                  <a:srgbClr val="64748B"/>
+                </a:solidFill>
+                <a:latin typeface="Montserrat"/>
+              </a:rPr>
+              <a:t>020 / 021</a:t>
+            </a:r>
+          </a:p>
+        </p:txBody>
+      </p:sp>
+      <p:sp>
+        <p:nvSpPr>
+          <p:cNvPr id="4" name="TextBox 3"/>
+          <p:cNvSpPr txBox="1"/>
+          <p:nvPr/>
+        </p:nvSpPr>
+        <p:spPr>
+          <a:xfrm>
+            <a:off x="457200" y="6419088"/>
+            <a:ext cx="8229600" cy="365760"/>
+          </a:xfrm>
+          <a:prstGeom prst="rect">
+            <a:avLst/>
+          </a:prstGeom>
+          <a:noFill/>
+        </p:spPr>
+        <p:txBody>
+          <a:bodyPr wrap="square">
+            <a:spAutoFit/>
+          </a:bodyPr>
+          <a:lstStyle/>
+          <a:p>
+            <a:r>
+              <a:rPr sz="900" b="0" i="0">
+                <a:solidFill>
+                  <a:srgbClr val="64748B"/>
+                </a:solidFill>
+                <a:latin typeface="Montserrat"/>
+              </a:rPr>
+              <a:t>Curso Gas B · Tema 16 · UNE 60670-11/12/13</a:t>
+            </a:r>
+          </a:p>
+        </p:txBody>
+      </p:sp>
+      <p:sp>
+        <p:nvSpPr>
+          <p:cNvPr id="5" name="TextBox 4"/>
+          <p:cNvSpPr txBox="1"/>
+          <p:nvPr/>
+        </p:nvSpPr>
+        <p:spPr>
+          <a:xfrm>
+            <a:off x="822960" y="457200"/>
+            <a:ext cx="10058400" cy="365760"/>
+          </a:xfrm>
+          <a:prstGeom prst="rect">
+            <a:avLst/>
+          </a:prstGeom>
+          <a:noFill/>
+        </p:spPr>
+        <p:txBody>
+          <a:bodyPr wrap="square">
+            <a:spAutoFit/>
+          </a:bodyPr>
+          <a:lstStyle/>
+          <a:p>
+            <a:r>
+              <a:rPr sz="1300" b="1" i="0">
+                <a:solidFill>
+                  <a:srgbClr val="E8801A"/>
+                </a:solidFill>
+                <a:latin typeface="Montserrat"/>
+              </a:rPr>
+              <a:t>PARTE 12 · EL PAPELEO</a:t>
+            </a:r>
+          </a:p>
+        </p:txBody>
+      </p:sp>
+      <p:sp>
+        <p:nvSpPr>
+          <p:cNvPr id="6" name="TextBox 5"/>
+          <p:cNvSpPr txBox="1"/>
+          <p:nvPr/>
+        </p:nvSpPr>
+        <p:spPr>
+          <a:xfrm>
+            <a:off x="822960" y="868680"/>
+            <a:ext cx="10515600" cy="914400"/>
+          </a:xfrm>
+          <a:prstGeom prst="rect">
+            <a:avLst/>
+          </a:prstGeom>
+          <a:noFill/>
+        </p:spPr>
+        <p:txBody>
+          <a:bodyPr wrap="square">
+            <a:spAutoFit/>
+          </a:bodyPr>
+          <a:lstStyle/>
+          <a:p>
+            <a:r>
+              <a:rPr sz="2800" b="1" i="0">
+                <a:solidFill>
+                  <a:srgbClr val="1E2761"/>
+                </a:solidFill>
+                <a:latin typeface="Montserrat"/>
+              </a:rPr>
+              <a:t>Quién firma y a quién avisas</a:t>
+            </a:r>
+          </a:p>
+        </p:txBody>
+      </p:sp>
+      <p:sp>
+        <p:nvSpPr>
+          <p:cNvPr id="7" name="Rounded Rectangle 6"/>
+          <p:cNvSpPr/>
+          <p:nvPr/>
+        </p:nvSpPr>
+        <p:spPr>
+          <a:xfrm>
+            <a:off x="868680" y="1627632"/>
+            <a:ext cx="2011680" cy="73152"/>
+          </a:xfrm>
+          <a:prstGeom prst="roundRect">
+            <a:avLst/>
+          </a:prstGeom>
+          <a:solidFill>
+            <a:srgbClr val="E8801A"/>
+          </a:solidFill>
+          <a:ln>
+            <a:noFill/>
+          </a:ln>
+          <a:effectLst/>
+        </p:spPr>
+        <p:style>
+          <a:lnRef idx="1">
+            <a:schemeClr val="accent1"/>
+          </a:lnRef>
+          <a:fillRef idx="3">
+            <a:schemeClr val="accent1"/>
+          </a:fillRef>
+          <a:effectRef idx="2">
+            <a:schemeClr val="accent1"/>
+          </a:effectRef>
+          <a:fontRef idx="minor">
+            <a:schemeClr val="lt1"/>
+          </a:fontRef>
+        </p:style>
+        <p:txBody>
+          <a:bodyPr rtlCol="0" anchor="ctr"/>
+          <a:lstStyle/>
+          <a:p>
+            <a:pPr algn="ctr"/>
+          </a:p>
+        </p:txBody>
+      </p:sp>
+      <p:sp>
+        <p:nvSpPr>
+          <p:cNvPr id="8" name="TextBox 7"/>
+          <p:cNvSpPr txBox="1"/>
+          <p:nvPr/>
+        </p:nvSpPr>
+        <p:spPr>
+          <a:xfrm>
+            <a:off x="822960" y="1965960"/>
+            <a:ext cx="4983480" cy="4206240"/>
+          </a:xfrm>
+          <a:prstGeom prst="rect">
+            <a:avLst/>
+          </a:prstGeom>
+          <a:noFill/>
+        </p:spPr>
+        <p:txBody>
+          <a:bodyPr wrap="square">
+            <a:spAutoFit/>
+          </a:bodyPr>
+          <a:lstStyle/>
+          <a:p>
+            <a:pPr>
+              <a:spcAft>
+                <a:spcPts val="1100"/>
+              </a:spcAft>
+            </a:pPr>
+            <a:r>
+              <a:rPr sz="1600" b="1" i="0">
+                <a:solidFill>
+                  <a:srgbClr val="E8801A"/>
+                </a:solidFill>
+                <a:latin typeface="Montserrat"/>
+              </a:rPr>
+              <a:t>▸  </a:t>
+            </a:r>
+            <a:r>
+              <a:rPr sz="1600" b="0" i="0">
+                <a:solidFill>
+                  <a:srgbClr val="1B2330"/>
+                </a:solidFill>
+                <a:latin typeface="Montserrat"/>
+              </a:rPr>
+              <a:t>Lo hace la empresa habilitada</a:t>
+            </a:r>
+          </a:p>
+          <a:p>
+            <a:pPr>
+              <a:spcAft>
+                <a:spcPts val="1100"/>
+              </a:spcAft>
+            </a:pPr>
+            <a:r>
+              <a:rPr sz="1600" b="1" i="0">
+                <a:solidFill>
+                  <a:srgbClr val="E8801A"/>
+                </a:solidFill>
+                <a:latin typeface="Montserrat"/>
+              </a:rPr>
+              <a:t>▸  </a:t>
+            </a:r>
+            <a:r>
+              <a:rPr sz="1600" b="0" i="0">
+                <a:solidFill>
+                  <a:srgbClr val="1B2330"/>
+                </a:solidFill>
+                <a:latin typeface="Montserrat"/>
+              </a:rPr>
+              <a:t>Certificado o informe al titular</a:t>
+            </a:r>
+          </a:p>
+          <a:p>
+            <a:pPr>
+              <a:spcAft>
+                <a:spcPts val="1100"/>
+              </a:spcAft>
+            </a:pPr>
+            <a:r>
+              <a:rPr sz="1600" b="1" i="0">
+                <a:solidFill>
+                  <a:srgbClr val="E8801A"/>
+                </a:solidFill>
+                <a:latin typeface="Montserrat"/>
+              </a:rPr>
+              <a:t>▸  </a:t>
+            </a:r>
+            <a:r>
+              <a:rPr sz="1600" b="0" i="0">
+                <a:solidFill>
+                  <a:srgbClr val="1B2330"/>
+                </a:solidFill>
+                <a:latin typeface="Montserrat"/>
+              </a:rPr>
+              <a:t>Principales o no apta: avisar a distribuidora</a:t>
+            </a:r>
+          </a:p>
+        </p:txBody>
+      </p:sp>
+      <p:sp>
+        <p:nvSpPr>
+          <p:cNvPr id="9" name="imgph" descr="IMGQ:gas installer signing inspection report"/>
+          <p:cNvSpPr/>
+          <p:nvPr/>
+        </p:nvSpPr>
+        <p:spPr>
+          <a:xfrm>
+            <a:off x="5806440" y="1051560"/>
+            <a:ext cx="5298947" cy="4629150"/>
+          </a:xfrm>
+          <a:prstGeom prst="roundRect">
+            <a:avLst/>
+          </a:prstGeom>
+          <a:solidFill>
+            <a:srgbClr val="F3F6FB"/>
+          </a:solidFill>
+          <a:ln w="12700">
+            <a:solidFill>
+              <a:srgbClr val="C7D2E6"/>
+            </a:solidFill>
+          </a:ln>
+          <a:effectLst/>
+        </p:spPr>
+        <p:style>
+          <a:lnRef idx="1">
+            <a:schemeClr val="accent1"/>
+          </a:lnRef>
+          <a:fillRef idx="3">
+            <a:schemeClr val="accent1"/>
+          </a:fillRef>
+          <a:effectRef idx="2">
+            <a:schemeClr val="accent1"/>
+          </a:effectRef>
+          <a:fontRef idx="minor">
+            <a:schemeClr val="lt1"/>
+          </a:fontRef>
+        </p:style>
+        <p:txBody>
+          <a:bodyPr rtlCol="0" anchor="ctr"/>
+          <a:lstStyle/>
+          <a:p>
+            <a:pPr algn="ctr"/>
+          </a:p>
+        </p:txBody>
+      </p:sp>
+      <p:sp>
+        <p:nvSpPr>
+          <p:cNvPr id="10" name="TextBox 9"/>
+          <p:cNvSpPr txBox="1"/>
+          <p:nvPr/>
+        </p:nvSpPr>
+        <p:spPr>
+          <a:xfrm>
+            <a:off x="6080760" y="2726055"/>
+            <a:ext cx="4750307" cy="1280160"/>
+          </a:xfrm>
+          <a:prstGeom prst="rect">
+            <a:avLst/>
+          </a:prstGeom>
+          <a:noFill/>
+        </p:spPr>
+        <p:txBody>
+          <a:bodyPr wrap="square">
+            <a:spAutoFit/>
+          </a:bodyPr>
+          <a:lstStyle/>
+          <a:p>
+            <a:pPr algn="ctr"/>
+            <a:r>
+              <a:rPr sz="1400" b="1" i="0">
+                <a:solidFill>
+                  <a:srgbClr val="64748B"/>
+                </a:solidFill>
+                <a:latin typeface="Montserrat"/>
+              </a:rPr>
+              <a:t>IMAGEN REALISTA</a:t>
+            </a:r>
+          </a:p>
+          <a:p>
+            <a:pPr algn="ctr"/>
+            <a:r>
+              <a:rPr sz="1100" b="0" i="1">
+                <a:solidFill>
+                  <a:srgbClr val="64748B"/>
+                </a:solidFill>
+                <a:latin typeface="Montserrat"/>
+              </a:rPr>
+              <a:t>gas installer signing inspection report</a:t>
+            </a:r>
+          </a:p>
+        </p:txBody>
+      </p:sp>
+    </p:spTree>
+  </p:cSld>
+  <p:clrMapOvr>
+    <a:masterClrMapping/>
+  </p:clrMapOvr>
+</p:sld>
+</file>
+
+<file path=ppt/slides/slide21.xml><?xml version="1.0" encoding="utf-8"?>
+<p:sld xmlns:a="http://schemas.openxmlformats.org/drawingml/2006/main" xmlns:p="http://schemas.openxmlformats.org/presentationml/2006/main" xmlns:r="http://schemas.openxmlformats.org/officeDocument/2006/relationships">
+  <p:cSld>
+    <p:spTree>
+      <p:nvGrpSpPr>
+        <p:cNvPr id="1" name=""/>
+        <p:cNvGrpSpPr/>
+        <p:nvPr/>
+      </p:nvGrpSpPr>
+      <p:grpSpPr/>
+      <p:sp>
+        <p:nvSpPr>
+          <p:cNvPr id="2" name="Rectangle 1"/>
+          <p:cNvSpPr/>
+          <p:nvPr/>
+        </p:nvSpPr>
+        <p:spPr>
+          <a:xfrm>
+            <a:off x="0" y="0"/>
+            <a:ext cx="12191695" cy="6858000"/>
+          </a:xfrm>
+          <a:prstGeom prst="rect">
+            <a:avLst/>
+          </a:prstGeom>
+          <a:solidFill>
             <a:srgbClr val="1E2761"/>
           </a:solidFill>
           <a:ln>
@@ -9954,7 +11008,7 @@
             <a:r>
               <a:rPr sz="1400" b="1" i="0">
                 <a:solidFill>
-                  <a:srgbClr val="CADCFC"/>
+                  <a:srgbClr val="F4A24C"/>
                 </a:solidFill>
                 <a:latin typeface="Montserrat"/>
               </a:rPr>
@@ -9965,13 +11019,57 @@
       </p:sp>
       <p:sp>
         <p:nvSpPr>
-          <p:cNvPr id="4" name="TextBox 3"/>
+          <p:cNvPr id="4" name="Rounded Rectangle 3"/>
+          <p:cNvSpPr/>
+          <p:nvPr/>
+        </p:nvSpPr>
+        <p:spPr>
+          <a:xfrm>
+            <a:off x="868680" y="1051560"/>
+            <a:ext cx="1463040" cy="82296"/>
+          </a:xfrm>
+          <a:prstGeom prst="roundRect">
+            <a:avLst/>
+          </a:prstGeom>
+          <a:solidFill>
+            <a:srgbClr val="E8801A"/>
+          </a:solidFill>
+          <a:ln>
+            <a:noFill/>
+          </a:ln>
+          <a:effectLst/>
+        </p:spPr>
+        <p:style>
+          <a:lnRef idx="1">
+            <a:schemeClr val="accent1"/>
+          </a:lnRef>
+          <a:fillRef idx="3">
+            <a:schemeClr val="accent1"/>
+          </a:fillRef>
+          <a:effectRef idx="2">
+            <a:schemeClr val="accent1"/>
+          </a:effectRef>
+          <a:fontRef idx="minor">
+            <a:schemeClr val="lt1"/>
+          </a:fontRef>
+        </p:style>
+        <p:txBody>
+          <a:bodyPr rtlCol="0" anchor="ctr"/>
+          <a:lstStyle/>
+          <a:p>
+            <a:pPr algn="ctr"/>
+          </a:p>
+        </p:txBody>
+      </p:sp>
+      <p:sp>
+        <p:nvSpPr>
+          <p:cNvPr id="5" name="TextBox 4"/>
           <p:cNvSpPr txBox="1"/>
           <p:nvPr/>
         </p:nvSpPr>
         <p:spPr>
           <a:xfrm>
-            <a:off x="822960" y="1143000"/>
+            <a:off x="822960" y="1234440"/>
             <a:ext cx="10515600" cy="1097280"/>
           </a:xfrm>
           <a:prstGeom prst="rect">
@@ -9999,14 +11097,14 @@
       </p:sp>
       <p:sp>
         <p:nvSpPr>
-          <p:cNvPr id="5" name="TextBox 4"/>
+          <p:cNvPr id="6" name="TextBox 5"/>
           <p:cNvSpPr txBox="1"/>
           <p:nvPr/>
         </p:nvSpPr>
         <p:spPr>
           <a:xfrm>
-            <a:off x="822960" y="2514600"/>
-            <a:ext cx="10515600" cy="2834640"/>
+            <a:off x="822960" y="2606040"/>
+            <a:ext cx="10515600" cy="2743200"/>
           </a:xfrm>
           <a:prstGeom prst="rect">
             <a:avLst/>
@@ -10027,7 +11125,7 @@
             <a:r>
               <a:rPr sz="2000" b="1" i="0">
                 <a:solidFill>
-                  <a:srgbClr val="CADCFC"/>
+                  <a:srgbClr val="F4A24C"/>
                 </a:solidFill>
                 <a:latin typeface="Montserrat"/>
               </a:rPr>
@@ -10052,7 +11150,7 @@
             <a:r>
               <a:rPr sz="2000" b="1" i="0">
                 <a:solidFill>
-                  <a:srgbClr val="CADCFC"/>
+                  <a:srgbClr val="F4A24C"/>
                 </a:solidFill>
                 <a:latin typeface="Montserrat"/>
               </a:rPr>
@@ -10077,7 +11175,7 @@
             <a:r>
               <a:rPr sz="2000" b="1" i="0">
                 <a:solidFill>
-                  <a:srgbClr val="CADCFC"/>
+                  <a:srgbClr val="F4A24C"/>
                 </a:solidFill>
                 <a:latin typeface="Montserrat"/>
               </a:rPr>
@@ -10102,7 +11200,7 @@
             <a:r>
               <a:rPr sz="2000" b="1" i="0">
                 <a:solidFill>
-                  <a:srgbClr val="CADCFC"/>
+                  <a:srgbClr val="F4A24C"/>
                 </a:solidFill>
                 <a:latin typeface="Montserrat"/>
               </a:rPr>
@@ -10122,20 +11220,20 @@
       </p:sp>
       <p:sp>
         <p:nvSpPr>
-          <p:cNvPr id="6" name="Rounded Rectangle 5"/>
+          <p:cNvPr id="7" name="Rounded Rectangle 6"/>
           <p:cNvSpPr/>
           <p:nvPr/>
         </p:nvSpPr>
         <p:spPr>
           <a:xfrm>
             <a:off x="822960" y="5532120"/>
-            <a:ext cx="10515600" cy="777240"/>
+            <a:ext cx="10515600" cy="822960"/>
           </a:xfrm>
           <a:prstGeom prst="roundRect">
             <a:avLst/>
           </a:prstGeom>
           <a:solidFill>
-            <a:srgbClr val="2E3A80"/>
+            <a:srgbClr val="E8801A"/>
           </a:solidFill>
           <a:ln>
             <a:noFill/>
@@ -10166,13 +11264,13 @@
       </p:sp>
       <p:sp>
         <p:nvSpPr>
-          <p:cNvPr id="7" name="TextBox 6"/>
+          <p:cNvPr id="8" name="TextBox 7"/>
           <p:cNvSpPr txBox="1"/>
           <p:nvPr/>
         </p:nvSpPr>
         <p:spPr>
           <a:xfrm>
-            <a:off x="1051560" y="5605272"/>
+            <a:off x="1051560" y="5623560"/>
             <a:ext cx="10058400" cy="640080"/>
           </a:xfrm>
           <a:prstGeom prst="rect">
@@ -10189,7 +11287,7 @@
             <a:r>
               <a:rPr sz="1500" b="1" i="1">
                 <a:solidFill>
-                  <a:srgbClr val="CADCFC"/>
+                  <a:srgbClr val="1E2761"/>
                 </a:solidFill>
                 <a:latin typeface="Montserrat"/>
               </a:rPr>
@@ -10290,7 +11388,7 @@
                 </a:solidFill>
                 <a:latin typeface="Montserrat"/>
               </a:rPr>
-              <a:t>003 / 020</a:t>
+              <a:t>003 / 021</a:t>
             </a:r>
           </a:p>
         </p:txBody>
@@ -10337,7 +11435,7 @@
         </p:nvSpPr>
         <p:spPr>
           <a:xfrm>
-            <a:off x="822960" y="457200"/>
+            <a:off x="822960" y="502920"/>
             <a:ext cx="8229600" cy="365760"/>
           </a:xfrm>
           <a:prstGeom prst="rect">
@@ -10352,13 +11450,13 @@
           <a:lstStyle/>
           <a:p>
             <a:r>
-              <a:rPr sz="1200" b="1" i="0">
-                <a:solidFill>
-                  <a:srgbClr val="64748B"/>
-                </a:solidFill>
-                <a:latin typeface="Montserrat"/>
-              </a:rPr>
-              <a:t>PARTE 12 · APARTADO 1</a:t>
+              <a:rPr sz="1300" b="1" i="0">
+                <a:solidFill>
+                  <a:srgbClr val="E8801A"/>
+                </a:solidFill>
+                <a:latin typeface="Montserrat"/>
+              </a:rPr>
+              <a:t>PARTES DE ESTE VÍDEO</a:t>
             </a:r>
           </a:p>
         </p:txBody>
@@ -10371,7 +11469,7 @@
         </p:nvSpPr>
         <p:spPr>
           <a:xfrm>
-            <a:off x="822960" y="868680"/>
+            <a:off x="822960" y="914400"/>
             <a:ext cx="10515600" cy="914400"/>
           </a:xfrm>
           <a:prstGeom prst="rect">
@@ -10392,130 +11490,30 @@
                 </a:solidFill>
                 <a:latin typeface="Montserrat"/>
               </a:rPr>
-              <a:t>Qué regula la Parte 12</a:t>
-            </a:r>
-          </a:p>
-        </p:txBody>
-      </p:sp>
-      <p:sp>
-        <p:nvSpPr>
-          <p:cNvPr id="7" name="TextBox 6"/>
-          <p:cNvSpPr txBox="1"/>
-          <p:nvPr/>
-        </p:nvSpPr>
-        <p:spPr>
-          <a:xfrm>
-            <a:off x="822960" y="1920240"/>
-            <a:ext cx="4983480" cy="4206240"/>
-          </a:xfrm>
-          <a:prstGeom prst="rect">
-            <a:avLst/>
-          </a:prstGeom>
-          <a:noFill/>
-        </p:spPr>
-        <p:txBody>
-          <a:bodyPr wrap="square">
-            <a:spAutoFit/>
-          </a:bodyPr>
-          <a:lstStyle/>
-          <a:p>
-            <a:pPr>
-              <a:spcAft>
-                <a:spcPts val="1000"/>
-              </a:spcAft>
-            </a:pPr>
-            <a:r>
-              <a:rPr sz="1600" b="1" i="0">
-                <a:solidFill>
-                  <a:srgbClr val="2E3A80"/>
-                </a:solidFill>
-                <a:latin typeface="Montserrat"/>
-              </a:rPr>
-              <a:t>•  </a:t>
-            </a:r>
-            <a:r>
-              <a:rPr sz="1600" b="0" i="0">
-                <a:solidFill>
-                  <a:srgbClr val="1B2330"/>
-                </a:solidFill>
-                <a:latin typeface="Montserrat"/>
-              </a:rPr>
-              <a:t>Control periódico de instalaciones en servicio</a:t>
-            </a:r>
-          </a:p>
-          <a:p>
-            <a:pPr>
-              <a:spcAft>
-                <a:spcPts val="1000"/>
-              </a:spcAft>
-            </a:pPr>
-            <a:r>
-              <a:rPr sz="1600" b="1" i="0">
-                <a:solidFill>
-                  <a:srgbClr val="2E3A80"/>
-                </a:solidFill>
-                <a:latin typeface="Montserrat"/>
-              </a:rPr>
-              <a:t>•  </a:t>
-            </a:r>
-            <a:r>
-              <a:rPr sz="1600" b="0" i="0">
-                <a:solidFill>
-                  <a:srgbClr val="1B2330"/>
-                </a:solidFill>
-                <a:latin typeface="Montserrat"/>
-              </a:rPr>
-              <a:t>Criterios técnicos básicos</a:t>
-            </a:r>
-          </a:p>
-          <a:p>
-            <a:pPr>
-              <a:spcAft>
-                <a:spcPts val="1000"/>
-              </a:spcAft>
-            </a:pPr>
-            <a:r>
-              <a:rPr sz="1600" b="1" i="0">
-                <a:solidFill>
-                  <a:srgbClr val="2E3A80"/>
-                </a:solidFill>
-                <a:latin typeface="Montserrat"/>
-              </a:rPr>
-              <a:t>•  </a:t>
-            </a:r>
-            <a:r>
-              <a:rPr sz="1600" b="0" i="0">
-                <a:solidFill>
-                  <a:srgbClr val="1B2330"/>
-                </a:solidFill>
-                <a:latin typeface="Montserrat"/>
-              </a:rPr>
-              <a:t>MOP igual o menor de 5 bar</a:t>
-            </a:r>
-          </a:p>
-        </p:txBody>
-      </p:sp>
-      <p:sp>
-        <p:nvSpPr>
-          <p:cNvPr id="8" name="imgph" descr="IMGQ:gas installation periodic inspection technician"/>
+              <a:t>En este vídeo</a:t>
+            </a:r>
+          </a:p>
+        </p:txBody>
+      </p:sp>
+      <p:sp>
+        <p:nvSpPr>
+          <p:cNvPr id="7" name="Rounded Rectangle 6"/>
           <p:cNvSpPr/>
           <p:nvPr/>
         </p:nvSpPr>
         <p:spPr>
           <a:xfrm>
-            <a:off x="5806440" y="1051560"/>
-            <a:ext cx="5298947" cy="4629150"/>
+            <a:off x="868680" y="1673352"/>
+            <a:ext cx="2011680" cy="73152"/>
           </a:xfrm>
           <a:prstGeom prst="roundRect">
             <a:avLst/>
           </a:prstGeom>
           <a:solidFill>
-            <a:srgbClr val="F3F6FB"/>
+            <a:srgbClr val="E8801A"/>
           </a:solidFill>
-          <a:ln w="12700">
-            <a:solidFill>
-              <a:srgbClr val="C7D2E6"/>
-            </a:solidFill>
+          <a:ln>
+            <a:noFill/>
           </a:ln>
           <a:effectLst/>
         </p:spPr>
@@ -10543,14 +11541,14 @@
       </p:sp>
       <p:sp>
         <p:nvSpPr>
-          <p:cNvPr id="9" name="TextBox 8"/>
+          <p:cNvPr id="8" name="TextBox 7"/>
           <p:cNvSpPr txBox="1"/>
           <p:nvPr/>
         </p:nvSpPr>
         <p:spPr>
           <a:xfrm>
-            <a:off x="6080760" y="2726055"/>
-            <a:ext cx="4750307" cy="1280160"/>
+            <a:off x="822960" y="2103120"/>
+            <a:ext cx="10515600" cy="4023360"/>
           </a:xfrm>
           <a:prstGeom prst="rect">
             <a:avLst/>
@@ -10563,27 +11561,53 @@
           </a:bodyPr>
           <a:lstStyle/>
           <a:p>
-            <a:pPr algn="ctr"/>
-            <a:r>
-              <a:rPr sz="1400" b="1" i="0">
-                <a:solidFill>
-                  <a:srgbClr val="64748B"/>
-                </a:solidFill>
-                <a:latin typeface="Montserrat"/>
-              </a:rPr>
-              <a:t>IMAGEN REALISTA</a:t>
-            </a:r>
-          </a:p>
-          <a:p>
-            <a:pPr algn="ctr"/>
-            <a:r>
-              <a:rPr sz="1100" b="0" i="1">
-                <a:solidFill>
-                  <a:srgbClr val="64748B"/>
-                </a:solidFill>
-                <a:latin typeface="Montserrat"/>
-              </a:rPr>
-              <a:t>gas installation periodic inspection technician</a:t>
+            <a:pPr>
+              <a:spcAft>
+                <a:spcPts val="900"/>
+              </a:spcAft>
+            </a:pPr>
+            <a:r>
+              <a:rPr sz="1800" b="1" i="0">
+                <a:solidFill>
+                  <a:srgbClr val="E8801A"/>
+                </a:solidFill>
+                <a:latin typeface="Montserrat"/>
+              </a:rPr>
+              <a:t>01   </a:t>
+            </a:r>
+            <a:r>
+              <a:rPr sz="1700" b="0" i="0">
+                <a:solidFill>
+                  <a:srgbClr val="1B2330"/>
+                </a:solidFill>
+                <a:latin typeface="Montserrat"/>
+              </a:rPr>
+              <a:t>Parte 12</a:t>
+            </a:r>
+          </a:p>
+          <a:p>
+            <a:pPr>
+              <a:spcAft>
+                <a:spcPts val="900"/>
+              </a:spcAft>
+            </a:pPr>
+            <a:r>
+              <a:rPr sz="1800" b="1" i="0">
+                <a:solidFill>
+                  <a:srgbClr val="E8801A"/>
+                </a:solidFill>
+                <a:latin typeface="Montserrat"/>
+              </a:rPr>
+              <a:t>02   </a:t>
+            </a:r>
+            <a:r>
+              <a:rPr sz="1700" b="0" i="0">
+                <a:solidFill>
+                  <a:srgbClr val="1B2330"/>
+                </a:solidFill>
+                <a:latin typeface="Montserrat"/>
+              </a:rPr>
+              <a:t>Repaso clave</a:t>
             </a:r>
           </a:p>
         </p:txBody>
@@ -10680,7 +11704,7 @@
                 </a:solidFill>
                 <a:latin typeface="Montserrat"/>
               </a:rPr>
-              <a:t>004 / 020</a:t>
+              <a:t>004 / 021</a:t>
             </a:r>
           </a:p>
         </p:txBody>
@@ -10728,7 +11752,7 @@
         <p:spPr>
           <a:xfrm>
             <a:off x="822960" y="457200"/>
-            <a:ext cx="8229600" cy="365760"/>
+            <a:ext cx="10058400" cy="365760"/>
           </a:xfrm>
           <a:prstGeom prst="rect">
             <a:avLst/>
@@ -10742,13 +11766,13 @@
           <a:lstStyle/>
           <a:p>
             <a:r>
-              <a:rPr sz="1200" b="1" i="0">
-                <a:solidFill>
-                  <a:srgbClr val="64748B"/>
-                </a:solidFill>
-                <a:latin typeface="Montserrat"/>
-              </a:rPr>
-              <a:t>PARTE 12 · APARTADO 2.1</a:t>
+              <a:rPr sz="1300" b="1" i="0">
+                <a:solidFill>
+                  <a:srgbClr val="E8801A"/>
+                </a:solidFill>
+                <a:latin typeface="Montserrat"/>
+              </a:rPr>
+              <a:t>PARTE 12 · APARTADO 1</a:t>
             </a:r>
           </a:p>
         </p:txBody>
@@ -10776,26 +11800,70 @@
           <a:lstStyle/>
           <a:p>
             <a:r>
-              <a:rPr sz="2700" b="1" i="0">
+              <a:rPr sz="2800" b="1" i="0">
                 <a:solidFill>
                   <a:srgbClr val="1E2761"/>
                 </a:solidFill>
                 <a:latin typeface="Montserrat"/>
               </a:rPr>
-              <a:t>Dos papeles posibles al acabar</a:t>
-            </a:r>
-          </a:p>
-        </p:txBody>
-      </p:sp>
-      <p:sp>
-        <p:nvSpPr>
-          <p:cNvPr id="7" name="TextBox 6"/>
+              <a:t>Qué regula la Parte 12</a:t>
+            </a:r>
+          </a:p>
+        </p:txBody>
+      </p:sp>
+      <p:sp>
+        <p:nvSpPr>
+          <p:cNvPr id="7" name="Rounded Rectangle 6"/>
+          <p:cNvSpPr/>
+          <p:nvPr/>
+        </p:nvSpPr>
+        <p:spPr>
+          <a:xfrm>
+            <a:off x="868680" y="1627632"/>
+            <a:ext cx="2011680" cy="73152"/>
+          </a:xfrm>
+          <a:prstGeom prst="roundRect">
+            <a:avLst/>
+          </a:prstGeom>
+          <a:solidFill>
+            <a:srgbClr val="E8801A"/>
+          </a:solidFill>
+          <a:ln>
+            <a:noFill/>
+          </a:ln>
+          <a:effectLst/>
+        </p:spPr>
+        <p:style>
+          <a:lnRef idx="1">
+            <a:schemeClr val="accent1"/>
+          </a:lnRef>
+          <a:fillRef idx="3">
+            <a:schemeClr val="accent1"/>
+          </a:fillRef>
+          <a:effectRef idx="2">
+            <a:schemeClr val="accent1"/>
+          </a:effectRef>
+          <a:fontRef idx="minor">
+            <a:schemeClr val="lt1"/>
+          </a:fontRef>
+        </p:style>
+        <p:txBody>
+          <a:bodyPr rtlCol="0" anchor="ctr"/>
+          <a:lstStyle/>
+          <a:p>
+            <a:pPr algn="ctr"/>
+          </a:p>
+        </p:txBody>
+      </p:sp>
+      <p:sp>
+        <p:nvSpPr>
+          <p:cNvPr id="8" name="TextBox 7"/>
           <p:cNvSpPr txBox="1"/>
           <p:nvPr/>
         </p:nvSpPr>
         <p:spPr>
           <a:xfrm>
-            <a:off x="822960" y="1920240"/>
+            <a:off x="822960" y="1965960"/>
             <a:ext cx="4983480" cy="4206240"/>
           </a:xfrm>
           <a:prstGeom prst="rect">
@@ -10811,17 +11879,17 @@
           <a:p>
             <a:pPr>
               <a:spcAft>
-                <a:spcPts val="1000"/>
+                <a:spcPts val="1100"/>
               </a:spcAft>
             </a:pPr>
             <a:r>
               <a:rPr sz="1600" b="1" i="0">
                 <a:solidFill>
-                  <a:srgbClr val="2E3A80"/>
-                </a:solidFill>
-                <a:latin typeface="Montserrat"/>
-              </a:rPr>
-              <a:t>•  </a:t>
+                  <a:srgbClr val="E8801A"/>
+                </a:solidFill>
+                <a:latin typeface="Montserrat"/>
+              </a:rPr>
+              <a:t>▸  </a:t>
             </a:r>
             <a:r>
               <a:rPr sz="1600" b="0" i="0">
@@ -10830,23 +11898,23 @@
                 </a:solidFill>
                 <a:latin typeface="Montserrat"/>
               </a:rPr>
-              <a:t>Todo bien: certificado (favorable)</a:t>
+              <a:t>Control periódico de instalaciones en servicio</a:t>
             </a:r>
           </a:p>
           <a:p>
             <a:pPr>
               <a:spcAft>
-                <a:spcPts val="1000"/>
+                <a:spcPts val="1100"/>
               </a:spcAft>
             </a:pPr>
             <a:r>
               <a:rPr sz="1600" b="1" i="0">
                 <a:solidFill>
-                  <a:srgbClr val="2E3A80"/>
-                </a:solidFill>
-                <a:latin typeface="Montserrat"/>
-              </a:rPr>
-              <a:t>•  </a:t>
+                  <a:srgbClr val="E8801A"/>
+                </a:solidFill>
+                <a:latin typeface="Montserrat"/>
+              </a:rPr>
+              <a:t>▸  </a:t>
             </a:r>
             <a:r>
               <a:rPr sz="1600" b="0" i="0">
@@ -10855,23 +11923,23 @@
                 </a:solidFill>
                 <a:latin typeface="Montserrat"/>
               </a:rPr>
-              <a:t>Algo falla: informe de anomalías</a:t>
+              <a:t>Criterios técnicos básicos</a:t>
             </a:r>
           </a:p>
           <a:p>
             <a:pPr>
               <a:spcAft>
-                <a:spcPts val="1000"/>
+                <a:spcPts val="1100"/>
               </a:spcAft>
             </a:pPr>
             <a:r>
               <a:rPr sz="1600" b="1" i="0">
                 <a:solidFill>
-                  <a:srgbClr val="2E3A80"/>
-                </a:solidFill>
-                <a:latin typeface="Montserrat"/>
-              </a:rPr>
-              <a:t>•  </a:t>
+                  <a:srgbClr val="E8801A"/>
+                </a:solidFill>
+                <a:latin typeface="Montserrat"/>
+              </a:rPr>
+              <a:t>▸  </a:t>
             </a:r>
             <a:r>
               <a:rPr sz="1600" b="0" i="0">
@@ -10880,39 +11948,14 @@
                 </a:solidFill>
                 <a:latin typeface="Montserrat"/>
               </a:rPr>
-              <a:t>Informe: alcance, situación y plazo</a:t>
-            </a:r>
-          </a:p>
-          <a:p>
-            <a:pPr>
-              <a:spcAft>
-                <a:spcPts val="1000"/>
-              </a:spcAft>
-            </a:pPr>
-            <a:r>
-              <a:rPr sz="1600" b="1" i="0">
-                <a:solidFill>
-                  <a:srgbClr val="2E3A80"/>
-                </a:solidFill>
-                <a:latin typeface="Montserrat"/>
-              </a:rPr>
-              <a:t>•  </a:t>
-            </a:r>
-            <a:r>
-              <a:rPr sz="1600" b="0" i="0">
-                <a:solidFill>
-                  <a:srgbClr val="1B2330"/>
-                </a:solidFill>
-                <a:latin typeface="Montserrat"/>
-              </a:rPr>
-              <a:t>Siempre: recomendaciones de seguridad</a:t>
-            </a:r>
-          </a:p>
-        </p:txBody>
-      </p:sp>
-      <p:sp>
-        <p:nvSpPr>
-          <p:cNvPr id="8" name="imgph" descr="IMGQ:inspection certificate document signature pen"/>
+              <a:t>MOP igual o menor de 5 bar</a:t>
+            </a:r>
+          </a:p>
+        </p:txBody>
+      </p:sp>
+      <p:sp>
+        <p:nvSpPr>
+          <p:cNvPr id="9" name="imgph" descr="IMGQ:gas installation periodic inspection technician"/>
           <p:cNvSpPr/>
           <p:nvPr/>
         </p:nvSpPr>
@@ -10958,7 +12001,7 @@
       </p:sp>
       <p:sp>
         <p:nvSpPr>
-          <p:cNvPr id="9" name="TextBox 8"/>
+          <p:cNvPr id="10" name="TextBox 9"/>
           <p:cNvSpPr txBox="1"/>
           <p:nvPr/>
         </p:nvSpPr>
@@ -10998,7 +12041,7 @@
                 </a:solidFill>
                 <a:latin typeface="Montserrat"/>
               </a:rPr>
-              <a:t>inspection certificate document signature pen</a:t>
+              <a:t>gas installation periodic inspection technician</a:t>
             </a:r>
           </a:p>
         </p:txBody>
@@ -11095,7 +12138,7 @@
                 </a:solidFill>
                 <a:latin typeface="Montserrat"/>
               </a:rPr>
-              <a:t>005 / 020</a:t>
+              <a:t>005 / 021</a:t>
             </a:r>
           </a:p>
         </p:txBody>
@@ -11143,7 +12186,7 @@
         <p:spPr>
           <a:xfrm>
             <a:off x="822960" y="457200"/>
-            <a:ext cx="8229600" cy="365760"/>
+            <a:ext cx="10058400" cy="365760"/>
           </a:xfrm>
           <a:prstGeom prst="rect">
             <a:avLst/>
@@ -11157,9 +12200,9 @@
           <a:lstStyle/>
           <a:p>
             <a:r>
-              <a:rPr sz="1200" b="1" i="0">
-                <a:solidFill>
-                  <a:srgbClr val="64748B"/>
+              <a:rPr sz="1300" b="1" i="0">
+                <a:solidFill>
+                  <a:srgbClr val="E8801A"/>
                 </a:solidFill>
                 <a:latin typeface="Montserrat"/>
               </a:rPr>
@@ -11191,26 +12234,70 @@
           <a:lstStyle/>
           <a:p>
             <a:r>
-              <a:rPr sz="2700" b="1" i="0">
+              <a:rPr sz="2800" b="1" i="0">
                 <a:solidFill>
                   <a:srgbClr val="1E2761"/>
                 </a:solidFill>
                 <a:latin typeface="Montserrat"/>
               </a:rPr>
-              <a:t>Solo lo visible y accesible</a:t>
-            </a:r>
-          </a:p>
-        </p:txBody>
-      </p:sp>
-      <p:sp>
-        <p:nvSpPr>
-          <p:cNvPr id="7" name="TextBox 6"/>
+              <a:t>Dos papeles posibles al acabar</a:t>
+            </a:r>
+          </a:p>
+        </p:txBody>
+      </p:sp>
+      <p:sp>
+        <p:nvSpPr>
+          <p:cNvPr id="7" name="Rounded Rectangle 6"/>
+          <p:cNvSpPr/>
+          <p:nvPr/>
+        </p:nvSpPr>
+        <p:spPr>
+          <a:xfrm>
+            <a:off x="868680" y="1627632"/>
+            <a:ext cx="2011680" cy="73152"/>
+          </a:xfrm>
+          <a:prstGeom prst="roundRect">
+            <a:avLst/>
+          </a:prstGeom>
+          <a:solidFill>
+            <a:srgbClr val="E8801A"/>
+          </a:solidFill>
+          <a:ln>
+            <a:noFill/>
+          </a:ln>
+          <a:effectLst/>
+        </p:spPr>
+        <p:style>
+          <a:lnRef idx="1">
+            <a:schemeClr val="accent1"/>
+          </a:lnRef>
+          <a:fillRef idx="3">
+            <a:schemeClr val="accent1"/>
+          </a:fillRef>
+          <a:effectRef idx="2">
+            <a:schemeClr val="accent1"/>
+          </a:effectRef>
+          <a:fontRef idx="minor">
+            <a:schemeClr val="lt1"/>
+          </a:fontRef>
+        </p:style>
+        <p:txBody>
+          <a:bodyPr rtlCol="0" anchor="ctr"/>
+          <a:lstStyle/>
+          <a:p>
+            <a:pPr algn="ctr"/>
+          </a:p>
+        </p:txBody>
+      </p:sp>
+      <p:sp>
+        <p:nvSpPr>
+          <p:cNvPr id="8" name="TextBox 7"/>
           <p:cNvSpPr txBox="1"/>
           <p:nvPr/>
         </p:nvSpPr>
         <p:spPr>
           <a:xfrm>
-            <a:off x="822960" y="1920240"/>
+            <a:off x="822960" y="1965960"/>
             <a:ext cx="4983480" cy="4206240"/>
           </a:xfrm>
           <a:prstGeom prst="rect">
@@ -11226,17 +12313,17 @@
           <a:p>
             <a:pPr>
               <a:spcAft>
-                <a:spcPts val="1000"/>
+                <a:spcPts val="1100"/>
               </a:spcAft>
             </a:pPr>
             <a:r>
               <a:rPr sz="1600" b="1" i="0">
                 <a:solidFill>
-                  <a:srgbClr val="2E3A80"/>
-                </a:solidFill>
-                <a:latin typeface="Montserrat"/>
-              </a:rPr>
-              <a:t>•  </a:t>
+                  <a:srgbClr val="E8801A"/>
+                </a:solidFill>
+                <a:latin typeface="Montserrat"/>
+              </a:rPr>
+              <a:t>▸  </a:t>
             </a:r>
             <a:r>
               <a:rPr sz="1600" b="0" i="0">
@@ -11245,23 +12332,23 @@
                 </a:solidFill>
                 <a:latin typeface="Montserrat"/>
               </a:rPr>
-              <a:t>No se abren tabiques ni falsos techos</a:t>
+              <a:t>Todo bien: certificado (favorable)</a:t>
             </a:r>
           </a:p>
           <a:p>
             <a:pPr>
               <a:spcAft>
-                <a:spcPts val="1000"/>
+                <a:spcPts val="1100"/>
               </a:spcAft>
             </a:pPr>
             <a:r>
               <a:rPr sz="1600" b="1" i="0">
                 <a:solidFill>
-                  <a:srgbClr val="2E3A80"/>
-                </a:solidFill>
-                <a:latin typeface="Montserrat"/>
-              </a:rPr>
-              <a:t>•  </a:t>
+                  <a:srgbClr val="E8801A"/>
+                </a:solidFill>
+                <a:latin typeface="Montserrat"/>
+              </a:rPr>
+              <a:t>▸  </a:t>
             </a:r>
             <a:r>
               <a:rPr sz="1600" b="0" i="0">
@@ -11270,23 +12357,23 @@
                 </a:solidFill>
                 <a:latin typeface="Montserrat"/>
               </a:rPr>
-              <a:t>Se comprueba lo que se ve y se alcanza</a:t>
+              <a:t>Algo falla: informe de anomalías</a:t>
             </a:r>
           </a:p>
           <a:p>
             <a:pPr>
               <a:spcAft>
-                <a:spcPts val="1000"/>
+                <a:spcPts val="1100"/>
               </a:spcAft>
             </a:pPr>
             <a:r>
               <a:rPr sz="1600" b="1" i="0">
                 <a:solidFill>
-                  <a:srgbClr val="2E3A80"/>
-                </a:solidFill>
-                <a:latin typeface="Montserrat"/>
-              </a:rPr>
-              <a:t>•  </a:t>
+                  <a:srgbClr val="E8801A"/>
+                </a:solidFill>
+                <a:latin typeface="Montserrat"/>
+              </a:rPr>
+              <a:t>▸  </a:t>
             </a:r>
             <a:r>
               <a:rPr sz="1600" b="0" i="0">
@@ -11295,14 +12382,39 @@
                 </a:solidFill>
                 <a:latin typeface="Montserrat"/>
               </a:rPr>
-              <a:t>Lo empotrado, por lo que asoma</a:t>
-            </a:r>
-          </a:p>
-        </p:txBody>
-      </p:sp>
-      <p:sp>
-        <p:nvSpPr>
-          <p:cNvPr id="8" name="imgph" descr="IMGQ:exposed gas pipe visible on wall kitchen"/>
+              <a:t>Informe: alcance, situación y plazo</a:t>
+            </a:r>
+          </a:p>
+          <a:p>
+            <a:pPr>
+              <a:spcAft>
+                <a:spcPts val="1100"/>
+              </a:spcAft>
+            </a:pPr>
+            <a:r>
+              <a:rPr sz="1600" b="1" i="0">
+                <a:solidFill>
+                  <a:srgbClr val="E8801A"/>
+                </a:solidFill>
+                <a:latin typeface="Montserrat"/>
+              </a:rPr>
+              <a:t>▸  </a:t>
+            </a:r>
+            <a:r>
+              <a:rPr sz="1600" b="0" i="0">
+                <a:solidFill>
+                  <a:srgbClr val="1B2330"/>
+                </a:solidFill>
+                <a:latin typeface="Montserrat"/>
+              </a:rPr>
+              <a:t>Siempre: recomendaciones de seguridad</a:t>
+            </a:r>
+          </a:p>
+        </p:txBody>
+      </p:sp>
+      <p:sp>
+        <p:nvSpPr>
+          <p:cNvPr id="9" name="imgph" descr="IMGQ:inspection certificate document signature pen"/>
           <p:cNvSpPr/>
           <p:nvPr/>
         </p:nvSpPr>
@@ -11348,7 +12460,7 @@
       </p:sp>
       <p:sp>
         <p:nvSpPr>
-          <p:cNvPr id="9" name="TextBox 8"/>
+          <p:cNvPr id="10" name="TextBox 9"/>
           <p:cNvSpPr txBox="1"/>
           <p:nvPr/>
         </p:nvSpPr>
@@ -11388,7 +12500,7 @@
                 </a:solidFill>
                 <a:latin typeface="Montserrat"/>
               </a:rPr>
-              <a:t>exposed gas pipe visible on wall kitchen</a:t>
+              <a:t>inspection certificate document signature pen</a:t>
             </a:r>
           </a:p>
         </p:txBody>
@@ -11485,7 +12597,7 @@
                 </a:solidFill>
                 <a:latin typeface="Montserrat"/>
               </a:rPr>
-              <a:t>006 / 020</a:t>
+              <a:t>006 / 021</a:t>
             </a:r>
           </a:p>
         </p:txBody>
@@ -11533,7 +12645,7 @@
         <p:spPr>
           <a:xfrm>
             <a:off x="822960" y="457200"/>
-            <a:ext cx="8229600" cy="365760"/>
+            <a:ext cx="10058400" cy="365760"/>
           </a:xfrm>
           <a:prstGeom prst="rect">
             <a:avLst/>
@@ -11547,13 +12659,13 @@
           <a:lstStyle/>
           <a:p>
             <a:r>
-              <a:rPr sz="1200" b="1" i="0">
-                <a:solidFill>
-                  <a:srgbClr val="64748B"/>
-                </a:solidFill>
-                <a:latin typeface="Montserrat"/>
-              </a:rPr>
-              <a:t>PARTE 12 · APARTADO 2.2</a:t>
+              <a:rPr sz="1300" b="1" i="0">
+                <a:solidFill>
+                  <a:srgbClr val="E8801A"/>
+                </a:solidFill>
+                <a:latin typeface="Montserrat"/>
+              </a:rPr>
+              <a:t>PARTE 12 · APARTADO 2.1</a:t>
             </a:r>
           </a:p>
         </p:txBody>
@@ -11581,26 +12693,70 @@
           <a:lstStyle/>
           <a:p>
             <a:r>
-              <a:rPr sz="2700" b="1" i="0">
+              <a:rPr sz="2800" b="1" i="0">
                 <a:solidFill>
                   <a:srgbClr val="1E2761"/>
                 </a:solidFill>
                 <a:latin typeface="Montserrat"/>
               </a:rPr>
-              <a:t>Principal o secundaria</a:t>
-            </a:r>
-          </a:p>
-        </p:txBody>
-      </p:sp>
-      <p:sp>
-        <p:nvSpPr>
-          <p:cNvPr id="7" name="TextBox 6"/>
+              <a:t>Solo lo visible y accesible</a:t>
+            </a:r>
+          </a:p>
+        </p:txBody>
+      </p:sp>
+      <p:sp>
+        <p:nvSpPr>
+          <p:cNvPr id="7" name="Rounded Rectangle 6"/>
+          <p:cNvSpPr/>
+          <p:nvPr/>
+        </p:nvSpPr>
+        <p:spPr>
+          <a:xfrm>
+            <a:off x="868680" y="1627632"/>
+            <a:ext cx="2011680" cy="73152"/>
+          </a:xfrm>
+          <a:prstGeom prst="roundRect">
+            <a:avLst/>
+          </a:prstGeom>
+          <a:solidFill>
+            <a:srgbClr val="E8801A"/>
+          </a:solidFill>
+          <a:ln>
+            <a:noFill/>
+          </a:ln>
+          <a:effectLst/>
+        </p:spPr>
+        <p:style>
+          <a:lnRef idx="1">
+            <a:schemeClr val="accent1"/>
+          </a:lnRef>
+          <a:fillRef idx="3">
+            <a:schemeClr val="accent1"/>
+          </a:fillRef>
+          <a:effectRef idx="2">
+            <a:schemeClr val="accent1"/>
+          </a:effectRef>
+          <a:fontRef idx="minor">
+            <a:schemeClr val="lt1"/>
+          </a:fontRef>
+        </p:style>
+        <p:txBody>
+          <a:bodyPr rtlCol="0" anchor="ctr"/>
+          <a:lstStyle/>
+          <a:p>
+            <a:pPr algn="ctr"/>
+          </a:p>
+        </p:txBody>
+      </p:sp>
+      <p:sp>
+        <p:nvSpPr>
+          <p:cNvPr id="8" name="TextBox 7"/>
           <p:cNvSpPr txBox="1"/>
           <p:nvPr/>
         </p:nvSpPr>
         <p:spPr>
           <a:xfrm>
-            <a:off x="822960" y="1920240"/>
+            <a:off x="822960" y="1965960"/>
             <a:ext cx="4983480" cy="4206240"/>
           </a:xfrm>
           <a:prstGeom prst="rect">
@@ -11616,17 +12772,17 @@
           <a:p>
             <a:pPr>
               <a:spcAft>
-                <a:spcPts val="1000"/>
+                <a:spcPts val="1100"/>
               </a:spcAft>
             </a:pPr>
             <a:r>
               <a:rPr sz="1600" b="1" i="0">
                 <a:solidFill>
-                  <a:srgbClr val="2E3A80"/>
-                </a:solidFill>
-                <a:latin typeface="Montserrat"/>
-              </a:rPr>
-              <a:t>•  </a:t>
+                  <a:srgbClr val="E8801A"/>
+                </a:solidFill>
+                <a:latin typeface="Montserrat"/>
+              </a:rPr>
+              <a:t>▸  </a:t>
             </a:r>
             <a:r>
               <a:rPr sz="1600" b="0" i="0">
@@ -11635,23 +12791,23 @@
                 </a:solidFill>
                 <a:latin typeface="Montserrat"/>
               </a:rPr>
-              <a:t>Principal: subsanar en el acto</a:t>
+              <a:t>No se abren tabiques ni falsos techos</a:t>
             </a:r>
           </a:p>
           <a:p>
             <a:pPr>
               <a:spcAft>
-                <a:spcPts val="1000"/>
+                <a:spcPts val="1100"/>
               </a:spcAft>
             </a:pPr>
             <a:r>
               <a:rPr sz="1600" b="1" i="0">
                 <a:solidFill>
-                  <a:srgbClr val="2E3A80"/>
-                </a:solidFill>
-                <a:latin typeface="Montserrat"/>
-              </a:rPr>
-              <a:t>•  </a:t>
+                  <a:srgbClr val="E8801A"/>
+                </a:solidFill>
+                <a:latin typeface="Montserrat"/>
+              </a:rPr>
+              <a:t>▸  </a:t>
             </a:r>
             <a:r>
               <a:rPr sz="1600" b="0" i="0">
@@ -11660,23 +12816,23 @@
                 </a:solidFill>
                 <a:latin typeface="Montserrat"/>
               </a:rPr>
-              <a:t>Si no puedes: cortar el suministro</a:t>
+              <a:t>Se comprueba lo que se ve y se alcanza</a:t>
             </a:r>
           </a:p>
           <a:p>
             <a:pPr>
               <a:spcAft>
-                <a:spcPts val="1000"/>
+                <a:spcPts val="1100"/>
               </a:spcAft>
             </a:pPr>
             <a:r>
               <a:rPr sz="1600" b="1" i="0">
                 <a:solidFill>
-                  <a:srgbClr val="2E3A80"/>
-                </a:solidFill>
-                <a:latin typeface="Montserrat"/>
-              </a:rPr>
-              <a:t>•  </a:t>
+                  <a:srgbClr val="E8801A"/>
+                </a:solidFill>
+                <a:latin typeface="Montserrat"/>
+              </a:rPr>
+              <a:t>▸  </a:t>
             </a:r>
             <a:r>
               <a:rPr sz="1600" b="0" i="0">
@@ -11685,39 +12841,14 @@
                 </a:solidFill>
                 <a:latin typeface="Montserrat"/>
               </a:rPr>
-              <a:t>Secundaria: el gas sigue, con plazo</a:t>
-            </a:r>
-          </a:p>
-          <a:p>
-            <a:pPr>
-              <a:spcAft>
-                <a:spcPts val="1000"/>
-              </a:spcAft>
-            </a:pPr>
-            <a:r>
-              <a:rPr sz="1600" b="1" i="0">
-                <a:solidFill>
-                  <a:srgbClr val="2E3A80"/>
-                </a:solidFill>
-                <a:latin typeface="Montserrat"/>
-              </a:rPr>
-              <a:t>•  </a:t>
-            </a:r>
-            <a:r>
-              <a:rPr sz="1600" b="0" i="0">
-                <a:solidFill>
-                  <a:srgbClr val="1B2330"/>
-                </a:solidFill>
-                <a:latin typeface="Montserrat"/>
-              </a:rPr>
-              <a:t>Es la clasificación que te protege</a:t>
-            </a:r>
-          </a:p>
-        </p:txBody>
-      </p:sp>
-      <p:sp>
-        <p:nvSpPr>
-          <p:cNvPr id="8" name="imgph" descr="IMGQ:gas valve being closed by technician hand"/>
+              <a:t>Lo empotrado, por lo que asoma</a:t>
+            </a:r>
+          </a:p>
+        </p:txBody>
+      </p:sp>
+      <p:sp>
+        <p:nvSpPr>
+          <p:cNvPr id="9" name="imgph" descr="IMGQ:exposed gas pipe visible on wall kitchen"/>
           <p:cNvSpPr/>
           <p:nvPr/>
         </p:nvSpPr>
@@ -11763,7 +12894,7 @@
       </p:sp>
       <p:sp>
         <p:nvSpPr>
-          <p:cNvPr id="9" name="TextBox 8"/>
+          <p:cNvPr id="10" name="TextBox 9"/>
           <p:cNvSpPr txBox="1"/>
           <p:nvPr/>
         </p:nvSpPr>
@@ -11803,7 +12934,7 @@
                 </a:solidFill>
                 <a:latin typeface="Montserrat"/>
               </a:rPr>
-              <a:t>gas valve being closed by technician hand</a:t>
+              <a:t>exposed gas pipe visible on wall kitchen</a:t>
             </a:r>
           </a:p>
         </p:txBody>
@@ -11900,7 +13031,7 @@
                 </a:solidFill>
                 <a:latin typeface="Montserrat"/>
               </a:rPr>
-              <a:t>007 / 020</a:t>
+              <a:t>007 / 021</a:t>
             </a:r>
           </a:p>
         </p:txBody>
@@ -11948,7 +13079,7 @@
         <p:spPr>
           <a:xfrm>
             <a:off x="822960" y="457200"/>
-            <a:ext cx="8229600" cy="365760"/>
+            <a:ext cx="10058400" cy="365760"/>
           </a:xfrm>
           <a:prstGeom prst="rect">
             <a:avLst/>
@@ -11962,9 +13093,9 @@
           <a:lstStyle/>
           <a:p>
             <a:r>
-              <a:rPr sz="1200" b="1" i="0">
-                <a:solidFill>
-                  <a:srgbClr val="64748B"/>
+              <a:rPr sz="1300" b="1" i="0">
+                <a:solidFill>
+                  <a:srgbClr val="E8801A"/>
                 </a:solidFill>
                 <a:latin typeface="Montserrat"/>
               </a:rPr>
@@ -11996,26 +13127,70 @@
           <a:lstStyle/>
           <a:p>
             <a:r>
-              <a:rPr sz="2700" b="1" i="0">
+              <a:rPr sz="2800" b="1" i="0">
                 <a:solidFill>
                   <a:srgbClr val="1E2761"/>
                 </a:solidFill>
                 <a:latin typeface="Montserrat"/>
               </a:rPr>
-              <a:t>Los plazos de las secundarias</a:t>
-            </a:r>
-          </a:p>
-        </p:txBody>
-      </p:sp>
-      <p:sp>
-        <p:nvSpPr>
-          <p:cNvPr id="7" name="TextBox 6"/>
+              <a:t>Principal o secundaria</a:t>
+            </a:r>
+          </a:p>
+        </p:txBody>
+      </p:sp>
+      <p:sp>
+        <p:nvSpPr>
+          <p:cNvPr id="7" name="Rounded Rectangle 6"/>
+          <p:cNvSpPr/>
+          <p:nvPr/>
+        </p:nvSpPr>
+        <p:spPr>
+          <a:xfrm>
+            <a:off x="868680" y="1627632"/>
+            <a:ext cx="2011680" cy="73152"/>
+          </a:xfrm>
+          <a:prstGeom prst="roundRect">
+            <a:avLst/>
+          </a:prstGeom>
+          <a:solidFill>
+            <a:srgbClr val="E8801A"/>
+          </a:solidFill>
+          <a:ln>
+            <a:noFill/>
+          </a:ln>
+          <a:effectLst/>
+        </p:spPr>
+        <p:style>
+          <a:lnRef idx="1">
+            <a:schemeClr val="accent1"/>
+          </a:lnRef>
+          <a:fillRef idx="3">
+            <a:schemeClr val="accent1"/>
+          </a:fillRef>
+          <a:effectRef idx="2">
+            <a:schemeClr val="accent1"/>
+          </a:effectRef>
+          <a:fontRef idx="minor">
+            <a:schemeClr val="lt1"/>
+          </a:fontRef>
+        </p:style>
+        <p:txBody>
+          <a:bodyPr rtlCol="0" anchor="ctr"/>
+          <a:lstStyle/>
+          <a:p>
+            <a:pPr algn="ctr"/>
+          </a:p>
+        </p:txBody>
+      </p:sp>
+      <p:sp>
+        <p:nvSpPr>
+          <p:cNvPr id="8" name="TextBox 7"/>
           <p:cNvSpPr txBox="1"/>
           <p:nvPr/>
         </p:nvSpPr>
         <p:spPr>
           <a:xfrm>
-            <a:off x="822960" y="1920240"/>
+            <a:off x="822960" y="1965960"/>
             <a:ext cx="4983480" cy="4206240"/>
           </a:xfrm>
           <a:prstGeom prst="rect">
@@ -12031,17 +13206,17 @@
           <a:p>
             <a:pPr>
               <a:spcAft>
-                <a:spcPts val="1000"/>
+                <a:spcPts val="1100"/>
               </a:spcAft>
             </a:pPr>
             <a:r>
               <a:rPr sz="1600" b="1" i="0">
                 <a:solidFill>
-                  <a:srgbClr val="2E3A80"/>
-                </a:solidFill>
-                <a:latin typeface="Montserrat"/>
-              </a:rPr>
-              <a:t>•  </a:t>
+                  <a:srgbClr val="E8801A"/>
+                </a:solidFill>
+                <a:latin typeface="Montserrat"/>
+              </a:rPr>
+              <a:t>▸  </a:t>
             </a:r>
             <a:r>
               <a:rPr sz="1600" b="0" i="0">
@@ -12050,23 +13225,23 @@
                 </a:solidFill>
                 <a:latin typeface="Montserrat"/>
               </a:rPr>
-              <a:t>Secundaria general: máximo 6 meses</a:t>
+              <a:t>Principal: subsanar en el acto</a:t>
             </a:r>
           </a:p>
           <a:p>
             <a:pPr>
               <a:spcAft>
-                <a:spcPts val="1000"/>
+                <a:spcPts val="1100"/>
               </a:spcAft>
             </a:pPr>
             <a:r>
               <a:rPr sz="1600" b="1" i="0">
                 <a:solidFill>
-                  <a:srgbClr val="2E3A80"/>
-                </a:solidFill>
-                <a:latin typeface="Montserrat"/>
-              </a:rPr>
-              <a:t>•  </a:t>
+                  <a:srgbClr val="E8801A"/>
+                </a:solidFill>
+                <a:latin typeface="Montserrat"/>
+              </a:rPr>
+              <a:t>▸  </a:t>
             </a:r>
             <a:r>
               <a:rPr sz="1600" b="0" i="0">
@@ -12075,23 +13250,23 @@
                 </a:solidFill>
                 <a:latin typeface="Montserrat"/>
               </a:rPr>
-              <a:t>Fuga secundaria: menos de 15 días naturales</a:t>
+              <a:t>Si no puedes: cortar el suministro</a:t>
             </a:r>
           </a:p>
           <a:p>
             <a:pPr>
               <a:spcAft>
-                <a:spcPts val="1000"/>
+                <a:spcPts val="1100"/>
               </a:spcAft>
             </a:pPr>
             <a:r>
               <a:rPr sz="1600" b="1" i="0">
                 <a:solidFill>
-                  <a:srgbClr val="2E3A80"/>
-                </a:solidFill>
-                <a:latin typeface="Montserrat"/>
-              </a:rPr>
-              <a:t>•  </a:t>
+                  <a:srgbClr val="E8801A"/>
+                </a:solidFill>
+                <a:latin typeface="Montserrat"/>
+              </a:rPr>
+              <a:t>▸  </a:t>
             </a:r>
             <a:r>
               <a:rPr sz="1600" b="0" i="0">
@@ -12100,14 +13275,39 @@
                 </a:solidFill>
                 <a:latin typeface="Montserrat"/>
               </a:rPr>
-              <a:t>Principal: ya, o se corta</a:t>
-            </a:r>
-          </a:p>
-        </p:txBody>
-      </p:sp>
-      <p:sp>
-        <p:nvSpPr>
-          <p:cNvPr id="8" name="imgph" descr="IMGQ:calendar deadline reminder gas repair"/>
+              <a:t>Secundaria: el gas sigue, con plazo</a:t>
+            </a:r>
+          </a:p>
+          <a:p>
+            <a:pPr>
+              <a:spcAft>
+                <a:spcPts val="1100"/>
+              </a:spcAft>
+            </a:pPr>
+            <a:r>
+              <a:rPr sz="1600" b="1" i="0">
+                <a:solidFill>
+                  <a:srgbClr val="E8801A"/>
+                </a:solidFill>
+                <a:latin typeface="Montserrat"/>
+              </a:rPr>
+              <a:t>▸  </a:t>
+            </a:r>
+            <a:r>
+              <a:rPr sz="1600" b="0" i="0">
+                <a:solidFill>
+                  <a:srgbClr val="1B2330"/>
+                </a:solidFill>
+                <a:latin typeface="Montserrat"/>
+              </a:rPr>
+              <a:t>Es la clasificación que te protege</a:t>
+            </a:r>
+          </a:p>
+        </p:txBody>
+      </p:sp>
+      <p:sp>
+        <p:nvSpPr>
+          <p:cNvPr id="9" name="imgph" descr="IMGQ:gas valve being closed by technician hand"/>
           <p:cNvSpPr/>
           <p:nvPr/>
         </p:nvSpPr>
@@ -12153,7 +13353,7 @@
       </p:sp>
       <p:sp>
         <p:nvSpPr>
-          <p:cNvPr id="9" name="TextBox 8"/>
+          <p:cNvPr id="10" name="TextBox 9"/>
           <p:cNvSpPr txBox="1"/>
           <p:nvPr/>
         </p:nvSpPr>
@@ -12193,7 +13393,7 @@
                 </a:solidFill>
                 <a:latin typeface="Montserrat"/>
               </a:rPr>
-              <a:t>calendar deadline reminder gas repair</a:t>
+              <a:t>gas valve being closed by technician hand</a:t>
             </a:r>
           </a:p>
         </p:txBody>
@@ -12290,7 +13490,7 @@
                 </a:solidFill>
                 <a:latin typeface="Montserrat"/>
               </a:rPr>
-              <a:t>008 / 020</a:t>
+              <a:t>008 / 021</a:t>
             </a:r>
           </a:p>
         </p:txBody>
@@ -12338,7 +13538,7 @@
         <p:spPr>
           <a:xfrm>
             <a:off x="822960" y="457200"/>
-            <a:ext cx="8229600" cy="365760"/>
+            <a:ext cx="10058400" cy="365760"/>
           </a:xfrm>
           <a:prstGeom prst="rect">
             <a:avLst/>
@@ -12352,13 +13552,13 @@
           <a:lstStyle/>
           <a:p>
             <a:r>
-              <a:rPr sz="1200" b="1" i="0">
-                <a:solidFill>
-                  <a:srgbClr val="64748B"/>
-                </a:solidFill>
-                <a:latin typeface="Montserrat"/>
-              </a:rPr>
-              <a:t>PARTE 12 · APARTADO 3</a:t>
+              <a:rPr sz="1300" b="1" i="0">
+                <a:solidFill>
+                  <a:srgbClr val="E8801A"/>
+                </a:solidFill>
+                <a:latin typeface="Montserrat"/>
+              </a:rPr>
+              <a:t>PARTE 12 · APARTADO 2.2</a:t>
             </a:r>
           </a:p>
         </p:txBody>
@@ -12386,26 +13586,70 @@
           <a:lstStyle/>
           <a:p>
             <a:r>
-              <a:rPr sz="2700" b="1" i="0">
+              <a:rPr sz="2800" b="1" i="0">
                 <a:solidFill>
                   <a:srgbClr val="1E2761"/>
                 </a:solidFill>
                 <a:latin typeface="Montserrat"/>
               </a:rPr>
-              <a:t>Individuales ≤ 70 kW</a:t>
-            </a:r>
-          </a:p>
-        </p:txBody>
-      </p:sp>
-      <p:sp>
-        <p:nvSpPr>
-          <p:cNvPr id="7" name="TextBox 6"/>
+              <a:t>Los plazos de las secundarias</a:t>
+            </a:r>
+          </a:p>
+        </p:txBody>
+      </p:sp>
+      <p:sp>
+        <p:nvSpPr>
+          <p:cNvPr id="7" name="Rounded Rectangle 6"/>
+          <p:cNvSpPr/>
+          <p:nvPr/>
+        </p:nvSpPr>
+        <p:spPr>
+          <a:xfrm>
+            <a:off x="868680" y="1627632"/>
+            <a:ext cx="2011680" cy="73152"/>
+          </a:xfrm>
+          <a:prstGeom prst="roundRect">
+            <a:avLst/>
+          </a:prstGeom>
+          <a:solidFill>
+            <a:srgbClr val="E8801A"/>
+          </a:solidFill>
+          <a:ln>
+            <a:noFill/>
+          </a:ln>
+          <a:effectLst/>
+        </p:spPr>
+        <p:style>
+          <a:lnRef idx="1">
+            <a:schemeClr val="accent1"/>
+          </a:lnRef>
+          <a:fillRef idx="3">
+            <a:schemeClr val="accent1"/>
+          </a:fillRef>
+          <a:effectRef idx="2">
+            <a:schemeClr val="accent1"/>
+          </a:effectRef>
+          <a:fontRef idx="minor">
+            <a:schemeClr val="lt1"/>
+          </a:fontRef>
+        </p:style>
+        <p:txBody>
+          <a:bodyPr rtlCol="0" anchor="ctr"/>
+          <a:lstStyle/>
+          <a:p>
+            <a:pPr algn="ctr"/>
+          </a:p>
+        </p:txBody>
+      </p:sp>
+      <p:sp>
+        <p:nvSpPr>
+          <p:cNvPr id="8" name="TextBox 7"/>
           <p:cNvSpPr txBox="1"/>
           <p:nvPr/>
         </p:nvSpPr>
         <p:spPr>
           <a:xfrm>
-            <a:off x="822960" y="1920240"/>
+            <a:off x="822960" y="1965960"/>
             <a:ext cx="4983480" cy="4206240"/>
           </a:xfrm>
           <a:prstGeom prst="rect">
@@ -12421,17 +13665,17 @@
           <a:p>
             <a:pPr>
               <a:spcAft>
-                <a:spcPts val="1000"/>
+                <a:spcPts val="1100"/>
               </a:spcAft>
             </a:pPr>
             <a:r>
               <a:rPr sz="1600" b="1" i="0">
                 <a:solidFill>
-                  <a:srgbClr val="2E3A80"/>
-                </a:solidFill>
-                <a:latin typeface="Montserrat"/>
-              </a:rPr>
-              <a:t>•  </a:t>
+                  <a:srgbClr val="E8801A"/>
+                </a:solidFill>
+                <a:latin typeface="Montserrat"/>
+              </a:rPr>
+              <a:t>▸  </a:t>
             </a:r>
             <a:r>
               <a:rPr sz="1600" b="0" i="0">
@@ -12440,23 +13684,23 @@
                 </a:solidFill>
                 <a:latin typeface="Montserrat"/>
               </a:rPr>
-              <a:t>El caso doméstico habitual</a:t>
+              <a:t>Secundaria general: máximo 6 meses</a:t>
             </a:r>
           </a:p>
           <a:p>
             <a:pPr>
               <a:spcAft>
-                <a:spcPts val="1000"/>
+                <a:spcPts val="1100"/>
               </a:spcAft>
             </a:pPr>
             <a:r>
               <a:rPr sz="1600" b="1" i="0">
                 <a:solidFill>
-                  <a:srgbClr val="2E3A80"/>
-                </a:solidFill>
-                <a:latin typeface="Montserrat"/>
-              </a:rPr>
-              <a:t>•  </a:t>
+                  <a:srgbClr val="E8801A"/>
+                </a:solidFill>
+                <a:latin typeface="Montserrat"/>
+              </a:rPr>
+              <a:t>▸  </a:t>
             </a:r>
             <a:r>
               <a:rPr sz="1600" b="0" i="0">
@@ -12465,23 +13709,23 @@
                 </a:solidFill>
                 <a:latin typeface="Montserrat"/>
               </a:rPr>
-              <a:t>Códigos IPa: anomalías principales</a:t>
+              <a:t>Fuga secundaria: menos de 15 días naturales</a:t>
             </a:r>
           </a:p>
           <a:p>
             <a:pPr>
               <a:spcAft>
-                <a:spcPts val="1000"/>
+                <a:spcPts val="1100"/>
               </a:spcAft>
             </a:pPr>
             <a:r>
               <a:rPr sz="1600" b="1" i="0">
                 <a:solidFill>
-                  <a:srgbClr val="2E3A80"/>
-                </a:solidFill>
-                <a:latin typeface="Montserrat"/>
-              </a:rPr>
-              <a:t>•  </a:t>
+                  <a:srgbClr val="E8801A"/>
+                </a:solidFill>
+                <a:latin typeface="Montserrat"/>
+              </a:rPr>
+              <a:t>▸  </a:t>
             </a:r>
             <a:r>
               <a:rPr sz="1600" b="0" i="0">
@@ -12490,14 +13734,14 @@
                 </a:solidFill>
                 <a:latin typeface="Montserrat"/>
               </a:rPr>
-              <a:t>Códigos ISa: anomalías secundarias</a:t>
-            </a:r>
-          </a:p>
-        </p:txBody>
-      </p:sp>
-      <p:sp>
-        <p:nvSpPr>
-          <p:cNvPr id="8" name="imgph" descr="IMGQ:domestic gas boiler wall mounted apartment"/>
+              <a:t>Principal: ya, o se corta</a:t>
+            </a:r>
+          </a:p>
+        </p:txBody>
+      </p:sp>
+      <p:sp>
+        <p:nvSpPr>
+          <p:cNvPr id="9" name="imgph" descr="IMGQ:calendar deadline reminder gas repair"/>
           <p:cNvSpPr/>
           <p:nvPr/>
         </p:nvSpPr>
@@ -12543,7 +13787,7 @@
       </p:sp>
       <p:sp>
         <p:nvSpPr>
-          <p:cNvPr id="9" name="TextBox 8"/>
+          <p:cNvPr id="10" name="TextBox 9"/>
           <p:cNvSpPr txBox="1"/>
           <p:nvPr/>
         </p:nvSpPr>
@@ -12583,7 +13827,7 @@
                 </a:solidFill>
                 <a:latin typeface="Montserrat"/>
               </a:rPr>
-              <a:t>domestic gas boiler wall mounted apartment</a:t>
+              <a:t>calendar deadline reminder gas repair</a:t>
             </a:r>
           </a:p>
         </p:txBody>
@@ -12680,7 +13924,7 @@
                 </a:solidFill>
                 <a:latin typeface="Montserrat"/>
               </a:rPr>
-              <a:t>009 / 020</a:t>
+              <a:t>009 / 021</a:t>
             </a:r>
           </a:p>
         </p:txBody>
@@ -12728,7 +13972,7 @@
         <p:spPr>
           <a:xfrm>
             <a:off x="822960" y="457200"/>
-            <a:ext cx="8229600" cy="365760"/>
+            <a:ext cx="10058400" cy="365760"/>
           </a:xfrm>
           <a:prstGeom prst="rect">
             <a:avLst/>
@@ -12742,13 +13986,13 @@
           <a:lstStyle/>
           <a:p>
             <a:r>
-              <a:rPr sz="1200" b="1" i="0">
-                <a:solidFill>
-                  <a:srgbClr val="64748B"/>
-                </a:solidFill>
-                <a:latin typeface="Montserrat"/>
-              </a:rPr>
-              <a:t>PARTE 12 · IPA-1</a:t>
+              <a:rPr sz="1300" b="1" i="0">
+                <a:solidFill>
+                  <a:srgbClr val="E8801A"/>
+                </a:solidFill>
+                <a:latin typeface="Montserrat"/>
+              </a:rPr>
+              <a:t>PARTE 12 · APARTADO 3</a:t>
             </a:r>
           </a:p>
         </p:txBody>
@@ -12776,26 +14020,70 @@
           <a:lstStyle/>
           <a:p>
             <a:r>
-              <a:rPr sz="2700" b="1" i="0">
+              <a:rPr sz="2800" b="1" i="0">
                 <a:solidFill>
                   <a:srgbClr val="1E2761"/>
                 </a:solidFill>
                 <a:latin typeface="Montserrat"/>
               </a:rPr>
-              <a:t>Fuga de gas: siempre no apta</a:t>
-            </a:r>
-          </a:p>
-        </p:txBody>
-      </p:sp>
-      <p:sp>
-        <p:nvSpPr>
-          <p:cNvPr id="7" name="TextBox 6"/>
+              <a:t>Individuales ≤ 70 kW</a:t>
+            </a:r>
+          </a:p>
+        </p:txBody>
+      </p:sp>
+      <p:sp>
+        <p:nvSpPr>
+          <p:cNvPr id="7" name="Rounded Rectangle 6"/>
+          <p:cNvSpPr/>
+          <p:nvPr/>
+        </p:nvSpPr>
+        <p:spPr>
+          <a:xfrm>
+            <a:off x="868680" y="1627632"/>
+            <a:ext cx="2011680" cy="73152"/>
+          </a:xfrm>
+          <a:prstGeom prst="roundRect">
+            <a:avLst/>
+          </a:prstGeom>
+          <a:solidFill>
+            <a:srgbClr val="E8801A"/>
+          </a:solidFill>
+          <a:ln>
+            <a:noFill/>
+          </a:ln>
+          <a:effectLst/>
+        </p:spPr>
+        <p:style>
+          <a:lnRef idx="1">
+            <a:schemeClr val="accent1"/>
+          </a:lnRef>
+          <a:fillRef idx="3">
+            <a:schemeClr val="accent1"/>
+          </a:fillRef>
+          <a:effectRef idx="2">
+            <a:schemeClr val="accent1"/>
+          </a:effectRef>
+          <a:fontRef idx="minor">
+            <a:schemeClr val="lt1"/>
+          </a:fontRef>
+        </p:style>
+        <p:txBody>
+          <a:bodyPr rtlCol="0" anchor="ctr"/>
+          <a:lstStyle/>
+          <a:p>
+            <a:pPr algn="ctr"/>
+          </a:p>
+        </p:txBody>
+      </p:sp>
+      <p:sp>
+        <p:nvSpPr>
+          <p:cNvPr id="8" name="TextBox 7"/>
           <p:cNvSpPr txBox="1"/>
           <p:nvPr/>
         </p:nvSpPr>
         <p:spPr>
           <a:xfrm>
-            <a:off x="822960" y="1920240"/>
+            <a:off x="822960" y="1965960"/>
             <a:ext cx="4983480" cy="4206240"/>
           </a:xfrm>
           <a:prstGeom prst="rect">
@@ -12811,17 +14099,17 @@
           <a:p>
             <a:pPr>
               <a:spcAft>
-                <a:spcPts val="1000"/>
+                <a:spcPts val="1100"/>
               </a:spcAft>
             </a:pPr>
             <a:r>
               <a:rPr sz="1600" b="1" i="0">
                 <a:solidFill>
-                  <a:srgbClr val="2E3A80"/>
-                </a:solidFill>
-                <a:latin typeface="Montserrat"/>
-              </a:rPr>
-              <a:t>•  </a:t>
+                  <a:srgbClr val="E8801A"/>
+                </a:solidFill>
+                <a:latin typeface="Montserrat"/>
+              </a:rPr>
+              <a:t>▸  </a:t>
             </a:r>
             <a:r>
               <a:rPr sz="1600" b="0" i="0">
@@ -12830,23 +14118,23 @@
                 </a:solidFill>
                 <a:latin typeface="Montserrat"/>
               </a:rPr>
-              <a:t>Comprobar estanquidad (métodos 6.1)</a:t>
+              <a:t>El caso doméstico habitual</a:t>
             </a:r>
           </a:p>
           <a:p>
             <a:pPr>
               <a:spcAft>
-                <a:spcPts val="1000"/>
+                <a:spcPts val="1100"/>
               </a:spcAft>
             </a:pPr>
             <a:r>
               <a:rPr sz="1600" b="1" i="0">
                 <a:solidFill>
-                  <a:srgbClr val="2E3A80"/>
-                </a:solidFill>
-                <a:latin typeface="Montserrat"/>
-              </a:rPr>
-              <a:t>•  </a:t>
+                  <a:srgbClr val="E8801A"/>
+                </a:solidFill>
+                <a:latin typeface="Montserrat"/>
+              </a:rPr>
+              <a:t>▸  </a:t>
             </a:r>
             <a:r>
               <a:rPr sz="1600" b="0" i="0">
@@ -12855,23 +14143,23 @@
                 </a:solidFill>
                 <a:latin typeface="Montserrat"/>
               </a:rPr>
-              <a:t>Si hay fuga: siempre no apta</a:t>
+              <a:t>Códigos IPa: anomalías principales</a:t>
             </a:r>
           </a:p>
           <a:p>
             <a:pPr>
               <a:spcAft>
-                <a:spcPts val="1000"/>
+                <a:spcPts val="1100"/>
               </a:spcAft>
             </a:pPr>
             <a:r>
               <a:rPr sz="1600" b="1" i="0">
                 <a:solidFill>
-                  <a:srgbClr val="2E3A80"/>
-                </a:solidFill>
-                <a:latin typeface="Montserrat"/>
-              </a:rPr>
-              <a:t>•  </a:t>
+                  <a:srgbClr val="E8801A"/>
+                </a:solidFill>
+                <a:latin typeface="Montserrat"/>
+              </a:rPr>
+              <a:t>▸  </a:t>
             </a:r>
             <a:r>
               <a:rPr sz="1600" b="0" i="0">
@@ -12880,39 +14168,14 @@
                 </a:solidFill>
                 <a:latin typeface="Montserrat"/>
               </a:rPr>
-              <a:t>Anomalía principal IPa-1</a:t>
-            </a:r>
-          </a:p>
-          <a:p>
-            <a:pPr>
-              <a:spcAft>
-                <a:spcPts val="1000"/>
-              </a:spcAft>
-            </a:pPr>
-            <a:r>
-              <a:rPr sz="1600" b="1" i="0">
-                <a:solidFill>
-                  <a:srgbClr val="2E3A80"/>
-                </a:solidFill>
-                <a:latin typeface="Montserrat"/>
-              </a:rPr>
-              <a:t>•  </a:t>
-            </a:r>
-            <a:r>
-              <a:rPr sz="1600" b="0" i="0">
-                <a:solidFill>
-                  <a:srgbClr val="1B2330"/>
-                </a:solidFill>
-                <a:latin typeface="Montserrat"/>
-              </a:rPr>
-              <a:t>Tramo aéreo exterior: criterios &gt; 70 kW</a:t>
-            </a:r>
-          </a:p>
-        </p:txBody>
-      </p:sp>
-      <p:sp>
-        <p:nvSpPr>
-          <p:cNvPr id="8" name="imgph" descr="IMGQ:soapy water leak test on gas fitting bubbles"/>
+              <a:t>Códigos ISa: anomalías secundarias</a:t>
+            </a:r>
+          </a:p>
+        </p:txBody>
+      </p:sp>
+      <p:sp>
+        <p:nvSpPr>
+          <p:cNvPr id="9" name="imgph" descr="IMGQ:domestic gas boiler wall mounted apartment"/>
           <p:cNvSpPr/>
           <p:nvPr/>
         </p:nvSpPr>
@@ -12958,7 +14221,7 @@
       </p:sp>
       <p:sp>
         <p:nvSpPr>
-          <p:cNvPr id="9" name="TextBox 8"/>
+          <p:cNvPr id="10" name="TextBox 9"/>
           <p:cNvSpPr txBox="1"/>
           <p:nvPr/>
         </p:nvSpPr>
@@ -12998,7 +14261,7 @@
                 </a:solidFill>
                 <a:latin typeface="Montserrat"/>
               </a:rPr>
-              <a:t>soapy water leak test on gas fitting bubbles</a:t>
+              <a:t>domestic gas boiler wall mounted apartment</a:t>
             </a:r>
           </a:p>
         </p:txBody>

--- a/Curso Gas B/16 - UNE 60670 - Instalaciones en servicio y control periodico/16 - UNE 60670 - Instalaciones en servicio y control periodico - Vídeo 2.pptx
+++ b/Curso Gas B/16 - UNE 60670 - Instalaciones en servicio y control periodico/16 - UNE 60670 - Instalaciones en servicio y control periodico - Vídeo 2.pptx
@@ -26,6 +26,12 @@
     <p:sldId id="274" r:id="rId26"/>
     <p:sldId id="275" r:id="rId27"/>
     <p:sldId id="276" r:id="rId28"/>
+    <p:sldId id="277" r:id="rId29"/>
+    <p:sldId id="278" r:id="rId30"/>
+    <p:sldId id="279" r:id="rId31"/>
+    <p:sldId id="280" r:id="rId32"/>
+    <p:sldId id="281" r:id="rId33"/>
+    <p:sldId id="282" r:id="rId34"/>
   </p:sldIdLst>
   <p:sldSz cx="12191695" cy="6858000" type="screen4x3"/>
   <p:notesSz cx="6858000" cy="9144000"/>
@@ -607,22 +613,12 @@
           <a:lstStyle/>
           <a:p>
             <a:r>
-              <a:t>N1: En una instalación pequeña, ¿toda fuga es grave?</a:t>
-            </a:r>
-          </a:p>
-          <a:p>
-            <a:r>
-              <a:t>N2: Sí, y esto es lo bueno de las individuales de hasta setenta kilovatios: no hay que andar midiendo litros por hora. Haces la comprobación de estanquidad de la instalación individual y de las conexiones de los aparatos, con los métodos del apartado seis punto uno de la Parte once, los que ya conoces: detector, agua jabonosa, manómetro. Y si detectas fuga, la instalación se considera siempre no apta para su uso, sin más. Eso es una anomalía principal, la IPa uno.</a:t>
-            </a:r>
-          </a:p>
-          <a:p>
-            <a:r>
-              <a:t>N1: ¿No hay ninguna excepción?</a:t>
-            </a:r>
-          </a:p>
-          <a:p>
-            <a:r>
-              <a:t>N2: Solo una: si la fuga está en un tramo aéreo exterior, es decir, un tubo al aire libre por fuera del edificio, entonces se aplican los criterios de las instalaciones de más de setenta kilovatios, que veremos en el siguiente vídeo con la escalera de litros por hora. Pero para lo normal, lo de dentro de la vivienda, quédate con la regla simple y potente: en una individual pequeña, fuga es igual a no apta y principal. Se corta.</a:t>
+              <a:t>N1: ¿Por qué quince días y no seis meses?</a:t>
+            </a:r>
+          </a:p>
+          <a:p>
+            <a:r>
+              <a:t>N2: Porque una fuga, aunque sea secundaria, es gas escapando, y eso no admite medio año de espera. Chuleta completa: principal, ya o se corta; secundaria general, seis meses; secundaria que es fuga, menos de quince días naturales, que cuentan fines de semana y festivos.</a:t>
             </a:r>
           </a:p>
         </p:txBody>
@@ -692,22 +688,22 @@
           <a:lstStyle/>
           <a:p>
             <a:r>
-              <a:t>N1: ¿Por qué no puede haber un calentador en el baño o en el dormitorio?</a:t>
-            </a:r>
-          </a:p>
-          <a:p>
-            <a:r>
-              <a:t>N2: Esta es de las anomalías más preguntadas y de las que más matan, así que atención. Un aparato de tipo A o de tipo B, que son los que cogen el aire del propio local o evacuan los humos a él, no puede estar en un dormitorio ni en un baño, ducha o aseo. ¿La razón? Son estancias donde duermes o te encierras con la puerta cerrada. Si el aparato falla y suelta monóxido de carbono, ahí te intoxica sin que te des cuenta, porque estás dormido o aislado. Es intoxicación por CO esperando a pasar.</a:t>
-            </a:r>
-          </a:p>
-          <a:p>
-            <a:r>
-              <a:t>N1: ¿Y los aparatos estancos, los tipo C?</a:t>
-            </a:r>
-          </a:p>
-          <a:p>
-            <a:r>
-              <a:t>N2: Esos sí pueden, y esa es la clave. Un tipo C es estanco: coge el aire de fuera y echa los humos fuera, no intercambia aire con el cuarto. Como no respira el aire de la habitación ni le suelta humos, no hay riesgo de intoxicación por ese lado. Por eso la caldera estanca moderna sí puede ir en un baño y el viejo calentador de tiro natural no. Esta anomalía es principal: si te la encuentras, se corta. Y para no perderte, en el siguiente slide repasamos rápido los tipos de aparato.</a:t>
+              <a:t>N1: ¿Qué es una instalación individual de setenta kilovatios o menos?</a:t>
+            </a:r>
+          </a:p>
+          <a:p>
+            <a:r>
+              <a:t>N2: Es el caso doméstico de toda la vida: la instalación de una vivienda o un pequeño comercio, con su caldera, su calentador y su cocina, cuya potencia útil nominal no pasa de setenta kilovatios. Es lo que más te vas a encontrar, con diferencia. Por eso la norma le dedica un catálogo completo de anomalías, que es el que vamos a recorrer.</a:t>
+            </a:r>
+          </a:p>
+          <a:p>
+            <a:r>
+              <a:t>N1: ¿Y esos códigos con letras qué son?</a:t>
+            </a:r>
+          </a:p>
+          <a:p>
+            <a:r>
+              <a:t>N2: Son la forma de nombrar cada anomalía para entenderse en los informes. En las individuales pequeñas, las principales llevan el código IPa y las secundarias el código ISa. La i de individual, la p de principal o la s de secundaria, y la a que las distingue de las grandes, que llevarán b en el siguiente vídeo. No te agobies con memorizar códigos: lo importante es saber qué defecto es principal, o sea que corta, y cuál es secundario, o sea con plazo.</a:t>
             </a:r>
           </a:p>
         </p:txBody>
@@ -777,22 +773,22 @@
           <a:lstStyle/>
           <a:p>
             <a:r>
-              <a:t>N1: ¿Me repasas los tipos de aparato sin líos?</a:t>
-            </a:r>
-          </a:p>
-          <a:p>
-            <a:r>
-              <a:t>N2: Claro, porque esta clasificación explica casi todas las anomalías de ventilación y evacuación, así que conviene tenerla clavada. Tipo A: no tiene conducto de evacuación, suelta los humos directamente al local. El ejemplo típico es una cocina de gas. Tipo B: coge el aire del propio local para quemar y evacúa los humos al exterior por un conducto. Piensa en un calentador o una caldera de tiro natural. Y tipo C: es estanco, coge el aire de fuera y echa los humos fuera; no intercambia aire con el local. Es la caldera estanca moderna.</a:t>
-            </a:r>
-          </a:p>
-          <a:p>
-            <a:r>
-              <a:t>N1: ¿Y cuál es el más seguro respecto al local?</a:t>
-            </a:r>
-          </a:p>
-          <a:p>
-            <a:r>
-              <a:t>N2: El tipo C, sin duda, porque no toca el aire de la habitación: ni se lo roba para quemar ni le mete humos. Por eso es el único que puede ir en sitios delicados como un baño. El tipo A y el tipo B sí «respiran» con el local, y ahí es donde aparecen los problemas de ventilación, de monóxido y de dónde se pueden colocar. Con esta chuleta de tres líneas entiendes el porqué de media Parte doce.</a:t>
+              <a:t>N1: En una instalación pequeña, ¿toda fuga es grave?</a:t>
+            </a:r>
+          </a:p>
+          <a:p>
+            <a:r>
+              <a:t>N2: Sí, y esto es lo bueno de las individuales de hasta setenta kilovatios: no hay que andar midiendo litros por hora. Haces la comprobación de estanquidad de la instalación individual y de las conexiones de los aparatos, con los métodos del apartado seis punto uno de la Parte once, los que ya conoces: detector, agua jabonosa, manómetro. Y si detectas fuga, la instalación se considera siempre no apta para su uso, sin más. Eso es una anomalía principal, la IPa uno.</a:t>
+            </a:r>
+          </a:p>
+          <a:p>
+            <a:r>
+              <a:t>N1: ¿No hay ninguna excepción?</a:t>
+            </a:r>
+          </a:p>
+          <a:p>
+            <a:r>
+              <a:t>N2: Solo una: si la fuga está en un tramo aéreo exterior, es decir, un tubo al aire libre por fuera del edificio, entonces se aplican los criterios de las instalaciones de más de setenta kilovatios, que veremos en el siguiente vídeo con la escalera de litros por hora. Pero para lo normal, lo de dentro de la vivienda, quédate con la regla simple y potente: en una individual pequeña, fuga es igual a no apta y principal. Se corta.</a:t>
             </a:r>
           </a:p>
         </p:txBody>
@@ -862,22 +858,22 @@
           <a:lstStyle/>
           <a:p>
             <a:r>
-              <a:t>N1: ¿Cuándo un tubo flexible es anomalía principal?</a:t>
-            </a:r>
-          </a:p>
-          <a:p>
-            <a:r>
-              <a:t>N2: Cuando está visiblemente dañado. Si un tubo flexible, ya sea de elastómero, o sea de goma, con o sin armadura, o uno espirometálico, presenta grietas, fisuras o daños, es anomalía principal IPa tres. ¿Por qué principal? Porque un tubo agrietado puede reventar y soltar gas en cualquier momento; es un peligro inmediato, no algo que pueda esperar.</a:t>
-            </a:r>
-          </a:p>
-          <a:p>
-            <a:r>
-              <a:t>N1: ¿Y si el tubo toca la parte caliente del horno?</a:t>
-            </a:r>
-          </a:p>
-          <a:p>
-            <a:r>
-              <a:t>N2: Ese es el caso de la IPa cuatro: un tubo flexible de elastómero en contacto con las paredes calientes de un horno u otro aparato de cocción. El calor reseca y degrada la goma hasta que revienta, así que también es principal. La única salvedad es que la conexión tenga aislantes adecuados que impidan que el flexible toque la parte caliente; si están bien puestos, no es anomalía. Truco de campo: tubo roto o achicharrado por el horno, corto; es principal. Pero ojo, que el tubo flexible da también anomalías secundarias, y las vemos luego.</a:t>
+              <a:t>N1: ¿Por qué no puede haber un calentador en el baño o en el dormitorio?</a:t>
+            </a:r>
+          </a:p>
+          <a:p>
+            <a:r>
+              <a:t>N2: Esta es de las anomalías más preguntadas y de las que más matan, así que atención. Un aparato de tipo A o de tipo B, que son los que cogen el aire del propio local o evacuan los humos a él, no puede estar en un dormitorio ni en un baño, ducha o aseo. ¿La razón? Son estancias donde duermes o te encierras con la puerta cerrada. Si el aparato falla y suelta monóxido de carbono, ahí te intoxica sin que te des cuenta, porque estás dormido o aislado. Es intoxicación por CO esperando a pasar.</a:t>
+            </a:r>
+          </a:p>
+          <a:p>
+            <a:r>
+              <a:t>N1: ¿Y los aparatos estancos, los tipo C?</a:t>
+            </a:r>
+          </a:p>
+          <a:p>
+            <a:r>
+              <a:t>N2: Esos sí pueden, y esa es la clave. Un tipo C es estanco: coge el aire de fuera y echa los humos fuera, no intercambia aire con el cuarto. Como no respira el aire de la habitación ni le suelta humos, no hay riesgo de intoxicación por ese lado. Por eso la caldera estanca moderna sí puede ir en un baño y el viejo calentador de tiro natural no. Esta anomalía es principal: si te la encuentras, se corta. Y para no perderte, en el siguiente slide repasamos rápido los tipos de aparato.</a:t>
             </a:r>
           </a:p>
         </p:txBody>
@@ -947,22 +943,12 @@
           <a:lstStyle/>
           <a:p>
             <a:r>
-              <a:t>N1: ¿Qué problemas de la salida de humos son principales?</a:t>
-            </a:r>
-          </a:p>
-          <a:p>
-            <a:r>
-              <a:t>N2: La IPa cinco recoge las deficiencias apreciables en los conductos de evacuación de los aparatos de tipo B y tipo C. Son varias: que falte el conducto de evacuación; que falte o esté deteriorado el deflector; que el conducto desemboque en un local que no sea zona exterior; un diámetro menor del adecuado; una estrangulación; materiales que no resistan la temperatura de los humos; una evidente falta de estanquidad; y, solo en aparatos de tiro natural, bordear obstáculos bajando de cota en el trazado. Todas tienen un problema común: devuelven los humos al local, y con ellos el monóxido.</a:t>
-            </a:r>
-          </a:p>
-          <a:p>
-            <a:r>
-              <a:t>N1: ¿Qué es el deflector y por qué importa tanto?</a:t>
-            </a:r>
-          </a:p>
-          <a:p>
-            <a:r>
-              <a:t>N2: El deflector es la pieza del extremo del conducto, el sombrerete, que evita que el viento meta aire dentro del tubo y provoque revocos, es decir, que los humos se devuelvan. Si falta o está roto de forma que no cumple su función, el aparato puede echar los humos hacia dentro cuando sopla el viento. Por eso un deflector roto es la causa típica del revoco y por eso todo esto es anomalía principal: se corta.</a:t>
+              <a:t>N1: Una de las que más caen y más matan. ¿Qué aparato puede ir en un baño o un dormitorio?</a:t>
+            </a:r>
+          </a:p>
+          <a:p>
+            <a:r>
+              <a:t>N2: Piensa en cuál no respira el aire de la habitación ni le suelta humos.</a:t>
             </a:r>
           </a:p>
         </p:txBody>
@@ -1032,22 +1018,12 @@
           <a:lstStyle/>
           <a:p>
             <a:r>
-              <a:t>N1: ¿Qué más cuenta como principal en una vivienda?</a:t>
-            </a:r>
-          </a:p>
-          <a:p>
-            <a:r>
-              <a:t>N2: Tres casos más. La IPa seis: que un extractor mecánico, una campana de cocina o un aparato con ayuda a la evacuación estén conectados a la misma chimenea por donde salen los humos de un aparato de tipo B de tiro natural; el extractor le roba el tiro y puede devolver los humos. La IPa siete: un aparato de tipo B en un local de volumen igual o menor de ocho metros cúbicos que no tenga ventilación suficiente. Y la IPa ocho: llaves de aparato sin conectar que no estén cerradas, bloqueadas, precintadas y taponadas; si la llave no es bloqueable, al menos cerrada, precintada y taponada.</a:t>
-            </a:r>
-          </a:p>
-          <a:p>
-            <a:r>
-              <a:t>N1: ¿Por qué esos ocho metros cúbicos son la frontera?</a:t>
-            </a:r>
-          </a:p>
-          <a:p>
-            <a:r>
-              <a:t>N2: Fíjate en el detalle finísimo, que cae en el examen. Un tipo B mal ventilado es anomalía principal, que corta, si el local es pequeño, de ocho metros cúbicos o menos; y solo secundaria si el local es grande, de más de ocho. La lógica es clarísima: en un cuartito pequeño y mal ventilado, el monóxido se acumula deprisa y mata; en uno grande hay más margen de aire. Mismo defecto, distinta gravedad según el volumen. Ese ocho es un número de oro.</a:t>
+              <a:t>N1: ¿Por qué el tipo C sí y los otros no?</a:t>
+            </a:r>
+          </a:p>
+          <a:p>
+            <a:r>
+              <a:t>N2: Porque el tipo C es estanco: toma el aire del exterior y expulsa los humos al exterior, no toca el aire del cuarto. El tipo A y el tipo B respiran con el local, y en un sitio cerrado donde duermes o te encierras el monóxido te intoxica sin que te des cuenta. Por eso la caldera estanca moderna sí puede ir en un baño y el viejo calentador de tiro natural no.</a:t>
             </a:r>
           </a:p>
         </p:txBody>
@@ -1117,22 +1093,22 @@
           <a:lstStyle/>
           <a:p>
             <a:r>
-              <a:t>N1: ¿Qué defectos son secundarios pero hay que arreglar?</a:t>
-            </a:r>
-          </a:p>
-          <a:p>
-            <a:r>
-              <a:t>N2: Empezamos con la ISa uno, que es la pareja de la anterior: un aparato de tipo B mal ventilado, pero ahora en un local grande, de más de ocho metros cúbicos. Como hay más margen de aire, no obliga a cortar, es secundaria, seis meses. Y la ISa dos recoge lo «feo pero no urgente» del estado de conservación: materiales de tuberías, soportes, protecciones o uniones en mal estado, por ejemplo con corrosión manifiesta; llaves de corte en malas condiciones, que falten o no sean accesibles, sea la de usuario, la de vivienda o la de aparato; y el regulador de usuario o la válvula de seguridad por mínima presión en mal estado.</a:t>
-            </a:r>
-          </a:p>
-          <a:p>
-            <a:r>
-              <a:t>N1: Entonces, ¿el óxido no corta el gas?</a:t>
-            </a:r>
-          </a:p>
-          <a:p>
-            <a:r>
-              <a:t>N2: No por sí solo. La corrosión, una llave que no cierra o un regulador viejo son cosas que hay que arreglar, pero no son un peligro inmediato: van a seis meses. Ahora, mucho ojo con un matiz: si una llave que falta acabara provocando una fuga, ya no es este cajón de conservación, sino el de fuga, que en individual pequeña es principal. La fuga siempre manda. Guarda la idea: ISa dos es lo feo pero con plazo.</a:t>
+              <a:t>N1: ¿Me repasas los tipos de aparato sin líos?</a:t>
+            </a:r>
+          </a:p>
+          <a:p>
+            <a:r>
+              <a:t>N2: Claro, porque esta clasificación explica casi todas las anomalías de ventilación y evacuación, así que conviene tenerla clavada. Tipo A: no tiene conducto de evacuación, suelta los humos directamente al local. El ejemplo típico es una cocina de gas. Tipo B: coge el aire del propio local para quemar y evacúa los humos al exterior por un conducto. Piensa en un calentador o una caldera de tiro natural. Y tipo C: es estanco, coge el aire de fuera y echa los humos fuera; no intercambia aire con el local. Es la caldera estanca moderna.</a:t>
+            </a:r>
+          </a:p>
+          <a:p>
+            <a:r>
+              <a:t>N1: ¿Y cuál es el más seguro respecto al local?</a:t>
+            </a:r>
+          </a:p>
+          <a:p>
+            <a:r>
+              <a:t>N2: El tipo C, sin duda, porque no toca el aire de la habitación: ni se lo roba para quemar ni le mete humos. Por eso es el único que puede ir en sitios delicados como un baño. El tipo A y el tipo B sí «respiran» con el local, y ahí es donde aparecen los problemas de ventilación, de monóxido y de dónde se pueden colocar. Con esta chuleta de tres líneas entiendes el porqué de media Parte doce.</a:t>
             </a:r>
           </a:p>
         </p:txBody>
@@ -1202,22 +1178,22 @@
           <a:lstStyle/>
           <a:p>
             <a:r>
-              <a:t>N1: ¿No habíamos visto ya el tubo flexible?</a:t>
-            </a:r>
-          </a:p>
-          <a:p>
-            <a:r>
-              <a:t>N2: Sí, pero el tubo flexible es un clásico que reúne principales y secundarias, y conviene separarlas. Roto, con grietas o fisuras, es principal IPa tres, peligro inmediato. En cambio, son secundarias ISa tres: un tubo caducado; sin identificación o sin fecha de caducidad; más largo de lo permitido por la Norma; con la unión defectuosa o floja, con riesgo de que se desconecte fácil; sin enchufe de seguridad en gases de la segunda familia; o en contacto con partes calientes pero con horno que tenga aislamiento térmico adecuado. Todo eso va a seis meses.</a:t>
-            </a:r>
-          </a:p>
-          <a:p>
-            <a:r>
-              <a:t>N1: ¿Qué es el enchufe de seguridad?</a:t>
-            </a:r>
-          </a:p>
-          <a:p>
-            <a:r>
-              <a:t>N2: Es esa conexión rápida que corta el gas automáticamente si el tubo se suelta del aparato. Es obligatorio con el gas natural, que es la segunda familia. Si un tubo de gas natural no lo lleva, es anomalía secundaria. Truco que no falla: tubo roto, corto, principal; tubo viejo o mal puesto, plazo, secundaria. Y verifica siempre a mano que la unión está firme y no se suelta de un tirón.</a:t>
+              <a:t>N1: ¿Cuándo un tubo flexible es anomalía principal?</a:t>
+            </a:r>
+          </a:p>
+          <a:p>
+            <a:r>
+              <a:t>N2: Cuando está visiblemente dañado. Si un tubo flexible, ya sea de elastómero, o sea de goma, con o sin armadura, o uno espirometálico, presenta grietas, fisuras o daños, es anomalía principal IPa tres. ¿Por qué principal? Porque un tubo agrietado puede reventar y soltar gas en cualquier momento; es un peligro inmediato, no algo que pueda esperar.</a:t>
+            </a:r>
+          </a:p>
+          <a:p>
+            <a:r>
+              <a:t>N1: ¿Y si el tubo toca la parte caliente del horno?</a:t>
+            </a:r>
+          </a:p>
+          <a:p>
+            <a:r>
+              <a:t>N2: Ese es el caso de la IPa cuatro: un tubo flexible de elastómero en contacto con las paredes calientes de un horno u otro aparato de cocción. El calor reseca y degrada la goma hasta que revienta, así que también es principal. La única salvedad es que la conexión tenga aislantes adecuados que impidan que el flexible toque la parte caliente; si están bien puestos, no es anomalía. Truco de campo: tubo roto o achicharrado por el horno, corto; es principal. Pero ojo, que el tubo flexible da también anomalías secundarias, y las vemos luego.</a:t>
             </a:r>
           </a:p>
         </p:txBody>
@@ -1287,22 +1263,22 @@
           <a:lstStyle/>
           <a:p>
             <a:r>
-              <a:t>N1: ¿Cuándo la ventilación de un local es anomalía?</a:t>
-            </a:r>
-          </a:p>
-          <a:p>
-            <a:r>
-              <a:t>N2: La ISa cinco dice que es anomalía secundaria que falte el orificio de ventilación, salvo para aparatos de tipo C que no lo necesitan, o que el orificio sea insuficiente, esté obstruido o a una altura distinta de la que marca la norma. Pero hay unos números muy preguntables cuando en vez de orificio hay un extractor mecánico que comunica con el exterior. Su sección libre de paso, con el extractor parado, debe ser de al menos ochenta centímetros cuadrados cuando la suma de los aparatos de tipo A del local sea de dieciséis kilovatios o menos; y de al menos cien centímetros cuadrados cuando esa suma supere los dieciséis kilovatios.</a:t>
-            </a:r>
-          </a:p>
-          <a:p>
-            <a:r>
-              <a:t>N1: ¿Y la altura del extractor importa?</a:t>
-            </a:r>
-          </a:p>
-          <a:p>
-            <a:r>
-              <a:t>N2: Mucho, y también cae. El extremo inferior del extractor debe estar a una altura de un metro con ochenta o más respecto al suelo, o bien a menos de cuarenta centímetros del techo. La excepción: si está dentro de una campana extractora, no hay límite de altura. Memoriza el bloque: ochenta centímetros cuadrados hasta dieciséis kilovatios, cien por encima; y altura, uno con ochenta del suelo o menos de cuarenta del techo. Son cifras de examen puro.</a:t>
+              <a:t>N1: ¿Qué problemas de la salida de humos son principales?</a:t>
+            </a:r>
+          </a:p>
+          <a:p>
+            <a:r>
+              <a:t>N2: La IPa cinco recoge las deficiencias apreciables en los conductos de evacuación de los aparatos de tipo B y tipo C. Son varias: que falte el conducto de evacuación; que falte o esté deteriorado el deflector; que el conducto desemboque en un local que no sea zona exterior; un diámetro menor del adecuado; una estrangulación; materiales que no resistan la temperatura de los humos; una evidente falta de estanquidad; y, solo en aparatos de tiro natural, bordear obstáculos bajando de cota en el trazado. Todas tienen un problema común: devuelven los humos al local, y con ellos el monóxido.</a:t>
+            </a:r>
+          </a:p>
+          <a:p>
+            <a:r>
+              <a:t>N1: ¿Qué es el deflector y por qué importa tanto?</a:t>
+            </a:r>
+          </a:p>
+          <a:p>
+            <a:r>
+              <a:t>N2: El deflector es la pieza del extremo del conducto, el sombrerete, que evita que el viento meta aire dentro del tubo y provoque revocos, es decir, que los humos se devuelvan. Si falta o está roto de forma que no cumple su función, el aparato puede echar los humos hacia dentro cuando sopla el viento. Por eso un deflector roto es la causa típica del revoco y por eso todo esto es anomalía principal: se corta.</a:t>
             </a:r>
           </a:p>
         </p:txBody>
@@ -1372,22 +1348,22 @@
           <a:lstStyle/>
           <a:p>
             <a:r>
-              <a:t>N1: ¿Qué otras secundarias me quedan por ver en la vivienda?</a:t>
-            </a:r>
-          </a:p>
-          <a:p>
-            <a:r>
-              <a:t>N2: Tres que redondean el catálogo. La ISa seis: local con volumen insuficiente cuando el consumo total de los aparatos de cocción instalados supere los dieciséis kilovatios; si metes mucha potencia de cocción en un espacio pequeño, falta aire, y eso se valora según la Parte seis de la norma. La ISa siete: que falte el sistema de detección y corte de gas donde la norma lo exige; ese sistema es el que detecta una fuga y cierra solo. Y la ISa ocho: conducciones de otros servicios, como agua o electricidad, en contacto directo con las conducciones de gas.</a:t>
-            </a:r>
-          </a:p>
-          <a:p>
-            <a:r>
-              <a:t>N1: ¿Por qué molesta que un tubo de agua toque al del gas?</a:t>
-            </a:r>
-          </a:p>
-          <a:p>
-            <a:r>
-              <a:t>N2: Porque el contacto entre servicios distintos favorece problemas: corrosión donde se tocan un metal y otro, condensaciones, o que una corriente eléctrica de otra instalación llegue a la tubería de gas. Por eso las conducciones de gas deben ir separadas de las demás. Las tres son secundarias, seis meses, pero son defectos reales que un buen gasista anota sin pereza.</a:t>
+              <a:t>N1: ¿Qué más cuenta como principal en una vivienda?</a:t>
+            </a:r>
+          </a:p>
+          <a:p>
+            <a:r>
+              <a:t>N2: Tres casos más. La IPa seis: que un extractor mecánico, una campana de cocina o un aparato con ayuda a la evacuación estén conectados a la misma chimenea por donde salen los humos de un aparato de tipo B de tiro natural; el extractor le roba el tiro y puede devolver los humos. La IPa siete: un aparato de tipo B en un local de volumen igual o menor de ocho metros cúbicos que no tenga ventilación suficiente. Y la IPa ocho: llaves de aparato sin conectar que no estén cerradas, bloqueadas, precintadas y taponadas; si la llave no es bloqueable, al menos cerrada, precintada y taponada.</a:t>
+            </a:r>
+          </a:p>
+          <a:p>
+            <a:r>
+              <a:t>N1: ¿Por qué esos ocho metros cúbicos son la frontera?</a:t>
+            </a:r>
+          </a:p>
+          <a:p>
+            <a:r>
+              <a:t>N2: Fíjate en el detalle finísimo, que cae en el examen. Un tipo B mal ventilado es anomalía principal, que corta, si el local es pequeño, de ocho metros cúbicos o menos; y solo secundaria si el local es grande, de más de ocho. La lógica es clarísima: en un cuartito pequeño y mal ventilado, el monóxido se acumula deprisa y mata; en uno grande hay más margen de aire. Mismo defecto, distinta gravedad según el volumen. Ese ocho es un número de oro.</a:t>
             </a:r>
           </a:p>
         </p:txBody>
@@ -1532,22 +1508,12 @@
           <a:lstStyle/>
           <a:p>
             <a:r>
-              <a:t>N1: ¿Quién puede hacer y firmar este control periódico?</a:t>
-            </a:r>
-          </a:p>
-          <a:p>
-            <a:r>
-              <a:t>N2: Lo realiza y lo firma la empresa habilitada, es decir, la empresa instaladora de gas que lo tiene encomendado. No es algo que haga cualquiera: hace falta la habilitación. El documento que salga, el certificado si todo va bien o el informe de anomalías si hay defectos, se entrega al titular o usuario de la instalación, que es quien tiene que corregir y guardar el papel.</a:t>
-            </a:r>
-          </a:p>
-          <a:p>
-            <a:r>
-              <a:t>N1: ¿Y cuándo entra la distribuidora?</a:t>
-            </a:r>
-          </a:p>
-          <a:p>
-            <a:r>
-              <a:t>N2: Cuando hay anomalías principales o la instalación queda no apta para uso, se informa a la empresa distribuidora, igual que veíamos en la Parte once. Recuerda el reparto: tú inspeccionas y firmas; el usuario recibe y corrige; la distribuidora se entera de lo grave y maneja la acometida y el cese. Y sin ese papel, la revisión no existe: es la prueba de que se hizo y de lo que se encontró. El papeleo, siempre claro.</a:t>
+              <a:t>N1: Del número de oro del vídeo. Tipo B mal ventilado en un cuartito de ocho metros cúbicos o menos. ¿Principal o secundaria?</a:t>
+            </a:r>
+          </a:p>
+          <a:p>
+            <a:r>
+              <a:t>N2: Fíjate en el volumen del local: pequeño y mal ventilado no perdona.</a:t>
             </a:r>
           </a:p>
         </p:txBody>
@@ -1617,6 +1583,506 @@
           <a:lstStyle/>
           <a:p>
             <a:r>
+              <a:t>N1: ¿Por qué principal en el local pequeño?</a:t>
+            </a:r>
+          </a:p>
+          <a:p>
+            <a:r>
+              <a:t>N2: Porque en un cuartito de ocho metros cúbicos o menos, mal ventilado, el monóxido se acumula deprisa y mata; por eso es principal y se corta. Si el local fuera grande, de más de ocho, el mismo defecto sería solo secundario. Mismo defecto, distinta gravedad según el volumen.</a:t>
+            </a:r>
+          </a:p>
+        </p:txBody>
+      </p:sp>
+      <p:sp>
+        <p:nvSpPr>
+          <p:cNvPr id="4" name="Slide Number Placeholder 3"/>
+          <p:cNvSpPr>
+            <a:spLocks noGrp="1"/>
+          </p:cNvSpPr>
+          <p:nvPr>
+            <p:ph type="sldNum" idx="5" sz="quarter"/>
+          </p:nvPr>
+        </p:nvSpPr>
+        <p:spPr/>
+      </p:sp>
+    </p:spTree>
+  </p:cSld>
+  <p:clrMapOvr>
+    <a:masterClrMapping/>
+  </p:clrMapOvr>
+</p:notes>
+</file>
+
+<file path=ppt/notesSlides/notesSlide22.xml><?xml version="1.0" encoding="utf-8"?>
+<p:notes xmlns:a="http://schemas.openxmlformats.org/drawingml/2006/main" xmlns:p="http://schemas.openxmlformats.org/presentationml/2006/main" xmlns:r="http://schemas.openxmlformats.org/officeDocument/2006/relationships">
+  <p:cSld>
+    <p:spTree>
+      <p:nvGrpSpPr>
+        <p:cNvPr id="1" name=""/>
+        <p:cNvGrpSpPr/>
+        <p:nvPr/>
+      </p:nvGrpSpPr>
+      <p:grpSpPr>
+        <a:xfrm>
+          <a:off x="0" y="0"/>
+          <a:ext cx="0" cy="0"/>
+          <a:chOff x="0" y="0"/>
+          <a:chExt cx="0" cy="0"/>
+        </a:xfrm>
+      </p:grpSpPr>
+      <p:sp>
+        <p:nvSpPr>
+          <p:cNvPr id="2" name="Slide Image Placeholder 1"/>
+          <p:cNvSpPr>
+            <a:spLocks noGrp="1"/>
+          </p:cNvSpPr>
+          <p:nvPr>
+            <p:ph type="sldImg" idx="2"/>
+          </p:nvPr>
+        </p:nvSpPr>
+        <p:spPr/>
+      </p:sp>
+      <p:sp>
+        <p:nvSpPr>
+          <p:cNvPr id="3" name="Notes Placeholder 2"/>
+          <p:cNvSpPr>
+            <a:spLocks noGrp="1"/>
+          </p:cNvSpPr>
+          <p:nvPr>
+            <p:ph type="body" idx="3" sz="quarter"/>
+          </p:nvPr>
+        </p:nvSpPr>
+        <p:spPr/>
+        <p:txBody>
+          <a:bodyPr/>
+          <a:lstStyle/>
+          <a:p>
+            <a:r>
+              <a:t>N1: ¿Qué defectos son secundarios pero hay que arreglar?</a:t>
+            </a:r>
+          </a:p>
+          <a:p>
+            <a:r>
+              <a:t>N2: Empezamos con la ISa uno, que es la pareja de la anterior: un aparato de tipo B mal ventilado, pero ahora en un local grande, de más de ocho metros cúbicos. Como hay más margen de aire, no obliga a cortar, es secundaria, seis meses. Y la ISa dos recoge lo «feo pero no urgente» del estado de conservación: materiales de tuberías, soportes, protecciones o uniones en mal estado, por ejemplo con corrosión manifiesta; llaves de corte en malas condiciones, que falten o no sean accesibles, sea la de usuario, la de vivienda o la de aparato; y el regulador de usuario o la válvula de seguridad por mínima presión en mal estado.</a:t>
+            </a:r>
+          </a:p>
+          <a:p>
+            <a:r>
+              <a:t>N1: Entonces, ¿el óxido no corta el gas?</a:t>
+            </a:r>
+          </a:p>
+          <a:p>
+            <a:r>
+              <a:t>N2: No por sí solo. La corrosión, una llave que no cierra o un regulador viejo son cosas que hay que arreglar, pero no son un peligro inmediato: van a seis meses. Ahora, mucho ojo con un matiz: si una llave que falta acabara provocando una fuga, ya no es este cajón de conservación, sino el de fuga, que en individual pequeña es principal. La fuga siempre manda. Guarda la idea: ISa dos es lo feo pero con plazo.</a:t>
+            </a:r>
+          </a:p>
+        </p:txBody>
+      </p:sp>
+      <p:sp>
+        <p:nvSpPr>
+          <p:cNvPr id="4" name="Slide Number Placeholder 3"/>
+          <p:cNvSpPr>
+            <a:spLocks noGrp="1"/>
+          </p:cNvSpPr>
+          <p:nvPr>
+            <p:ph type="sldNum" idx="5" sz="quarter"/>
+          </p:nvPr>
+        </p:nvSpPr>
+        <p:spPr/>
+      </p:sp>
+    </p:spTree>
+  </p:cSld>
+  <p:clrMapOvr>
+    <a:masterClrMapping/>
+  </p:clrMapOvr>
+</p:notes>
+</file>
+
+<file path=ppt/notesSlides/notesSlide23.xml><?xml version="1.0" encoding="utf-8"?>
+<p:notes xmlns:a="http://schemas.openxmlformats.org/drawingml/2006/main" xmlns:p="http://schemas.openxmlformats.org/presentationml/2006/main" xmlns:r="http://schemas.openxmlformats.org/officeDocument/2006/relationships">
+  <p:cSld>
+    <p:spTree>
+      <p:nvGrpSpPr>
+        <p:cNvPr id="1" name=""/>
+        <p:cNvGrpSpPr/>
+        <p:nvPr/>
+      </p:nvGrpSpPr>
+      <p:grpSpPr>
+        <a:xfrm>
+          <a:off x="0" y="0"/>
+          <a:ext cx="0" cy="0"/>
+          <a:chOff x="0" y="0"/>
+          <a:chExt cx="0" cy="0"/>
+        </a:xfrm>
+      </p:grpSpPr>
+      <p:sp>
+        <p:nvSpPr>
+          <p:cNvPr id="2" name="Slide Image Placeholder 1"/>
+          <p:cNvSpPr>
+            <a:spLocks noGrp="1"/>
+          </p:cNvSpPr>
+          <p:nvPr>
+            <p:ph type="sldImg" idx="2"/>
+          </p:nvPr>
+        </p:nvSpPr>
+        <p:spPr/>
+      </p:sp>
+      <p:sp>
+        <p:nvSpPr>
+          <p:cNvPr id="3" name="Notes Placeholder 2"/>
+          <p:cNvSpPr>
+            <a:spLocks noGrp="1"/>
+          </p:cNvSpPr>
+          <p:nvPr>
+            <p:ph type="body" idx="3" sz="quarter"/>
+          </p:nvPr>
+        </p:nvSpPr>
+        <p:spPr/>
+        <p:txBody>
+          <a:bodyPr/>
+          <a:lstStyle/>
+          <a:p>
+            <a:r>
+              <a:t>N1: ¿No habíamos visto ya el tubo flexible?</a:t>
+            </a:r>
+          </a:p>
+          <a:p>
+            <a:r>
+              <a:t>N2: Sí, pero el tubo flexible es un clásico que reúne principales y secundarias, y conviene separarlas. Roto, con grietas o fisuras, es principal IPa tres, peligro inmediato. En cambio, son secundarias ISa tres: un tubo caducado; sin identificación o sin fecha de caducidad; más largo de lo permitido por la Norma; con la unión defectuosa o floja, con riesgo de que se desconecte fácil; sin enchufe de seguridad en gases de la segunda familia; o en contacto con partes calientes pero con horno que tenga aislamiento térmico adecuado. Todo eso va a seis meses.</a:t>
+            </a:r>
+          </a:p>
+          <a:p>
+            <a:r>
+              <a:t>N1: ¿Qué es el enchufe de seguridad?</a:t>
+            </a:r>
+          </a:p>
+          <a:p>
+            <a:r>
+              <a:t>N2: Es esa conexión rápida que corta el gas automáticamente si el tubo se suelta del aparato. Es obligatorio con el gas natural, que es la segunda familia. Si un tubo de gas natural no lo lleva, es anomalía secundaria. Truco que no falla: tubo roto, corto, principal; tubo viejo o mal puesto, plazo, secundaria. Y verifica siempre a mano que la unión está firme y no se suelta de un tirón.</a:t>
+            </a:r>
+          </a:p>
+        </p:txBody>
+      </p:sp>
+      <p:sp>
+        <p:nvSpPr>
+          <p:cNvPr id="4" name="Slide Number Placeholder 3"/>
+          <p:cNvSpPr>
+            <a:spLocks noGrp="1"/>
+          </p:cNvSpPr>
+          <p:nvPr>
+            <p:ph type="sldNum" idx="5" sz="quarter"/>
+          </p:nvPr>
+        </p:nvSpPr>
+        <p:spPr/>
+      </p:sp>
+    </p:spTree>
+  </p:cSld>
+  <p:clrMapOvr>
+    <a:masterClrMapping/>
+  </p:clrMapOvr>
+</p:notes>
+</file>
+
+<file path=ppt/notesSlides/notesSlide24.xml><?xml version="1.0" encoding="utf-8"?>
+<p:notes xmlns:a="http://schemas.openxmlformats.org/drawingml/2006/main" xmlns:p="http://schemas.openxmlformats.org/presentationml/2006/main" xmlns:r="http://schemas.openxmlformats.org/officeDocument/2006/relationships">
+  <p:cSld>
+    <p:spTree>
+      <p:nvGrpSpPr>
+        <p:cNvPr id="1" name=""/>
+        <p:cNvGrpSpPr/>
+        <p:nvPr/>
+      </p:nvGrpSpPr>
+      <p:grpSpPr>
+        <a:xfrm>
+          <a:off x="0" y="0"/>
+          <a:ext cx="0" cy="0"/>
+          <a:chOff x="0" y="0"/>
+          <a:chExt cx="0" cy="0"/>
+        </a:xfrm>
+      </p:grpSpPr>
+      <p:sp>
+        <p:nvSpPr>
+          <p:cNvPr id="2" name="Slide Image Placeholder 1"/>
+          <p:cNvSpPr>
+            <a:spLocks noGrp="1"/>
+          </p:cNvSpPr>
+          <p:nvPr>
+            <p:ph type="sldImg" idx="2"/>
+          </p:nvPr>
+        </p:nvSpPr>
+        <p:spPr/>
+      </p:sp>
+      <p:sp>
+        <p:nvSpPr>
+          <p:cNvPr id="3" name="Notes Placeholder 2"/>
+          <p:cNvSpPr>
+            <a:spLocks noGrp="1"/>
+          </p:cNvSpPr>
+          <p:nvPr>
+            <p:ph type="body" idx="3" sz="quarter"/>
+          </p:nvPr>
+        </p:nvSpPr>
+        <p:spPr/>
+        <p:txBody>
+          <a:bodyPr/>
+          <a:lstStyle/>
+          <a:p>
+            <a:r>
+              <a:t>N1: ¿Cuándo la ventilación de un local es anomalía?</a:t>
+            </a:r>
+          </a:p>
+          <a:p>
+            <a:r>
+              <a:t>N2: La ISa cinco dice que es anomalía secundaria que falte el orificio de ventilación, salvo para aparatos de tipo C que no lo necesitan, o que el orificio sea insuficiente, esté obstruido o a una altura distinta de la que marca la norma. Pero hay unos números muy preguntables cuando en vez de orificio hay un extractor mecánico que comunica con el exterior. Su sección libre de paso, con el extractor parado, debe ser de al menos ochenta centímetros cuadrados cuando la suma de los aparatos de tipo A del local sea de dieciséis kilovatios o menos; y de al menos cien centímetros cuadrados cuando esa suma supere los dieciséis kilovatios.</a:t>
+            </a:r>
+          </a:p>
+          <a:p>
+            <a:r>
+              <a:t>N1: ¿Y la altura del extractor importa?</a:t>
+            </a:r>
+          </a:p>
+          <a:p>
+            <a:r>
+              <a:t>N2: Mucho, y también cae. El extremo inferior del extractor debe estar a una altura de un metro con ochenta o más respecto al suelo, o bien a menos de cuarenta centímetros del techo. La excepción: si está dentro de una campana extractora, no hay límite de altura. Memoriza el bloque: ochenta centímetros cuadrados hasta dieciséis kilovatios, cien por encima; y altura, uno con ochenta del suelo o menos de cuarenta del techo. Son cifras de examen puro.</a:t>
+            </a:r>
+          </a:p>
+        </p:txBody>
+      </p:sp>
+      <p:sp>
+        <p:nvSpPr>
+          <p:cNvPr id="4" name="Slide Number Placeholder 3"/>
+          <p:cNvSpPr>
+            <a:spLocks noGrp="1"/>
+          </p:cNvSpPr>
+          <p:nvPr>
+            <p:ph type="sldNum" idx="5" sz="quarter"/>
+          </p:nvPr>
+        </p:nvSpPr>
+        <p:spPr/>
+      </p:sp>
+    </p:spTree>
+  </p:cSld>
+  <p:clrMapOvr>
+    <a:masterClrMapping/>
+  </p:clrMapOvr>
+</p:notes>
+</file>
+
+<file path=ppt/notesSlides/notesSlide25.xml><?xml version="1.0" encoding="utf-8"?>
+<p:notes xmlns:a="http://schemas.openxmlformats.org/drawingml/2006/main" xmlns:p="http://schemas.openxmlformats.org/presentationml/2006/main" xmlns:r="http://schemas.openxmlformats.org/officeDocument/2006/relationships">
+  <p:cSld>
+    <p:spTree>
+      <p:nvGrpSpPr>
+        <p:cNvPr id="1" name=""/>
+        <p:cNvGrpSpPr/>
+        <p:nvPr/>
+      </p:nvGrpSpPr>
+      <p:grpSpPr>
+        <a:xfrm>
+          <a:off x="0" y="0"/>
+          <a:ext cx="0" cy="0"/>
+          <a:chOff x="0" y="0"/>
+          <a:chExt cx="0" cy="0"/>
+        </a:xfrm>
+      </p:grpSpPr>
+      <p:sp>
+        <p:nvSpPr>
+          <p:cNvPr id="2" name="Slide Image Placeholder 1"/>
+          <p:cNvSpPr>
+            <a:spLocks noGrp="1"/>
+          </p:cNvSpPr>
+          <p:nvPr>
+            <p:ph type="sldImg" idx="2"/>
+          </p:nvPr>
+        </p:nvSpPr>
+        <p:spPr/>
+      </p:sp>
+      <p:sp>
+        <p:nvSpPr>
+          <p:cNvPr id="3" name="Notes Placeholder 2"/>
+          <p:cNvSpPr>
+            <a:spLocks noGrp="1"/>
+          </p:cNvSpPr>
+          <p:nvPr>
+            <p:ph type="body" idx="3" sz="quarter"/>
+          </p:nvPr>
+        </p:nvSpPr>
+        <p:spPr/>
+        <p:txBody>
+          <a:bodyPr/>
+          <a:lstStyle/>
+          <a:p>
+            <a:r>
+              <a:t>N1: ¿Qué otras secundarias me quedan por ver en la vivienda?</a:t>
+            </a:r>
+          </a:p>
+          <a:p>
+            <a:r>
+              <a:t>N2: Tres que redondean el catálogo. La ISa seis: local con volumen insuficiente cuando el consumo total de los aparatos de cocción instalados supere los dieciséis kilovatios; si metes mucha potencia de cocción en un espacio pequeño, falta aire, y eso se valora según la Parte seis de la norma. La ISa siete: que falte el sistema de detección y corte de gas donde la norma lo exige; ese sistema es el que detecta una fuga y cierra solo. Y la ISa ocho: conducciones de otros servicios, como agua o electricidad, en contacto directo con las conducciones de gas.</a:t>
+            </a:r>
+          </a:p>
+          <a:p>
+            <a:r>
+              <a:t>N1: ¿Por qué molesta que un tubo de agua toque al del gas?</a:t>
+            </a:r>
+          </a:p>
+          <a:p>
+            <a:r>
+              <a:t>N2: Porque el contacto entre servicios distintos favorece problemas: corrosión donde se tocan un metal y otro, condensaciones, o que una corriente eléctrica de otra instalación llegue a la tubería de gas. Por eso las conducciones de gas deben ir separadas de las demás. Las tres son secundarias, seis meses, pero son defectos reales que un buen gasista anota sin pereza.</a:t>
+            </a:r>
+          </a:p>
+        </p:txBody>
+      </p:sp>
+      <p:sp>
+        <p:nvSpPr>
+          <p:cNvPr id="4" name="Slide Number Placeholder 3"/>
+          <p:cNvSpPr>
+            <a:spLocks noGrp="1"/>
+          </p:cNvSpPr>
+          <p:nvPr>
+            <p:ph type="sldNum" idx="5" sz="quarter"/>
+          </p:nvPr>
+        </p:nvSpPr>
+        <p:spPr/>
+      </p:sp>
+    </p:spTree>
+  </p:cSld>
+  <p:clrMapOvr>
+    <a:masterClrMapping/>
+  </p:clrMapOvr>
+</p:notes>
+</file>
+
+<file path=ppt/notesSlides/notesSlide26.xml><?xml version="1.0" encoding="utf-8"?>
+<p:notes xmlns:a="http://schemas.openxmlformats.org/drawingml/2006/main" xmlns:p="http://schemas.openxmlformats.org/presentationml/2006/main" xmlns:r="http://schemas.openxmlformats.org/officeDocument/2006/relationships">
+  <p:cSld>
+    <p:spTree>
+      <p:nvGrpSpPr>
+        <p:cNvPr id="1" name=""/>
+        <p:cNvGrpSpPr/>
+        <p:nvPr/>
+      </p:nvGrpSpPr>
+      <p:grpSpPr>
+        <a:xfrm>
+          <a:off x="0" y="0"/>
+          <a:ext cx="0" cy="0"/>
+          <a:chOff x="0" y="0"/>
+          <a:chExt cx="0" cy="0"/>
+        </a:xfrm>
+      </p:grpSpPr>
+      <p:sp>
+        <p:nvSpPr>
+          <p:cNvPr id="2" name="Slide Image Placeholder 1"/>
+          <p:cNvSpPr>
+            <a:spLocks noGrp="1"/>
+          </p:cNvSpPr>
+          <p:nvPr>
+            <p:ph type="sldImg" idx="2"/>
+          </p:nvPr>
+        </p:nvSpPr>
+        <p:spPr/>
+      </p:sp>
+      <p:sp>
+        <p:nvSpPr>
+          <p:cNvPr id="3" name="Notes Placeholder 2"/>
+          <p:cNvSpPr>
+            <a:spLocks noGrp="1"/>
+          </p:cNvSpPr>
+          <p:nvPr>
+            <p:ph type="body" idx="3" sz="quarter"/>
+          </p:nvPr>
+        </p:nvSpPr>
+        <p:spPr/>
+        <p:txBody>
+          <a:bodyPr/>
+          <a:lstStyle/>
+          <a:p>
+            <a:r>
+              <a:t>N1: ¿Quién puede hacer y firmar este control periódico?</a:t>
+            </a:r>
+          </a:p>
+          <a:p>
+            <a:r>
+              <a:t>N2: Lo realiza y lo firma la empresa habilitada, es decir, la empresa instaladora de gas que lo tiene encomendado. No es algo que haga cualquiera: hace falta la habilitación. El documento que salga, el certificado si todo va bien o el informe de anomalías si hay defectos, se entrega al titular o usuario de la instalación, que es quien tiene que corregir y guardar el papel.</a:t>
+            </a:r>
+          </a:p>
+          <a:p>
+            <a:r>
+              <a:t>N1: ¿Y cuándo entra la distribuidora?</a:t>
+            </a:r>
+          </a:p>
+          <a:p>
+            <a:r>
+              <a:t>N2: Cuando hay anomalías principales o la instalación queda no apta para uso, se informa a la empresa distribuidora, igual que veíamos en la Parte once. Recuerda el reparto: tú inspeccionas y firmas; el usuario recibe y corrige; la distribuidora se entera de lo grave y maneja la acometida y el cese. Y sin ese papel, la revisión no existe: es la prueba de que se hizo y de lo que se encontró. El papeleo, siempre claro.</a:t>
+            </a:r>
+          </a:p>
+        </p:txBody>
+      </p:sp>
+      <p:sp>
+        <p:nvSpPr>
+          <p:cNvPr id="4" name="Slide Number Placeholder 3"/>
+          <p:cNvSpPr>
+            <a:spLocks noGrp="1"/>
+          </p:cNvSpPr>
+          <p:nvPr>
+            <p:ph type="sldNum" idx="5" sz="quarter"/>
+          </p:nvPr>
+        </p:nvSpPr>
+        <p:spPr/>
+      </p:sp>
+    </p:spTree>
+  </p:cSld>
+  <p:clrMapOvr>
+    <a:masterClrMapping/>
+  </p:clrMapOvr>
+</p:notes>
+</file>
+
+<file path=ppt/notesSlides/notesSlide27.xml><?xml version="1.0" encoding="utf-8"?>
+<p:notes xmlns:a="http://schemas.openxmlformats.org/drawingml/2006/main" xmlns:p="http://schemas.openxmlformats.org/presentationml/2006/main" xmlns:r="http://schemas.openxmlformats.org/officeDocument/2006/relationships">
+  <p:cSld>
+    <p:spTree>
+      <p:nvGrpSpPr>
+        <p:cNvPr id="1" name=""/>
+        <p:cNvGrpSpPr/>
+        <p:nvPr/>
+      </p:nvGrpSpPr>
+      <p:grpSpPr>
+        <a:xfrm>
+          <a:off x="0" y="0"/>
+          <a:ext cx="0" cy="0"/>
+          <a:chOff x="0" y="0"/>
+          <a:chExt cx="0" cy="0"/>
+        </a:xfrm>
+      </p:grpSpPr>
+      <p:sp>
+        <p:nvSpPr>
+          <p:cNvPr id="2" name="Slide Image Placeholder 1"/>
+          <p:cNvSpPr>
+            <a:spLocks noGrp="1"/>
+          </p:cNvSpPr>
+          <p:nvPr>
+            <p:ph type="sldImg" idx="2"/>
+          </p:nvPr>
+        </p:nvSpPr>
+        <p:spPr/>
+      </p:sp>
+      <p:sp>
+        <p:nvSpPr>
+          <p:cNvPr id="3" name="Notes Placeholder 2"/>
+          <p:cNvSpPr>
+            <a:spLocks noGrp="1"/>
+          </p:cNvSpPr>
+          <p:nvPr>
+            <p:ph type="body" idx="3" sz="quarter"/>
+          </p:nvPr>
+        </p:nvSpPr>
+        <p:spPr/>
+        <p:txBody>
+          <a:bodyPr/>
+          <a:lstStyle/>
+          <a:p>
+            <a:r>
               <a:t>N1: Hagamos el resumen grande. ¿Qué me llevo de la Parte doce en vivienda?</a:t>
             </a:r>
           </a:p>
@@ -2193,22 +2659,12 @@
           <a:lstStyle/>
           <a:p>
             <a:r>
-              <a:t>N1: ¿Qué es una instalación individual de setenta kilovatios o menos?</a:t>
-            </a:r>
-          </a:p>
-          <a:p>
-            <a:r>
-              <a:t>N2: Es el caso doméstico de toda la vida: la instalación de una vivienda o un pequeño comercio, con su caldera, su calentador y su cocina, cuya potencia útil nominal no pasa de setenta kilovatios. Es lo que más te vas a encontrar, con diferencia. Por eso la norma le dedica un catálogo completo de anomalías, que es el que vamos a recorrer.</a:t>
-            </a:r>
-          </a:p>
-          <a:p>
-            <a:r>
-              <a:t>N1: ¿Y esos códigos con letras qué son?</a:t>
-            </a:r>
-          </a:p>
-          <a:p>
-            <a:r>
-              <a:t>N2: Son la forma de nombrar cada anomalía para entenderse en los informes. En las individuales pequeñas, las principales llevan el código IPa y las secundarias el código ISa. La i de individual, la p de principal o la s de secundaria, y la a que las distingue de las grandes, que llevarán b en el siguiente vídeo. No te agobies con memorizar códigos: lo importante es saber qué defecto es principal, o sea que corta, y cuál es secundario, o sea con plazo.</a:t>
+              <a:t>N1: De plazos, que son de examen seguro. Una anomalía secundaria, pero que resulta ser una fuga. ¿Cuánto margen hay?</a:t>
+            </a:r>
+          </a:p>
+          <a:p>
+            <a:r>
+              <a:t>N2: Recuerda que la fuga siempre aprieta el plazo, aunque se considere secundaria.</a:t>
             </a:r>
           </a:p>
         </p:txBody>
@@ -5294,7 +5750,7 @@
       </p:sp>
       <p:sp>
         <p:nvSpPr>
-          <p:cNvPr id="4" name="Rounded Rectangle 3"/>
+          <p:cNvPr id="4" name="Rectangle 3"/>
           <p:cNvSpPr/>
           <p:nvPr/>
         </p:nvSpPr>
@@ -5303,7 +5759,7 @@
             <a:off x="868680" y="2057400"/>
             <a:ext cx="1463040" cy="82296"/>
           </a:xfrm>
-          <a:prstGeom prst="roundRect">
+          <a:prstGeom prst="rect">
             <a:avLst/>
           </a:prstGeom>
           <a:solidFill>
@@ -5420,6 +5876,18 @@
   <p:clrMapOvr>
     <a:masterClrMapping/>
   </p:clrMapOvr>
+  <mc:AlternateContent xmlns:mc="http://schemas.openxmlformats.org/markup-compatibility/2006">
+    <mc:Choice xmlns:p14="http://schemas.microsoft.com/office/powerpoint/2010/main" Requires="p14">
+      <p:transition spd="med" p14:dur="700">
+        <p14:cube dir="l"/>
+      </p:transition>
+    </mc:Choice>
+    <mc:Fallback>
+      <p:transition spd="med">
+        <p:push dir="l"/>
+      </p:transition>
+    </mc:Fallback>
+  </mc:AlternateContent>
 </p:sld>
 </file>
 
@@ -5507,7 +5975,7 @@
                 </a:solidFill>
                 <a:latin typeface="Montserrat"/>
               </a:rPr>
-              <a:t>010 / 021</a:t>
+              <a:t>010 / 027</a:t>
             </a:r>
           </a:p>
         </p:txBody>
@@ -5548,88 +6016,20 @@
       </p:sp>
       <p:sp>
         <p:nvSpPr>
-          <p:cNvPr id="5" name="TextBox 4"/>
-          <p:cNvSpPr txBox="1"/>
-          <p:nvPr/>
-        </p:nvSpPr>
-        <p:spPr>
-          <a:xfrm>
-            <a:off x="822960" y="457200"/>
-            <a:ext cx="10058400" cy="365760"/>
-          </a:xfrm>
-          <a:prstGeom prst="rect">
-            <a:avLst/>
-          </a:prstGeom>
-          <a:noFill/>
-        </p:spPr>
-        <p:txBody>
-          <a:bodyPr wrap="square">
-            <a:spAutoFit/>
-          </a:bodyPr>
-          <a:lstStyle/>
-          <a:p>
-            <a:r>
-              <a:rPr sz="1300" b="1" i="0">
-                <a:solidFill>
-                  <a:srgbClr val="E8801A"/>
-                </a:solidFill>
-                <a:latin typeface="Montserrat"/>
-              </a:rPr>
-              <a:t>PARTE 12 · IPA-1</a:t>
-            </a:r>
-          </a:p>
-        </p:txBody>
-      </p:sp>
-      <p:sp>
-        <p:nvSpPr>
-          <p:cNvPr id="6" name="TextBox 5"/>
-          <p:cNvSpPr txBox="1"/>
-          <p:nvPr/>
-        </p:nvSpPr>
-        <p:spPr>
-          <a:xfrm>
-            <a:off x="822960" y="868680"/>
-            <a:ext cx="10515600" cy="914400"/>
-          </a:xfrm>
-          <a:prstGeom prst="rect">
-            <a:avLst/>
-          </a:prstGeom>
-          <a:noFill/>
-        </p:spPr>
-        <p:txBody>
-          <a:bodyPr wrap="square">
-            <a:spAutoFit/>
-          </a:bodyPr>
-          <a:lstStyle/>
-          <a:p>
-            <a:r>
-              <a:rPr sz="2800" b="1" i="0">
-                <a:solidFill>
-                  <a:srgbClr val="1E2761"/>
-                </a:solidFill>
-                <a:latin typeface="Montserrat"/>
-              </a:rPr>
-              <a:t>Fuga de gas: siempre no apta</a:t>
-            </a:r>
-          </a:p>
-        </p:txBody>
-      </p:sp>
-      <p:sp>
-        <p:nvSpPr>
-          <p:cNvPr id="7" name="Rounded Rectangle 6"/>
+          <p:cNvPr id="5" name="Rectangle 4"/>
           <p:cNvSpPr/>
           <p:nvPr/>
         </p:nvSpPr>
         <p:spPr>
           <a:xfrm>
-            <a:off x="868680" y="1627632"/>
-            <a:ext cx="2011680" cy="73152"/>
-          </a:xfrm>
-          <a:prstGeom prst="roundRect">
+            <a:off x="0" y="0"/>
+            <a:ext cx="12191695" cy="1143000"/>
+          </a:xfrm>
+          <a:prstGeom prst="rect">
             <a:avLst/>
           </a:prstGeom>
           <a:solidFill>
-            <a:srgbClr val="E8801A"/>
+            <a:srgbClr val="1E8E4B"/>
           </a:solidFill>
           <a:ln>
             <a:noFill/>
@@ -5660,14 +6060,14 @@
       </p:sp>
       <p:sp>
         <p:nvSpPr>
-          <p:cNvPr id="8" name="TextBox 7"/>
+          <p:cNvPr id="6" name="TextBox 5"/>
           <p:cNvSpPr txBox="1"/>
           <p:nvPr/>
         </p:nvSpPr>
         <p:spPr>
           <a:xfrm>
-            <a:off x="822960" y="1965960"/>
-            <a:ext cx="4983480" cy="4206240"/>
+            <a:off x="822960" y="274320"/>
+            <a:ext cx="10515600" cy="640080"/>
           </a:xfrm>
           <a:prstGeom prst="rect">
             <a:avLst/>
@@ -5680,127 +6080,72 @@
           </a:bodyPr>
           <a:lstStyle/>
           <a:p>
-            <a:pPr>
-              <a:spcAft>
-                <a:spcPts val="1100"/>
-              </a:spcAft>
-            </a:pPr>
-            <a:r>
-              <a:rPr sz="1600" b="1" i="0">
-                <a:solidFill>
-                  <a:srgbClr val="E8801A"/>
-                </a:solidFill>
-                <a:latin typeface="Montserrat"/>
-              </a:rPr>
-              <a:t>▸  </a:t>
-            </a:r>
-            <a:r>
-              <a:rPr sz="1600" b="0" i="0">
-                <a:solidFill>
-                  <a:srgbClr val="1B2330"/>
-                </a:solidFill>
-                <a:latin typeface="Montserrat"/>
-              </a:rPr>
-              <a:t>Comprobar estanquidad (métodos 6.1)</a:t>
-            </a:r>
-          </a:p>
-          <a:p>
-            <a:pPr>
-              <a:spcAft>
-                <a:spcPts val="1100"/>
-              </a:spcAft>
-            </a:pPr>
-            <a:r>
-              <a:rPr sz="1600" b="1" i="0">
-                <a:solidFill>
-                  <a:srgbClr val="E8801A"/>
-                </a:solidFill>
-                <a:latin typeface="Montserrat"/>
-              </a:rPr>
-              <a:t>▸  </a:t>
-            </a:r>
-            <a:r>
-              <a:rPr sz="1600" b="0" i="0">
-                <a:solidFill>
-                  <a:srgbClr val="1B2330"/>
-                </a:solidFill>
-                <a:latin typeface="Montserrat"/>
-              </a:rPr>
-              <a:t>Si hay fuga: siempre no apta</a:t>
-            </a:r>
-          </a:p>
-          <a:p>
-            <a:pPr>
-              <a:spcAft>
-                <a:spcPts val="1100"/>
-              </a:spcAft>
-            </a:pPr>
-            <a:r>
-              <a:rPr sz="1600" b="1" i="0">
-                <a:solidFill>
-                  <a:srgbClr val="E8801A"/>
-                </a:solidFill>
-                <a:latin typeface="Montserrat"/>
-              </a:rPr>
-              <a:t>▸  </a:t>
-            </a:r>
-            <a:r>
-              <a:rPr sz="1600" b="0" i="0">
-                <a:solidFill>
-                  <a:srgbClr val="1B2330"/>
-                </a:solidFill>
-                <a:latin typeface="Montserrat"/>
-              </a:rPr>
-              <a:t>Anomalía principal IPa-1</a:t>
-            </a:r>
-          </a:p>
-          <a:p>
-            <a:pPr>
-              <a:spcAft>
-                <a:spcPts val="1100"/>
-              </a:spcAft>
-            </a:pPr>
-            <a:r>
-              <a:rPr sz="1600" b="1" i="0">
-                <a:solidFill>
-                  <a:srgbClr val="E8801A"/>
-                </a:solidFill>
-                <a:latin typeface="Montserrat"/>
-              </a:rPr>
-              <a:t>▸  </a:t>
-            </a:r>
-            <a:r>
-              <a:rPr sz="1600" b="0" i="0">
-                <a:solidFill>
-                  <a:srgbClr val="1B2330"/>
-                </a:solidFill>
-                <a:latin typeface="Montserrat"/>
-              </a:rPr>
-              <a:t>Tramo aéreo exterior: criterios &gt; 70 kW</a:t>
-            </a:r>
-          </a:p>
-        </p:txBody>
-      </p:sp>
-      <p:sp>
-        <p:nvSpPr>
-          <p:cNvPr id="9" name="imgph" descr="IMGQ:soapy water leak test on gas fitting bubbles"/>
+            <a:r>
+              <a:rPr sz="2400" b="1" i="0">
+                <a:solidFill>
+                  <a:srgbClr val="FFFFFF"/>
+                </a:solidFill>
+                <a:latin typeface="Montserrat"/>
+              </a:rPr>
+              <a:t>✔  RESPUESTA:  B</a:t>
+            </a:r>
+          </a:p>
+        </p:txBody>
+      </p:sp>
+      <p:sp>
+        <p:nvSpPr>
+          <p:cNvPr id="7" name="TextBox 6"/>
+          <p:cNvSpPr txBox="1"/>
+          <p:nvPr/>
+        </p:nvSpPr>
+        <p:spPr>
+          <a:xfrm>
+            <a:off x="822960" y="1417320"/>
+            <a:ext cx="10515600" cy="914400"/>
+          </a:xfrm>
+          <a:prstGeom prst="rect">
+            <a:avLst/>
+          </a:prstGeom>
+          <a:noFill/>
+        </p:spPr>
+        <p:txBody>
+          <a:bodyPr wrap="square">
+            <a:spAutoFit/>
+          </a:bodyPr>
+          <a:lstStyle/>
+          <a:p>
+            <a:r>
+              <a:rPr sz="1800" b="1" i="0">
+                <a:solidFill>
+                  <a:srgbClr val="64748B"/>
+                </a:solidFill>
+                <a:latin typeface="Montserrat"/>
+              </a:rPr>
+              <a:t>Una anomalía secundaria consistente en una falta de estanquidad (fuga). ¿En qué plazo debe corregirse?</a:t>
+            </a:r>
+          </a:p>
+        </p:txBody>
+      </p:sp>
+      <p:sp>
+        <p:nvSpPr>
+          <p:cNvPr id="8" name="Rounded Rectangle 7"/>
           <p:cNvSpPr/>
           <p:nvPr/>
         </p:nvSpPr>
         <p:spPr>
           <a:xfrm>
-            <a:off x="5806440" y="1051560"/>
-            <a:ext cx="5298947" cy="4629150"/>
+            <a:off x="822960" y="2514600"/>
+            <a:ext cx="10515600" cy="914400"/>
           </a:xfrm>
           <a:prstGeom prst="roundRect">
             <a:avLst/>
           </a:prstGeom>
           <a:solidFill>
-            <a:srgbClr val="F3F6FB"/>
+            <a:srgbClr val="E9F6EE"/>
           </a:solidFill>
           <a:ln w="12700">
             <a:solidFill>
-              <a:srgbClr val="C7D2E6"/>
+              <a:srgbClr val="1E8E4B"/>
             </a:solidFill>
           </a:ln>
           <a:effectLst/>
@@ -5829,14 +6174,14 @@
       </p:sp>
       <p:sp>
         <p:nvSpPr>
-          <p:cNvPr id="10" name="TextBox 9"/>
+          <p:cNvPr id="9" name="TextBox 8"/>
           <p:cNvSpPr txBox="1"/>
           <p:nvPr/>
         </p:nvSpPr>
         <p:spPr>
           <a:xfrm>
-            <a:off x="6080760" y="2726055"/>
-            <a:ext cx="4750307" cy="1280160"/>
+            <a:off x="1097280" y="2697480"/>
+            <a:ext cx="10058400" cy="640080"/>
           </a:xfrm>
           <a:prstGeom prst="rect">
             <a:avLst/>
@@ -5849,27 +6194,66 @@
           </a:bodyPr>
           <a:lstStyle/>
           <a:p>
-            <a:pPr algn="ctr"/>
-            <a:r>
-              <a:rPr sz="1400" b="1" i="0">
-                <a:solidFill>
-                  <a:srgbClr val="64748B"/>
-                </a:solidFill>
-                <a:latin typeface="Montserrat"/>
-              </a:rPr>
-              <a:t>IMAGEN REALISTA</a:t>
-            </a:r>
-          </a:p>
-          <a:p>
-            <a:pPr algn="ctr"/>
-            <a:r>
-              <a:rPr sz="1100" b="0" i="1">
-                <a:solidFill>
-                  <a:srgbClr val="64748B"/>
-                </a:solidFill>
-                <a:latin typeface="Montserrat"/>
-              </a:rPr>
-              <a:t>soapy water leak test on gas fitting bubbles</a:t>
+            <a:r>
+              <a:rPr sz="1800" b="1" i="0">
+                <a:solidFill>
+                  <a:srgbClr val="1E8E4B"/>
+                </a:solidFill>
+                <a:latin typeface="Montserrat"/>
+              </a:rPr>
+              <a:t>B.  </a:t>
+            </a:r>
+            <a:r>
+              <a:rPr sz="1800" b="1" i="0">
+                <a:solidFill>
+                  <a:srgbClr val="1E2761"/>
+                </a:solidFill>
+                <a:latin typeface="Montserrat"/>
+              </a:rPr>
+              <a:t>En menos de quince días naturales</a:t>
+            </a:r>
+          </a:p>
+        </p:txBody>
+      </p:sp>
+      <p:sp>
+        <p:nvSpPr>
+          <p:cNvPr id="10" name="TextBox 9"/>
+          <p:cNvSpPr txBox="1"/>
+          <p:nvPr/>
+        </p:nvSpPr>
+        <p:spPr>
+          <a:xfrm>
+            <a:off x="822960" y="3749039"/>
+            <a:ext cx="10515600" cy="2194560"/>
+          </a:xfrm>
+          <a:prstGeom prst="rect">
+            <a:avLst/>
+          </a:prstGeom>
+          <a:noFill/>
+        </p:spPr>
+        <p:txBody>
+          <a:bodyPr wrap="square">
+            <a:spAutoFit/>
+          </a:bodyPr>
+          <a:lstStyle/>
+          <a:p>
+            <a:r>
+              <a:rPr sz="1500" b="1" i="0">
+                <a:solidFill>
+                  <a:srgbClr val="E8801A"/>
+                </a:solidFill>
+                <a:latin typeface="Montserrat"/>
+              </a:rPr>
+              <a:t>Por qué:  </a:t>
+            </a:r>
+            <a:r>
+              <a:rPr sz="1500" b="0" i="0">
+                <a:solidFill>
+                  <a:srgbClr val="1B2330"/>
+                </a:solidFill>
+                <a:latin typeface="Montserrat"/>
+              </a:rPr>
+              <a:t>La secundaria general tiene seis meses, pero si es una fuga el plazo baja a menos de quince días naturales.</a:t>
             </a:r>
           </a:p>
         </p:txBody>
@@ -5879,6 +6263,18 @@
   <p:clrMapOvr>
     <a:masterClrMapping/>
   </p:clrMapOvr>
+  <mc:AlternateContent xmlns:mc="http://schemas.openxmlformats.org/markup-compatibility/2006">
+    <mc:Choice xmlns:p14="http://schemas.microsoft.com/office/powerpoint/2010/main" Requires="p14">
+      <p:transition spd="med" p14:dur="700">
+        <p14:cube dir="r"/>
+      </p:transition>
+    </mc:Choice>
+    <mc:Fallback>
+      <p:transition spd="med">
+        <p:push dir="r"/>
+      </p:transition>
+    </mc:Fallback>
+  </mc:AlternateContent>
 </p:sld>
 </file>
 
@@ -5966,7 +6362,7 @@
                 </a:solidFill>
                 <a:latin typeface="Montserrat"/>
               </a:rPr>
-              <a:t>011 / 021</a:t>
+              <a:t>011 / 027</a:t>
             </a:r>
           </a:p>
         </p:txBody>
@@ -6034,7 +6430,7 @@
                 </a:solidFill>
                 <a:latin typeface="Montserrat"/>
               </a:rPr>
-              <a:t>PARTE 12 · IPA-2</a:t>
+              <a:t>PARTE 12 · APARTADO 3</a:t>
             </a:r>
           </a:p>
         </p:txBody>
@@ -6068,14 +6464,14 @@
                 </a:solidFill>
                 <a:latin typeface="Montserrat"/>
               </a:rPr>
-              <a:t>Nada de tipo A o B en dormitorio ni baño</a:t>
-            </a:r>
-          </a:p>
-        </p:txBody>
-      </p:sp>
-      <p:sp>
-        <p:nvSpPr>
-          <p:cNvPr id="7" name="Rounded Rectangle 6"/>
+              <a:t>Individuales ≤ 70 kW</a:t>
+            </a:r>
+          </a:p>
+        </p:txBody>
+      </p:sp>
+      <p:sp>
+        <p:nvSpPr>
+          <p:cNvPr id="7" name="Rectangle 6"/>
           <p:cNvSpPr/>
           <p:nvPr/>
         </p:nvSpPr>
@@ -6084,7 +6480,7 @@
             <a:off x="868680" y="1627632"/>
             <a:ext cx="2011680" cy="73152"/>
           </a:xfrm>
-          <a:prstGeom prst="roundRect">
+          <a:prstGeom prst="rect">
             <a:avLst/>
           </a:prstGeom>
           <a:solidFill>
@@ -6125,8 +6521,8 @@
         </p:nvSpPr>
         <p:spPr>
           <a:xfrm>
-            <a:off x="822960" y="1965960"/>
-            <a:ext cx="4983480" cy="4206240"/>
+            <a:off x="6355080" y="1965960"/>
+            <a:ext cx="5029200" cy="4206240"/>
           </a:xfrm>
           <a:prstGeom prst="rect">
             <a:avLst/>
@@ -6160,7 +6556,7 @@
                 </a:solidFill>
                 <a:latin typeface="Montserrat"/>
               </a:rPr>
-              <a:t>Prohibido en dormitorio</a:t>
+              <a:t>El caso doméstico habitual</a:t>
             </a:r>
           </a:p>
           <a:p>
@@ -6185,7 +6581,7 @@
                 </a:solidFill>
                 <a:latin typeface="Montserrat"/>
               </a:rPr>
-              <a:t>Prohibido en baño, ducha o aseo</a:t>
+              <a:t>Códigos IPa: anomalías principales</a:t>
             </a:r>
           </a:p>
           <a:p>
@@ -6210,46 +6606,21 @@
                 </a:solidFill>
                 <a:latin typeface="Montserrat"/>
               </a:rPr>
-              <a:t>Los tipo C (estancos) sí pueden</a:t>
-            </a:r>
-          </a:p>
-          <a:p>
-            <a:pPr>
-              <a:spcAft>
-                <a:spcPts val="1100"/>
-              </a:spcAft>
-            </a:pPr>
-            <a:r>
-              <a:rPr sz="1600" b="1" i="0">
-                <a:solidFill>
-                  <a:srgbClr val="E8801A"/>
-                </a:solidFill>
-                <a:latin typeface="Montserrat"/>
-              </a:rPr>
-              <a:t>▸  </a:t>
-            </a:r>
-            <a:r>
-              <a:rPr sz="1600" b="0" i="0">
-                <a:solidFill>
-                  <a:srgbClr val="1B2330"/>
-                </a:solidFill>
-                <a:latin typeface="Montserrat"/>
-              </a:rPr>
-              <a:t>Anomalía principal: se corta</a:t>
-            </a:r>
-          </a:p>
-        </p:txBody>
-      </p:sp>
-      <p:sp>
-        <p:nvSpPr>
-          <p:cNvPr id="9" name="imgph" descr="IMGQ:gas water heater in bathroom hazard"/>
+              <a:t>Códigos ISa: anomalías secundarias</a:t>
+            </a:r>
+          </a:p>
+        </p:txBody>
+      </p:sp>
+      <p:sp>
+        <p:nvSpPr>
+          <p:cNvPr id="9" name="imgph" descr="IMGQ:domestic gas boiler wall mounted apartment"/>
           <p:cNvSpPr/>
           <p:nvPr/>
         </p:nvSpPr>
         <p:spPr>
           <a:xfrm>
-            <a:off x="5806440" y="1051560"/>
-            <a:ext cx="5298947" cy="4629150"/>
+            <a:off x="822960" y="1965960"/>
+            <a:ext cx="5303520" cy="4572000"/>
           </a:xfrm>
           <a:prstGeom prst="roundRect">
             <a:avLst/>
@@ -6294,8 +6665,8 @@
         </p:nvSpPr>
         <p:spPr>
           <a:xfrm>
-            <a:off x="6080760" y="2726055"/>
-            <a:ext cx="4750307" cy="1280160"/>
+            <a:off x="1097280" y="3611880"/>
+            <a:ext cx="4754880" cy="1280160"/>
           </a:xfrm>
           <a:prstGeom prst="rect">
             <a:avLst/>
@@ -6316,7 +6687,7 @@
                 </a:solidFill>
                 <a:latin typeface="Montserrat"/>
               </a:rPr>
-              <a:t>IMAGEN REALISTA</a:t>
+              <a:t>IMAGEN</a:t>
             </a:r>
           </a:p>
           <a:p>
@@ -6328,7 +6699,7 @@
                 </a:solidFill>
                 <a:latin typeface="Montserrat"/>
               </a:rPr>
-              <a:t>gas water heater in bathroom hazard</a:t>
+              <a:t>domestic gas boiler wall mounted apartment</a:t>
             </a:r>
           </a:p>
         </p:txBody>
@@ -6338,6 +6709,18 @@
   <p:clrMapOvr>
     <a:masterClrMapping/>
   </p:clrMapOvr>
+  <mc:AlternateContent xmlns:mc="http://schemas.openxmlformats.org/markup-compatibility/2006">
+    <mc:Choice xmlns:p14="http://schemas.microsoft.com/office/powerpoint/2010/main" Requires="p14">
+      <p:transition spd="med" p14:dur="700">
+        <p14:cube dir="l"/>
+      </p:transition>
+    </mc:Choice>
+    <mc:Fallback>
+      <p:transition spd="med">
+        <p:push dir="l"/>
+      </p:transition>
+    </mc:Fallback>
+  </mc:AlternateContent>
 </p:sld>
 </file>
 
@@ -6425,7 +6808,7 @@
                 </a:solidFill>
                 <a:latin typeface="Montserrat"/>
               </a:rPr>
-              <a:t>012 / 021</a:t>
+              <a:t>012 / 027</a:t>
             </a:r>
           </a:p>
         </p:txBody>
@@ -6493,7 +6876,7 @@
                 </a:solidFill>
                 <a:latin typeface="Montserrat"/>
               </a:rPr>
-              <a:t>REPASO CLAVE</a:t>
+              <a:t>PARTE 12 · IPA-1</a:t>
             </a:r>
           </a:p>
         </p:txBody>
@@ -6527,14 +6910,14 @@
                 </a:solidFill>
                 <a:latin typeface="Montserrat"/>
               </a:rPr>
-              <a:t>Tipos de aparato A, B y C</a:t>
-            </a:r>
-          </a:p>
-        </p:txBody>
-      </p:sp>
-      <p:sp>
-        <p:nvSpPr>
-          <p:cNvPr id="7" name="Rounded Rectangle 6"/>
+              <a:t>Fuga de gas: siempre no apta</a:t>
+            </a:r>
+          </a:p>
+        </p:txBody>
+      </p:sp>
+      <p:sp>
+        <p:nvSpPr>
+          <p:cNvPr id="7" name="Rectangle 6"/>
           <p:cNvSpPr/>
           <p:nvPr/>
         </p:nvSpPr>
@@ -6543,7 +6926,7 @@
             <a:off x="868680" y="1627632"/>
             <a:ext cx="2011680" cy="73152"/>
           </a:xfrm>
-          <a:prstGeom prst="roundRect">
+          <a:prstGeom prst="rect">
             <a:avLst/>
           </a:prstGeom>
           <a:solidFill>
@@ -6585,7 +6968,7 @@
         <p:spPr>
           <a:xfrm>
             <a:off x="822960" y="1965960"/>
-            <a:ext cx="4983480" cy="4206240"/>
+            <a:ext cx="5029200" cy="4206240"/>
           </a:xfrm>
           <a:prstGeom prst="rect">
             <a:avLst/>
@@ -6619,7 +7002,7 @@
                 </a:solidFill>
                 <a:latin typeface="Montserrat"/>
               </a:rPr>
-              <a:t>Tipo A: suelta los humos al local</a:t>
+              <a:t>Comprobar estanquidad (métodos 6.1)</a:t>
             </a:r>
           </a:p>
           <a:p>
@@ -6644,7 +7027,7 @@
                 </a:solidFill>
                 <a:latin typeface="Montserrat"/>
               </a:rPr>
-              <a:t>Tipo B: aire del local, humos fuera</a:t>
+              <a:t>Si hay fuga: siempre no apta</a:t>
             </a:r>
           </a:p>
           <a:p>
@@ -6669,21 +7052,46 @@
                 </a:solidFill>
                 <a:latin typeface="Montserrat"/>
               </a:rPr>
-              <a:t>Tipo C: estanco, aire y humos de fuera</a:t>
-            </a:r>
-          </a:p>
-        </p:txBody>
-      </p:sp>
-      <p:sp>
-        <p:nvSpPr>
-          <p:cNvPr id="9" name="imgph" descr="IMGQ:modern sealed gas boiler flue outside wall"/>
+              <a:t>Anomalía principal IPa-1</a:t>
+            </a:r>
+          </a:p>
+          <a:p>
+            <a:pPr>
+              <a:spcAft>
+                <a:spcPts val="1100"/>
+              </a:spcAft>
+            </a:pPr>
+            <a:r>
+              <a:rPr sz="1600" b="1" i="0">
+                <a:solidFill>
+                  <a:srgbClr val="E8801A"/>
+                </a:solidFill>
+                <a:latin typeface="Montserrat"/>
+              </a:rPr>
+              <a:t>▸  </a:t>
+            </a:r>
+            <a:r>
+              <a:rPr sz="1600" b="0" i="0">
+                <a:solidFill>
+                  <a:srgbClr val="1B2330"/>
+                </a:solidFill>
+                <a:latin typeface="Montserrat"/>
+              </a:rPr>
+              <a:t>Tramo aéreo exterior: criterios &gt; 70 kW</a:t>
+            </a:r>
+          </a:p>
+        </p:txBody>
+      </p:sp>
+      <p:sp>
+        <p:nvSpPr>
+          <p:cNvPr id="9" name="imgph" descr="IMGQ:soapy water leak test on gas fitting bubbles"/>
           <p:cNvSpPr/>
           <p:nvPr/>
         </p:nvSpPr>
         <p:spPr>
           <a:xfrm>
-            <a:off x="5806440" y="1051560"/>
-            <a:ext cx="5298947" cy="4629150"/>
+            <a:off x="6080760" y="1965960"/>
+            <a:ext cx="5303520" cy="4572000"/>
           </a:xfrm>
           <a:prstGeom prst="roundRect">
             <a:avLst/>
@@ -6728,8 +7136,8 @@
         </p:nvSpPr>
         <p:spPr>
           <a:xfrm>
-            <a:off x="6080760" y="2726055"/>
-            <a:ext cx="4750307" cy="1280160"/>
+            <a:off x="6355080" y="3611880"/>
+            <a:ext cx="4754880" cy="1280160"/>
           </a:xfrm>
           <a:prstGeom prst="rect">
             <a:avLst/>
@@ -6750,7 +7158,7 @@
                 </a:solidFill>
                 <a:latin typeface="Montserrat"/>
               </a:rPr>
-              <a:t>IMAGEN REALISTA</a:t>
+              <a:t>IMAGEN</a:t>
             </a:r>
           </a:p>
           <a:p>
@@ -6762,7 +7170,7 @@
                 </a:solidFill>
                 <a:latin typeface="Montserrat"/>
               </a:rPr>
-              <a:t>modern sealed gas boiler flue outside wall</a:t>
+              <a:t>soapy water leak test on gas fitting bubbles</a:t>
             </a:r>
           </a:p>
         </p:txBody>
@@ -6772,6 +7180,18 @@
   <p:clrMapOvr>
     <a:masterClrMapping/>
   </p:clrMapOvr>
+  <mc:AlternateContent xmlns:mc="http://schemas.openxmlformats.org/markup-compatibility/2006">
+    <mc:Choice xmlns:p14="http://schemas.microsoft.com/office/powerpoint/2010/main" Requires="p14">
+      <p:transition spd="med" p14:dur="700">
+        <p14:cube dir="r"/>
+      </p:transition>
+    </mc:Choice>
+    <mc:Fallback>
+      <p:transition spd="med">
+        <p:push dir="r"/>
+      </p:transition>
+    </mc:Fallback>
+  </mc:AlternateContent>
 </p:sld>
 </file>
 
@@ -6859,7 +7279,7 @@
                 </a:solidFill>
                 <a:latin typeface="Montserrat"/>
               </a:rPr>
-              <a:t>013 / 021</a:t>
+              <a:t>013 / 027</a:t>
             </a:r>
           </a:p>
         </p:txBody>
@@ -6927,7 +7347,7 @@
                 </a:solidFill>
                 <a:latin typeface="Montserrat"/>
               </a:rPr>
-              <a:t>PARTE 12 · IPA-3 Y IPA-4</a:t>
+              <a:t>PARTE 12 · IPA-2</a:t>
             </a:r>
           </a:p>
         </p:txBody>
@@ -6961,14 +7381,14 @@
                 </a:solidFill>
                 <a:latin typeface="Montserrat"/>
               </a:rPr>
-              <a:t>Tubo flexible dañado o quemado</a:t>
-            </a:r>
-          </a:p>
-        </p:txBody>
-      </p:sp>
-      <p:sp>
-        <p:nvSpPr>
-          <p:cNvPr id="7" name="Rounded Rectangle 6"/>
+              <a:t>Nada de tipo A o B en dormitorio ni baño</a:t>
+            </a:r>
+          </a:p>
+        </p:txBody>
+      </p:sp>
+      <p:sp>
+        <p:nvSpPr>
+          <p:cNvPr id="7" name="Rectangle 6"/>
           <p:cNvSpPr/>
           <p:nvPr/>
         </p:nvSpPr>
@@ -6977,7 +7397,7 @@
             <a:off x="868680" y="1627632"/>
             <a:ext cx="2011680" cy="73152"/>
           </a:xfrm>
-          <a:prstGeom prst="roundRect">
+          <a:prstGeom prst="rect">
             <a:avLst/>
           </a:prstGeom>
           <a:solidFill>
@@ -7018,8 +7438,8 @@
         </p:nvSpPr>
         <p:spPr>
           <a:xfrm>
-            <a:off x="822960" y="1965960"/>
-            <a:ext cx="4983480" cy="4206240"/>
+            <a:off x="6355080" y="1965960"/>
+            <a:ext cx="5029200" cy="4206240"/>
           </a:xfrm>
           <a:prstGeom prst="rect">
             <a:avLst/>
@@ -7053,7 +7473,7 @@
                 </a:solidFill>
                 <a:latin typeface="Montserrat"/>
               </a:rPr>
-              <a:t>Grietas, fisuras o daños: principal IPa-3</a:t>
+              <a:t>Prohibido en dormitorio</a:t>
             </a:r>
           </a:p>
           <a:p>
@@ -7078,7 +7498,7 @@
                 </a:solidFill>
                 <a:latin typeface="Montserrat"/>
               </a:rPr>
-              <a:t>Elastómero o espirometálico</a:t>
+              <a:t>Prohibido en baño, ducha o aseo</a:t>
             </a:r>
           </a:p>
           <a:p>
@@ -7103,7 +7523,7 @@
                 </a:solidFill>
                 <a:latin typeface="Montserrat"/>
               </a:rPr>
-              <a:t>Pegado a partes calientes del horno: IPa-4</a:t>
+              <a:t>Los tipo C (estancos) sí pueden</a:t>
             </a:r>
           </a:p>
           <a:p>
@@ -7128,21 +7548,21 @@
                 </a:solidFill>
                 <a:latin typeface="Montserrat"/>
               </a:rPr>
-              <a:t>Salvo aislante que impida el contacto</a:t>
-            </a:r>
-          </a:p>
-        </p:txBody>
-      </p:sp>
-      <p:sp>
-        <p:nvSpPr>
-          <p:cNvPr id="9" name="imgph" descr="IMGQ:damaged cracked rubber gas hose connection"/>
+              <a:t>Anomalía principal: se corta</a:t>
+            </a:r>
+          </a:p>
+        </p:txBody>
+      </p:sp>
+      <p:sp>
+        <p:nvSpPr>
+          <p:cNvPr id="9" name="imgph" descr="IMGQ:gas water heater in bathroom hazard"/>
           <p:cNvSpPr/>
           <p:nvPr/>
         </p:nvSpPr>
         <p:spPr>
           <a:xfrm>
-            <a:off x="5806440" y="1051560"/>
-            <a:ext cx="5298947" cy="4629150"/>
+            <a:off x="822960" y="1965960"/>
+            <a:ext cx="5303520" cy="4572000"/>
           </a:xfrm>
           <a:prstGeom prst="roundRect">
             <a:avLst/>
@@ -7187,8 +7607,8 @@
         </p:nvSpPr>
         <p:spPr>
           <a:xfrm>
-            <a:off x="6080760" y="2726055"/>
-            <a:ext cx="4750307" cy="1280160"/>
+            <a:off x="1097280" y="3611880"/>
+            <a:ext cx="4754880" cy="1280160"/>
           </a:xfrm>
           <a:prstGeom prst="rect">
             <a:avLst/>
@@ -7209,7 +7629,7 @@
                 </a:solidFill>
                 <a:latin typeface="Montserrat"/>
               </a:rPr>
-              <a:t>IMAGEN REALISTA</a:t>
+              <a:t>IMAGEN</a:t>
             </a:r>
           </a:p>
           <a:p>
@@ -7221,7 +7641,7 @@
                 </a:solidFill>
                 <a:latin typeface="Montserrat"/>
               </a:rPr>
-              <a:t>damaged cracked rubber gas hose connection</a:t>
+              <a:t>gas water heater in bathroom hazard</a:t>
             </a:r>
           </a:p>
         </p:txBody>
@@ -7231,6 +7651,18 @@
   <p:clrMapOvr>
     <a:masterClrMapping/>
   </p:clrMapOvr>
+  <mc:AlternateContent xmlns:mc="http://schemas.openxmlformats.org/markup-compatibility/2006">
+    <mc:Choice xmlns:p14="http://schemas.microsoft.com/office/powerpoint/2010/main" Requires="p14">
+      <p:transition spd="med" p14:dur="700">
+        <p14:cube dir="l"/>
+      </p:transition>
+    </mc:Choice>
+    <mc:Fallback>
+      <p:transition spd="med">
+        <p:push dir="l"/>
+      </p:transition>
+    </mc:Fallback>
+  </mc:AlternateContent>
 </p:sld>
 </file>
 
@@ -7318,7 +7750,7 @@
                 </a:solidFill>
                 <a:latin typeface="Montserrat"/>
               </a:rPr>
-              <a:t>014 / 021</a:t>
+              <a:t>014 / 027</a:t>
             </a:r>
           </a:p>
         </p:txBody>
@@ -7359,84 +7791,16 @@
       </p:sp>
       <p:sp>
         <p:nvSpPr>
-          <p:cNvPr id="5" name="TextBox 4"/>
-          <p:cNvSpPr txBox="1"/>
-          <p:nvPr/>
-        </p:nvSpPr>
-        <p:spPr>
-          <a:xfrm>
-            <a:off x="822960" y="457200"/>
-            <a:ext cx="10058400" cy="365760"/>
-          </a:xfrm>
-          <a:prstGeom prst="rect">
-            <a:avLst/>
-          </a:prstGeom>
-          <a:noFill/>
-        </p:spPr>
-        <p:txBody>
-          <a:bodyPr wrap="square">
-            <a:spAutoFit/>
-          </a:bodyPr>
-          <a:lstStyle/>
-          <a:p>
-            <a:r>
-              <a:rPr sz="1300" b="1" i="0">
-                <a:solidFill>
-                  <a:srgbClr val="E8801A"/>
-                </a:solidFill>
-                <a:latin typeface="Montserrat"/>
-              </a:rPr>
-              <a:t>PARTE 12 · IPA-5</a:t>
-            </a:r>
-          </a:p>
-        </p:txBody>
-      </p:sp>
-      <p:sp>
-        <p:nvSpPr>
-          <p:cNvPr id="6" name="TextBox 5"/>
-          <p:cNvSpPr txBox="1"/>
-          <p:nvPr/>
-        </p:nvSpPr>
-        <p:spPr>
-          <a:xfrm>
-            <a:off x="822960" y="868680"/>
-            <a:ext cx="10515600" cy="914400"/>
-          </a:xfrm>
-          <a:prstGeom prst="rect">
-            <a:avLst/>
-          </a:prstGeom>
-          <a:noFill/>
-        </p:spPr>
-        <p:txBody>
-          <a:bodyPr wrap="square">
-            <a:spAutoFit/>
-          </a:bodyPr>
-          <a:lstStyle/>
-          <a:p>
-            <a:r>
-              <a:rPr sz="2800" b="1" i="0">
-                <a:solidFill>
-                  <a:srgbClr val="1E2761"/>
-                </a:solidFill>
-                <a:latin typeface="Montserrat"/>
-              </a:rPr>
-              <a:t>Conductos de evacuación y deflector</a:t>
-            </a:r>
-          </a:p>
-        </p:txBody>
-      </p:sp>
-      <p:sp>
-        <p:nvSpPr>
-          <p:cNvPr id="7" name="Rounded Rectangle 6"/>
+          <p:cNvPr id="5" name="Rectangle 4"/>
           <p:cNvSpPr/>
           <p:nvPr/>
         </p:nvSpPr>
         <p:spPr>
           <a:xfrm>
-            <a:off x="868680" y="1627632"/>
-            <a:ext cx="2011680" cy="73152"/>
-          </a:xfrm>
-          <a:prstGeom prst="roundRect">
+            <a:off x="0" y="0"/>
+            <a:ext cx="12191695" cy="1143000"/>
+          </a:xfrm>
+          <a:prstGeom prst="rect">
             <a:avLst/>
           </a:prstGeom>
           <a:solidFill>
@@ -7471,14 +7835,14 @@
       </p:sp>
       <p:sp>
         <p:nvSpPr>
-          <p:cNvPr id="8" name="TextBox 7"/>
+          <p:cNvPr id="6" name="TextBox 5"/>
           <p:cNvSpPr txBox="1"/>
           <p:nvPr/>
         </p:nvSpPr>
         <p:spPr>
           <a:xfrm>
-            <a:off x="822960" y="1965960"/>
-            <a:ext cx="4983480" cy="4206240"/>
+            <a:off x="822960" y="274320"/>
+            <a:ext cx="10515600" cy="640080"/>
           </a:xfrm>
           <a:prstGeom prst="rect">
             <a:avLst/>
@@ -7491,117 +7855,62 @@
           </a:bodyPr>
           <a:lstStyle/>
           <a:p>
-            <a:pPr>
-              <a:spcAft>
-                <a:spcPts val="1100"/>
-              </a:spcAft>
-            </a:pPr>
-            <a:r>
-              <a:rPr sz="1600" b="1" i="0">
-                <a:solidFill>
-                  <a:srgbClr val="E8801A"/>
-                </a:solidFill>
-                <a:latin typeface="Montserrat"/>
-              </a:rPr>
-              <a:t>▸  </a:t>
-            </a:r>
-            <a:r>
-              <a:rPr sz="1600" b="0" i="0">
-                <a:solidFill>
-                  <a:srgbClr val="1B2330"/>
-                </a:solidFill>
-                <a:latin typeface="Montserrat"/>
-              </a:rPr>
-              <a:t>Falta de conducto o de deflector</a:t>
-            </a:r>
-          </a:p>
-          <a:p>
-            <a:pPr>
-              <a:spcAft>
-                <a:spcPts val="1100"/>
-              </a:spcAft>
-            </a:pPr>
-            <a:r>
-              <a:rPr sz="1600" b="1" i="0">
-                <a:solidFill>
-                  <a:srgbClr val="E8801A"/>
-                </a:solidFill>
-                <a:latin typeface="Montserrat"/>
-              </a:rPr>
-              <a:t>▸  </a:t>
-            </a:r>
-            <a:r>
-              <a:rPr sz="1600" b="0" i="0">
-                <a:solidFill>
-                  <a:srgbClr val="1B2330"/>
-                </a:solidFill>
-                <a:latin typeface="Montserrat"/>
-              </a:rPr>
-              <a:t>Diámetro escaso o estrangulación</a:t>
-            </a:r>
-          </a:p>
-          <a:p>
-            <a:pPr>
-              <a:spcAft>
-                <a:spcPts val="1100"/>
-              </a:spcAft>
-            </a:pPr>
-            <a:r>
-              <a:rPr sz="1600" b="1" i="0">
-                <a:solidFill>
-                  <a:srgbClr val="E8801A"/>
-                </a:solidFill>
-                <a:latin typeface="Montserrat"/>
-              </a:rPr>
-              <a:t>▸  </a:t>
-            </a:r>
-            <a:r>
-              <a:rPr sz="1600" b="0" i="0">
-                <a:solidFill>
-                  <a:srgbClr val="1B2330"/>
-                </a:solidFill>
-                <a:latin typeface="Montserrat"/>
-              </a:rPr>
-              <a:t>Materiales que no aguantan la temperatura</a:t>
-            </a:r>
-          </a:p>
-          <a:p>
-            <a:pPr>
-              <a:spcAft>
-                <a:spcPts val="1100"/>
-              </a:spcAft>
-            </a:pPr>
-            <a:r>
-              <a:rPr sz="1600" b="1" i="0">
-                <a:solidFill>
-                  <a:srgbClr val="E8801A"/>
-                </a:solidFill>
-                <a:latin typeface="Montserrat"/>
-              </a:rPr>
-              <a:t>▸  </a:t>
-            </a:r>
-            <a:r>
-              <a:rPr sz="1600" b="0" i="0">
-                <a:solidFill>
-                  <a:srgbClr val="1B2330"/>
-                </a:solidFill>
-                <a:latin typeface="Montserrat"/>
-              </a:rPr>
-              <a:t>Devuelven los humos al local: principal</a:t>
-            </a:r>
-          </a:p>
-        </p:txBody>
-      </p:sp>
-      <p:sp>
-        <p:nvSpPr>
-          <p:cNvPr id="9" name="imgph" descr="IMGQ:damaged flue chimney cap on roof"/>
+            <a:r>
+              <a:rPr sz="2400" b="1" i="0">
+                <a:solidFill>
+                  <a:srgbClr val="FFFFFF"/>
+                </a:solidFill>
+                <a:latin typeface="Montserrat"/>
+              </a:rPr>
+              <a:t>⚡  PREGUNTA RÁPIDA</a:t>
+            </a:r>
+          </a:p>
+        </p:txBody>
+      </p:sp>
+      <p:sp>
+        <p:nvSpPr>
+          <p:cNvPr id="7" name="TextBox 6"/>
+          <p:cNvSpPr txBox="1"/>
+          <p:nvPr/>
+        </p:nvSpPr>
+        <p:spPr>
+          <a:xfrm>
+            <a:off x="822960" y="1508760"/>
+            <a:ext cx="10515600" cy="1371600"/>
+          </a:xfrm>
+          <a:prstGeom prst="rect">
+            <a:avLst/>
+          </a:prstGeom>
+          <a:noFill/>
+        </p:spPr>
+        <p:txBody>
+          <a:bodyPr wrap="square">
+            <a:spAutoFit/>
+          </a:bodyPr>
+          <a:lstStyle/>
+          <a:p>
+            <a:r>
+              <a:rPr sz="2400" b="1" i="0">
+                <a:solidFill>
+                  <a:srgbClr val="1E2761"/>
+                </a:solidFill>
+                <a:latin typeface="Montserrat"/>
+              </a:rPr>
+              <a:t>¿Qué tipo de aparato de gas SÍ puede instalarse en un cuarto de baño?</a:t>
+            </a:r>
+          </a:p>
+        </p:txBody>
+      </p:sp>
+      <p:sp>
+        <p:nvSpPr>
+          <p:cNvPr id="8" name="Rounded Rectangle 7"/>
           <p:cNvSpPr/>
           <p:nvPr/>
         </p:nvSpPr>
         <p:spPr>
           <a:xfrm>
-            <a:off x="5806440" y="1051560"/>
-            <a:ext cx="5298947" cy="4629150"/>
+            <a:off x="822960" y="3291840"/>
+            <a:ext cx="4983480" cy="1143000"/>
           </a:xfrm>
           <a:prstGeom prst="roundRect">
             <a:avLst/>
@@ -7640,14 +7949,58 @@
       </p:sp>
       <p:sp>
         <p:nvSpPr>
+          <p:cNvPr id="9" name="Rectangle 8"/>
+          <p:cNvSpPr/>
+          <p:nvPr/>
+        </p:nvSpPr>
+        <p:spPr>
+          <a:xfrm>
+            <a:off x="822960" y="3291840"/>
+            <a:ext cx="640080" cy="1143000"/>
+          </a:xfrm>
+          <a:prstGeom prst="rect">
+            <a:avLst/>
+          </a:prstGeom>
+          <a:solidFill>
+            <a:srgbClr val="1E2761"/>
+          </a:solidFill>
+          <a:ln>
+            <a:noFill/>
+          </a:ln>
+          <a:effectLst/>
+        </p:spPr>
+        <p:style>
+          <a:lnRef idx="1">
+            <a:schemeClr val="accent1"/>
+          </a:lnRef>
+          <a:fillRef idx="3">
+            <a:schemeClr val="accent1"/>
+          </a:fillRef>
+          <a:effectRef idx="2">
+            <a:schemeClr val="accent1"/>
+          </a:effectRef>
+          <a:fontRef idx="minor">
+            <a:schemeClr val="lt1"/>
+          </a:fontRef>
+        </p:style>
+        <p:txBody>
+          <a:bodyPr rtlCol="0" anchor="ctr"/>
+          <a:lstStyle/>
+          <a:p>
+            <a:pPr algn="ctr"/>
+          </a:p>
+        </p:txBody>
+      </p:sp>
+      <p:sp>
+        <p:nvSpPr>
           <p:cNvPr id="10" name="TextBox 9"/>
           <p:cNvSpPr txBox="1"/>
           <p:nvPr/>
         </p:nvSpPr>
         <p:spPr>
           <a:xfrm>
-            <a:off x="6080760" y="2726055"/>
-            <a:ext cx="4750307" cy="1280160"/>
+            <a:off x="822960" y="3611880"/>
+            <a:ext cx="640080" cy="548640"/>
           </a:xfrm>
           <a:prstGeom prst="rect">
             <a:avLst/>
@@ -7662,25 +8015,524 @@
           <a:p>
             <a:pPr algn="ctr"/>
             <a:r>
-              <a:rPr sz="1400" b="1" i="0">
-                <a:solidFill>
-                  <a:srgbClr val="64748B"/>
-                </a:solidFill>
-                <a:latin typeface="Montserrat"/>
-              </a:rPr>
-              <a:t>IMAGEN REALISTA</a:t>
-            </a:r>
-          </a:p>
+              <a:rPr sz="2200" b="1" i="0">
+                <a:solidFill>
+                  <a:srgbClr val="FFFFFF"/>
+                </a:solidFill>
+                <a:latin typeface="Montserrat"/>
+              </a:rPr>
+              <a:t>A</a:t>
+            </a:r>
+          </a:p>
+        </p:txBody>
+      </p:sp>
+      <p:sp>
+        <p:nvSpPr>
+          <p:cNvPr id="11" name="TextBox 10"/>
+          <p:cNvSpPr txBox="1"/>
+          <p:nvPr/>
+        </p:nvSpPr>
+        <p:spPr>
+          <a:xfrm>
+            <a:off x="1600200" y="3474720"/>
+            <a:ext cx="4114800" cy="868680"/>
+          </a:xfrm>
+          <a:prstGeom prst="rect">
+            <a:avLst/>
+          </a:prstGeom>
+          <a:noFill/>
+        </p:spPr>
+        <p:txBody>
+          <a:bodyPr wrap="square">
+            <a:spAutoFit/>
+          </a:bodyPr>
+          <a:lstStyle/>
+          <a:p>
+            <a:r>
+              <a:rPr sz="1400" b="0" i="0">
+                <a:solidFill>
+                  <a:srgbClr val="1B2330"/>
+                </a:solidFill>
+                <a:latin typeface="Montserrat"/>
+              </a:rPr>
+              <a:t>Un aparato de tipo A</a:t>
+            </a:r>
+          </a:p>
+        </p:txBody>
+      </p:sp>
+      <p:sp>
+        <p:nvSpPr>
+          <p:cNvPr id="12" name="Rounded Rectangle 11"/>
+          <p:cNvSpPr/>
+          <p:nvPr/>
+        </p:nvSpPr>
+        <p:spPr>
+          <a:xfrm>
+            <a:off x="6355080" y="3291840"/>
+            <a:ext cx="4983480" cy="1143000"/>
+          </a:xfrm>
+          <a:prstGeom prst="roundRect">
+            <a:avLst/>
+          </a:prstGeom>
+          <a:solidFill>
+            <a:srgbClr val="F3F6FB"/>
+          </a:solidFill>
+          <a:ln w="12700">
+            <a:solidFill>
+              <a:srgbClr val="C7D2E6"/>
+            </a:solidFill>
+          </a:ln>
+          <a:effectLst/>
+        </p:spPr>
+        <p:style>
+          <a:lnRef idx="1">
+            <a:schemeClr val="accent1"/>
+          </a:lnRef>
+          <a:fillRef idx="3">
+            <a:schemeClr val="accent1"/>
+          </a:fillRef>
+          <a:effectRef idx="2">
+            <a:schemeClr val="accent1"/>
+          </a:effectRef>
+          <a:fontRef idx="minor">
+            <a:schemeClr val="lt1"/>
+          </a:fontRef>
+        </p:style>
+        <p:txBody>
+          <a:bodyPr rtlCol="0" anchor="ctr"/>
+          <a:lstStyle/>
           <a:p>
             <a:pPr algn="ctr"/>
-            <a:r>
-              <a:rPr sz="1100" b="0" i="1">
-                <a:solidFill>
-                  <a:srgbClr val="64748B"/>
-                </a:solidFill>
-                <a:latin typeface="Montserrat"/>
-              </a:rPr>
-              <a:t>damaged flue chimney cap on roof</a:t>
+          </a:p>
+        </p:txBody>
+      </p:sp>
+      <p:sp>
+        <p:nvSpPr>
+          <p:cNvPr id="13" name="Rectangle 12"/>
+          <p:cNvSpPr/>
+          <p:nvPr/>
+        </p:nvSpPr>
+        <p:spPr>
+          <a:xfrm>
+            <a:off x="6355080" y="3291840"/>
+            <a:ext cx="640080" cy="1143000"/>
+          </a:xfrm>
+          <a:prstGeom prst="rect">
+            <a:avLst/>
+          </a:prstGeom>
+          <a:solidFill>
+            <a:srgbClr val="1E2761"/>
+          </a:solidFill>
+          <a:ln>
+            <a:noFill/>
+          </a:ln>
+          <a:effectLst/>
+        </p:spPr>
+        <p:style>
+          <a:lnRef idx="1">
+            <a:schemeClr val="accent1"/>
+          </a:lnRef>
+          <a:fillRef idx="3">
+            <a:schemeClr val="accent1"/>
+          </a:fillRef>
+          <a:effectRef idx="2">
+            <a:schemeClr val="accent1"/>
+          </a:effectRef>
+          <a:fontRef idx="minor">
+            <a:schemeClr val="lt1"/>
+          </a:fontRef>
+        </p:style>
+        <p:txBody>
+          <a:bodyPr rtlCol="0" anchor="ctr"/>
+          <a:lstStyle/>
+          <a:p>
+            <a:pPr algn="ctr"/>
+          </a:p>
+        </p:txBody>
+      </p:sp>
+      <p:sp>
+        <p:nvSpPr>
+          <p:cNvPr id="14" name="TextBox 13"/>
+          <p:cNvSpPr txBox="1"/>
+          <p:nvPr/>
+        </p:nvSpPr>
+        <p:spPr>
+          <a:xfrm>
+            <a:off x="6355080" y="3611880"/>
+            <a:ext cx="640080" cy="548640"/>
+          </a:xfrm>
+          <a:prstGeom prst="rect">
+            <a:avLst/>
+          </a:prstGeom>
+          <a:noFill/>
+        </p:spPr>
+        <p:txBody>
+          <a:bodyPr wrap="square">
+            <a:spAutoFit/>
+          </a:bodyPr>
+          <a:lstStyle/>
+          <a:p>
+            <a:pPr algn="ctr"/>
+            <a:r>
+              <a:rPr sz="2200" b="1" i="0">
+                <a:solidFill>
+                  <a:srgbClr val="FFFFFF"/>
+                </a:solidFill>
+                <a:latin typeface="Montserrat"/>
+              </a:rPr>
+              <a:t>B</a:t>
+            </a:r>
+          </a:p>
+        </p:txBody>
+      </p:sp>
+      <p:sp>
+        <p:nvSpPr>
+          <p:cNvPr id="15" name="TextBox 14"/>
+          <p:cNvSpPr txBox="1"/>
+          <p:nvPr/>
+        </p:nvSpPr>
+        <p:spPr>
+          <a:xfrm>
+            <a:off x="7132320" y="3474720"/>
+            <a:ext cx="4114800" cy="868680"/>
+          </a:xfrm>
+          <a:prstGeom prst="rect">
+            <a:avLst/>
+          </a:prstGeom>
+          <a:noFill/>
+        </p:spPr>
+        <p:txBody>
+          <a:bodyPr wrap="square">
+            <a:spAutoFit/>
+          </a:bodyPr>
+          <a:lstStyle/>
+          <a:p>
+            <a:r>
+              <a:rPr sz="1400" b="0" i="0">
+                <a:solidFill>
+                  <a:srgbClr val="1B2330"/>
+                </a:solidFill>
+                <a:latin typeface="Montserrat"/>
+              </a:rPr>
+              <a:t>Un aparato de tipo B de tiro natural</a:t>
+            </a:r>
+          </a:p>
+        </p:txBody>
+      </p:sp>
+      <p:sp>
+        <p:nvSpPr>
+          <p:cNvPr id="16" name="Rounded Rectangle 15"/>
+          <p:cNvSpPr/>
+          <p:nvPr/>
+        </p:nvSpPr>
+        <p:spPr>
+          <a:xfrm>
+            <a:off x="822960" y="4617720"/>
+            <a:ext cx="4983480" cy="1143000"/>
+          </a:xfrm>
+          <a:prstGeom prst="roundRect">
+            <a:avLst/>
+          </a:prstGeom>
+          <a:solidFill>
+            <a:srgbClr val="F3F6FB"/>
+          </a:solidFill>
+          <a:ln w="12700">
+            <a:solidFill>
+              <a:srgbClr val="C7D2E6"/>
+            </a:solidFill>
+          </a:ln>
+          <a:effectLst/>
+        </p:spPr>
+        <p:style>
+          <a:lnRef idx="1">
+            <a:schemeClr val="accent1"/>
+          </a:lnRef>
+          <a:fillRef idx="3">
+            <a:schemeClr val="accent1"/>
+          </a:fillRef>
+          <a:effectRef idx="2">
+            <a:schemeClr val="accent1"/>
+          </a:effectRef>
+          <a:fontRef idx="minor">
+            <a:schemeClr val="lt1"/>
+          </a:fontRef>
+        </p:style>
+        <p:txBody>
+          <a:bodyPr rtlCol="0" anchor="ctr"/>
+          <a:lstStyle/>
+          <a:p>
+            <a:pPr algn="ctr"/>
+          </a:p>
+        </p:txBody>
+      </p:sp>
+      <p:sp>
+        <p:nvSpPr>
+          <p:cNvPr id="17" name="Rectangle 16"/>
+          <p:cNvSpPr/>
+          <p:nvPr/>
+        </p:nvSpPr>
+        <p:spPr>
+          <a:xfrm>
+            <a:off x="822960" y="4617720"/>
+            <a:ext cx="640080" cy="1143000"/>
+          </a:xfrm>
+          <a:prstGeom prst="rect">
+            <a:avLst/>
+          </a:prstGeom>
+          <a:solidFill>
+            <a:srgbClr val="1E2761"/>
+          </a:solidFill>
+          <a:ln>
+            <a:noFill/>
+          </a:ln>
+          <a:effectLst/>
+        </p:spPr>
+        <p:style>
+          <a:lnRef idx="1">
+            <a:schemeClr val="accent1"/>
+          </a:lnRef>
+          <a:fillRef idx="3">
+            <a:schemeClr val="accent1"/>
+          </a:fillRef>
+          <a:effectRef idx="2">
+            <a:schemeClr val="accent1"/>
+          </a:effectRef>
+          <a:fontRef idx="minor">
+            <a:schemeClr val="lt1"/>
+          </a:fontRef>
+        </p:style>
+        <p:txBody>
+          <a:bodyPr rtlCol="0" anchor="ctr"/>
+          <a:lstStyle/>
+          <a:p>
+            <a:pPr algn="ctr"/>
+          </a:p>
+        </p:txBody>
+      </p:sp>
+      <p:sp>
+        <p:nvSpPr>
+          <p:cNvPr id="18" name="TextBox 17"/>
+          <p:cNvSpPr txBox="1"/>
+          <p:nvPr/>
+        </p:nvSpPr>
+        <p:spPr>
+          <a:xfrm>
+            <a:off x="822960" y="4937760"/>
+            <a:ext cx="640080" cy="548640"/>
+          </a:xfrm>
+          <a:prstGeom prst="rect">
+            <a:avLst/>
+          </a:prstGeom>
+          <a:noFill/>
+        </p:spPr>
+        <p:txBody>
+          <a:bodyPr wrap="square">
+            <a:spAutoFit/>
+          </a:bodyPr>
+          <a:lstStyle/>
+          <a:p>
+            <a:pPr algn="ctr"/>
+            <a:r>
+              <a:rPr sz="2200" b="1" i="0">
+                <a:solidFill>
+                  <a:srgbClr val="FFFFFF"/>
+                </a:solidFill>
+                <a:latin typeface="Montserrat"/>
+              </a:rPr>
+              <a:t>C</a:t>
+            </a:r>
+          </a:p>
+        </p:txBody>
+      </p:sp>
+      <p:sp>
+        <p:nvSpPr>
+          <p:cNvPr id="19" name="TextBox 18"/>
+          <p:cNvSpPr txBox="1"/>
+          <p:nvPr/>
+        </p:nvSpPr>
+        <p:spPr>
+          <a:xfrm>
+            <a:off x="1600200" y="4800600"/>
+            <a:ext cx="4114800" cy="868680"/>
+          </a:xfrm>
+          <a:prstGeom prst="rect">
+            <a:avLst/>
+          </a:prstGeom>
+          <a:noFill/>
+        </p:spPr>
+        <p:txBody>
+          <a:bodyPr wrap="square">
+            <a:spAutoFit/>
+          </a:bodyPr>
+          <a:lstStyle/>
+          <a:p>
+            <a:r>
+              <a:rPr sz="1400" b="0" i="0">
+                <a:solidFill>
+                  <a:srgbClr val="1B2330"/>
+                </a:solidFill>
+                <a:latin typeface="Montserrat"/>
+              </a:rPr>
+              <a:t>Un aparato de tipo C, estanco</a:t>
+            </a:r>
+          </a:p>
+        </p:txBody>
+      </p:sp>
+      <p:sp>
+        <p:nvSpPr>
+          <p:cNvPr id="20" name="Rounded Rectangle 19"/>
+          <p:cNvSpPr/>
+          <p:nvPr/>
+        </p:nvSpPr>
+        <p:spPr>
+          <a:xfrm>
+            <a:off x="6355080" y="4617720"/>
+            <a:ext cx="4983480" cy="1143000"/>
+          </a:xfrm>
+          <a:prstGeom prst="roundRect">
+            <a:avLst/>
+          </a:prstGeom>
+          <a:solidFill>
+            <a:srgbClr val="F3F6FB"/>
+          </a:solidFill>
+          <a:ln w="12700">
+            <a:solidFill>
+              <a:srgbClr val="C7D2E6"/>
+            </a:solidFill>
+          </a:ln>
+          <a:effectLst/>
+        </p:spPr>
+        <p:style>
+          <a:lnRef idx="1">
+            <a:schemeClr val="accent1"/>
+          </a:lnRef>
+          <a:fillRef idx="3">
+            <a:schemeClr val="accent1"/>
+          </a:fillRef>
+          <a:effectRef idx="2">
+            <a:schemeClr val="accent1"/>
+          </a:effectRef>
+          <a:fontRef idx="minor">
+            <a:schemeClr val="lt1"/>
+          </a:fontRef>
+        </p:style>
+        <p:txBody>
+          <a:bodyPr rtlCol="0" anchor="ctr"/>
+          <a:lstStyle/>
+          <a:p>
+            <a:pPr algn="ctr"/>
+          </a:p>
+        </p:txBody>
+      </p:sp>
+      <p:sp>
+        <p:nvSpPr>
+          <p:cNvPr id="21" name="Rectangle 20"/>
+          <p:cNvSpPr/>
+          <p:nvPr/>
+        </p:nvSpPr>
+        <p:spPr>
+          <a:xfrm>
+            <a:off x="6355080" y="4617720"/>
+            <a:ext cx="640080" cy="1143000"/>
+          </a:xfrm>
+          <a:prstGeom prst="rect">
+            <a:avLst/>
+          </a:prstGeom>
+          <a:solidFill>
+            <a:srgbClr val="1E2761"/>
+          </a:solidFill>
+          <a:ln>
+            <a:noFill/>
+          </a:ln>
+          <a:effectLst/>
+        </p:spPr>
+        <p:style>
+          <a:lnRef idx="1">
+            <a:schemeClr val="accent1"/>
+          </a:lnRef>
+          <a:fillRef idx="3">
+            <a:schemeClr val="accent1"/>
+          </a:fillRef>
+          <a:effectRef idx="2">
+            <a:schemeClr val="accent1"/>
+          </a:effectRef>
+          <a:fontRef idx="minor">
+            <a:schemeClr val="lt1"/>
+          </a:fontRef>
+        </p:style>
+        <p:txBody>
+          <a:bodyPr rtlCol="0" anchor="ctr"/>
+          <a:lstStyle/>
+          <a:p>
+            <a:pPr algn="ctr"/>
+          </a:p>
+        </p:txBody>
+      </p:sp>
+      <p:sp>
+        <p:nvSpPr>
+          <p:cNvPr id="22" name="TextBox 21"/>
+          <p:cNvSpPr txBox="1"/>
+          <p:nvPr/>
+        </p:nvSpPr>
+        <p:spPr>
+          <a:xfrm>
+            <a:off x="6355080" y="4937760"/>
+            <a:ext cx="640080" cy="548640"/>
+          </a:xfrm>
+          <a:prstGeom prst="rect">
+            <a:avLst/>
+          </a:prstGeom>
+          <a:noFill/>
+        </p:spPr>
+        <p:txBody>
+          <a:bodyPr wrap="square">
+            <a:spAutoFit/>
+          </a:bodyPr>
+          <a:lstStyle/>
+          <a:p>
+            <a:pPr algn="ctr"/>
+            <a:r>
+              <a:rPr sz="2200" b="1" i="0">
+                <a:solidFill>
+                  <a:srgbClr val="FFFFFF"/>
+                </a:solidFill>
+                <a:latin typeface="Montserrat"/>
+              </a:rPr>
+              <a:t>D</a:t>
+            </a:r>
+          </a:p>
+        </p:txBody>
+      </p:sp>
+      <p:sp>
+        <p:nvSpPr>
+          <p:cNvPr id="23" name="TextBox 22"/>
+          <p:cNvSpPr txBox="1"/>
+          <p:nvPr/>
+        </p:nvSpPr>
+        <p:spPr>
+          <a:xfrm>
+            <a:off x="7132320" y="4800600"/>
+            <a:ext cx="4114800" cy="868680"/>
+          </a:xfrm>
+          <a:prstGeom prst="rect">
+            <a:avLst/>
+          </a:prstGeom>
+          <a:noFill/>
+        </p:spPr>
+        <p:txBody>
+          <a:bodyPr wrap="square">
+            <a:spAutoFit/>
+          </a:bodyPr>
+          <a:lstStyle/>
+          <a:p>
+            <a:r>
+              <a:rPr sz="1400" b="0" i="0">
+                <a:solidFill>
+                  <a:srgbClr val="1B2330"/>
+                </a:solidFill>
+                <a:latin typeface="Montserrat"/>
+              </a:rPr>
+              <a:t>Ninguno, está prohibido cualquiera</a:t>
             </a:r>
           </a:p>
         </p:txBody>
@@ -7690,6 +8542,18 @@
   <p:clrMapOvr>
     <a:masterClrMapping/>
   </p:clrMapOvr>
+  <mc:AlternateContent xmlns:mc="http://schemas.openxmlformats.org/markup-compatibility/2006">
+    <mc:Choice xmlns:p14="http://schemas.microsoft.com/office/powerpoint/2010/main" Requires="p14">
+      <p:transition spd="med" p14:dur="700">
+        <p14:cube dir="r"/>
+      </p:transition>
+    </mc:Choice>
+    <mc:Fallback>
+      <p:transition spd="med">
+        <p:push dir="r"/>
+      </p:transition>
+    </mc:Fallback>
+  </mc:AlternateContent>
 </p:sld>
 </file>
 
@@ -7777,7 +8641,7 @@
                 </a:solidFill>
                 <a:latin typeface="Montserrat"/>
               </a:rPr>
-              <a:t>015 / 021</a:t>
+              <a:t>015 / 027</a:t>
             </a:r>
           </a:p>
         </p:txBody>
@@ -7818,88 +8682,20 @@
       </p:sp>
       <p:sp>
         <p:nvSpPr>
-          <p:cNvPr id="5" name="TextBox 4"/>
-          <p:cNvSpPr txBox="1"/>
-          <p:nvPr/>
-        </p:nvSpPr>
-        <p:spPr>
-          <a:xfrm>
-            <a:off x="822960" y="457200"/>
-            <a:ext cx="10058400" cy="365760"/>
-          </a:xfrm>
-          <a:prstGeom prst="rect">
-            <a:avLst/>
-          </a:prstGeom>
-          <a:noFill/>
-        </p:spPr>
-        <p:txBody>
-          <a:bodyPr wrap="square">
-            <a:spAutoFit/>
-          </a:bodyPr>
-          <a:lstStyle/>
-          <a:p>
-            <a:r>
-              <a:rPr sz="1300" b="1" i="0">
-                <a:solidFill>
-                  <a:srgbClr val="E8801A"/>
-                </a:solidFill>
-                <a:latin typeface="Montserrat"/>
-              </a:rPr>
-              <a:t>PARTE 12 · IPA-6, IPA-7, IPA-8</a:t>
-            </a:r>
-          </a:p>
-        </p:txBody>
-      </p:sp>
-      <p:sp>
-        <p:nvSpPr>
-          <p:cNvPr id="6" name="TextBox 5"/>
-          <p:cNvSpPr txBox="1"/>
-          <p:nvPr/>
-        </p:nvSpPr>
-        <p:spPr>
-          <a:xfrm>
-            <a:off x="822960" y="868680"/>
-            <a:ext cx="10515600" cy="914400"/>
-          </a:xfrm>
-          <a:prstGeom prst="rect">
-            <a:avLst/>
-          </a:prstGeom>
-          <a:noFill/>
-        </p:spPr>
-        <p:txBody>
-          <a:bodyPr wrap="square">
-            <a:spAutoFit/>
-          </a:bodyPr>
-          <a:lstStyle/>
-          <a:p>
-            <a:r>
-              <a:rPr sz="2800" b="1" i="0">
-                <a:solidFill>
-                  <a:srgbClr val="1E2761"/>
-                </a:solidFill>
-                <a:latin typeface="Montserrat"/>
-              </a:rPr>
-              <a:t>Chimenea, volumen y llaves sueltas</a:t>
-            </a:r>
-          </a:p>
-        </p:txBody>
-      </p:sp>
-      <p:sp>
-        <p:nvSpPr>
-          <p:cNvPr id="7" name="Rounded Rectangle 6"/>
+          <p:cNvPr id="5" name="Rectangle 4"/>
           <p:cNvSpPr/>
           <p:nvPr/>
         </p:nvSpPr>
         <p:spPr>
           <a:xfrm>
-            <a:off x="868680" y="1627632"/>
-            <a:ext cx="2011680" cy="73152"/>
-          </a:xfrm>
-          <a:prstGeom prst="roundRect">
+            <a:off x="0" y="0"/>
+            <a:ext cx="12191695" cy="1143000"/>
+          </a:xfrm>
+          <a:prstGeom prst="rect">
             <a:avLst/>
           </a:prstGeom>
           <a:solidFill>
-            <a:srgbClr val="E8801A"/>
+            <a:srgbClr val="1E8E4B"/>
           </a:solidFill>
           <a:ln>
             <a:noFill/>
@@ -7930,14 +8726,14 @@
       </p:sp>
       <p:sp>
         <p:nvSpPr>
-          <p:cNvPr id="8" name="TextBox 7"/>
+          <p:cNvPr id="6" name="TextBox 5"/>
           <p:cNvSpPr txBox="1"/>
           <p:nvPr/>
         </p:nvSpPr>
         <p:spPr>
           <a:xfrm>
-            <a:off x="822960" y="1965960"/>
-            <a:ext cx="4983480" cy="4206240"/>
+            <a:off x="822960" y="274320"/>
+            <a:ext cx="10515600" cy="640080"/>
           </a:xfrm>
           <a:prstGeom prst="rect">
             <a:avLst/>
@@ -7950,102 +8746,72 @@
           </a:bodyPr>
           <a:lstStyle/>
           <a:p>
-            <a:pPr>
-              <a:spcAft>
-                <a:spcPts val="1100"/>
-              </a:spcAft>
-            </a:pPr>
-            <a:r>
-              <a:rPr sz="1600" b="1" i="0">
-                <a:solidFill>
-                  <a:srgbClr val="E8801A"/>
-                </a:solidFill>
-                <a:latin typeface="Montserrat"/>
-              </a:rPr>
-              <a:t>▸  </a:t>
-            </a:r>
-            <a:r>
-              <a:rPr sz="1600" b="0" i="0">
-                <a:solidFill>
-                  <a:srgbClr val="1B2330"/>
-                </a:solidFill>
-                <a:latin typeface="Montserrat"/>
-              </a:rPr>
-              <a:t>Extractor o campana en chimenea de tipo B</a:t>
-            </a:r>
-          </a:p>
-          <a:p>
-            <a:pPr>
-              <a:spcAft>
-                <a:spcPts val="1100"/>
-              </a:spcAft>
-            </a:pPr>
-            <a:r>
-              <a:rPr sz="1600" b="1" i="0">
-                <a:solidFill>
-                  <a:srgbClr val="E8801A"/>
-                </a:solidFill>
-                <a:latin typeface="Montserrat"/>
-              </a:rPr>
-              <a:t>▸  </a:t>
-            </a:r>
-            <a:r>
-              <a:rPr sz="1600" b="0" i="0">
-                <a:solidFill>
-                  <a:srgbClr val="1B2330"/>
-                </a:solidFill>
-                <a:latin typeface="Montserrat"/>
-              </a:rPr>
-              <a:t>Tipo B en local V ≤ 8 m³ mal ventilado</a:t>
-            </a:r>
-          </a:p>
-          <a:p>
-            <a:pPr>
-              <a:spcAft>
-                <a:spcPts val="1100"/>
-              </a:spcAft>
-            </a:pPr>
-            <a:r>
-              <a:rPr sz="1600" b="1" i="0">
-                <a:solidFill>
-                  <a:srgbClr val="E8801A"/>
-                </a:solidFill>
-                <a:latin typeface="Montserrat"/>
-              </a:rPr>
-              <a:t>▸  </a:t>
-            </a:r>
-            <a:r>
-              <a:rPr sz="1600" b="0" i="0">
-                <a:solidFill>
-                  <a:srgbClr val="1B2330"/>
-                </a:solidFill>
-                <a:latin typeface="Montserrat"/>
-              </a:rPr>
-              <a:t>Llaves sin conectar y sin cerrar/precintar</a:t>
-            </a:r>
-          </a:p>
-        </p:txBody>
-      </p:sp>
-      <p:sp>
-        <p:nvSpPr>
-          <p:cNvPr id="9" name="imgph" descr="IMGQ:small kitchen gas water heater ventilation grille"/>
+            <a:r>
+              <a:rPr sz="2400" b="1" i="0">
+                <a:solidFill>
+                  <a:srgbClr val="FFFFFF"/>
+                </a:solidFill>
+                <a:latin typeface="Montserrat"/>
+              </a:rPr>
+              <a:t>✔  RESPUESTA:  C</a:t>
+            </a:r>
+          </a:p>
+        </p:txBody>
+      </p:sp>
+      <p:sp>
+        <p:nvSpPr>
+          <p:cNvPr id="7" name="TextBox 6"/>
+          <p:cNvSpPr txBox="1"/>
+          <p:nvPr/>
+        </p:nvSpPr>
+        <p:spPr>
+          <a:xfrm>
+            <a:off x="822960" y="1417320"/>
+            <a:ext cx="10515600" cy="914400"/>
+          </a:xfrm>
+          <a:prstGeom prst="rect">
+            <a:avLst/>
+          </a:prstGeom>
+          <a:noFill/>
+        </p:spPr>
+        <p:txBody>
+          <a:bodyPr wrap="square">
+            <a:spAutoFit/>
+          </a:bodyPr>
+          <a:lstStyle/>
+          <a:p>
+            <a:r>
+              <a:rPr sz="1800" b="1" i="0">
+                <a:solidFill>
+                  <a:srgbClr val="64748B"/>
+                </a:solidFill>
+                <a:latin typeface="Montserrat"/>
+              </a:rPr>
+              <a:t>¿Qué tipo de aparato de gas SÍ puede instalarse en un cuarto de baño?</a:t>
+            </a:r>
+          </a:p>
+        </p:txBody>
+      </p:sp>
+      <p:sp>
+        <p:nvSpPr>
+          <p:cNvPr id="8" name="Rounded Rectangle 7"/>
           <p:cNvSpPr/>
           <p:nvPr/>
         </p:nvSpPr>
         <p:spPr>
           <a:xfrm>
-            <a:off x="5806440" y="1051560"/>
-            <a:ext cx="5298947" cy="4629150"/>
+            <a:off x="822960" y="2514600"/>
+            <a:ext cx="10515600" cy="914400"/>
           </a:xfrm>
           <a:prstGeom prst="roundRect">
             <a:avLst/>
           </a:prstGeom>
           <a:solidFill>
-            <a:srgbClr val="F3F6FB"/>
+            <a:srgbClr val="E9F6EE"/>
           </a:solidFill>
           <a:ln w="12700">
             <a:solidFill>
-              <a:srgbClr val="C7D2E6"/>
+              <a:srgbClr val="1E8E4B"/>
             </a:solidFill>
           </a:ln>
           <a:effectLst/>
@@ -8074,14 +8840,14 @@
       </p:sp>
       <p:sp>
         <p:nvSpPr>
-          <p:cNvPr id="10" name="TextBox 9"/>
+          <p:cNvPr id="9" name="TextBox 8"/>
           <p:cNvSpPr txBox="1"/>
           <p:nvPr/>
         </p:nvSpPr>
         <p:spPr>
           <a:xfrm>
-            <a:off x="6080760" y="2726055"/>
-            <a:ext cx="4750307" cy="1280160"/>
+            <a:off x="1097280" y="2697480"/>
+            <a:ext cx="10058400" cy="640080"/>
           </a:xfrm>
           <a:prstGeom prst="rect">
             <a:avLst/>
@@ -8094,27 +8860,66 @@
           </a:bodyPr>
           <a:lstStyle/>
           <a:p>
-            <a:pPr algn="ctr"/>
-            <a:r>
-              <a:rPr sz="1400" b="1" i="0">
-                <a:solidFill>
-                  <a:srgbClr val="64748B"/>
-                </a:solidFill>
-                <a:latin typeface="Montserrat"/>
-              </a:rPr>
-              <a:t>IMAGEN REALISTA</a:t>
-            </a:r>
-          </a:p>
-          <a:p>
-            <a:pPr algn="ctr"/>
-            <a:r>
-              <a:rPr sz="1100" b="0" i="1">
-                <a:solidFill>
-                  <a:srgbClr val="64748B"/>
-                </a:solidFill>
-                <a:latin typeface="Montserrat"/>
-              </a:rPr>
-              <a:t>small kitchen gas water heater ventilation grille</a:t>
+            <a:r>
+              <a:rPr sz="1800" b="1" i="0">
+                <a:solidFill>
+                  <a:srgbClr val="1E8E4B"/>
+                </a:solidFill>
+                <a:latin typeface="Montserrat"/>
+              </a:rPr>
+              <a:t>C.  </a:t>
+            </a:r>
+            <a:r>
+              <a:rPr sz="1800" b="1" i="0">
+                <a:solidFill>
+                  <a:srgbClr val="1E2761"/>
+                </a:solidFill>
+                <a:latin typeface="Montserrat"/>
+              </a:rPr>
+              <a:t>Un aparato de tipo C, estanco</a:t>
+            </a:r>
+          </a:p>
+        </p:txBody>
+      </p:sp>
+      <p:sp>
+        <p:nvSpPr>
+          <p:cNvPr id="10" name="TextBox 9"/>
+          <p:cNvSpPr txBox="1"/>
+          <p:nvPr/>
+        </p:nvSpPr>
+        <p:spPr>
+          <a:xfrm>
+            <a:off x="822960" y="3749039"/>
+            <a:ext cx="10515600" cy="2194560"/>
+          </a:xfrm>
+          <a:prstGeom prst="rect">
+            <a:avLst/>
+          </a:prstGeom>
+          <a:noFill/>
+        </p:spPr>
+        <p:txBody>
+          <a:bodyPr wrap="square">
+            <a:spAutoFit/>
+          </a:bodyPr>
+          <a:lstStyle/>
+          <a:p>
+            <a:r>
+              <a:rPr sz="1500" b="1" i="0">
+                <a:solidFill>
+                  <a:srgbClr val="E8801A"/>
+                </a:solidFill>
+                <a:latin typeface="Montserrat"/>
+              </a:rPr>
+              <a:t>Por qué:  </a:t>
+            </a:r>
+            <a:r>
+              <a:rPr sz="1500" b="0" i="0">
+                <a:solidFill>
+                  <a:srgbClr val="1B2330"/>
+                </a:solidFill>
+                <a:latin typeface="Montserrat"/>
+              </a:rPr>
+              <a:t>El tipo C es estanco: coge el aire de fuera y echa los humos fuera, sin intercambiar aire con el local, así que no intoxica.</a:t>
             </a:r>
           </a:p>
         </p:txBody>
@@ -8124,6 +8929,18 @@
   <p:clrMapOvr>
     <a:masterClrMapping/>
   </p:clrMapOvr>
+  <mc:AlternateContent xmlns:mc="http://schemas.openxmlformats.org/markup-compatibility/2006">
+    <mc:Choice xmlns:p14="http://schemas.microsoft.com/office/powerpoint/2010/main" Requires="p14">
+      <p:transition spd="med" p14:dur="700">
+        <p14:cube dir="l"/>
+      </p:transition>
+    </mc:Choice>
+    <mc:Fallback>
+      <p:transition spd="med">
+        <p:push dir="l"/>
+      </p:transition>
+    </mc:Fallback>
+  </mc:AlternateContent>
 </p:sld>
 </file>
 
@@ -8211,7 +9028,7 @@
                 </a:solidFill>
                 <a:latin typeface="Montserrat"/>
               </a:rPr>
-              <a:t>016 / 021</a:t>
+              <a:t>016 / 027</a:t>
             </a:r>
           </a:p>
         </p:txBody>
@@ -8279,7 +9096,7 @@
                 </a:solidFill>
                 <a:latin typeface="Montserrat"/>
               </a:rPr>
-              <a:t>PARTE 12 · ISA-1 Y ISA-2</a:t>
+              <a:t>REPASO CLAVE</a:t>
             </a:r>
           </a:p>
         </p:txBody>
@@ -8313,14 +9130,14 @@
                 </a:solidFill>
                 <a:latin typeface="Montserrat"/>
               </a:rPr>
-              <a:t>Secundarias: ventilación y conservación</a:t>
-            </a:r>
-          </a:p>
-        </p:txBody>
-      </p:sp>
-      <p:sp>
-        <p:nvSpPr>
-          <p:cNvPr id="7" name="Rounded Rectangle 6"/>
+              <a:t>Tipos de aparato A, B y C</a:t>
+            </a:r>
+          </a:p>
+        </p:txBody>
+      </p:sp>
+      <p:sp>
+        <p:nvSpPr>
+          <p:cNvPr id="7" name="Rectangle 6"/>
           <p:cNvSpPr/>
           <p:nvPr/>
         </p:nvSpPr>
@@ -8329,7 +9146,7 @@
             <a:off x="868680" y="1627632"/>
             <a:ext cx="2011680" cy="73152"/>
           </a:xfrm>
-          <a:prstGeom prst="roundRect">
+          <a:prstGeom prst="rect">
             <a:avLst/>
           </a:prstGeom>
           <a:solidFill>
@@ -8371,7 +9188,7 @@
         <p:spPr>
           <a:xfrm>
             <a:off x="822960" y="1965960"/>
-            <a:ext cx="4983480" cy="4206240"/>
+            <a:ext cx="5029200" cy="4206240"/>
           </a:xfrm>
           <a:prstGeom prst="rect">
             <a:avLst/>
@@ -8405,7 +9222,7 @@
                 </a:solidFill>
                 <a:latin typeface="Montserrat"/>
               </a:rPr>
-              <a:t>Tipo B mal ventilado en V &gt; 8 m³: ISa-1</a:t>
+              <a:t>Tipo A: suelta los humos al local</a:t>
             </a:r>
           </a:p>
           <a:p>
@@ -8430,7 +9247,7 @@
                 </a:solidFill>
                 <a:latin typeface="Montserrat"/>
               </a:rPr>
-              <a:t>Corrosión, soportes o uniones en mal estado</a:t>
+              <a:t>Tipo B: aire del local, humos fuera</a:t>
             </a:r>
           </a:p>
           <a:p>
@@ -8455,46 +9272,21 @@
                 </a:solidFill>
                 <a:latin typeface="Montserrat"/>
               </a:rPr>
-              <a:t>Llaves que faltan o no son accesibles</a:t>
-            </a:r>
-          </a:p>
-          <a:p>
-            <a:pPr>
-              <a:spcAft>
-                <a:spcPts val="1100"/>
-              </a:spcAft>
-            </a:pPr>
-            <a:r>
-              <a:rPr sz="1600" b="1" i="0">
-                <a:solidFill>
-                  <a:srgbClr val="E8801A"/>
-                </a:solidFill>
-                <a:latin typeface="Montserrat"/>
-              </a:rPr>
-              <a:t>▸  </a:t>
-            </a:r>
-            <a:r>
-              <a:rPr sz="1600" b="0" i="0">
-                <a:solidFill>
-                  <a:srgbClr val="1B2330"/>
-                </a:solidFill>
-                <a:latin typeface="Montserrat"/>
-              </a:rPr>
-              <a:t>Regulador o válvula de mínima defectuosos</a:t>
-            </a:r>
-          </a:p>
-        </p:txBody>
-      </p:sp>
-      <p:sp>
-        <p:nvSpPr>
-          <p:cNvPr id="9" name="imgph" descr="IMGQ:corroded rusty gas pipe fitting valve"/>
+              <a:t>Tipo C: estanco, aire y humos de fuera</a:t>
+            </a:r>
+          </a:p>
+        </p:txBody>
+      </p:sp>
+      <p:sp>
+        <p:nvSpPr>
+          <p:cNvPr id="9" name="imgph" descr="IMGQ:modern sealed gas boiler flue outside wall"/>
           <p:cNvSpPr/>
           <p:nvPr/>
         </p:nvSpPr>
         <p:spPr>
           <a:xfrm>
-            <a:off x="5806440" y="1051560"/>
-            <a:ext cx="5298947" cy="4629150"/>
+            <a:off x="6080760" y="1965960"/>
+            <a:ext cx="5303520" cy="4572000"/>
           </a:xfrm>
           <a:prstGeom prst="roundRect">
             <a:avLst/>
@@ -8539,8 +9331,8 @@
         </p:nvSpPr>
         <p:spPr>
           <a:xfrm>
-            <a:off x="6080760" y="2726055"/>
-            <a:ext cx="4750307" cy="1280160"/>
+            <a:off x="6355080" y="3611880"/>
+            <a:ext cx="4754880" cy="1280160"/>
           </a:xfrm>
           <a:prstGeom prst="rect">
             <a:avLst/>
@@ -8561,7 +9353,7 @@
                 </a:solidFill>
                 <a:latin typeface="Montserrat"/>
               </a:rPr>
-              <a:t>IMAGEN REALISTA</a:t>
+              <a:t>IMAGEN</a:t>
             </a:r>
           </a:p>
           <a:p>
@@ -8573,7 +9365,7 @@
                 </a:solidFill>
                 <a:latin typeface="Montserrat"/>
               </a:rPr>
-              <a:t>corroded rusty gas pipe fitting valve</a:t>
+              <a:t>modern sealed gas boiler flue outside wall</a:t>
             </a:r>
           </a:p>
         </p:txBody>
@@ -8583,6 +9375,18 @@
   <p:clrMapOvr>
     <a:masterClrMapping/>
   </p:clrMapOvr>
+  <mc:AlternateContent xmlns:mc="http://schemas.openxmlformats.org/markup-compatibility/2006">
+    <mc:Choice xmlns:p14="http://schemas.microsoft.com/office/powerpoint/2010/main" Requires="p14">
+      <p:transition spd="med" p14:dur="700">
+        <p14:cube dir="r"/>
+      </p:transition>
+    </mc:Choice>
+    <mc:Fallback>
+      <p:transition spd="med">
+        <p:push dir="r"/>
+      </p:transition>
+    </mc:Fallback>
+  </mc:AlternateContent>
 </p:sld>
 </file>
 
@@ -8670,7 +9474,7 @@
                 </a:solidFill>
                 <a:latin typeface="Montserrat"/>
               </a:rPr>
-              <a:t>017 / 021</a:t>
+              <a:t>017 / 027</a:t>
             </a:r>
           </a:p>
         </p:txBody>
@@ -8738,7 +9542,7 @@
                 </a:solidFill>
                 <a:latin typeface="Montserrat"/>
               </a:rPr>
-              <a:t>PARTE 12 · ISA-3</a:t>
+              <a:t>PARTE 12 · IPA-3 Y IPA-4</a:t>
             </a:r>
           </a:p>
         </p:txBody>
@@ -8772,14 +9576,14 @@
                 </a:solidFill>
                 <a:latin typeface="Montserrat"/>
               </a:rPr>
-              <a:t>Tubo flexible: viejo o mal puesto</a:t>
-            </a:r>
-          </a:p>
-        </p:txBody>
-      </p:sp>
-      <p:sp>
-        <p:nvSpPr>
-          <p:cNvPr id="7" name="Rounded Rectangle 6"/>
+              <a:t>Tubo flexible dañado o quemado</a:t>
+            </a:r>
+          </a:p>
+        </p:txBody>
+      </p:sp>
+      <p:sp>
+        <p:nvSpPr>
+          <p:cNvPr id="7" name="Rectangle 6"/>
           <p:cNvSpPr/>
           <p:nvPr/>
         </p:nvSpPr>
@@ -8788,7 +9592,7 @@
             <a:off x="868680" y="1627632"/>
             <a:ext cx="2011680" cy="73152"/>
           </a:xfrm>
-          <a:prstGeom prst="roundRect">
+          <a:prstGeom prst="rect">
             <a:avLst/>
           </a:prstGeom>
           <a:solidFill>
@@ -8829,8 +9633,8 @@
         </p:nvSpPr>
         <p:spPr>
           <a:xfrm>
-            <a:off x="822960" y="1965960"/>
-            <a:ext cx="4983480" cy="4206240"/>
+            <a:off x="6355080" y="1965960"/>
+            <a:ext cx="5029200" cy="4206240"/>
           </a:xfrm>
           <a:prstGeom prst="rect">
             <a:avLst/>
@@ -8864,7 +9668,7 @@
                 </a:solidFill>
                 <a:latin typeface="Montserrat"/>
               </a:rPr>
-              <a:t>Caducado, sin identificación o muy largo</a:t>
+              <a:t>Grietas, fisuras o daños: principal IPa-3</a:t>
             </a:r>
           </a:p>
           <a:p>
@@ -8889,7 +9693,7 @@
                 </a:solidFill>
                 <a:latin typeface="Montserrat"/>
               </a:rPr>
-              <a:t>Sin enchufe de seguridad en 2.ª familia</a:t>
+              <a:t>Elastómero o espirometálico</a:t>
             </a:r>
           </a:p>
           <a:p>
@@ -8914,7 +9718,7 @@
                 </a:solidFill>
                 <a:latin typeface="Montserrat"/>
               </a:rPr>
-              <a:t>Unión floja: riesgo de desconexión</a:t>
+              <a:t>Pegado a partes calientes del horno: IPa-4</a:t>
             </a:r>
           </a:p>
           <a:p>
@@ -8939,21 +9743,21 @@
                 </a:solidFill>
                 <a:latin typeface="Montserrat"/>
               </a:rPr>
-              <a:t>Roto es principal; viejo, secundario</a:t>
-            </a:r>
-          </a:p>
-        </p:txBody>
-      </p:sp>
-      <p:sp>
-        <p:nvSpPr>
-          <p:cNvPr id="9" name="imgph" descr="IMGQ:gas hose safety connector expiry date label"/>
+              <a:t>Salvo aislante que impida el contacto</a:t>
+            </a:r>
+          </a:p>
+        </p:txBody>
+      </p:sp>
+      <p:sp>
+        <p:nvSpPr>
+          <p:cNvPr id="9" name="imgph" descr="IMGQ:damaged cracked rubber gas hose connection"/>
           <p:cNvSpPr/>
           <p:nvPr/>
         </p:nvSpPr>
         <p:spPr>
           <a:xfrm>
-            <a:off x="5806440" y="1051560"/>
-            <a:ext cx="5298947" cy="4629150"/>
+            <a:off x="822960" y="1965960"/>
+            <a:ext cx="5303520" cy="4572000"/>
           </a:xfrm>
           <a:prstGeom prst="roundRect">
             <a:avLst/>
@@ -8998,8 +9802,8 @@
         </p:nvSpPr>
         <p:spPr>
           <a:xfrm>
-            <a:off x="6080760" y="2726055"/>
-            <a:ext cx="4750307" cy="1280160"/>
+            <a:off x="1097280" y="3611880"/>
+            <a:ext cx="4754880" cy="1280160"/>
           </a:xfrm>
           <a:prstGeom prst="rect">
             <a:avLst/>
@@ -9020,7 +9824,7 @@
                 </a:solidFill>
                 <a:latin typeface="Montserrat"/>
               </a:rPr>
-              <a:t>IMAGEN REALISTA</a:t>
+              <a:t>IMAGEN</a:t>
             </a:r>
           </a:p>
           <a:p>
@@ -9032,7 +9836,7 @@
                 </a:solidFill>
                 <a:latin typeface="Montserrat"/>
               </a:rPr>
-              <a:t>gas hose safety connector expiry date label</a:t>
+              <a:t>damaged cracked rubber gas hose connection</a:t>
             </a:r>
           </a:p>
         </p:txBody>
@@ -9042,6 +9846,18 @@
   <p:clrMapOvr>
     <a:masterClrMapping/>
   </p:clrMapOvr>
+  <mc:AlternateContent xmlns:mc="http://schemas.openxmlformats.org/markup-compatibility/2006">
+    <mc:Choice xmlns:p14="http://schemas.microsoft.com/office/powerpoint/2010/main" Requires="p14">
+      <p:transition spd="med" p14:dur="700">
+        <p14:cube dir="l"/>
+      </p:transition>
+    </mc:Choice>
+    <mc:Fallback>
+      <p:transition spd="med">
+        <p:push dir="l"/>
+      </p:transition>
+    </mc:Fallback>
+  </mc:AlternateContent>
 </p:sld>
 </file>
 
@@ -9129,7 +9945,7 @@
                 </a:solidFill>
                 <a:latin typeface="Montserrat"/>
               </a:rPr>
-              <a:t>018 / 021</a:t>
+              <a:t>018 / 027</a:t>
             </a:r>
           </a:p>
         </p:txBody>
@@ -9197,7 +10013,7 @@
                 </a:solidFill>
                 <a:latin typeface="Montserrat"/>
               </a:rPr>
-              <a:t>PARTE 12 · ISA-5</a:t>
+              <a:t>PARTE 12 · IPA-5</a:t>
             </a:r>
           </a:p>
         </p:txBody>
@@ -9231,14 +10047,14 @@
                 </a:solidFill>
                 <a:latin typeface="Montserrat"/>
               </a:rPr>
-              <a:t>Ventilación inadecuada: los números</a:t>
-            </a:r>
-          </a:p>
-        </p:txBody>
-      </p:sp>
-      <p:sp>
-        <p:nvSpPr>
-          <p:cNvPr id="7" name="Rounded Rectangle 6"/>
+              <a:t>Conductos de evacuación y deflector</a:t>
+            </a:r>
+          </a:p>
+        </p:txBody>
+      </p:sp>
+      <p:sp>
+        <p:nvSpPr>
+          <p:cNvPr id="7" name="Rectangle 6"/>
           <p:cNvSpPr/>
           <p:nvPr/>
         </p:nvSpPr>
@@ -9247,7 +10063,7 @@
             <a:off x="868680" y="1627632"/>
             <a:ext cx="2011680" cy="73152"/>
           </a:xfrm>
-          <a:prstGeom prst="roundRect">
+          <a:prstGeom prst="rect">
             <a:avLst/>
           </a:prstGeom>
           <a:solidFill>
@@ -9289,7 +10105,7 @@
         <p:spPr>
           <a:xfrm>
             <a:off x="822960" y="1965960"/>
-            <a:ext cx="4983480" cy="4206240"/>
+            <a:ext cx="5029200" cy="4206240"/>
           </a:xfrm>
           <a:prstGeom prst="rect">
             <a:avLst/>
@@ -9323,7 +10139,7 @@
                 </a:solidFill>
                 <a:latin typeface="Montserrat"/>
               </a:rPr>
-              <a:t>Falta o está obstruido el orificio</a:t>
+              <a:t>Falta de conducto o de deflector</a:t>
             </a:r>
           </a:p>
           <a:p>
@@ -9348,7 +10164,7 @@
                 </a:solidFill>
                 <a:latin typeface="Montserrat"/>
               </a:rPr>
-              <a:t>Extractor: ≥ 80 cm² hasta 16 kW (tipo A)</a:t>
+              <a:t>Diámetro escaso o estrangulación</a:t>
             </a:r>
           </a:p>
           <a:p>
@@ -9373,7 +10189,7 @@
                 </a:solidFill>
                 <a:latin typeface="Montserrat"/>
               </a:rPr>
-              <a:t>≥ 100 cm² por encima de 16 kW</a:t>
+              <a:t>Materiales que no aguantan la temperatura</a:t>
             </a:r>
           </a:p>
           <a:p>
@@ -9398,21 +10214,21 @@
                 </a:solidFill>
                 <a:latin typeface="Montserrat"/>
               </a:rPr>
-              <a:t>Altura: ≥ 1,80 m o &lt; 0,40 m del techo</a:t>
-            </a:r>
-          </a:p>
-        </p:txBody>
-      </p:sp>
-      <p:sp>
-        <p:nvSpPr>
-          <p:cNvPr id="9" name="imgph" descr="IMGQ:kitchen ventilation grille air vent wall"/>
+              <a:t>Devuelven los humos al local: principal</a:t>
+            </a:r>
+          </a:p>
+        </p:txBody>
+      </p:sp>
+      <p:sp>
+        <p:nvSpPr>
+          <p:cNvPr id="9" name="imgph" descr="IMGQ:damaged flue chimney cap on roof"/>
           <p:cNvSpPr/>
           <p:nvPr/>
         </p:nvSpPr>
         <p:spPr>
           <a:xfrm>
-            <a:off x="5806440" y="1051560"/>
-            <a:ext cx="5298947" cy="4629150"/>
+            <a:off x="6080760" y="1965960"/>
+            <a:ext cx="5303520" cy="4572000"/>
           </a:xfrm>
           <a:prstGeom prst="roundRect">
             <a:avLst/>
@@ -9457,8 +10273,8 @@
         </p:nvSpPr>
         <p:spPr>
           <a:xfrm>
-            <a:off x="6080760" y="2726055"/>
-            <a:ext cx="4750307" cy="1280160"/>
+            <a:off x="6355080" y="3611880"/>
+            <a:ext cx="4754880" cy="1280160"/>
           </a:xfrm>
           <a:prstGeom prst="rect">
             <a:avLst/>
@@ -9479,7 +10295,7 @@
                 </a:solidFill>
                 <a:latin typeface="Montserrat"/>
               </a:rPr>
-              <a:t>IMAGEN REALISTA</a:t>
+              <a:t>IMAGEN</a:t>
             </a:r>
           </a:p>
           <a:p>
@@ -9491,7 +10307,7 @@
                 </a:solidFill>
                 <a:latin typeface="Montserrat"/>
               </a:rPr>
-              <a:t>kitchen ventilation grille air vent wall</a:t>
+              <a:t>damaged flue chimney cap on roof</a:t>
             </a:r>
           </a:p>
         </p:txBody>
@@ -9501,6 +10317,18 @@
   <p:clrMapOvr>
     <a:masterClrMapping/>
   </p:clrMapOvr>
+  <mc:AlternateContent xmlns:mc="http://schemas.openxmlformats.org/markup-compatibility/2006">
+    <mc:Choice xmlns:p14="http://schemas.microsoft.com/office/powerpoint/2010/main" Requires="p14">
+      <p:transition spd="med" p14:dur="700">
+        <p14:cube dir="r"/>
+      </p:transition>
+    </mc:Choice>
+    <mc:Fallback>
+      <p:transition spd="med">
+        <p:push dir="r"/>
+      </p:transition>
+    </mc:Fallback>
+  </mc:AlternateContent>
 </p:sld>
 </file>
 
@@ -9588,7 +10416,7 @@
                 </a:solidFill>
                 <a:latin typeface="Montserrat"/>
               </a:rPr>
-              <a:t>019 / 021</a:t>
+              <a:t>019 / 027</a:t>
             </a:r>
           </a:p>
         </p:txBody>
@@ -9656,7 +10484,7 @@
                 </a:solidFill>
                 <a:latin typeface="Montserrat"/>
               </a:rPr>
-              <a:t>PARTE 12 · ISA-6, ISA-7, ISA-8</a:t>
+              <a:t>PARTE 12 · IPA-6, IPA-7, IPA-8</a:t>
             </a:r>
           </a:p>
         </p:txBody>
@@ -9690,14 +10518,14 @@
                 </a:solidFill>
                 <a:latin typeface="Montserrat"/>
               </a:rPr>
-              <a:t>Volumen, detección y otros servicios</a:t>
-            </a:r>
-          </a:p>
-        </p:txBody>
-      </p:sp>
-      <p:sp>
-        <p:nvSpPr>
-          <p:cNvPr id="7" name="Rounded Rectangle 6"/>
+              <a:t>Chimenea, volumen y llaves sueltas</a:t>
+            </a:r>
+          </a:p>
+        </p:txBody>
+      </p:sp>
+      <p:sp>
+        <p:nvSpPr>
+          <p:cNvPr id="7" name="Rectangle 6"/>
           <p:cNvSpPr/>
           <p:nvPr/>
         </p:nvSpPr>
@@ -9706,7 +10534,7 @@
             <a:off x="868680" y="1627632"/>
             <a:ext cx="2011680" cy="73152"/>
           </a:xfrm>
-          <a:prstGeom prst="roundRect">
+          <a:prstGeom prst="rect">
             <a:avLst/>
           </a:prstGeom>
           <a:solidFill>
@@ -9747,8 +10575,8 @@
         </p:nvSpPr>
         <p:spPr>
           <a:xfrm>
-            <a:off x="822960" y="1965960"/>
-            <a:ext cx="4983480" cy="4206240"/>
+            <a:off x="6355080" y="1965960"/>
+            <a:ext cx="5029200" cy="4206240"/>
           </a:xfrm>
           <a:prstGeom prst="rect">
             <a:avLst/>
@@ -9782,7 +10610,7 @@
                 </a:solidFill>
                 <a:latin typeface="Montserrat"/>
               </a:rPr>
-              <a:t>Cocción &gt; 16 kW: volumen insuficiente</a:t>
+              <a:t>Extractor o campana en chimenea de tipo B</a:t>
             </a:r>
           </a:p>
           <a:p>
@@ -9807,7 +10635,7 @@
                 </a:solidFill>
                 <a:latin typeface="Montserrat"/>
               </a:rPr>
-              <a:t>Falta el sistema de detección y corte</a:t>
+              <a:t>Tipo B en local V ≤ 8 m³ mal ventilado</a:t>
             </a:r>
           </a:p>
           <a:p>
@@ -9832,21 +10660,21 @@
                 </a:solidFill>
                 <a:latin typeface="Montserrat"/>
               </a:rPr>
-              <a:t>Otras conducciones en contacto con el gas</a:t>
-            </a:r>
-          </a:p>
-        </p:txBody>
-      </p:sp>
-      <p:sp>
-        <p:nvSpPr>
-          <p:cNvPr id="9" name="imgph" descr="IMGQ:gas detection safety device kitchen wall"/>
+              <a:t>Llaves sin conectar y sin cerrar/precintar</a:t>
+            </a:r>
+          </a:p>
+        </p:txBody>
+      </p:sp>
+      <p:sp>
+        <p:nvSpPr>
+          <p:cNvPr id="9" name="imgph" descr="IMGQ:small kitchen gas water heater ventilation grille"/>
           <p:cNvSpPr/>
           <p:nvPr/>
         </p:nvSpPr>
         <p:spPr>
           <a:xfrm>
-            <a:off x="5806440" y="1051560"/>
-            <a:ext cx="5298947" cy="4629150"/>
+            <a:off x="822960" y="1965960"/>
+            <a:ext cx="5303520" cy="4572000"/>
           </a:xfrm>
           <a:prstGeom prst="roundRect">
             <a:avLst/>
@@ -9891,8 +10719,8 @@
         </p:nvSpPr>
         <p:spPr>
           <a:xfrm>
-            <a:off x="6080760" y="2726055"/>
-            <a:ext cx="4750307" cy="1280160"/>
+            <a:off x="1097280" y="3611880"/>
+            <a:ext cx="4754880" cy="1280160"/>
           </a:xfrm>
           <a:prstGeom prst="rect">
             <a:avLst/>
@@ -9913,7 +10741,7 @@
                 </a:solidFill>
                 <a:latin typeface="Montserrat"/>
               </a:rPr>
-              <a:t>IMAGEN REALISTA</a:t>
+              <a:t>IMAGEN</a:t>
             </a:r>
           </a:p>
           <a:p>
@@ -9925,7 +10753,7 @@
                 </a:solidFill>
                 <a:latin typeface="Montserrat"/>
               </a:rPr>
-              <a:t>gas detection safety device kitchen wall</a:t>
+              <a:t>small kitchen gas water heater ventilation grille</a:t>
             </a:r>
           </a:p>
         </p:txBody>
@@ -9935,6 +10763,18 @@
   <p:clrMapOvr>
     <a:masterClrMapping/>
   </p:clrMapOvr>
+  <mc:AlternateContent xmlns:mc="http://schemas.openxmlformats.org/markup-compatibility/2006">
+    <mc:Choice xmlns:p14="http://schemas.microsoft.com/office/powerpoint/2010/main" Requires="p14">
+      <p:transition spd="med" p14:dur="700">
+        <p14:cube dir="l"/>
+      </p:transition>
+    </mc:Choice>
+    <mc:Fallback>
+      <p:transition spd="med">
+        <p:push dir="l"/>
+      </p:transition>
+    </mc:Fallback>
+  </mc:AlternateContent>
 </p:sld>
 </file>
 
@@ -10022,7 +10862,7 @@
                 </a:solidFill>
                 <a:latin typeface="Montserrat"/>
               </a:rPr>
-              <a:t>002 / 021</a:t>
+              <a:t>002 / 027</a:t>
             </a:r>
           </a:p>
         </p:txBody>
@@ -10097,7 +10937,7 @@
       </p:sp>
       <p:sp>
         <p:nvSpPr>
-          <p:cNvPr id="6" name="Rounded Rectangle 5"/>
+          <p:cNvPr id="6" name="Rectangle 5"/>
           <p:cNvSpPr/>
           <p:nvPr/>
         </p:nvSpPr>
@@ -10106,7 +10946,7 @@
             <a:off x="868680" y="1234440"/>
             <a:ext cx="1463040" cy="73152"/>
           </a:xfrm>
-          <a:prstGeom prst="roundRect">
+          <a:prstGeom prst="rect">
             <a:avLst/>
           </a:prstGeom>
           <a:solidFill>
@@ -10187,14 +11027,58 @@
       </p:sp>
       <p:sp>
         <p:nvSpPr>
-          <p:cNvPr id="8" name="TextBox 7"/>
+          <p:cNvPr id="8" name="Rectangle 7"/>
+          <p:cNvSpPr/>
+          <p:nvPr/>
+        </p:nvSpPr>
+        <p:spPr>
+          <a:xfrm>
+            <a:off x="822960" y="2011680"/>
+            <a:ext cx="3017520" cy="128016"/>
+          </a:xfrm>
+          <a:prstGeom prst="rect">
+            <a:avLst/>
+          </a:prstGeom>
+          <a:solidFill>
+            <a:srgbClr val="E8801A"/>
+          </a:solidFill>
+          <a:ln>
+            <a:noFill/>
+          </a:ln>
+          <a:effectLst/>
+        </p:spPr>
+        <p:style>
+          <a:lnRef idx="1">
+            <a:schemeClr val="accent1"/>
+          </a:lnRef>
+          <a:fillRef idx="3">
+            <a:schemeClr val="accent1"/>
+          </a:fillRef>
+          <a:effectRef idx="2">
+            <a:schemeClr val="accent1"/>
+          </a:effectRef>
+          <a:fontRef idx="minor">
+            <a:schemeClr val="lt1"/>
+          </a:fontRef>
+        </p:style>
+        <p:txBody>
+          <a:bodyPr rtlCol="0" anchor="ctr"/>
+          <a:lstStyle/>
+          <a:p>
+            <a:pPr algn="ctr"/>
+          </a:p>
+        </p:txBody>
+      </p:sp>
+      <p:sp>
+        <p:nvSpPr>
+          <p:cNvPr id="9" name="TextBox 8"/>
           <p:cNvSpPr txBox="1"/>
           <p:nvPr/>
         </p:nvSpPr>
         <p:spPr>
           <a:xfrm>
-            <a:off x="822960" y="2331720"/>
-            <a:ext cx="3017520" cy="1463040"/>
+            <a:off x="822960" y="2377440"/>
+            <a:ext cx="3017520" cy="1371600"/>
           </a:xfrm>
           <a:prstGeom prst="rect">
             <a:avLst/>
@@ -10209,7 +11093,7 @@
           <a:p>
             <a:pPr algn="ctr"/>
             <a:r>
-              <a:rPr sz="6000" b="1" i="0">
+              <a:rPr sz="5800" b="1" i="0">
                 <a:solidFill>
                   <a:srgbClr val="1E2761"/>
                 </a:solidFill>
@@ -10222,13 +11106,13 @@
       </p:sp>
       <p:sp>
         <p:nvSpPr>
-          <p:cNvPr id="9" name="TextBox 8"/>
+          <p:cNvPr id="10" name="TextBox 9"/>
           <p:cNvSpPr txBox="1"/>
           <p:nvPr/>
         </p:nvSpPr>
         <p:spPr>
           <a:xfrm>
-            <a:off x="1051560" y="3611880"/>
+            <a:off x="1051560" y="3657600"/>
             <a:ext cx="2560320" cy="1005840"/>
           </a:xfrm>
           <a:prstGeom prst="rect">
@@ -10257,7 +11141,7 @@
       </p:sp>
       <p:sp>
         <p:nvSpPr>
-          <p:cNvPr id="10" name="Rounded Rectangle 9"/>
+          <p:cNvPr id="11" name="Rounded Rectangle 10"/>
           <p:cNvSpPr/>
           <p:nvPr/>
         </p:nvSpPr>
@@ -10303,14 +11187,58 @@
       </p:sp>
       <p:sp>
         <p:nvSpPr>
-          <p:cNvPr id="11" name="TextBox 10"/>
+          <p:cNvPr id="12" name="Rectangle 11"/>
+          <p:cNvSpPr/>
+          <p:nvPr/>
+        </p:nvSpPr>
+        <p:spPr>
+          <a:xfrm>
+            <a:off x="4617720" y="2011680"/>
+            <a:ext cx="3017520" cy="128016"/>
+          </a:xfrm>
+          <a:prstGeom prst="rect">
+            <a:avLst/>
+          </a:prstGeom>
+          <a:solidFill>
+            <a:srgbClr val="E8801A"/>
+          </a:solidFill>
+          <a:ln>
+            <a:noFill/>
+          </a:ln>
+          <a:effectLst/>
+        </p:spPr>
+        <p:style>
+          <a:lnRef idx="1">
+            <a:schemeClr val="accent1"/>
+          </a:lnRef>
+          <a:fillRef idx="3">
+            <a:schemeClr val="accent1"/>
+          </a:fillRef>
+          <a:effectRef idx="2">
+            <a:schemeClr val="accent1"/>
+          </a:effectRef>
+          <a:fontRef idx="minor">
+            <a:schemeClr val="lt1"/>
+          </a:fontRef>
+        </p:style>
+        <p:txBody>
+          <a:bodyPr rtlCol="0" anchor="ctr"/>
+          <a:lstStyle/>
+          <a:p>
+            <a:pPr algn="ctr"/>
+          </a:p>
+        </p:txBody>
+      </p:sp>
+      <p:sp>
+        <p:nvSpPr>
+          <p:cNvPr id="13" name="TextBox 12"/>
           <p:cNvSpPr txBox="1"/>
           <p:nvPr/>
         </p:nvSpPr>
         <p:spPr>
           <a:xfrm>
-            <a:off x="4617720" y="2331720"/>
-            <a:ext cx="3017520" cy="1463040"/>
+            <a:off x="4617720" y="2377440"/>
+            <a:ext cx="3017520" cy="1371600"/>
           </a:xfrm>
           <a:prstGeom prst="rect">
             <a:avLst/>
@@ -10325,7 +11253,7 @@
           <a:p>
             <a:pPr algn="ctr"/>
             <a:r>
-              <a:rPr sz="6000" b="1" i="0">
+              <a:rPr sz="5800" b="1" i="0">
                 <a:solidFill>
                   <a:srgbClr val="1E2761"/>
                 </a:solidFill>
@@ -10338,13 +11266,13 @@
       </p:sp>
       <p:sp>
         <p:nvSpPr>
-          <p:cNvPr id="12" name="TextBox 11"/>
+          <p:cNvPr id="14" name="TextBox 13"/>
           <p:cNvSpPr txBox="1"/>
           <p:nvPr/>
         </p:nvSpPr>
         <p:spPr>
           <a:xfrm>
-            <a:off x="4846320" y="3611880"/>
+            <a:off x="4846320" y="3657600"/>
             <a:ext cx="2560320" cy="1005840"/>
           </a:xfrm>
           <a:prstGeom prst="rect">
@@ -10373,7 +11301,7 @@
       </p:sp>
       <p:sp>
         <p:nvSpPr>
-          <p:cNvPr id="13" name="Rounded Rectangle 12"/>
+          <p:cNvPr id="15" name="Rounded Rectangle 14"/>
           <p:cNvSpPr/>
           <p:nvPr/>
         </p:nvSpPr>
@@ -10419,14 +11347,58 @@
       </p:sp>
       <p:sp>
         <p:nvSpPr>
-          <p:cNvPr id="14" name="TextBox 13"/>
+          <p:cNvPr id="16" name="Rectangle 15"/>
+          <p:cNvSpPr/>
+          <p:nvPr/>
+        </p:nvSpPr>
+        <p:spPr>
+          <a:xfrm>
+            <a:off x="8412480" y="2011680"/>
+            <a:ext cx="3017520" cy="128016"/>
+          </a:xfrm>
+          <a:prstGeom prst="rect">
+            <a:avLst/>
+          </a:prstGeom>
+          <a:solidFill>
+            <a:srgbClr val="E8801A"/>
+          </a:solidFill>
+          <a:ln>
+            <a:noFill/>
+          </a:ln>
+          <a:effectLst/>
+        </p:spPr>
+        <p:style>
+          <a:lnRef idx="1">
+            <a:schemeClr val="accent1"/>
+          </a:lnRef>
+          <a:fillRef idx="3">
+            <a:schemeClr val="accent1"/>
+          </a:fillRef>
+          <a:effectRef idx="2">
+            <a:schemeClr val="accent1"/>
+          </a:effectRef>
+          <a:fontRef idx="minor">
+            <a:schemeClr val="lt1"/>
+          </a:fontRef>
+        </p:style>
+        <p:txBody>
+          <a:bodyPr rtlCol="0" anchor="ctr"/>
+          <a:lstStyle/>
+          <a:p>
+            <a:pPr algn="ctr"/>
+          </a:p>
+        </p:txBody>
+      </p:sp>
+      <p:sp>
+        <p:nvSpPr>
+          <p:cNvPr id="17" name="TextBox 16"/>
           <p:cNvSpPr txBox="1"/>
           <p:nvPr/>
         </p:nvSpPr>
         <p:spPr>
           <a:xfrm>
-            <a:off x="8412480" y="2331720"/>
-            <a:ext cx="3017520" cy="1463040"/>
+            <a:off x="8412480" y="2377440"/>
+            <a:ext cx="3017520" cy="1371600"/>
           </a:xfrm>
           <a:prstGeom prst="rect">
             <a:avLst/>
@@ -10441,7 +11413,7 @@
           <a:p>
             <a:pPr algn="ctr"/>
             <a:r>
-              <a:rPr sz="6000" b="1" i="0">
+              <a:rPr sz="5800" b="1" i="0">
                 <a:solidFill>
                   <a:srgbClr val="1E2761"/>
                 </a:solidFill>
@@ -10454,13 +11426,13 @@
       </p:sp>
       <p:sp>
         <p:nvSpPr>
-          <p:cNvPr id="15" name="TextBox 14"/>
+          <p:cNvPr id="18" name="TextBox 17"/>
           <p:cNvSpPr txBox="1"/>
           <p:nvPr/>
         </p:nvSpPr>
         <p:spPr>
           <a:xfrm>
-            <a:off x="8641080" y="3611880"/>
+            <a:off x="8641080" y="3657600"/>
             <a:ext cx="2560320" cy="1005840"/>
           </a:xfrm>
           <a:prstGeom prst="rect">
@@ -10492,6 +11464,18 @@
   <p:clrMapOvr>
     <a:masterClrMapping/>
   </p:clrMapOvr>
+  <mc:AlternateContent xmlns:mc="http://schemas.openxmlformats.org/markup-compatibility/2006">
+    <mc:Choice xmlns:p14="http://schemas.microsoft.com/office/powerpoint/2010/main" Requires="p14">
+      <p:transition spd="med" p14:dur="700">
+        <p14:cube dir="r"/>
+      </p:transition>
+    </mc:Choice>
+    <mc:Fallback>
+      <p:transition spd="med">
+        <p:push dir="r"/>
+      </p:transition>
+    </mc:Fallback>
+  </mc:AlternateContent>
 </p:sld>
 </file>
 
@@ -10579,7 +11563,7 @@
                 </a:solidFill>
                 <a:latin typeface="Montserrat"/>
               </a:rPr>
-              <a:t>020 / 021</a:t>
+              <a:t>020 / 027</a:t>
             </a:r>
           </a:p>
         </p:txBody>
@@ -10620,84 +11604,16 @@
       </p:sp>
       <p:sp>
         <p:nvSpPr>
-          <p:cNvPr id="5" name="TextBox 4"/>
-          <p:cNvSpPr txBox="1"/>
-          <p:nvPr/>
-        </p:nvSpPr>
-        <p:spPr>
-          <a:xfrm>
-            <a:off x="822960" y="457200"/>
-            <a:ext cx="10058400" cy="365760"/>
-          </a:xfrm>
-          <a:prstGeom prst="rect">
-            <a:avLst/>
-          </a:prstGeom>
-          <a:noFill/>
-        </p:spPr>
-        <p:txBody>
-          <a:bodyPr wrap="square">
-            <a:spAutoFit/>
-          </a:bodyPr>
-          <a:lstStyle/>
-          <a:p>
-            <a:r>
-              <a:rPr sz="1300" b="1" i="0">
-                <a:solidFill>
-                  <a:srgbClr val="E8801A"/>
-                </a:solidFill>
-                <a:latin typeface="Montserrat"/>
-              </a:rPr>
-              <a:t>PARTE 12 · EL PAPELEO</a:t>
-            </a:r>
-          </a:p>
-        </p:txBody>
-      </p:sp>
-      <p:sp>
-        <p:nvSpPr>
-          <p:cNvPr id="6" name="TextBox 5"/>
-          <p:cNvSpPr txBox="1"/>
-          <p:nvPr/>
-        </p:nvSpPr>
-        <p:spPr>
-          <a:xfrm>
-            <a:off x="822960" y="868680"/>
-            <a:ext cx="10515600" cy="914400"/>
-          </a:xfrm>
-          <a:prstGeom prst="rect">
-            <a:avLst/>
-          </a:prstGeom>
-          <a:noFill/>
-        </p:spPr>
-        <p:txBody>
-          <a:bodyPr wrap="square">
-            <a:spAutoFit/>
-          </a:bodyPr>
-          <a:lstStyle/>
-          <a:p>
-            <a:r>
-              <a:rPr sz="2800" b="1" i="0">
-                <a:solidFill>
-                  <a:srgbClr val="1E2761"/>
-                </a:solidFill>
-                <a:latin typeface="Montserrat"/>
-              </a:rPr>
-              <a:t>Quién firma y a quién avisas</a:t>
-            </a:r>
-          </a:p>
-        </p:txBody>
-      </p:sp>
-      <p:sp>
-        <p:nvSpPr>
-          <p:cNvPr id="7" name="Rounded Rectangle 6"/>
+          <p:cNvPr id="5" name="Rectangle 4"/>
           <p:cNvSpPr/>
           <p:nvPr/>
         </p:nvSpPr>
         <p:spPr>
           <a:xfrm>
-            <a:off x="868680" y="1627632"/>
-            <a:ext cx="2011680" cy="73152"/>
-          </a:xfrm>
-          <a:prstGeom prst="roundRect">
+            <a:off x="0" y="0"/>
+            <a:ext cx="12191695" cy="1143000"/>
+          </a:xfrm>
+          <a:prstGeom prst="rect">
             <a:avLst/>
           </a:prstGeom>
           <a:solidFill>
@@ -10732,14 +11648,14 @@
       </p:sp>
       <p:sp>
         <p:nvSpPr>
-          <p:cNvPr id="8" name="TextBox 7"/>
+          <p:cNvPr id="6" name="TextBox 5"/>
           <p:cNvSpPr txBox="1"/>
           <p:nvPr/>
         </p:nvSpPr>
         <p:spPr>
           <a:xfrm>
-            <a:off x="822960" y="1965960"/>
-            <a:ext cx="4983480" cy="4206240"/>
+            <a:off x="822960" y="274320"/>
+            <a:ext cx="10515600" cy="640080"/>
           </a:xfrm>
           <a:prstGeom prst="rect">
             <a:avLst/>
@@ -10752,92 +11668,62 @@
           </a:bodyPr>
           <a:lstStyle/>
           <a:p>
-            <a:pPr>
-              <a:spcAft>
-                <a:spcPts val="1100"/>
-              </a:spcAft>
-            </a:pPr>
-            <a:r>
-              <a:rPr sz="1600" b="1" i="0">
-                <a:solidFill>
-                  <a:srgbClr val="E8801A"/>
-                </a:solidFill>
-                <a:latin typeface="Montserrat"/>
-              </a:rPr>
-              <a:t>▸  </a:t>
-            </a:r>
-            <a:r>
-              <a:rPr sz="1600" b="0" i="0">
-                <a:solidFill>
-                  <a:srgbClr val="1B2330"/>
-                </a:solidFill>
-                <a:latin typeface="Montserrat"/>
-              </a:rPr>
-              <a:t>Lo hace la empresa habilitada</a:t>
-            </a:r>
-          </a:p>
-          <a:p>
-            <a:pPr>
-              <a:spcAft>
-                <a:spcPts val="1100"/>
-              </a:spcAft>
-            </a:pPr>
-            <a:r>
-              <a:rPr sz="1600" b="1" i="0">
-                <a:solidFill>
-                  <a:srgbClr val="E8801A"/>
-                </a:solidFill>
-                <a:latin typeface="Montserrat"/>
-              </a:rPr>
-              <a:t>▸  </a:t>
-            </a:r>
-            <a:r>
-              <a:rPr sz="1600" b="0" i="0">
-                <a:solidFill>
-                  <a:srgbClr val="1B2330"/>
-                </a:solidFill>
-                <a:latin typeface="Montserrat"/>
-              </a:rPr>
-              <a:t>Certificado o informe al titular</a:t>
-            </a:r>
-          </a:p>
-          <a:p>
-            <a:pPr>
-              <a:spcAft>
-                <a:spcPts val="1100"/>
-              </a:spcAft>
-            </a:pPr>
-            <a:r>
-              <a:rPr sz="1600" b="1" i="0">
-                <a:solidFill>
-                  <a:srgbClr val="E8801A"/>
-                </a:solidFill>
-                <a:latin typeface="Montserrat"/>
-              </a:rPr>
-              <a:t>▸  </a:t>
-            </a:r>
-            <a:r>
-              <a:rPr sz="1600" b="0" i="0">
-                <a:solidFill>
-                  <a:srgbClr val="1B2330"/>
-                </a:solidFill>
-                <a:latin typeface="Montserrat"/>
-              </a:rPr>
-              <a:t>Principales o no apta: avisar a distribuidora</a:t>
-            </a:r>
-          </a:p>
-        </p:txBody>
-      </p:sp>
-      <p:sp>
-        <p:nvSpPr>
-          <p:cNvPr id="9" name="imgph" descr="IMGQ:gas installer signing inspection report"/>
+            <a:r>
+              <a:rPr sz="2400" b="1" i="0">
+                <a:solidFill>
+                  <a:srgbClr val="FFFFFF"/>
+                </a:solidFill>
+                <a:latin typeface="Montserrat"/>
+              </a:rPr>
+              <a:t>⚡  PREGUNTA RÁPIDA</a:t>
+            </a:r>
+          </a:p>
+        </p:txBody>
+      </p:sp>
+      <p:sp>
+        <p:nvSpPr>
+          <p:cNvPr id="7" name="TextBox 6"/>
+          <p:cNvSpPr txBox="1"/>
+          <p:nvPr/>
+        </p:nvSpPr>
+        <p:spPr>
+          <a:xfrm>
+            <a:off x="822960" y="1508760"/>
+            <a:ext cx="10515600" cy="1371600"/>
+          </a:xfrm>
+          <a:prstGeom prst="rect">
+            <a:avLst/>
+          </a:prstGeom>
+          <a:noFill/>
+        </p:spPr>
+        <p:txBody>
+          <a:bodyPr wrap="square">
+            <a:spAutoFit/>
+          </a:bodyPr>
+          <a:lstStyle/>
+          <a:p>
+            <a:r>
+              <a:rPr sz="2400" b="1" i="0">
+                <a:solidFill>
+                  <a:srgbClr val="1E2761"/>
+                </a:solidFill>
+                <a:latin typeface="Montserrat"/>
+              </a:rPr>
+              <a:t>Un aparato de tipo B mal ventilado en un local de ocho metros cúbicos o menos es una anomalía…</a:t>
+            </a:r>
+          </a:p>
+        </p:txBody>
+      </p:sp>
+      <p:sp>
+        <p:nvSpPr>
+          <p:cNvPr id="8" name="Rounded Rectangle 7"/>
           <p:cNvSpPr/>
           <p:nvPr/>
         </p:nvSpPr>
         <p:spPr>
           <a:xfrm>
-            <a:off x="5806440" y="1051560"/>
-            <a:ext cx="5298947" cy="4629150"/>
+            <a:off x="822960" y="3291840"/>
+            <a:ext cx="4983480" cy="1143000"/>
           </a:xfrm>
           <a:prstGeom prst="roundRect">
             <a:avLst/>
@@ -10876,14 +11762,58 @@
       </p:sp>
       <p:sp>
         <p:nvSpPr>
+          <p:cNvPr id="9" name="Rectangle 8"/>
+          <p:cNvSpPr/>
+          <p:nvPr/>
+        </p:nvSpPr>
+        <p:spPr>
+          <a:xfrm>
+            <a:off x="822960" y="3291840"/>
+            <a:ext cx="640080" cy="1143000"/>
+          </a:xfrm>
+          <a:prstGeom prst="rect">
+            <a:avLst/>
+          </a:prstGeom>
+          <a:solidFill>
+            <a:srgbClr val="1E2761"/>
+          </a:solidFill>
+          <a:ln>
+            <a:noFill/>
+          </a:ln>
+          <a:effectLst/>
+        </p:spPr>
+        <p:style>
+          <a:lnRef idx="1">
+            <a:schemeClr val="accent1"/>
+          </a:lnRef>
+          <a:fillRef idx="3">
+            <a:schemeClr val="accent1"/>
+          </a:fillRef>
+          <a:effectRef idx="2">
+            <a:schemeClr val="accent1"/>
+          </a:effectRef>
+          <a:fontRef idx="minor">
+            <a:schemeClr val="lt1"/>
+          </a:fontRef>
+        </p:style>
+        <p:txBody>
+          <a:bodyPr rtlCol="0" anchor="ctr"/>
+          <a:lstStyle/>
+          <a:p>
+            <a:pPr algn="ctr"/>
+          </a:p>
+        </p:txBody>
+      </p:sp>
+      <p:sp>
+        <p:nvSpPr>
           <p:cNvPr id="10" name="TextBox 9"/>
           <p:cNvSpPr txBox="1"/>
           <p:nvPr/>
         </p:nvSpPr>
         <p:spPr>
           <a:xfrm>
-            <a:off x="6080760" y="2726055"/>
-            <a:ext cx="4750307" cy="1280160"/>
+            <a:off x="822960" y="3611880"/>
+            <a:ext cx="640080" cy="548640"/>
           </a:xfrm>
           <a:prstGeom prst="rect">
             <a:avLst/>
@@ -10898,25 +11828,524 @@
           <a:p>
             <a:pPr algn="ctr"/>
             <a:r>
-              <a:rPr sz="1400" b="1" i="0">
-                <a:solidFill>
-                  <a:srgbClr val="64748B"/>
-                </a:solidFill>
-                <a:latin typeface="Montserrat"/>
-              </a:rPr>
-              <a:t>IMAGEN REALISTA</a:t>
-            </a:r>
-          </a:p>
+              <a:rPr sz="2200" b="1" i="0">
+                <a:solidFill>
+                  <a:srgbClr val="FFFFFF"/>
+                </a:solidFill>
+                <a:latin typeface="Montserrat"/>
+              </a:rPr>
+              <a:t>A</a:t>
+            </a:r>
+          </a:p>
+        </p:txBody>
+      </p:sp>
+      <p:sp>
+        <p:nvSpPr>
+          <p:cNvPr id="11" name="TextBox 10"/>
+          <p:cNvSpPr txBox="1"/>
+          <p:nvPr/>
+        </p:nvSpPr>
+        <p:spPr>
+          <a:xfrm>
+            <a:off x="1600200" y="3474720"/>
+            <a:ext cx="4114800" cy="868680"/>
+          </a:xfrm>
+          <a:prstGeom prst="rect">
+            <a:avLst/>
+          </a:prstGeom>
+          <a:noFill/>
+        </p:spPr>
+        <p:txBody>
+          <a:bodyPr wrap="square">
+            <a:spAutoFit/>
+          </a:bodyPr>
+          <a:lstStyle/>
+          <a:p>
+            <a:r>
+              <a:rPr sz="1400" b="0" i="0">
+                <a:solidFill>
+                  <a:srgbClr val="1B2330"/>
+                </a:solidFill>
+                <a:latin typeface="Montserrat"/>
+              </a:rPr>
+              <a:t>Secundaria, con seis meses de plazo</a:t>
+            </a:r>
+          </a:p>
+        </p:txBody>
+      </p:sp>
+      <p:sp>
+        <p:nvSpPr>
+          <p:cNvPr id="12" name="Rounded Rectangle 11"/>
+          <p:cNvSpPr/>
+          <p:nvPr/>
+        </p:nvSpPr>
+        <p:spPr>
+          <a:xfrm>
+            <a:off x="6355080" y="3291840"/>
+            <a:ext cx="4983480" cy="1143000"/>
+          </a:xfrm>
+          <a:prstGeom prst="roundRect">
+            <a:avLst/>
+          </a:prstGeom>
+          <a:solidFill>
+            <a:srgbClr val="F3F6FB"/>
+          </a:solidFill>
+          <a:ln w="12700">
+            <a:solidFill>
+              <a:srgbClr val="C7D2E6"/>
+            </a:solidFill>
+          </a:ln>
+          <a:effectLst/>
+        </p:spPr>
+        <p:style>
+          <a:lnRef idx="1">
+            <a:schemeClr val="accent1"/>
+          </a:lnRef>
+          <a:fillRef idx="3">
+            <a:schemeClr val="accent1"/>
+          </a:fillRef>
+          <a:effectRef idx="2">
+            <a:schemeClr val="accent1"/>
+          </a:effectRef>
+          <a:fontRef idx="minor">
+            <a:schemeClr val="lt1"/>
+          </a:fontRef>
+        </p:style>
+        <p:txBody>
+          <a:bodyPr rtlCol="0" anchor="ctr"/>
+          <a:lstStyle/>
           <a:p>
             <a:pPr algn="ctr"/>
-            <a:r>
-              <a:rPr sz="1100" b="0" i="1">
-                <a:solidFill>
-                  <a:srgbClr val="64748B"/>
-                </a:solidFill>
-                <a:latin typeface="Montserrat"/>
-              </a:rPr>
-              <a:t>gas installer signing inspection report</a:t>
+          </a:p>
+        </p:txBody>
+      </p:sp>
+      <p:sp>
+        <p:nvSpPr>
+          <p:cNvPr id="13" name="Rectangle 12"/>
+          <p:cNvSpPr/>
+          <p:nvPr/>
+        </p:nvSpPr>
+        <p:spPr>
+          <a:xfrm>
+            <a:off x="6355080" y="3291840"/>
+            <a:ext cx="640080" cy="1143000"/>
+          </a:xfrm>
+          <a:prstGeom prst="rect">
+            <a:avLst/>
+          </a:prstGeom>
+          <a:solidFill>
+            <a:srgbClr val="1E2761"/>
+          </a:solidFill>
+          <a:ln>
+            <a:noFill/>
+          </a:ln>
+          <a:effectLst/>
+        </p:spPr>
+        <p:style>
+          <a:lnRef idx="1">
+            <a:schemeClr val="accent1"/>
+          </a:lnRef>
+          <a:fillRef idx="3">
+            <a:schemeClr val="accent1"/>
+          </a:fillRef>
+          <a:effectRef idx="2">
+            <a:schemeClr val="accent1"/>
+          </a:effectRef>
+          <a:fontRef idx="minor">
+            <a:schemeClr val="lt1"/>
+          </a:fontRef>
+        </p:style>
+        <p:txBody>
+          <a:bodyPr rtlCol="0" anchor="ctr"/>
+          <a:lstStyle/>
+          <a:p>
+            <a:pPr algn="ctr"/>
+          </a:p>
+        </p:txBody>
+      </p:sp>
+      <p:sp>
+        <p:nvSpPr>
+          <p:cNvPr id="14" name="TextBox 13"/>
+          <p:cNvSpPr txBox="1"/>
+          <p:nvPr/>
+        </p:nvSpPr>
+        <p:spPr>
+          <a:xfrm>
+            <a:off x="6355080" y="3611880"/>
+            <a:ext cx="640080" cy="548640"/>
+          </a:xfrm>
+          <a:prstGeom prst="rect">
+            <a:avLst/>
+          </a:prstGeom>
+          <a:noFill/>
+        </p:spPr>
+        <p:txBody>
+          <a:bodyPr wrap="square">
+            <a:spAutoFit/>
+          </a:bodyPr>
+          <a:lstStyle/>
+          <a:p>
+            <a:pPr algn="ctr"/>
+            <a:r>
+              <a:rPr sz="2200" b="1" i="0">
+                <a:solidFill>
+                  <a:srgbClr val="FFFFFF"/>
+                </a:solidFill>
+                <a:latin typeface="Montserrat"/>
+              </a:rPr>
+              <a:t>B</a:t>
+            </a:r>
+          </a:p>
+        </p:txBody>
+      </p:sp>
+      <p:sp>
+        <p:nvSpPr>
+          <p:cNvPr id="15" name="TextBox 14"/>
+          <p:cNvSpPr txBox="1"/>
+          <p:nvPr/>
+        </p:nvSpPr>
+        <p:spPr>
+          <a:xfrm>
+            <a:off x="7132320" y="3474720"/>
+            <a:ext cx="4114800" cy="868680"/>
+          </a:xfrm>
+          <a:prstGeom prst="rect">
+            <a:avLst/>
+          </a:prstGeom>
+          <a:noFill/>
+        </p:spPr>
+        <p:txBody>
+          <a:bodyPr wrap="square">
+            <a:spAutoFit/>
+          </a:bodyPr>
+          <a:lstStyle/>
+          <a:p>
+            <a:r>
+              <a:rPr sz="1400" b="0" i="0">
+                <a:solidFill>
+                  <a:srgbClr val="1B2330"/>
+                </a:solidFill>
+                <a:latin typeface="Montserrat"/>
+              </a:rPr>
+              <a:t>Principal, se corta el suministro</a:t>
+            </a:r>
+          </a:p>
+        </p:txBody>
+      </p:sp>
+      <p:sp>
+        <p:nvSpPr>
+          <p:cNvPr id="16" name="Rounded Rectangle 15"/>
+          <p:cNvSpPr/>
+          <p:nvPr/>
+        </p:nvSpPr>
+        <p:spPr>
+          <a:xfrm>
+            <a:off x="822960" y="4617720"/>
+            <a:ext cx="4983480" cy="1143000"/>
+          </a:xfrm>
+          <a:prstGeom prst="roundRect">
+            <a:avLst/>
+          </a:prstGeom>
+          <a:solidFill>
+            <a:srgbClr val="F3F6FB"/>
+          </a:solidFill>
+          <a:ln w="12700">
+            <a:solidFill>
+              <a:srgbClr val="C7D2E6"/>
+            </a:solidFill>
+          </a:ln>
+          <a:effectLst/>
+        </p:spPr>
+        <p:style>
+          <a:lnRef idx="1">
+            <a:schemeClr val="accent1"/>
+          </a:lnRef>
+          <a:fillRef idx="3">
+            <a:schemeClr val="accent1"/>
+          </a:fillRef>
+          <a:effectRef idx="2">
+            <a:schemeClr val="accent1"/>
+          </a:effectRef>
+          <a:fontRef idx="minor">
+            <a:schemeClr val="lt1"/>
+          </a:fontRef>
+        </p:style>
+        <p:txBody>
+          <a:bodyPr rtlCol="0" anchor="ctr"/>
+          <a:lstStyle/>
+          <a:p>
+            <a:pPr algn="ctr"/>
+          </a:p>
+        </p:txBody>
+      </p:sp>
+      <p:sp>
+        <p:nvSpPr>
+          <p:cNvPr id="17" name="Rectangle 16"/>
+          <p:cNvSpPr/>
+          <p:nvPr/>
+        </p:nvSpPr>
+        <p:spPr>
+          <a:xfrm>
+            <a:off x="822960" y="4617720"/>
+            <a:ext cx="640080" cy="1143000"/>
+          </a:xfrm>
+          <a:prstGeom prst="rect">
+            <a:avLst/>
+          </a:prstGeom>
+          <a:solidFill>
+            <a:srgbClr val="1E2761"/>
+          </a:solidFill>
+          <a:ln>
+            <a:noFill/>
+          </a:ln>
+          <a:effectLst/>
+        </p:spPr>
+        <p:style>
+          <a:lnRef idx="1">
+            <a:schemeClr val="accent1"/>
+          </a:lnRef>
+          <a:fillRef idx="3">
+            <a:schemeClr val="accent1"/>
+          </a:fillRef>
+          <a:effectRef idx="2">
+            <a:schemeClr val="accent1"/>
+          </a:effectRef>
+          <a:fontRef idx="minor">
+            <a:schemeClr val="lt1"/>
+          </a:fontRef>
+        </p:style>
+        <p:txBody>
+          <a:bodyPr rtlCol="0" anchor="ctr"/>
+          <a:lstStyle/>
+          <a:p>
+            <a:pPr algn="ctr"/>
+          </a:p>
+        </p:txBody>
+      </p:sp>
+      <p:sp>
+        <p:nvSpPr>
+          <p:cNvPr id="18" name="TextBox 17"/>
+          <p:cNvSpPr txBox="1"/>
+          <p:nvPr/>
+        </p:nvSpPr>
+        <p:spPr>
+          <a:xfrm>
+            <a:off x="822960" y="4937760"/>
+            <a:ext cx="640080" cy="548640"/>
+          </a:xfrm>
+          <a:prstGeom prst="rect">
+            <a:avLst/>
+          </a:prstGeom>
+          <a:noFill/>
+        </p:spPr>
+        <p:txBody>
+          <a:bodyPr wrap="square">
+            <a:spAutoFit/>
+          </a:bodyPr>
+          <a:lstStyle/>
+          <a:p>
+            <a:pPr algn="ctr"/>
+            <a:r>
+              <a:rPr sz="2200" b="1" i="0">
+                <a:solidFill>
+                  <a:srgbClr val="FFFFFF"/>
+                </a:solidFill>
+                <a:latin typeface="Montserrat"/>
+              </a:rPr>
+              <a:t>C</a:t>
+            </a:r>
+          </a:p>
+        </p:txBody>
+      </p:sp>
+      <p:sp>
+        <p:nvSpPr>
+          <p:cNvPr id="19" name="TextBox 18"/>
+          <p:cNvSpPr txBox="1"/>
+          <p:nvPr/>
+        </p:nvSpPr>
+        <p:spPr>
+          <a:xfrm>
+            <a:off x="1600200" y="4800600"/>
+            <a:ext cx="4114800" cy="868680"/>
+          </a:xfrm>
+          <a:prstGeom prst="rect">
+            <a:avLst/>
+          </a:prstGeom>
+          <a:noFill/>
+        </p:spPr>
+        <p:txBody>
+          <a:bodyPr wrap="square">
+            <a:spAutoFit/>
+          </a:bodyPr>
+          <a:lstStyle/>
+          <a:p>
+            <a:r>
+              <a:rPr sz="1400" b="0" i="0">
+                <a:solidFill>
+                  <a:srgbClr val="1B2330"/>
+                </a:solidFill>
+                <a:latin typeface="Montserrat"/>
+              </a:rPr>
+              <a:t>Sin importancia, solo recomendación</a:t>
+            </a:r>
+          </a:p>
+        </p:txBody>
+      </p:sp>
+      <p:sp>
+        <p:nvSpPr>
+          <p:cNvPr id="20" name="Rounded Rectangle 19"/>
+          <p:cNvSpPr/>
+          <p:nvPr/>
+        </p:nvSpPr>
+        <p:spPr>
+          <a:xfrm>
+            <a:off x="6355080" y="4617720"/>
+            <a:ext cx="4983480" cy="1143000"/>
+          </a:xfrm>
+          <a:prstGeom prst="roundRect">
+            <a:avLst/>
+          </a:prstGeom>
+          <a:solidFill>
+            <a:srgbClr val="F3F6FB"/>
+          </a:solidFill>
+          <a:ln w="12700">
+            <a:solidFill>
+              <a:srgbClr val="C7D2E6"/>
+            </a:solidFill>
+          </a:ln>
+          <a:effectLst/>
+        </p:spPr>
+        <p:style>
+          <a:lnRef idx="1">
+            <a:schemeClr val="accent1"/>
+          </a:lnRef>
+          <a:fillRef idx="3">
+            <a:schemeClr val="accent1"/>
+          </a:fillRef>
+          <a:effectRef idx="2">
+            <a:schemeClr val="accent1"/>
+          </a:effectRef>
+          <a:fontRef idx="minor">
+            <a:schemeClr val="lt1"/>
+          </a:fontRef>
+        </p:style>
+        <p:txBody>
+          <a:bodyPr rtlCol="0" anchor="ctr"/>
+          <a:lstStyle/>
+          <a:p>
+            <a:pPr algn="ctr"/>
+          </a:p>
+        </p:txBody>
+      </p:sp>
+      <p:sp>
+        <p:nvSpPr>
+          <p:cNvPr id="21" name="Rectangle 20"/>
+          <p:cNvSpPr/>
+          <p:nvPr/>
+        </p:nvSpPr>
+        <p:spPr>
+          <a:xfrm>
+            <a:off x="6355080" y="4617720"/>
+            <a:ext cx="640080" cy="1143000"/>
+          </a:xfrm>
+          <a:prstGeom prst="rect">
+            <a:avLst/>
+          </a:prstGeom>
+          <a:solidFill>
+            <a:srgbClr val="1E2761"/>
+          </a:solidFill>
+          <a:ln>
+            <a:noFill/>
+          </a:ln>
+          <a:effectLst/>
+        </p:spPr>
+        <p:style>
+          <a:lnRef idx="1">
+            <a:schemeClr val="accent1"/>
+          </a:lnRef>
+          <a:fillRef idx="3">
+            <a:schemeClr val="accent1"/>
+          </a:fillRef>
+          <a:effectRef idx="2">
+            <a:schemeClr val="accent1"/>
+          </a:effectRef>
+          <a:fontRef idx="minor">
+            <a:schemeClr val="lt1"/>
+          </a:fontRef>
+        </p:style>
+        <p:txBody>
+          <a:bodyPr rtlCol="0" anchor="ctr"/>
+          <a:lstStyle/>
+          <a:p>
+            <a:pPr algn="ctr"/>
+          </a:p>
+        </p:txBody>
+      </p:sp>
+      <p:sp>
+        <p:nvSpPr>
+          <p:cNvPr id="22" name="TextBox 21"/>
+          <p:cNvSpPr txBox="1"/>
+          <p:nvPr/>
+        </p:nvSpPr>
+        <p:spPr>
+          <a:xfrm>
+            <a:off x="6355080" y="4937760"/>
+            <a:ext cx="640080" cy="548640"/>
+          </a:xfrm>
+          <a:prstGeom prst="rect">
+            <a:avLst/>
+          </a:prstGeom>
+          <a:noFill/>
+        </p:spPr>
+        <p:txBody>
+          <a:bodyPr wrap="square">
+            <a:spAutoFit/>
+          </a:bodyPr>
+          <a:lstStyle/>
+          <a:p>
+            <a:pPr algn="ctr"/>
+            <a:r>
+              <a:rPr sz="2200" b="1" i="0">
+                <a:solidFill>
+                  <a:srgbClr val="FFFFFF"/>
+                </a:solidFill>
+                <a:latin typeface="Montserrat"/>
+              </a:rPr>
+              <a:t>D</a:t>
+            </a:r>
+          </a:p>
+        </p:txBody>
+      </p:sp>
+      <p:sp>
+        <p:nvSpPr>
+          <p:cNvPr id="23" name="TextBox 22"/>
+          <p:cNvSpPr txBox="1"/>
+          <p:nvPr/>
+        </p:nvSpPr>
+        <p:spPr>
+          <a:xfrm>
+            <a:off x="7132320" y="4800600"/>
+            <a:ext cx="4114800" cy="868680"/>
+          </a:xfrm>
+          <a:prstGeom prst="rect">
+            <a:avLst/>
+          </a:prstGeom>
+          <a:noFill/>
+        </p:spPr>
+        <p:txBody>
+          <a:bodyPr wrap="square">
+            <a:spAutoFit/>
+          </a:bodyPr>
+          <a:lstStyle/>
+          <a:p>
+            <a:r>
+              <a:rPr sz="1400" b="0" i="0">
+                <a:solidFill>
+                  <a:srgbClr val="1B2330"/>
+                </a:solidFill>
+                <a:latin typeface="Montserrat"/>
+              </a:rPr>
+              <a:t>Principal solo si además hay fuga</a:t>
             </a:r>
           </a:p>
         </p:txBody>
@@ -10926,6 +12355,18 @@
   <p:clrMapOvr>
     <a:masterClrMapping/>
   </p:clrMapOvr>
+  <mc:AlternateContent xmlns:mc="http://schemas.openxmlformats.org/markup-compatibility/2006">
+    <mc:Choice xmlns:p14="http://schemas.microsoft.com/office/powerpoint/2010/main" Requires="p14">
+      <p:transition spd="med" p14:dur="700">
+        <p14:cube dir="r"/>
+      </p:transition>
+    </mc:Choice>
+    <mc:Fallback>
+      <p:transition spd="med">
+        <p:push dir="r"/>
+      </p:transition>
+    </mc:Fallback>
+  </mc:AlternateContent>
 </p:sld>
 </file>
 
@@ -10954,7 +12395,7 @@
             <a:avLst/>
           </a:prstGeom>
           <a:solidFill>
-            <a:srgbClr val="1E2761"/>
+            <a:srgbClr val="FFFFFF"/>
           </a:solidFill>
           <a:ln>
             <a:noFill/>
@@ -10991,8 +12432,8 @@
         </p:nvSpPr>
         <p:spPr>
           <a:xfrm>
-            <a:off x="822960" y="640080"/>
-            <a:ext cx="10515600" cy="457200"/>
+            <a:off x="10607040" y="320040"/>
+            <a:ext cx="1371600" cy="365760"/>
           </a:xfrm>
           <a:prstGeom prst="rect">
             <a:avLst/>
@@ -11005,30 +12446,520 @@
           </a:bodyPr>
           <a:lstStyle/>
           <a:p>
-            <a:r>
-              <a:rPr sz="1400" b="1" i="0">
-                <a:solidFill>
-                  <a:srgbClr val="F4A24C"/>
-                </a:solidFill>
-                <a:latin typeface="Montserrat"/>
-              </a:rPr>
-              <a:t>LO QUE YA DOMINAS</a:t>
-            </a:r>
-          </a:p>
-        </p:txBody>
-      </p:sp>
-      <p:sp>
-        <p:nvSpPr>
-          <p:cNvPr id="4" name="Rounded Rectangle 3"/>
+            <a:pPr algn="r"/>
+            <a:r>
+              <a:rPr sz="1000" b="1" i="0">
+                <a:solidFill>
+                  <a:srgbClr val="64748B"/>
+                </a:solidFill>
+                <a:latin typeface="Montserrat"/>
+              </a:rPr>
+              <a:t>021 / 027</a:t>
+            </a:r>
+          </a:p>
+        </p:txBody>
+      </p:sp>
+      <p:sp>
+        <p:nvSpPr>
+          <p:cNvPr id="4" name="TextBox 3"/>
+          <p:cNvSpPr txBox="1"/>
+          <p:nvPr/>
+        </p:nvSpPr>
+        <p:spPr>
+          <a:xfrm>
+            <a:off x="457200" y="6419088"/>
+            <a:ext cx="8229600" cy="365760"/>
+          </a:xfrm>
+          <a:prstGeom prst="rect">
+            <a:avLst/>
+          </a:prstGeom>
+          <a:noFill/>
+        </p:spPr>
+        <p:txBody>
+          <a:bodyPr wrap="square">
+            <a:spAutoFit/>
+          </a:bodyPr>
+          <a:lstStyle/>
+          <a:p>
+            <a:r>
+              <a:rPr sz="900" b="0" i="0">
+                <a:solidFill>
+                  <a:srgbClr val="64748B"/>
+                </a:solidFill>
+                <a:latin typeface="Montserrat"/>
+              </a:rPr>
+              <a:t>Curso Gas B · Tema 16 · UNE 60670-11/12/13</a:t>
+            </a:r>
+          </a:p>
+        </p:txBody>
+      </p:sp>
+      <p:sp>
+        <p:nvSpPr>
+          <p:cNvPr id="5" name="Rectangle 4"/>
           <p:cNvSpPr/>
           <p:nvPr/>
         </p:nvSpPr>
         <p:spPr>
           <a:xfrm>
-            <a:off x="868680" y="1051560"/>
-            <a:ext cx="1463040" cy="82296"/>
+            <a:off x="0" y="0"/>
+            <a:ext cx="12191695" cy="1143000"/>
+          </a:xfrm>
+          <a:prstGeom prst="rect">
+            <a:avLst/>
+          </a:prstGeom>
+          <a:solidFill>
+            <a:srgbClr val="1E8E4B"/>
+          </a:solidFill>
+          <a:ln>
+            <a:noFill/>
+          </a:ln>
+          <a:effectLst/>
+        </p:spPr>
+        <p:style>
+          <a:lnRef idx="1">
+            <a:schemeClr val="accent1"/>
+          </a:lnRef>
+          <a:fillRef idx="3">
+            <a:schemeClr val="accent1"/>
+          </a:fillRef>
+          <a:effectRef idx="2">
+            <a:schemeClr val="accent1"/>
+          </a:effectRef>
+          <a:fontRef idx="minor">
+            <a:schemeClr val="lt1"/>
+          </a:fontRef>
+        </p:style>
+        <p:txBody>
+          <a:bodyPr rtlCol="0" anchor="ctr"/>
+          <a:lstStyle/>
+          <a:p>
+            <a:pPr algn="ctr"/>
+          </a:p>
+        </p:txBody>
+      </p:sp>
+      <p:sp>
+        <p:nvSpPr>
+          <p:cNvPr id="6" name="TextBox 5"/>
+          <p:cNvSpPr txBox="1"/>
+          <p:nvPr/>
+        </p:nvSpPr>
+        <p:spPr>
+          <a:xfrm>
+            <a:off x="822960" y="274320"/>
+            <a:ext cx="10515600" cy="640080"/>
+          </a:xfrm>
+          <a:prstGeom prst="rect">
+            <a:avLst/>
+          </a:prstGeom>
+          <a:noFill/>
+        </p:spPr>
+        <p:txBody>
+          <a:bodyPr wrap="square">
+            <a:spAutoFit/>
+          </a:bodyPr>
+          <a:lstStyle/>
+          <a:p>
+            <a:r>
+              <a:rPr sz="2400" b="1" i="0">
+                <a:solidFill>
+                  <a:srgbClr val="FFFFFF"/>
+                </a:solidFill>
+                <a:latin typeface="Montserrat"/>
+              </a:rPr>
+              <a:t>✔  RESPUESTA:  B</a:t>
+            </a:r>
+          </a:p>
+        </p:txBody>
+      </p:sp>
+      <p:sp>
+        <p:nvSpPr>
+          <p:cNvPr id="7" name="TextBox 6"/>
+          <p:cNvSpPr txBox="1"/>
+          <p:nvPr/>
+        </p:nvSpPr>
+        <p:spPr>
+          <a:xfrm>
+            <a:off x="822960" y="1417320"/>
+            <a:ext cx="10515600" cy="914400"/>
+          </a:xfrm>
+          <a:prstGeom prst="rect">
+            <a:avLst/>
+          </a:prstGeom>
+          <a:noFill/>
+        </p:spPr>
+        <p:txBody>
+          <a:bodyPr wrap="square">
+            <a:spAutoFit/>
+          </a:bodyPr>
+          <a:lstStyle/>
+          <a:p>
+            <a:r>
+              <a:rPr sz="1800" b="1" i="0">
+                <a:solidFill>
+                  <a:srgbClr val="64748B"/>
+                </a:solidFill>
+                <a:latin typeface="Montserrat"/>
+              </a:rPr>
+              <a:t>Un aparato de tipo B mal ventilado en un local de ocho metros cúbicos o menos es una anomalía…</a:t>
+            </a:r>
+          </a:p>
+        </p:txBody>
+      </p:sp>
+      <p:sp>
+        <p:nvSpPr>
+          <p:cNvPr id="8" name="Rounded Rectangle 7"/>
+          <p:cNvSpPr/>
+          <p:nvPr/>
+        </p:nvSpPr>
+        <p:spPr>
+          <a:xfrm>
+            <a:off x="822960" y="2514600"/>
+            <a:ext cx="10515600" cy="914400"/>
           </a:xfrm>
           <a:prstGeom prst="roundRect">
+            <a:avLst/>
+          </a:prstGeom>
+          <a:solidFill>
+            <a:srgbClr val="E9F6EE"/>
+          </a:solidFill>
+          <a:ln w="12700">
+            <a:solidFill>
+              <a:srgbClr val="1E8E4B"/>
+            </a:solidFill>
+          </a:ln>
+          <a:effectLst/>
+        </p:spPr>
+        <p:style>
+          <a:lnRef idx="1">
+            <a:schemeClr val="accent1"/>
+          </a:lnRef>
+          <a:fillRef idx="3">
+            <a:schemeClr val="accent1"/>
+          </a:fillRef>
+          <a:effectRef idx="2">
+            <a:schemeClr val="accent1"/>
+          </a:effectRef>
+          <a:fontRef idx="minor">
+            <a:schemeClr val="lt1"/>
+          </a:fontRef>
+        </p:style>
+        <p:txBody>
+          <a:bodyPr rtlCol="0" anchor="ctr"/>
+          <a:lstStyle/>
+          <a:p>
+            <a:pPr algn="ctr"/>
+          </a:p>
+        </p:txBody>
+      </p:sp>
+      <p:sp>
+        <p:nvSpPr>
+          <p:cNvPr id="9" name="TextBox 8"/>
+          <p:cNvSpPr txBox="1"/>
+          <p:nvPr/>
+        </p:nvSpPr>
+        <p:spPr>
+          <a:xfrm>
+            <a:off x="1097280" y="2697480"/>
+            <a:ext cx="10058400" cy="640080"/>
+          </a:xfrm>
+          <a:prstGeom prst="rect">
+            <a:avLst/>
+          </a:prstGeom>
+          <a:noFill/>
+        </p:spPr>
+        <p:txBody>
+          <a:bodyPr wrap="square">
+            <a:spAutoFit/>
+          </a:bodyPr>
+          <a:lstStyle/>
+          <a:p>
+            <a:r>
+              <a:rPr sz="1800" b="1" i="0">
+                <a:solidFill>
+                  <a:srgbClr val="1E8E4B"/>
+                </a:solidFill>
+                <a:latin typeface="Montserrat"/>
+              </a:rPr>
+              <a:t>B.  </a:t>
+            </a:r>
+            <a:r>
+              <a:rPr sz="1800" b="1" i="0">
+                <a:solidFill>
+                  <a:srgbClr val="1E2761"/>
+                </a:solidFill>
+                <a:latin typeface="Montserrat"/>
+              </a:rPr>
+              <a:t>Principal, se corta el suministro</a:t>
+            </a:r>
+          </a:p>
+        </p:txBody>
+      </p:sp>
+      <p:sp>
+        <p:nvSpPr>
+          <p:cNvPr id="10" name="TextBox 9"/>
+          <p:cNvSpPr txBox="1"/>
+          <p:nvPr/>
+        </p:nvSpPr>
+        <p:spPr>
+          <a:xfrm>
+            <a:off x="822960" y="3749039"/>
+            <a:ext cx="10515600" cy="2194560"/>
+          </a:xfrm>
+          <a:prstGeom prst="rect">
+            <a:avLst/>
+          </a:prstGeom>
+          <a:noFill/>
+        </p:spPr>
+        <p:txBody>
+          <a:bodyPr wrap="square">
+            <a:spAutoFit/>
+          </a:bodyPr>
+          <a:lstStyle/>
+          <a:p>
+            <a:r>
+              <a:rPr sz="1500" b="1" i="0">
+                <a:solidFill>
+                  <a:srgbClr val="E8801A"/>
+                </a:solidFill>
+                <a:latin typeface="Montserrat"/>
+              </a:rPr>
+              <a:t>Por qué:  </a:t>
+            </a:r>
+            <a:r>
+              <a:rPr sz="1500" b="0" i="0">
+                <a:solidFill>
+                  <a:srgbClr val="1B2330"/>
+                </a:solidFill>
+                <a:latin typeface="Montserrat"/>
+              </a:rPr>
+              <a:t>En local pequeño (volumen igual o menor de ocho metros cúbicos) el monóxido se acumula deprisa, así que es principal y se corta.</a:t>
+            </a:r>
+          </a:p>
+        </p:txBody>
+      </p:sp>
+    </p:spTree>
+  </p:cSld>
+  <p:clrMapOvr>
+    <a:masterClrMapping/>
+  </p:clrMapOvr>
+  <mc:AlternateContent xmlns:mc="http://schemas.openxmlformats.org/markup-compatibility/2006">
+    <mc:Choice xmlns:p14="http://schemas.microsoft.com/office/powerpoint/2010/main" Requires="p14">
+      <p:transition spd="med" p14:dur="700">
+        <p14:cube dir="l"/>
+      </p:transition>
+    </mc:Choice>
+    <mc:Fallback>
+      <p:transition spd="med">
+        <p:push dir="l"/>
+      </p:transition>
+    </mc:Fallback>
+  </mc:AlternateContent>
+</p:sld>
+</file>
+
+<file path=ppt/slides/slide22.xml><?xml version="1.0" encoding="utf-8"?>
+<p:sld xmlns:a="http://schemas.openxmlformats.org/drawingml/2006/main" xmlns:p="http://schemas.openxmlformats.org/presentationml/2006/main" xmlns:r="http://schemas.openxmlformats.org/officeDocument/2006/relationships">
+  <p:cSld>
+    <p:spTree>
+      <p:nvGrpSpPr>
+        <p:cNvPr id="1" name=""/>
+        <p:cNvGrpSpPr/>
+        <p:nvPr/>
+      </p:nvGrpSpPr>
+      <p:grpSpPr/>
+      <p:sp>
+        <p:nvSpPr>
+          <p:cNvPr id="2" name="Rectangle 1"/>
+          <p:cNvSpPr/>
+          <p:nvPr/>
+        </p:nvSpPr>
+        <p:spPr>
+          <a:xfrm>
+            <a:off x="0" y="0"/>
+            <a:ext cx="12191695" cy="6858000"/>
+          </a:xfrm>
+          <a:prstGeom prst="rect">
+            <a:avLst/>
+          </a:prstGeom>
+          <a:solidFill>
+            <a:srgbClr val="FFFFFF"/>
+          </a:solidFill>
+          <a:ln>
+            <a:noFill/>
+          </a:ln>
+          <a:effectLst/>
+        </p:spPr>
+        <p:style>
+          <a:lnRef idx="1">
+            <a:schemeClr val="accent1"/>
+          </a:lnRef>
+          <a:fillRef idx="3">
+            <a:schemeClr val="accent1"/>
+          </a:fillRef>
+          <a:effectRef idx="2">
+            <a:schemeClr val="accent1"/>
+          </a:effectRef>
+          <a:fontRef idx="minor">
+            <a:schemeClr val="lt1"/>
+          </a:fontRef>
+        </p:style>
+        <p:txBody>
+          <a:bodyPr rtlCol="0" anchor="ctr"/>
+          <a:lstStyle/>
+          <a:p>
+            <a:pPr algn="ctr"/>
+          </a:p>
+        </p:txBody>
+      </p:sp>
+      <p:sp>
+        <p:nvSpPr>
+          <p:cNvPr id="3" name="TextBox 2"/>
+          <p:cNvSpPr txBox="1"/>
+          <p:nvPr/>
+        </p:nvSpPr>
+        <p:spPr>
+          <a:xfrm>
+            <a:off x="10607040" y="320040"/>
+            <a:ext cx="1371600" cy="365760"/>
+          </a:xfrm>
+          <a:prstGeom prst="rect">
+            <a:avLst/>
+          </a:prstGeom>
+          <a:noFill/>
+        </p:spPr>
+        <p:txBody>
+          <a:bodyPr wrap="square">
+            <a:spAutoFit/>
+          </a:bodyPr>
+          <a:lstStyle/>
+          <a:p>
+            <a:pPr algn="r"/>
+            <a:r>
+              <a:rPr sz="1000" b="1" i="0">
+                <a:solidFill>
+                  <a:srgbClr val="64748B"/>
+                </a:solidFill>
+                <a:latin typeface="Montserrat"/>
+              </a:rPr>
+              <a:t>022 / 027</a:t>
+            </a:r>
+          </a:p>
+        </p:txBody>
+      </p:sp>
+      <p:sp>
+        <p:nvSpPr>
+          <p:cNvPr id="4" name="TextBox 3"/>
+          <p:cNvSpPr txBox="1"/>
+          <p:nvPr/>
+        </p:nvSpPr>
+        <p:spPr>
+          <a:xfrm>
+            <a:off x="457200" y="6419088"/>
+            <a:ext cx="8229600" cy="365760"/>
+          </a:xfrm>
+          <a:prstGeom prst="rect">
+            <a:avLst/>
+          </a:prstGeom>
+          <a:noFill/>
+        </p:spPr>
+        <p:txBody>
+          <a:bodyPr wrap="square">
+            <a:spAutoFit/>
+          </a:bodyPr>
+          <a:lstStyle/>
+          <a:p>
+            <a:r>
+              <a:rPr sz="900" b="0" i="0">
+                <a:solidFill>
+                  <a:srgbClr val="64748B"/>
+                </a:solidFill>
+                <a:latin typeface="Montserrat"/>
+              </a:rPr>
+              <a:t>Curso Gas B · Tema 16 · UNE 60670-11/12/13</a:t>
+            </a:r>
+          </a:p>
+        </p:txBody>
+      </p:sp>
+      <p:sp>
+        <p:nvSpPr>
+          <p:cNvPr id="5" name="TextBox 4"/>
+          <p:cNvSpPr txBox="1"/>
+          <p:nvPr/>
+        </p:nvSpPr>
+        <p:spPr>
+          <a:xfrm>
+            <a:off x="822960" y="457200"/>
+            <a:ext cx="10058400" cy="365760"/>
+          </a:xfrm>
+          <a:prstGeom prst="rect">
+            <a:avLst/>
+          </a:prstGeom>
+          <a:noFill/>
+        </p:spPr>
+        <p:txBody>
+          <a:bodyPr wrap="square">
+            <a:spAutoFit/>
+          </a:bodyPr>
+          <a:lstStyle/>
+          <a:p>
+            <a:r>
+              <a:rPr sz="1300" b="1" i="0">
+                <a:solidFill>
+                  <a:srgbClr val="E8801A"/>
+                </a:solidFill>
+                <a:latin typeface="Montserrat"/>
+              </a:rPr>
+              <a:t>PARTE 12 · ISA-1 Y ISA-2</a:t>
+            </a:r>
+          </a:p>
+        </p:txBody>
+      </p:sp>
+      <p:sp>
+        <p:nvSpPr>
+          <p:cNvPr id="6" name="TextBox 5"/>
+          <p:cNvSpPr txBox="1"/>
+          <p:nvPr/>
+        </p:nvSpPr>
+        <p:spPr>
+          <a:xfrm>
+            <a:off x="822960" y="868680"/>
+            <a:ext cx="10515600" cy="914400"/>
+          </a:xfrm>
+          <a:prstGeom prst="rect">
+            <a:avLst/>
+          </a:prstGeom>
+          <a:noFill/>
+        </p:spPr>
+        <p:txBody>
+          <a:bodyPr wrap="square">
+            <a:spAutoFit/>
+          </a:bodyPr>
+          <a:lstStyle/>
+          <a:p>
+            <a:r>
+              <a:rPr sz="2800" b="1" i="0">
+                <a:solidFill>
+                  <a:srgbClr val="1E2761"/>
+                </a:solidFill>
+                <a:latin typeface="Montserrat"/>
+              </a:rPr>
+              <a:t>Secundarias: ventilación y conservación</a:t>
+            </a:r>
+          </a:p>
+        </p:txBody>
+      </p:sp>
+      <p:sp>
+        <p:nvSpPr>
+          <p:cNvPr id="7" name="Rectangle 6"/>
+          <p:cNvSpPr/>
+          <p:nvPr/>
+        </p:nvSpPr>
+        <p:spPr>
+          <a:xfrm>
+            <a:off x="868680" y="1627632"/>
+            <a:ext cx="2011680" cy="73152"/>
+          </a:xfrm>
+          <a:prstGeom prst="rect">
             <a:avLst/>
           </a:prstGeom>
           <a:solidFill>
@@ -11063,14 +12994,14 @@
       </p:sp>
       <p:sp>
         <p:nvSpPr>
-          <p:cNvPr id="5" name="TextBox 4"/>
+          <p:cNvPr id="8" name="TextBox 7"/>
           <p:cNvSpPr txBox="1"/>
           <p:nvPr/>
         </p:nvSpPr>
         <p:spPr>
           <a:xfrm>
-            <a:off x="822960" y="1234440"/>
-            <a:ext cx="10515600" cy="1097280"/>
+            <a:off x="822960" y="1965960"/>
+            <a:ext cx="5029200" cy="4206240"/>
           </a:xfrm>
           <a:prstGeom prst="rect">
             <a:avLst/>
@@ -11083,28 +13014,163 @@
           </a:bodyPr>
           <a:lstStyle/>
           <a:p>
-            <a:r>
-              <a:rPr sz="3400" b="1" i="0">
-                <a:solidFill>
-                  <a:srgbClr val="FFFFFF"/>
-                </a:solidFill>
-                <a:latin typeface="Montserrat"/>
-              </a:rPr>
-              <a:t>Ya sabes inspeccionar y poner nota</a:t>
-            </a:r>
-          </a:p>
-        </p:txBody>
-      </p:sp>
-      <p:sp>
-        <p:nvSpPr>
-          <p:cNvPr id="6" name="TextBox 5"/>
+            <a:pPr>
+              <a:spcAft>
+                <a:spcPts val="1100"/>
+              </a:spcAft>
+            </a:pPr>
+            <a:r>
+              <a:rPr sz="1600" b="1" i="0">
+                <a:solidFill>
+                  <a:srgbClr val="E8801A"/>
+                </a:solidFill>
+                <a:latin typeface="Montserrat"/>
+              </a:rPr>
+              <a:t>▸  </a:t>
+            </a:r>
+            <a:r>
+              <a:rPr sz="1600" b="0" i="0">
+                <a:solidFill>
+                  <a:srgbClr val="1B2330"/>
+                </a:solidFill>
+                <a:latin typeface="Montserrat"/>
+              </a:rPr>
+              <a:t>Tipo B mal ventilado en V &gt; 8 m³: ISa-1</a:t>
+            </a:r>
+          </a:p>
+          <a:p>
+            <a:pPr>
+              <a:spcAft>
+                <a:spcPts val="1100"/>
+              </a:spcAft>
+            </a:pPr>
+            <a:r>
+              <a:rPr sz="1600" b="1" i="0">
+                <a:solidFill>
+                  <a:srgbClr val="E8801A"/>
+                </a:solidFill>
+                <a:latin typeface="Montserrat"/>
+              </a:rPr>
+              <a:t>▸  </a:t>
+            </a:r>
+            <a:r>
+              <a:rPr sz="1600" b="0" i="0">
+                <a:solidFill>
+                  <a:srgbClr val="1B2330"/>
+                </a:solidFill>
+                <a:latin typeface="Montserrat"/>
+              </a:rPr>
+              <a:t>Corrosión, soportes o uniones en mal estado</a:t>
+            </a:r>
+          </a:p>
+          <a:p>
+            <a:pPr>
+              <a:spcAft>
+                <a:spcPts val="1100"/>
+              </a:spcAft>
+            </a:pPr>
+            <a:r>
+              <a:rPr sz="1600" b="1" i="0">
+                <a:solidFill>
+                  <a:srgbClr val="E8801A"/>
+                </a:solidFill>
+                <a:latin typeface="Montserrat"/>
+              </a:rPr>
+              <a:t>▸  </a:t>
+            </a:r>
+            <a:r>
+              <a:rPr sz="1600" b="0" i="0">
+                <a:solidFill>
+                  <a:srgbClr val="1B2330"/>
+                </a:solidFill>
+                <a:latin typeface="Montserrat"/>
+              </a:rPr>
+              <a:t>Llaves que faltan o no son accesibles</a:t>
+            </a:r>
+          </a:p>
+          <a:p>
+            <a:pPr>
+              <a:spcAft>
+                <a:spcPts val="1100"/>
+              </a:spcAft>
+            </a:pPr>
+            <a:r>
+              <a:rPr sz="1600" b="1" i="0">
+                <a:solidFill>
+                  <a:srgbClr val="E8801A"/>
+                </a:solidFill>
+                <a:latin typeface="Montserrat"/>
+              </a:rPr>
+              <a:t>▸  </a:t>
+            </a:r>
+            <a:r>
+              <a:rPr sz="1600" b="0" i="0">
+                <a:solidFill>
+                  <a:srgbClr val="1B2330"/>
+                </a:solidFill>
+                <a:latin typeface="Montserrat"/>
+              </a:rPr>
+              <a:t>Regulador o válvula de mínima defectuosos</a:t>
+            </a:r>
+          </a:p>
+        </p:txBody>
+      </p:sp>
+      <p:sp>
+        <p:nvSpPr>
+          <p:cNvPr id="9" name="imgph" descr="IMGQ:corroded rusty gas pipe fitting valve"/>
+          <p:cNvSpPr/>
+          <p:nvPr/>
+        </p:nvSpPr>
+        <p:spPr>
+          <a:xfrm>
+            <a:off x="6080760" y="1965960"/>
+            <a:ext cx="5303520" cy="4572000"/>
+          </a:xfrm>
+          <a:prstGeom prst="roundRect">
+            <a:avLst/>
+          </a:prstGeom>
+          <a:solidFill>
+            <a:srgbClr val="F3F6FB"/>
+          </a:solidFill>
+          <a:ln w="12700">
+            <a:solidFill>
+              <a:srgbClr val="C7D2E6"/>
+            </a:solidFill>
+          </a:ln>
+          <a:effectLst/>
+        </p:spPr>
+        <p:style>
+          <a:lnRef idx="1">
+            <a:schemeClr val="accent1"/>
+          </a:lnRef>
+          <a:fillRef idx="3">
+            <a:schemeClr val="accent1"/>
+          </a:fillRef>
+          <a:effectRef idx="2">
+            <a:schemeClr val="accent1"/>
+          </a:effectRef>
+          <a:fontRef idx="minor">
+            <a:schemeClr val="lt1"/>
+          </a:fontRef>
+        </p:style>
+        <p:txBody>
+          <a:bodyPr rtlCol="0" anchor="ctr"/>
+          <a:lstStyle/>
+          <a:p>
+            <a:pPr algn="ctr"/>
+          </a:p>
+        </p:txBody>
+      </p:sp>
+      <p:sp>
+        <p:nvSpPr>
+          <p:cNvPr id="10" name="TextBox 9"/>
           <p:cNvSpPr txBox="1"/>
           <p:nvPr/>
         </p:nvSpPr>
         <p:spPr>
           <a:xfrm>
-            <a:off x="822960" y="2606040"/>
-            <a:ext cx="10515600" cy="2743200"/>
+            <a:off x="6355080" y="3611880"/>
+            <a:ext cx="4754880" cy="1280160"/>
           </a:xfrm>
           <a:prstGeom prst="rect">
             <a:avLst/>
@@ -11117,119 +13183,254 @@
           </a:bodyPr>
           <a:lstStyle/>
           <a:p>
-            <a:pPr>
-              <a:spcAft>
-                <a:spcPts val="1200"/>
-              </a:spcAft>
-            </a:pPr>
-            <a:r>
-              <a:rPr sz="2000" b="1" i="0">
-                <a:solidFill>
-                  <a:srgbClr val="F4A24C"/>
-                </a:solidFill>
-                <a:latin typeface="Montserrat"/>
-              </a:rPr>
-              <a:t>✓  </a:t>
-            </a:r>
-            <a:r>
-              <a:rPr sz="1900" b="0" i="0">
-                <a:solidFill>
-                  <a:srgbClr val="FFFFFF"/>
-                </a:solidFill>
-                <a:latin typeface="Montserrat"/>
-              </a:rPr>
-              <a:t>Dos papeles: certificado o informe</a:t>
-            </a:r>
-          </a:p>
-          <a:p>
-            <a:pPr>
-              <a:spcAft>
-                <a:spcPts val="1200"/>
-              </a:spcAft>
-            </a:pPr>
-            <a:r>
-              <a:rPr sz="2000" b="1" i="0">
-                <a:solidFill>
-                  <a:srgbClr val="F4A24C"/>
-                </a:solidFill>
-                <a:latin typeface="Montserrat"/>
-              </a:rPr>
-              <a:t>✓  </a:t>
-            </a:r>
-            <a:r>
-              <a:rPr sz="1900" b="0" i="0">
-                <a:solidFill>
-                  <a:srgbClr val="FFFFFF"/>
-                </a:solidFill>
-                <a:latin typeface="Montserrat"/>
-              </a:rPr>
-              <a:t>Principal corta; secundaria tiene plazo</a:t>
-            </a:r>
-          </a:p>
-          <a:p>
-            <a:pPr>
-              <a:spcAft>
-                <a:spcPts val="1200"/>
-              </a:spcAft>
-            </a:pPr>
-            <a:r>
-              <a:rPr sz="2000" b="1" i="0">
-                <a:solidFill>
-                  <a:srgbClr val="F4A24C"/>
-                </a:solidFill>
-                <a:latin typeface="Montserrat"/>
-              </a:rPr>
-              <a:t>✓  </a:t>
-            </a:r>
-            <a:r>
-              <a:rPr sz="1900" b="0" i="0">
-                <a:solidFill>
-                  <a:srgbClr val="FFFFFF"/>
-                </a:solidFill>
-                <a:latin typeface="Montserrat"/>
-              </a:rPr>
-              <a:t>Ni tipo A ni B en dormitorio o baño</a:t>
-            </a:r>
-          </a:p>
-          <a:p>
-            <a:pPr>
-              <a:spcAft>
-                <a:spcPts val="1200"/>
-              </a:spcAft>
-            </a:pPr>
-            <a:r>
-              <a:rPr sz="2000" b="1" i="0">
-                <a:solidFill>
-                  <a:srgbClr val="F4A24C"/>
-                </a:solidFill>
-                <a:latin typeface="Montserrat"/>
-              </a:rPr>
-              <a:t>✓  </a:t>
-            </a:r>
-            <a:r>
-              <a:rPr sz="1900" b="0" i="0">
-                <a:solidFill>
-                  <a:srgbClr val="FFFFFF"/>
-                </a:solidFill>
-                <a:latin typeface="Montserrat"/>
-              </a:rPr>
-              <a:t>El volumen de 8 m³ cambia la gravedad</a:t>
-            </a:r>
-          </a:p>
-        </p:txBody>
-      </p:sp>
-      <p:sp>
-        <p:nvSpPr>
-          <p:cNvPr id="7" name="Rounded Rectangle 6"/>
+            <a:pPr algn="ctr"/>
+            <a:r>
+              <a:rPr sz="1400" b="1" i="0">
+                <a:solidFill>
+                  <a:srgbClr val="64748B"/>
+                </a:solidFill>
+                <a:latin typeface="Montserrat"/>
+              </a:rPr>
+              <a:t>IMAGEN</a:t>
+            </a:r>
+          </a:p>
+          <a:p>
+            <a:pPr algn="ctr"/>
+            <a:r>
+              <a:rPr sz="1100" b="0" i="1">
+                <a:solidFill>
+                  <a:srgbClr val="64748B"/>
+                </a:solidFill>
+                <a:latin typeface="Montserrat"/>
+              </a:rPr>
+              <a:t>corroded rusty gas pipe fitting valve</a:t>
+            </a:r>
+          </a:p>
+        </p:txBody>
+      </p:sp>
+    </p:spTree>
+  </p:cSld>
+  <p:clrMapOvr>
+    <a:masterClrMapping/>
+  </p:clrMapOvr>
+  <mc:AlternateContent xmlns:mc="http://schemas.openxmlformats.org/markup-compatibility/2006">
+    <mc:Choice xmlns:p14="http://schemas.microsoft.com/office/powerpoint/2010/main" Requires="p14">
+      <p:transition spd="med" p14:dur="700">
+        <p14:cube dir="r"/>
+      </p:transition>
+    </mc:Choice>
+    <mc:Fallback>
+      <p:transition spd="med">
+        <p:push dir="r"/>
+      </p:transition>
+    </mc:Fallback>
+  </mc:AlternateContent>
+</p:sld>
+</file>
+
+<file path=ppt/slides/slide23.xml><?xml version="1.0" encoding="utf-8"?>
+<p:sld xmlns:a="http://schemas.openxmlformats.org/drawingml/2006/main" xmlns:p="http://schemas.openxmlformats.org/presentationml/2006/main" xmlns:r="http://schemas.openxmlformats.org/officeDocument/2006/relationships">
+  <p:cSld>
+    <p:spTree>
+      <p:nvGrpSpPr>
+        <p:cNvPr id="1" name=""/>
+        <p:cNvGrpSpPr/>
+        <p:nvPr/>
+      </p:nvGrpSpPr>
+      <p:grpSpPr/>
+      <p:sp>
+        <p:nvSpPr>
+          <p:cNvPr id="2" name="Rectangle 1"/>
           <p:cNvSpPr/>
           <p:nvPr/>
         </p:nvSpPr>
         <p:spPr>
           <a:xfrm>
-            <a:off x="822960" y="5532120"/>
-            <a:ext cx="10515600" cy="822960"/>
-          </a:xfrm>
-          <a:prstGeom prst="roundRect">
+            <a:off x="0" y="0"/>
+            <a:ext cx="12191695" cy="6858000"/>
+          </a:xfrm>
+          <a:prstGeom prst="rect">
+            <a:avLst/>
+          </a:prstGeom>
+          <a:solidFill>
+            <a:srgbClr val="FFFFFF"/>
+          </a:solidFill>
+          <a:ln>
+            <a:noFill/>
+          </a:ln>
+          <a:effectLst/>
+        </p:spPr>
+        <p:style>
+          <a:lnRef idx="1">
+            <a:schemeClr val="accent1"/>
+          </a:lnRef>
+          <a:fillRef idx="3">
+            <a:schemeClr val="accent1"/>
+          </a:fillRef>
+          <a:effectRef idx="2">
+            <a:schemeClr val="accent1"/>
+          </a:effectRef>
+          <a:fontRef idx="minor">
+            <a:schemeClr val="lt1"/>
+          </a:fontRef>
+        </p:style>
+        <p:txBody>
+          <a:bodyPr rtlCol="0" anchor="ctr"/>
+          <a:lstStyle/>
+          <a:p>
+            <a:pPr algn="ctr"/>
+          </a:p>
+        </p:txBody>
+      </p:sp>
+      <p:sp>
+        <p:nvSpPr>
+          <p:cNvPr id="3" name="TextBox 2"/>
+          <p:cNvSpPr txBox="1"/>
+          <p:nvPr/>
+        </p:nvSpPr>
+        <p:spPr>
+          <a:xfrm>
+            <a:off x="10607040" y="320040"/>
+            <a:ext cx="1371600" cy="365760"/>
+          </a:xfrm>
+          <a:prstGeom prst="rect">
+            <a:avLst/>
+          </a:prstGeom>
+          <a:noFill/>
+        </p:spPr>
+        <p:txBody>
+          <a:bodyPr wrap="square">
+            <a:spAutoFit/>
+          </a:bodyPr>
+          <a:lstStyle/>
+          <a:p>
+            <a:pPr algn="r"/>
+            <a:r>
+              <a:rPr sz="1000" b="1" i="0">
+                <a:solidFill>
+                  <a:srgbClr val="64748B"/>
+                </a:solidFill>
+                <a:latin typeface="Montserrat"/>
+              </a:rPr>
+              <a:t>023 / 027</a:t>
+            </a:r>
+          </a:p>
+        </p:txBody>
+      </p:sp>
+      <p:sp>
+        <p:nvSpPr>
+          <p:cNvPr id="4" name="TextBox 3"/>
+          <p:cNvSpPr txBox="1"/>
+          <p:nvPr/>
+        </p:nvSpPr>
+        <p:spPr>
+          <a:xfrm>
+            <a:off x="457200" y="6419088"/>
+            <a:ext cx="8229600" cy="365760"/>
+          </a:xfrm>
+          <a:prstGeom prst="rect">
+            <a:avLst/>
+          </a:prstGeom>
+          <a:noFill/>
+        </p:spPr>
+        <p:txBody>
+          <a:bodyPr wrap="square">
+            <a:spAutoFit/>
+          </a:bodyPr>
+          <a:lstStyle/>
+          <a:p>
+            <a:r>
+              <a:rPr sz="900" b="0" i="0">
+                <a:solidFill>
+                  <a:srgbClr val="64748B"/>
+                </a:solidFill>
+                <a:latin typeface="Montserrat"/>
+              </a:rPr>
+              <a:t>Curso Gas B · Tema 16 · UNE 60670-11/12/13</a:t>
+            </a:r>
+          </a:p>
+        </p:txBody>
+      </p:sp>
+      <p:sp>
+        <p:nvSpPr>
+          <p:cNvPr id="5" name="TextBox 4"/>
+          <p:cNvSpPr txBox="1"/>
+          <p:nvPr/>
+        </p:nvSpPr>
+        <p:spPr>
+          <a:xfrm>
+            <a:off x="822960" y="457200"/>
+            <a:ext cx="10058400" cy="365760"/>
+          </a:xfrm>
+          <a:prstGeom prst="rect">
+            <a:avLst/>
+          </a:prstGeom>
+          <a:noFill/>
+        </p:spPr>
+        <p:txBody>
+          <a:bodyPr wrap="square">
+            <a:spAutoFit/>
+          </a:bodyPr>
+          <a:lstStyle/>
+          <a:p>
+            <a:r>
+              <a:rPr sz="1300" b="1" i="0">
+                <a:solidFill>
+                  <a:srgbClr val="E8801A"/>
+                </a:solidFill>
+                <a:latin typeface="Montserrat"/>
+              </a:rPr>
+              <a:t>PARTE 12 · ISA-3</a:t>
+            </a:r>
+          </a:p>
+        </p:txBody>
+      </p:sp>
+      <p:sp>
+        <p:nvSpPr>
+          <p:cNvPr id="6" name="TextBox 5"/>
+          <p:cNvSpPr txBox="1"/>
+          <p:nvPr/>
+        </p:nvSpPr>
+        <p:spPr>
+          <a:xfrm>
+            <a:off x="822960" y="868680"/>
+            <a:ext cx="10515600" cy="914400"/>
+          </a:xfrm>
+          <a:prstGeom prst="rect">
+            <a:avLst/>
+          </a:prstGeom>
+          <a:noFill/>
+        </p:spPr>
+        <p:txBody>
+          <a:bodyPr wrap="square">
+            <a:spAutoFit/>
+          </a:bodyPr>
+          <a:lstStyle/>
+          <a:p>
+            <a:r>
+              <a:rPr sz="2800" b="1" i="0">
+                <a:solidFill>
+                  <a:srgbClr val="1E2761"/>
+                </a:solidFill>
+                <a:latin typeface="Montserrat"/>
+              </a:rPr>
+              <a:t>Tubo flexible: viejo o mal puesto</a:t>
+            </a:r>
+          </a:p>
+        </p:txBody>
+      </p:sp>
+      <p:sp>
+        <p:nvSpPr>
+          <p:cNvPr id="7" name="Rectangle 6"/>
+          <p:cNvSpPr/>
+          <p:nvPr/>
+        </p:nvSpPr>
+        <p:spPr>
+          <a:xfrm>
+            <a:off x="868680" y="1627632"/>
+            <a:ext cx="2011680" cy="73152"/>
+          </a:xfrm>
+          <a:prstGeom prst="rect">
             <a:avLst/>
           </a:prstGeom>
           <a:solidFill>
@@ -11270,8 +13471,8 @@
         </p:nvSpPr>
         <p:spPr>
           <a:xfrm>
-            <a:off x="1051560" y="5623560"/>
-            <a:ext cx="10058400" cy="640080"/>
+            <a:off x="6355080" y="1965960"/>
+            <a:ext cx="5029200" cy="4206240"/>
           </a:xfrm>
           <a:prstGeom prst="rect">
             <a:avLst/>
@@ -11284,14 +13485,196 @@
           </a:bodyPr>
           <a:lstStyle/>
           <a:p>
-            <a:r>
-              <a:rPr sz="1500" b="1" i="1">
-                <a:solidFill>
-                  <a:srgbClr val="1E2761"/>
-                </a:solidFill>
-                <a:latin typeface="Montserrat"/>
-              </a:rPr>
-              <a:t>Ya lees una vivienda como un gasista de verdad. Ahora subimos a lo grande y al edificio.</a:t>
+            <a:pPr>
+              <a:spcAft>
+                <a:spcPts val="1100"/>
+              </a:spcAft>
+            </a:pPr>
+            <a:r>
+              <a:rPr sz="1600" b="1" i="0">
+                <a:solidFill>
+                  <a:srgbClr val="E8801A"/>
+                </a:solidFill>
+                <a:latin typeface="Montserrat"/>
+              </a:rPr>
+              <a:t>▸  </a:t>
+            </a:r>
+            <a:r>
+              <a:rPr sz="1600" b="0" i="0">
+                <a:solidFill>
+                  <a:srgbClr val="1B2330"/>
+                </a:solidFill>
+                <a:latin typeface="Montserrat"/>
+              </a:rPr>
+              <a:t>Caducado, sin identificación o muy largo</a:t>
+            </a:r>
+          </a:p>
+          <a:p>
+            <a:pPr>
+              <a:spcAft>
+                <a:spcPts val="1100"/>
+              </a:spcAft>
+            </a:pPr>
+            <a:r>
+              <a:rPr sz="1600" b="1" i="0">
+                <a:solidFill>
+                  <a:srgbClr val="E8801A"/>
+                </a:solidFill>
+                <a:latin typeface="Montserrat"/>
+              </a:rPr>
+              <a:t>▸  </a:t>
+            </a:r>
+            <a:r>
+              <a:rPr sz="1600" b="0" i="0">
+                <a:solidFill>
+                  <a:srgbClr val="1B2330"/>
+                </a:solidFill>
+                <a:latin typeface="Montserrat"/>
+              </a:rPr>
+              <a:t>Sin enchufe de seguridad en 2.ª familia</a:t>
+            </a:r>
+          </a:p>
+          <a:p>
+            <a:pPr>
+              <a:spcAft>
+                <a:spcPts val="1100"/>
+              </a:spcAft>
+            </a:pPr>
+            <a:r>
+              <a:rPr sz="1600" b="1" i="0">
+                <a:solidFill>
+                  <a:srgbClr val="E8801A"/>
+                </a:solidFill>
+                <a:latin typeface="Montserrat"/>
+              </a:rPr>
+              <a:t>▸  </a:t>
+            </a:r>
+            <a:r>
+              <a:rPr sz="1600" b="0" i="0">
+                <a:solidFill>
+                  <a:srgbClr val="1B2330"/>
+                </a:solidFill>
+                <a:latin typeface="Montserrat"/>
+              </a:rPr>
+              <a:t>Unión floja: riesgo de desconexión</a:t>
+            </a:r>
+          </a:p>
+          <a:p>
+            <a:pPr>
+              <a:spcAft>
+                <a:spcPts val="1100"/>
+              </a:spcAft>
+            </a:pPr>
+            <a:r>
+              <a:rPr sz="1600" b="1" i="0">
+                <a:solidFill>
+                  <a:srgbClr val="E8801A"/>
+                </a:solidFill>
+                <a:latin typeface="Montserrat"/>
+              </a:rPr>
+              <a:t>▸  </a:t>
+            </a:r>
+            <a:r>
+              <a:rPr sz="1600" b="0" i="0">
+                <a:solidFill>
+                  <a:srgbClr val="1B2330"/>
+                </a:solidFill>
+                <a:latin typeface="Montserrat"/>
+              </a:rPr>
+              <a:t>Roto es principal; viejo, secundario</a:t>
+            </a:r>
+          </a:p>
+        </p:txBody>
+      </p:sp>
+      <p:sp>
+        <p:nvSpPr>
+          <p:cNvPr id="9" name="imgph" descr="IMGQ:gas hose safety connector expiry date label"/>
+          <p:cNvSpPr/>
+          <p:nvPr/>
+        </p:nvSpPr>
+        <p:spPr>
+          <a:xfrm>
+            <a:off x="822960" y="1965960"/>
+            <a:ext cx="5303520" cy="4572000"/>
+          </a:xfrm>
+          <a:prstGeom prst="roundRect">
+            <a:avLst/>
+          </a:prstGeom>
+          <a:solidFill>
+            <a:srgbClr val="F3F6FB"/>
+          </a:solidFill>
+          <a:ln w="12700">
+            <a:solidFill>
+              <a:srgbClr val="C7D2E6"/>
+            </a:solidFill>
+          </a:ln>
+          <a:effectLst/>
+        </p:spPr>
+        <p:style>
+          <a:lnRef idx="1">
+            <a:schemeClr val="accent1"/>
+          </a:lnRef>
+          <a:fillRef idx="3">
+            <a:schemeClr val="accent1"/>
+          </a:fillRef>
+          <a:effectRef idx="2">
+            <a:schemeClr val="accent1"/>
+          </a:effectRef>
+          <a:fontRef idx="minor">
+            <a:schemeClr val="lt1"/>
+          </a:fontRef>
+        </p:style>
+        <p:txBody>
+          <a:bodyPr rtlCol="0" anchor="ctr"/>
+          <a:lstStyle/>
+          <a:p>
+            <a:pPr algn="ctr"/>
+          </a:p>
+        </p:txBody>
+      </p:sp>
+      <p:sp>
+        <p:nvSpPr>
+          <p:cNvPr id="10" name="TextBox 9"/>
+          <p:cNvSpPr txBox="1"/>
+          <p:nvPr/>
+        </p:nvSpPr>
+        <p:spPr>
+          <a:xfrm>
+            <a:off x="1097280" y="3611880"/>
+            <a:ext cx="4754880" cy="1280160"/>
+          </a:xfrm>
+          <a:prstGeom prst="rect">
+            <a:avLst/>
+          </a:prstGeom>
+          <a:noFill/>
+        </p:spPr>
+        <p:txBody>
+          <a:bodyPr wrap="square">
+            <a:spAutoFit/>
+          </a:bodyPr>
+          <a:lstStyle/>
+          <a:p>
+            <a:pPr algn="ctr"/>
+            <a:r>
+              <a:rPr sz="1400" b="1" i="0">
+                <a:solidFill>
+                  <a:srgbClr val="64748B"/>
+                </a:solidFill>
+                <a:latin typeface="Montserrat"/>
+              </a:rPr>
+              <a:t>IMAGEN</a:t>
+            </a:r>
+          </a:p>
+          <a:p>
+            <a:pPr algn="ctr"/>
+            <a:r>
+              <a:rPr sz="1100" b="0" i="1">
+                <a:solidFill>
+                  <a:srgbClr val="64748B"/>
+                </a:solidFill>
+                <a:latin typeface="Montserrat"/>
+              </a:rPr>
+              <a:t>gas hose safety connector expiry date label</a:t>
             </a:r>
           </a:p>
         </p:txBody>
@@ -11301,6 +13684,1768 @@
   <p:clrMapOvr>
     <a:masterClrMapping/>
   </p:clrMapOvr>
+  <mc:AlternateContent xmlns:mc="http://schemas.openxmlformats.org/markup-compatibility/2006">
+    <mc:Choice xmlns:p14="http://schemas.microsoft.com/office/powerpoint/2010/main" Requires="p14">
+      <p:transition spd="med" p14:dur="700">
+        <p14:cube dir="l"/>
+      </p:transition>
+    </mc:Choice>
+    <mc:Fallback>
+      <p:transition spd="med">
+        <p:push dir="l"/>
+      </p:transition>
+    </mc:Fallback>
+  </mc:AlternateContent>
+</p:sld>
+</file>
+
+<file path=ppt/slides/slide24.xml><?xml version="1.0" encoding="utf-8"?>
+<p:sld xmlns:a="http://schemas.openxmlformats.org/drawingml/2006/main" xmlns:p="http://schemas.openxmlformats.org/presentationml/2006/main" xmlns:r="http://schemas.openxmlformats.org/officeDocument/2006/relationships">
+  <p:cSld>
+    <p:spTree>
+      <p:nvGrpSpPr>
+        <p:cNvPr id="1" name=""/>
+        <p:cNvGrpSpPr/>
+        <p:nvPr/>
+      </p:nvGrpSpPr>
+      <p:grpSpPr/>
+      <p:sp>
+        <p:nvSpPr>
+          <p:cNvPr id="2" name="Rectangle 1"/>
+          <p:cNvSpPr/>
+          <p:nvPr/>
+        </p:nvSpPr>
+        <p:spPr>
+          <a:xfrm>
+            <a:off x="0" y="0"/>
+            <a:ext cx="12191695" cy="6858000"/>
+          </a:xfrm>
+          <a:prstGeom prst="rect">
+            <a:avLst/>
+          </a:prstGeom>
+          <a:solidFill>
+            <a:srgbClr val="FFFFFF"/>
+          </a:solidFill>
+          <a:ln>
+            <a:noFill/>
+          </a:ln>
+          <a:effectLst/>
+        </p:spPr>
+        <p:style>
+          <a:lnRef idx="1">
+            <a:schemeClr val="accent1"/>
+          </a:lnRef>
+          <a:fillRef idx="3">
+            <a:schemeClr val="accent1"/>
+          </a:fillRef>
+          <a:effectRef idx="2">
+            <a:schemeClr val="accent1"/>
+          </a:effectRef>
+          <a:fontRef idx="minor">
+            <a:schemeClr val="lt1"/>
+          </a:fontRef>
+        </p:style>
+        <p:txBody>
+          <a:bodyPr rtlCol="0" anchor="ctr"/>
+          <a:lstStyle/>
+          <a:p>
+            <a:pPr algn="ctr"/>
+          </a:p>
+        </p:txBody>
+      </p:sp>
+      <p:sp>
+        <p:nvSpPr>
+          <p:cNvPr id="3" name="TextBox 2"/>
+          <p:cNvSpPr txBox="1"/>
+          <p:nvPr/>
+        </p:nvSpPr>
+        <p:spPr>
+          <a:xfrm>
+            <a:off x="10607040" y="320040"/>
+            <a:ext cx="1371600" cy="365760"/>
+          </a:xfrm>
+          <a:prstGeom prst="rect">
+            <a:avLst/>
+          </a:prstGeom>
+          <a:noFill/>
+        </p:spPr>
+        <p:txBody>
+          <a:bodyPr wrap="square">
+            <a:spAutoFit/>
+          </a:bodyPr>
+          <a:lstStyle/>
+          <a:p>
+            <a:pPr algn="r"/>
+            <a:r>
+              <a:rPr sz="1000" b="1" i="0">
+                <a:solidFill>
+                  <a:srgbClr val="64748B"/>
+                </a:solidFill>
+                <a:latin typeface="Montserrat"/>
+              </a:rPr>
+              <a:t>024 / 027</a:t>
+            </a:r>
+          </a:p>
+        </p:txBody>
+      </p:sp>
+      <p:sp>
+        <p:nvSpPr>
+          <p:cNvPr id="4" name="TextBox 3"/>
+          <p:cNvSpPr txBox="1"/>
+          <p:nvPr/>
+        </p:nvSpPr>
+        <p:spPr>
+          <a:xfrm>
+            <a:off x="457200" y="6419088"/>
+            <a:ext cx="8229600" cy="365760"/>
+          </a:xfrm>
+          <a:prstGeom prst="rect">
+            <a:avLst/>
+          </a:prstGeom>
+          <a:noFill/>
+        </p:spPr>
+        <p:txBody>
+          <a:bodyPr wrap="square">
+            <a:spAutoFit/>
+          </a:bodyPr>
+          <a:lstStyle/>
+          <a:p>
+            <a:r>
+              <a:rPr sz="900" b="0" i="0">
+                <a:solidFill>
+                  <a:srgbClr val="64748B"/>
+                </a:solidFill>
+                <a:latin typeface="Montserrat"/>
+              </a:rPr>
+              <a:t>Curso Gas B · Tema 16 · UNE 60670-11/12/13</a:t>
+            </a:r>
+          </a:p>
+        </p:txBody>
+      </p:sp>
+      <p:sp>
+        <p:nvSpPr>
+          <p:cNvPr id="5" name="TextBox 4"/>
+          <p:cNvSpPr txBox="1"/>
+          <p:nvPr/>
+        </p:nvSpPr>
+        <p:spPr>
+          <a:xfrm>
+            <a:off x="822960" y="457200"/>
+            <a:ext cx="10058400" cy="365760"/>
+          </a:xfrm>
+          <a:prstGeom prst="rect">
+            <a:avLst/>
+          </a:prstGeom>
+          <a:noFill/>
+        </p:spPr>
+        <p:txBody>
+          <a:bodyPr wrap="square">
+            <a:spAutoFit/>
+          </a:bodyPr>
+          <a:lstStyle/>
+          <a:p>
+            <a:r>
+              <a:rPr sz="1300" b="1" i="0">
+                <a:solidFill>
+                  <a:srgbClr val="E8801A"/>
+                </a:solidFill>
+                <a:latin typeface="Montserrat"/>
+              </a:rPr>
+              <a:t>PARTE 12 · ISA-5</a:t>
+            </a:r>
+          </a:p>
+        </p:txBody>
+      </p:sp>
+      <p:sp>
+        <p:nvSpPr>
+          <p:cNvPr id="6" name="TextBox 5"/>
+          <p:cNvSpPr txBox="1"/>
+          <p:nvPr/>
+        </p:nvSpPr>
+        <p:spPr>
+          <a:xfrm>
+            <a:off x="822960" y="868680"/>
+            <a:ext cx="10515600" cy="914400"/>
+          </a:xfrm>
+          <a:prstGeom prst="rect">
+            <a:avLst/>
+          </a:prstGeom>
+          <a:noFill/>
+        </p:spPr>
+        <p:txBody>
+          <a:bodyPr wrap="square">
+            <a:spAutoFit/>
+          </a:bodyPr>
+          <a:lstStyle/>
+          <a:p>
+            <a:r>
+              <a:rPr sz="2800" b="1" i="0">
+                <a:solidFill>
+                  <a:srgbClr val="1E2761"/>
+                </a:solidFill>
+                <a:latin typeface="Montserrat"/>
+              </a:rPr>
+              <a:t>Ventilación inadecuada: los números</a:t>
+            </a:r>
+          </a:p>
+        </p:txBody>
+      </p:sp>
+      <p:sp>
+        <p:nvSpPr>
+          <p:cNvPr id="7" name="Rectangle 6"/>
+          <p:cNvSpPr/>
+          <p:nvPr/>
+        </p:nvSpPr>
+        <p:spPr>
+          <a:xfrm>
+            <a:off x="868680" y="1627632"/>
+            <a:ext cx="2011680" cy="73152"/>
+          </a:xfrm>
+          <a:prstGeom prst="rect">
+            <a:avLst/>
+          </a:prstGeom>
+          <a:solidFill>
+            <a:srgbClr val="E8801A"/>
+          </a:solidFill>
+          <a:ln>
+            <a:noFill/>
+          </a:ln>
+          <a:effectLst/>
+        </p:spPr>
+        <p:style>
+          <a:lnRef idx="1">
+            <a:schemeClr val="accent1"/>
+          </a:lnRef>
+          <a:fillRef idx="3">
+            <a:schemeClr val="accent1"/>
+          </a:fillRef>
+          <a:effectRef idx="2">
+            <a:schemeClr val="accent1"/>
+          </a:effectRef>
+          <a:fontRef idx="minor">
+            <a:schemeClr val="lt1"/>
+          </a:fontRef>
+        </p:style>
+        <p:txBody>
+          <a:bodyPr rtlCol="0" anchor="ctr"/>
+          <a:lstStyle/>
+          <a:p>
+            <a:pPr algn="ctr"/>
+          </a:p>
+        </p:txBody>
+      </p:sp>
+      <p:sp>
+        <p:nvSpPr>
+          <p:cNvPr id="8" name="TextBox 7"/>
+          <p:cNvSpPr txBox="1"/>
+          <p:nvPr/>
+        </p:nvSpPr>
+        <p:spPr>
+          <a:xfrm>
+            <a:off x="822960" y="1965960"/>
+            <a:ext cx="5029200" cy="4206240"/>
+          </a:xfrm>
+          <a:prstGeom prst="rect">
+            <a:avLst/>
+          </a:prstGeom>
+          <a:noFill/>
+        </p:spPr>
+        <p:txBody>
+          <a:bodyPr wrap="square">
+            <a:spAutoFit/>
+          </a:bodyPr>
+          <a:lstStyle/>
+          <a:p>
+            <a:pPr>
+              <a:spcAft>
+                <a:spcPts val="1100"/>
+              </a:spcAft>
+            </a:pPr>
+            <a:r>
+              <a:rPr sz="1600" b="1" i="0">
+                <a:solidFill>
+                  <a:srgbClr val="E8801A"/>
+                </a:solidFill>
+                <a:latin typeface="Montserrat"/>
+              </a:rPr>
+              <a:t>▸  </a:t>
+            </a:r>
+            <a:r>
+              <a:rPr sz="1600" b="0" i="0">
+                <a:solidFill>
+                  <a:srgbClr val="1B2330"/>
+                </a:solidFill>
+                <a:latin typeface="Montserrat"/>
+              </a:rPr>
+              <a:t>Falta o está obstruido el orificio</a:t>
+            </a:r>
+          </a:p>
+          <a:p>
+            <a:pPr>
+              <a:spcAft>
+                <a:spcPts val="1100"/>
+              </a:spcAft>
+            </a:pPr>
+            <a:r>
+              <a:rPr sz="1600" b="1" i="0">
+                <a:solidFill>
+                  <a:srgbClr val="E8801A"/>
+                </a:solidFill>
+                <a:latin typeface="Montserrat"/>
+              </a:rPr>
+              <a:t>▸  </a:t>
+            </a:r>
+            <a:r>
+              <a:rPr sz="1600" b="0" i="0">
+                <a:solidFill>
+                  <a:srgbClr val="1B2330"/>
+                </a:solidFill>
+                <a:latin typeface="Montserrat"/>
+              </a:rPr>
+              <a:t>Extractor: ≥ 80 cm² hasta 16 kW (tipo A)</a:t>
+            </a:r>
+          </a:p>
+          <a:p>
+            <a:pPr>
+              <a:spcAft>
+                <a:spcPts val="1100"/>
+              </a:spcAft>
+            </a:pPr>
+            <a:r>
+              <a:rPr sz="1600" b="1" i="0">
+                <a:solidFill>
+                  <a:srgbClr val="E8801A"/>
+                </a:solidFill>
+                <a:latin typeface="Montserrat"/>
+              </a:rPr>
+              <a:t>▸  </a:t>
+            </a:r>
+            <a:r>
+              <a:rPr sz="1600" b="0" i="0">
+                <a:solidFill>
+                  <a:srgbClr val="1B2330"/>
+                </a:solidFill>
+                <a:latin typeface="Montserrat"/>
+              </a:rPr>
+              <a:t>≥ 100 cm² por encima de 16 kW</a:t>
+            </a:r>
+          </a:p>
+          <a:p>
+            <a:pPr>
+              <a:spcAft>
+                <a:spcPts val="1100"/>
+              </a:spcAft>
+            </a:pPr>
+            <a:r>
+              <a:rPr sz="1600" b="1" i="0">
+                <a:solidFill>
+                  <a:srgbClr val="E8801A"/>
+                </a:solidFill>
+                <a:latin typeface="Montserrat"/>
+              </a:rPr>
+              <a:t>▸  </a:t>
+            </a:r>
+            <a:r>
+              <a:rPr sz="1600" b="0" i="0">
+                <a:solidFill>
+                  <a:srgbClr val="1B2330"/>
+                </a:solidFill>
+                <a:latin typeface="Montserrat"/>
+              </a:rPr>
+              <a:t>Altura: ≥ 1,80 m o &lt; 0,40 m del techo</a:t>
+            </a:r>
+          </a:p>
+        </p:txBody>
+      </p:sp>
+      <p:sp>
+        <p:nvSpPr>
+          <p:cNvPr id="9" name="imgph" descr="IMGQ:kitchen ventilation grille air vent wall"/>
+          <p:cNvSpPr/>
+          <p:nvPr/>
+        </p:nvSpPr>
+        <p:spPr>
+          <a:xfrm>
+            <a:off x="6080760" y="1965960"/>
+            <a:ext cx="5303520" cy="4572000"/>
+          </a:xfrm>
+          <a:prstGeom prst="roundRect">
+            <a:avLst/>
+          </a:prstGeom>
+          <a:solidFill>
+            <a:srgbClr val="F3F6FB"/>
+          </a:solidFill>
+          <a:ln w="12700">
+            <a:solidFill>
+              <a:srgbClr val="C7D2E6"/>
+            </a:solidFill>
+          </a:ln>
+          <a:effectLst/>
+        </p:spPr>
+        <p:style>
+          <a:lnRef idx="1">
+            <a:schemeClr val="accent1"/>
+          </a:lnRef>
+          <a:fillRef idx="3">
+            <a:schemeClr val="accent1"/>
+          </a:fillRef>
+          <a:effectRef idx="2">
+            <a:schemeClr val="accent1"/>
+          </a:effectRef>
+          <a:fontRef idx="minor">
+            <a:schemeClr val="lt1"/>
+          </a:fontRef>
+        </p:style>
+        <p:txBody>
+          <a:bodyPr rtlCol="0" anchor="ctr"/>
+          <a:lstStyle/>
+          <a:p>
+            <a:pPr algn="ctr"/>
+          </a:p>
+        </p:txBody>
+      </p:sp>
+      <p:sp>
+        <p:nvSpPr>
+          <p:cNvPr id="10" name="TextBox 9"/>
+          <p:cNvSpPr txBox="1"/>
+          <p:nvPr/>
+        </p:nvSpPr>
+        <p:spPr>
+          <a:xfrm>
+            <a:off x="6355080" y="3611880"/>
+            <a:ext cx="4754880" cy="1280160"/>
+          </a:xfrm>
+          <a:prstGeom prst="rect">
+            <a:avLst/>
+          </a:prstGeom>
+          <a:noFill/>
+        </p:spPr>
+        <p:txBody>
+          <a:bodyPr wrap="square">
+            <a:spAutoFit/>
+          </a:bodyPr>
+          <a:lstStyle/>
+          <a:p>
+            <a:pPr algn="ctr"/>
+            <a:r>
+              <a:rPr sz="1400" b="1" i="0">
+                <a:solidFill>
+                  <a:srgbClr val="64748B"/>
+                </a:solidFill>
+                <a:latin typeface="Montserrat"/>
+              </a:rPr>
+              <a:t>IMAGEN</a:t>
+            </a:r>
+          </a:p>
+          <a:p>
+            <a:pPr algn="ctr"/>
+            <a:r>
+              <a:rPr sz="1100" b="0" i="1">
+                <a:solidFill>
+                  <a:srgbClr val="64748B"/>
+                </a:solidFill>
+                <a:latin typeface="Montserrat"/>
+              </a:rPr>
+              <a:t>kitchen ventilation grille air vent wall</a:t>
+            </a:r>
+          </a:p>
+        </p:txBody>
+      </p:sp>
+    </p:spTree>
+  </p:cSld>
+  <p:clrMapOvr>
+    <a:masterClrMapping/>
+  </p:clrMapOvr>
+  <mc:AlternateContent xmlns:mc="http://schemas.openxmlformats.org/markup-compatibility/2006">
+    <mc:Choice xmlns:p14="http://schemas.microsoft.com/office/powerpoint/2010/main" Requires="p14">
+      <p:transition spd="med" p14:dur="700">
+        <p14:cube dir="r"/>
+      </p:transition>
+    </mc:Choice>
+    <mc:Fallback>
+      <p:transition spd="med">
+        <p:push dir="r"/>
+      </p:transition>
+    </mc:Fallback>
+  </mc:AlternateContent>
+</p:sld>
+</file>
+
+<file path=ppt/slides/slide25.xml><?xml version="1.0" encoding="utf-8"?>
+<p:sld xmlns:a="http://schemas.openxmlformats.org/drawingml/2006/main" xmlns:p="http://schemas.openxmlformats.org/presentationml/2006/main" xmlns:r="http://schemas.openxmlformats.org/officeDocument/2006/relationships">
+  <p:cSld>
+    <p:spTree>
+      <p:nvGrpSpPr>
+        <p:cNvPr id="1" name=""/>
+        <p:cNvGrpSpPr/>
+        <p:nvPr/>
+      </p:nvGrpSpPr>
+      <p:grpSpPr/>
+      <p:sp>
+        <p:nvSpPr>
+          <p:cNvPr id="2" name="Rectangle 1"/>
+          <p:cNvSpPr/>
+          <p:nvPr/>
+        </p:nvSpPr>
+        <p:spPr>
+          <a:xfrm>
+            <a:off x="0" y="0"/>
+            <a:ext cx="12191695" cy="6858000"/>
+          </a:xfrm>
+          <a:prstGeom prst="rect">
+            <a:avLst/>
+          </a:prstGeom>
+          <a:solidFill>
+            <a:srgbClr val="FFFFFF"/>
+          </a:solidFill>
+          <a:ln>
+            <a:noFill/>
+          </a:ln>
+          <a:effectLst/>
+        </p:spPr>
+        <p:style>
+          <a:lnRef idx="1">
+            <a:schemeClr val="accent1"/>
+          </a:lnRef>
+          <a:fillRef idx="3">
+            <a:schemeClr val="accent1"/>
+          </a:fillRef>
+          <a:effectRef idx="2">
+            <a:schemeClr val="accent1"/>
+          </a:effectRef>
+          <a:fontRef idx="minor">
+            <a:schemeClr val="lt1"/>
+          </a:fontRef>
+        </p:style>
+        <p:txBody>
+          <a:bodyPr rtlCol="0" anchor="ctr"/>
+          <a:lstStyle/>
+          <a:p>
+            <a:pPr algn="ctr"/>
+          </a:p>
+        </p:txBody>
+      </p:sp>
+      <p:sp>
+        <p:nvSpPr>
+          <p:cNvPr id="3" name="TextBox 2"/>
+          <p:cNvSpPr txBox="1"/>
+          <p:nvPr/>
+        </p:nvSpPr>
+        <p:spPr>
+          <a:xfrm>
+            <a:off x="10607040" y="320040"/>
+            <a:ext cx="1371600" cy="365760"/>
+          </a:xfrm>
+          <a:prstGeom prst="rect">
+            <a:avLst/>
+          </a:prstGeom>
+          <a:noFill/>
+        </p:spPr>
+        <p:txBody>
+          <a:bodyPr wrap="square">
+            <a:spAutoFit/>
+          </a:bodyPr>
+          <a:lstStyle/>
+          <a:p>
+            <a:pPr algn="r"/>
+            <a:r>
+              <a:rPr sz="1000" b="1" i="0">
+                <a:solidFill>
+                  <a:srgbClr val="64748B"/>
+                </a:solidFill>
+                <a:latin typeface="Montserrat"/>
+              </a:rPr>
+              <a:t>025 / 027</a:t>
+            </a:r>
+          </a:p>
+        </p:txBody>
+      </p:sp>
+      <p:sp>
+        <p:nvSpPr>
+          <p:cNvPr id="4" name="TextBox 3"/>
+          <p:cNvSpPr txBox="1"/>
+          <p:nvPr/>
+        </p:nvSpPr>
+        <p:spPr>
+          <a:xfrm>
+            <a:off x="457200" y="6419088"/>
+            <a:ext cx="8229600" cy="365760"/>
+          </a:xfrm>
+          <a:prstGeom prst="rect">
+            <a:avLst/>
+          </a:prstGeom>
+          <a:noFill/>
+        </p:spPr>
+        <p:txBody>
+          <a:bodyPr wrap="square">
+            <a:spAutoFit/>
+          </a:bodyPr>
+          <a:lstStyle/>
+          <a:p>
+            <a:r>
+              <a:rPr sz="900" b="0" i="0">
+                <a:solidFill>
+                  <a:srgbClr val="64748B"/>
+                </a:solidFill>
+                <a:latin typeface="Montserrat"/>
+              </a:rPr>
+              <a:t>Curso Gas B · Tema 16 · UNE 60670-11/12/13</a:t>
+            </a:r>
+          </a:p>
+        </p:txBody>
+      </p:sp>
+      <p:sp>
+        <p:nvSpPr>
+          <p:cNvPr id="5" name="TextBox 4"/>
+          <p:cNvSpPr txBox="1"/>
+          <p:nvPr/>
+        </p:nvSpPr>
+        <p:spPr>
+          <a:xfrm>
+            <a:off x="822960" y="457200"/>
+            <a:ext cx="10058400" cy="365760"/>
+          </a:xfrm>
+          <a:prstGeom prst="rect">
+            <a:avLst/>
+          </a:prstGeom>
+          <a:noFill/>
+        </p:spPr>
+        <p:txBody>
+          <a:bodyPr wrap="square">
+            <a:spAutoFit/>
+          </a:bodyPr>
+          <a:lstStyle/>
+          <a:p>
+            <a:r>
+              <a:rPr sz="1300" b="1" i="0">
+                <a:solidFill>
+                  <a:srgbClr val="E8801A"/>
+                </a:solidFill>
+                <a:latin typeface="Montserrat"/>
+              </a:rPr>
+              <a:t>PARTE 12 · ISA-6, ISA-7, ISA-8</a:t>
+            </a:r>
+          </a:p>
+        </p:txBody>
+      </p:sp>
+      <p:sp>
+        <p:nvSpPr>
+          <p:cNvPr id="6" name="TextBox 5"/>
+          <p:cNvSpPr txBox="1"/>
+          <p:nvPr/>
+        </p:nvSpPr>
+        <p:spPr>
+          <a:xfrm>
+            <a:off x="822960" y="868680"/>
+            <a:ext cx="10515600" cy="914400"/>
+          </a:xfrm>
+          <a:prstGeom prst="rect">
+            <a:avLst/>
+          </a:prstGeom>
+          <a:noFill/>
+        </p:spPr>
+        <p:txBody>
+          <a:bodyPr wrap="square">
+            <a:spAutoFit/>
+          </a:bodyPr>
+          <a:lstStyle/>
+          <a:p>
+            <a:r>
+              <a:rPr sz="2800" b="1" i="0">
+                <a:solidFill>
+                  <a:srgbClr val="1E2761"/>
+                </a:solidFill>
+                <a:latin typeface="Montserrat"/>
+              </a:rPr>
+              <a:t>Volumen, detección y otros servicios</a:t>
+            </a:r>
+          </a:p>
+        </p:txBody>
+      </p:sp>
+      <p:sp>
+        <p:nvSpPr>
+          <p:cNvPr id="7" name="Rectangle 6"/>
+          <p:cNvSpPr/>
+          <p:nvPr/>
+        </p:nvSpPr>
+        <p:spPr>
+          <a:xfrm>
+            <a:off x="868680" y="1627632"/>
+            <a:ext cx="2011680" cy="73152"/>
+          </a:xfrm>
+          <a:prstGeom prst="rect">
+            <a:avLst/>
+          </a:prstGeom>
+          <a:solidFill>
+            <a:srgbClr val="E8801A"/>
+          </a:solidFill>
+          <a:ln>
+            <a:noFill/>
+          </a:ln>
+          <a:effectLst/>
+        </p:spPr>
+        <p:style>
+          <a:lnRef idx="1">
+            <a:schemeClr val="accent1"/>
+          </a:lnRef>
+          <a:fillRef idx="3">
+            <a:schemeClr val="accent1"/>
+          </a:fillRef>
+          <a:effectRef idx="2">
+            <a:schemeClr val="accent1"/>
+          </a:effectRef>
+          <a:fontRef idx="minor">
+            <a:schemeClr val="lt1"/>
+          </a:fontRef>
+        </p:style>
+        <p:txBody>
+          <a:bodyPr rtlCol="0" anchor="ctr"/>
+          <a:lstStyle/>
+          <a:p>
+            <a:pPr algn="ctr"/>
+          </a:p>
+        </p:txBody>
+      </p:sp>
+      <p:sp>
+        <p:nvSpPr>
+          <p:cNvPr id="8" name="TextBox 7"/>
+          <p:cNvSpPr txBox="1"/>
+          <p:nvPr/>
+        </p:nvSpPr>
+        <p:spPr>
+          <a:xfrm>
+            <a:off x="6355080" y="1965960"/>
+            <a:ext cx="5029200" cy="4206240"/>
+          </a:xfrm>
+          <a:prstGeom prst="rect">
+            <a:avLst/>
+          </a:prstGeom>
+          <a:noFill/>
+        </p:spPr>
+        <p:txBody>
+          <a:bodyPr wrap="square">
+            <a:spAutoFit/>
+          </a:bodyPr>
+          <a:lstStyle/>
+          <a:p>
+            <a:pPr>
+              <a:spcAft>
+                <a:spcPts val="1100"/>
+              </a:spcAft>
+            </a:pPr>
+            <a:r>
+              <a:rPr sz="1600" b="1" i="0">
+                <a:solidFill>
+                  <a:srgbClr val="E8801A"/>
+                </a:solidFill>
+                <a:latin typeface="Montserrat"/>
+              </a:rPr>
+              <a:t>▸  </a:t>
+            </a:r>
+            <a:r>
+              <a:rPr sz="1600" b="0" i="0">
+                <a:solidFill>
+                  <a:srgbClr val="1B2330"/>
+                </a:solidFill>
+                <a:latin typeface="Montserrat"/>
+              </a:rPr>
+              <a:t>Cocción &gt; 16 kW: volumen insuficiente</a:t>
+            </a:r>
+          </a:p>
+          <a:p>
+            <a:pPr>
+              <a:spcAft>
+                <a:spcPts val="1100"/>
+              </a:spcAft>
+            </a:pPr>
+            <a:r>
+              <a:rPr sz="1600" b="1" i="0">
+                <a:solidFill>
+                  <a:srgbClr val="E8801A"/>
+                </a:solidFill>
+                <a:latin typeface="Montserrat"/>
+              </a:rPr>
+              <a:t>▸  </a:t>
+            </a:r>
+            <a:r>
+              <a:rPr sz="1600" b="0" i="0">
+                <a:solidFill>
+                  <a:srgbClr val="1B2330"/>
+                </a:solidFill>
+                <a:latin typeface="Montserrat"/>
+              </a:rPr>
+              <a:t>Falta el sistema de detección y corte</a:t>
+            </a:r>
+          </a:p>
+          <a:p>
+            <a:pPr>
+              <a:spcAft>
+                <a:spcPts val="1100"/>
+              </a:spcAft>
+            </a:pPr>
+            <a:r>
+              <a:rPr sz="1600" b="1" i="0">
+                <a:solidFill>
+                  <a:srgbClr val="E8801A"/>
+                </a:solidFill>
+                <a:latin typeface="Montserrat"/>
+              </a:rPr>
+              <a:t>▸  </a:t>
+            </a:r>
+            <a:r>
+              <a:rPr sz="1600" b="0" i="0">
+                <a:solidFill>
+                  <a:srgbClr val="1B2330"/>
+                </a:solidFill>
+                <a:latin typeface="Montserrat"/>
+              </a:rPr>
+              <a:t>Otras conducciones en contacto con el gas</a:t>
+            </a:r>
+          </a:p>
+        </p:txBody>
+      </p:sp>
+      <p:sp>
+        <p:nvSpPr>
+          <p:cNvPr id="9" name="imgph" descr="IMGQ:gas detection safety device kitchen wall"/>
+          <p:cNvSpPr/>
+          <p:nvPr/>
+        </p:nvSpPr>
+        <p:spPr>
+          <a:xfrm>
+            <a:off x="822960" y="1965960"/>
+            <a:ext cx="5303520" cy="4572000"/>
+          </a:xfrm>
+          <a:prstGeom prst="roundRect">
+            <a:avLst/>
+          </a:prstGeom>
+          <a:solidFill>
+            <a:srgbClr val="F3F6FB"/>
+          </a:solidFill>
+          <a:ln w="12700">
+            <a:solidFill>
+              <a:srgbClr val="C7D2E6"/>
+            </a:solidFill>
+          </a:ln>
+          <a:effectLst/>
+        </p:spPr>
+        <p:style>
+          <a:lnRef idx="1">
+            <a:schemeClr val="accent1"/>
+          </a:lnRef>
+          <a:fillRef idx="3">
+            <a:schemeClr val="accent1"/>
+          </a:fillRef>
+          <a:effectRef idx="2">
+            <a:schemeClr val="accent1"/>
+          </a:effectRef>
+          <a:fontRef idx="minor">
+            <a:schemeClr val="lt1"/>
+          </a:fontRef>
+        </p:style>
+        <p:txBody>
+          <a:bodyPr rtlCol="0" anchor="ctr"/>
+          <a:lstStyle/>
+          <a:p>
+            <a:pPr algn="ctr"/>
+          </a:p>
+        </p:txBody>
+      </p:sp>
+      <p:sp>
+        <p:nvSpPr>
+          <p:cNvPr id="10" name="TextBox 9"/>
+          <p:cNvSpPr txBox="1"/>
+          <p:nvPr/>
+        </p:nvSpPr>
+        <p:spPr>
+          <a:xfrm>
+            <a:off x="1097280" y="3611880"/>
+            <a:ext cx="4754880" cy="1280160"/>
+          </a:xfrm>
+          <a:prstGeom prst="rect">
+            <a:avLst/>
+          </a:prstGeom>
+          <a:noFill/>
+        </p:spPr>
+        <p:txBody>
+          <a:bodyPr wrap="square">
+            <a:spAutoFit/>
+          </a:bodyPr>
+          <a:lstStyle/>
+          <a:p>
+            <a:pPr algn="ctr"/>
+            <a:r>
+              <a:rPr sz="1400" b="1" i="0">
+                <a:solidFill>
+                  <a:srgbClr val="64748B"/>
+                </a:solidFill>
+                <a:latin typeface="Montserrat"/>
+              </a:rPr>
+              <a:t>IMAGEN</a:t>
+            </a:r>
+          </a:p>
+          <a:p>
+            <a:pPr algn="ctr"/>
+            <a:r>
+              <a:rPr sz="1100" b="0" i="1">
+                <a:solidFill>
+                  <a:srgbClr val="64748B"/>
+                </a:solidFill>
+                <a:latin typeface="Montserrat"/>
+              </a:rPr>
+              <a:t>gas detection safety device kitchen wall</a:t>
+            </a:r>
+          </a:p>
+        </p:txBody>
+      </p:sp>
+    </p:spTree>
+  </p:cSld>
+  <p:clrMapOvr>
+    <a:masterClrMapping/>
+  </p:clrMapOvr>
+  <mc:AlternateContent xmlns:mc="http://schemas.openxmlformats.org/markup-compatibility/2006">
+    <mc:Choice xmlns:p14="http://schemas.microsoft.com/office/powerpoint/2010/main" Requires="p14">
+      <p:transition spd="med" p14:dur="700">
+        <p14:cube dir="l"/>
+      </p:transition>
+    </mc:Choice>
+    <mc:Fallback>
+      <p:transition spd="med">
+        <p:push dir="l"/>
+      </p:transition>
+    </mc:Fallback>
+  </mc:AlternateContent>
+</p:sld>
+</file>
+
+<file path=ppt/slides/slide26.xml><?xml version="1.0" encoding="utf-8"?>
+<p:sld xmlns:a="http://schemas.openxmlformats.org/drawingml/2006/main" xmlns:p="http://schemas.openxmlformats.org/presentationml/2006/main" xmlns:r="http://schemas.openxmlformats.org/officeDocument/2006/relationships">
+  <p:cSld>
+    <p:spTree>
+      <p:nvGrpSpPr>
+        <p:cNvPr id="1" name=""/>
+        <p:cNvGrpSpPr/>
+        <p:nvPr/>
+      </p:nvGrpSpPr>
+      <p:grpSpPr/>
+      <p:sp>
+        <p:nvSpPr>
+          <p:cNvPr id="2" name="Rectangle 1"/>
+          <p:cNvSpPr/>
+          <p:nvPr/>
+        </p:nvSpPr>
+        <p:spPr>
+          <a:xfrm>
+            <a:off x="0" y="0"/>
+            <a:ext cx="12191695" cy="6858000"/>
+          </a:xfrm>
+          <a:prstGeom prst="rect">
+            <a:avLst/>
+          </a:prstGeom>
+          <a:solidFill>
+            <a:srgbClr val="FFFFFF"/>
+          </a:solidFill>
+          <a:ln>
+            <a:noFill/>
+          </a:ln>
+          <a:effectLst/>
+        </p:spPr>
+        <p:style>
+          <a:lnRef idx="1">
+            <a:schemeClr val="accent1"/>
+          </a:lnRef>
+          <a:fillRef idx="3">
+            <a:schemeClr val="accent1"/>
+          </a:fillRef>
+          <a:effectRef idx="2">
+            <a:schemeClr val="accent1"/>
+          </a:effectRef>
+          <a:fontRef idx="minor">
+            <a:schemeClr val="lt1"/>
+          </a:fontRef>
+        </p:style>
+        <p:txBody>
+          <a:bodyPr rtlCol="0" anchor="ctr"/>
+          <a:lstStyle/>
+          <a:p>
+            <a:pPr algn="ctr"/>
+          </a:p>
+        </p:txBody>
+      </p:sp>
+      <p:sp>
+        <p:nvSpPr>
+          <p:cNvPr id="3" name="TextBox 2"/>
+          <p:cNvSpPr txBox="1"/>
+          <p:nvPr/>
+        </p:nvSpPr>
+        <p:spPr>
+          <a:xfrm>
+            <a:off x="10607040" y="320040"/>
+            <a:ext cx="1371600" cy="365760"/>
+          </a:xfrm>
+          <a:prstGeom prst="rect">
+            <a:avLst/>
+          </a:prstGeom>
+          <a:noFill/>
+        </p:spPr>
+        <p:txBody>
+          <a:bodyPr wrap="square">
+            <a:spAutoFit/>
+          </a:bodyPr>
+          <a:lstStyle/>
+          <a:p>
+            <a:pPr algn="r"/>
+            <a:r>
+              <a:rPr sz="1000" b="1" i="0">
+                <a:solidFill>
+                  <a:srgbClr val="64748B"/>
+                </a:solidFill>
+                <a:latin typeface="Montserrat"/>
+              </a:rPr>
+              <a:t>026 / 027</a:t>
+            </a:r>
+          </a:p>
+        </p:txBody>
+      </p:sp>
+      <p:sp>
+        <p:nvSpPr>
+          <p:cNvPr id="4" name="TextBox 3"/>
+          <p:cNvSpPr txBox="1"/>
+          <p:nvPr/>
+        </p:nvSpPr>
+        <p:spPr>
+          <a:xfrm>
+            <a:off x="457200" y="6419088"/>
+            <a:ext cx="8229600" cy="365760"/>
+          </a:xfrm>
+          <a:prstGeom prst="rect">
+            <a:avLst/>
+          </a:prstGeom>
+          <a:noFill/>
+        </p:spPr>
+        <p:txBody>
+          <a:bodyPr wrap="square">
+            <a:spAutoFit/>
+          </a:bodyPr>
+          <a:lstStyle/>
+          <a:p>
+            <a:r>
+              <a:rPr sz="900" b="0" i="0">
+                <a:solidFill>
+                  <a:srgbClr val="64748B"/>
+                </a:solidFill>
+                <a:latin typeface="Montserrat"/>
+              </a:rPr>
+              <a:t>Curso Gas B · Tema 16 · UNE 60670-11/12/13</a:t>
+            </a:r>
+          </a:p>
+        </p:txBody>
+      </p:sp>
+      <p:sp>
+        <p:nvSpPr>
+          <p:cNvPr id="5" name="TextBox 4"/>
+          <p:cNvSpPr txBox="1"/>
+          <p:nvPr/>
+        </p:nvSpPr>
+        <p:spPr>
+          <a:xfrm>
+            <a:off x="822960" y="457200"/>
+            <a:ext cx="10058400" cy="365760"/>
+          </a:xfrm>
+          <a:prstGeom prst="rect">
+            <a:avLst/>
+          </a:prstGeom>
+          <a:noFill/>
+        </p:spPr>
+        <p:txBody>
+          <a:bodyPr wrap="square">
+            <a:spAutoFit/>
+          </a:bodyPr>
+          <a:lstStyle/>
+          <a:p>
+            <a:r>
+              <a:rPr sz="1300" b="1" i="0">
+                <a:solidFill>
+                  <a:srgbClr val="E8801A"/>
+                </a:solidFill>
+                <a:latin typeface="Montserrat"/>
+              </a:rPr>
+              <a:t>PARTE 12 · EL PAPELEO</a:t>
+            </a:r>
+          </a:p>
+        </p:txBody>
+      </p:sp>
+      <p:sp>
+        <p:nvSpPr>
+          <p:cNvPr id="6" name="TextBox 5"/>
+          <p:cNvSpPr txBox="1"/>
+          <p:nvPr/>
+        </p:nvSpPr>
+        <p:spPr>
+          <a:xfrm>
+            <a:off x="822960" y="868680"/>
+            <a:ext cx="10515600" cy="914400"/>
+          </a:xfrm>
+          <a:prstGeom prst="rect">
+            <a:avLst/>
+          </a:prstGeom>
+          <a:noFill/>
+        </p:spPr>
+        <p:txBody>
+          <a:bodyPr wrap="square">
+            <a:spAutoFit/>
+          </a:bodyPr>
+          <a:lstStyle/>
+          <a:p>
+            <a:r>
+              <a:rPr sz="2800" b="1" i="0">
+                <a:solidFill>
+                  <a:srgbClr val="1E2761"/>
+                </a:solidFill>
+                <a:latin typeface="Montserrat"/>
+              </a:rPr>
+              <a:t>Quién firma y a quién avisas</a:t>
+            </a:r>
+          </a:p>
+        </p:txBody>
+      </p:sp>
+      <p:sp>
+        <p:nvSpPr>
+          <p:cNvPr id="7" name="Rectangle 6"/>
+          <p:cNvSpPr/>
+          <p:nvPr/>
+        </p:nvSpPr>
+        <p:spPr>
+          <a:xfrm>
+            <a:off x="868680" y="1627632"/>
+            <a:ext cx="2011680" cy="73152"/>
+          </a:xfrm>
+          <a:prstGeom prst="rect">
+            <a:avLst/>
+          </a:prstGeom>
+          <a:solidFill>
+            <a:srgbClr val="E8801A"/>
+          </a:solidFill>
+          <a:ln>
+            <a:noFill/>
+          </a:ln>
+          <a:effectLst/>
+        </p:spPr>
+        <p:style>
+          <a:lnRef idx="1">
+            <a:schemeClr val="accent1"/>
+          </a:lnRef>
+          <a:fillRef idx="3">
+            <a:schemeClr val="accent1"/>
+          </a:fillRef>
+          <a:effectRef idx="2">
+            <a:schemeClr val="accent1"/>
+          </a:effectRef>
+          <a:fontRef idx="minor">
+            <a:schemeClr val="lt1"/>
+          </a:fontRef>
+        </p:style>
+        <p:txBody>
+          <a:bodyPr rtlCol="0" anchor="ctr"/>
+          <a:lstStyle/>
+          <a:p>
+            <a:pPr algn="ctr"/>
+          </a:p>
+        </p:txBody>
+      </p:sp>
+      <p:sp>
+        <p:nvSpPr>
+          <p:cNvPr id="8" name="TextBox 7"/>
+          <p:cNvSpPr txBox="1"/>
+          <p:nvPr/>
+        </p:nvSpPr>
+        <p:spPr>
+          <a:xfrm>
+            <a:off x="822960" y="1965960"/>
+            <a:ext cx="5029200" cy="4206240"/>
+          </a:xfrm>
+          <a:prstGeom prst="rect">
+            <a:avLst/>
+          </a:prstGeom>
+          <a:noFill/>
+        </p:spPr>
+        <p:txBody>
+          <a:bodyPr wrap="square">
+            <a:spAutoFit/>
+          </a:bodyPr>
+          <a:lstStyle/>
+          <a:p>
+            <a:pPr>
+              <a:spcAft>
+                <a:spcPts val="1100"/>
+              </a:spcAft>
+            </a:pPr>
+            <a:r>
+              <a:rPr sz="1600" b="1" i="0">
+                <a:solidFill>
+                  <a:srgbClr val="E8801A"/>
+                </a:solidFill>
+                <a:latin typeface="Montserrat"/>
+              </a:rPr>
+              <a:t>▸  </a:t>
+            </a:r>
+            <a:r>
+              <a:rPr sz="1600" b="0" i="0">
+                <a:solidFill>
+                  <a:srgbClr val="1B2330"/>
+                </a:solidFill>
+                <a:latin typeface="Montserrat"/>
+              </a:rPr>
+              <a:t>Lo hace la empresa habilitada</a:t>
+            </a:r>
+          </a:p>
+          <a:p>
+            <a:pPr>
+              <a:spcAft>
+                <a:spcPts val="1100"/>
+              </a:spcAft>
+            </a:pPr>
+            <a:r>
+              <a:rPr sz="1600" b="1" i="0">
+                <a:solidFill>
+                  <a:srgbClr val="E8801A"/>
+                </a:solidFill>
+                <a:latin typeface="Montserrat"/>
+              </a:rPr>
+              <a:t>▸  </a:t>
+            </a:r>
+            <a:r>
+              <a:rPr sz="1600" b="0" i="0">
+                <a:solidFill>
+                  <a:srgbClr val="1B2330"/>
+                </a:solidFill>
+                <a:latin typeface="Montserrat"/>
+              </a:rPr>
+              <a:t>Certificado o informe al titular</a:t>
+            </a:r>
+          </a:p>
+          <a:p>
+            <a:pPr>
+              <a:spcAft>
+                <a:spcPts val="1100"/>
+              </a:spcAft>
+            </a:pPr>
+            <a:r>
+              <a:rPr sz="1600" b="1" i="0">
+                <a:solidFill>
+                  <a:srgbClr val="E8801A"/>
+                </a:solidFill>
+                <a:latin typeface="Montserrat"/>
+              </a:rPr>
+              <a:t>▸  </a:t>
+            </a:r>
+            <a:r>
+              <a:rPr sz="1600" b="0" i="0">
+                <a:solidFill>
+                  <a:srgbClr val="1B2330"/>
+                </a:solidFill>
+                <a:latin typeface="Montserrat"/>
+              </a:rPr>
+              <a:t>Principales o no apta: avisar a distribuidora</a:t>
+            </a:r>
+          </a:p>
+        </p:txBody>
+      </p:sp>
+      <p:sp>
+        <p:nvSpPr>
+          <p:cNvPr id="9" name="imgph" descr="IMGQ:gas installer signing inspection report"/>
+          <p:cNvSpPr/>
+          <p:nvPr/>
+        </p:nvSpPr>
+        <p:spPr>
+          <a:xfrm>
+            <a:off x="6080760" y="1965960"/>
+            <a:ext cx="5303520" cy="4572000"/>
+          </a:xfrm>
+          <a:prstGeom prst="roundRect">
+            <a:avLst/>
+          </a:prstGeom>
+          <a:solidFill>
+            <a:srgbClr val="F3F6FB"/>
+          </a:solidFill>
+          <a:ln w="12700">
+            <a:solidFill>
+              <a:srgbClr val="C7D2E6"/>
+            </a:solidFill>
+          </a:ln>
+          <a:effectLst/>
+        </p:spPr>
+        <p:style>
+          <a:lnRef idx="1">
+            <a:schemeClr val="accent1"/>
+          </a:lnRef>
+          <a:fillRef idx="3">
+            <a:schemeClr val="accent1"/>
+          </a:fillRef>
+          <a:effectRef idx="2">
+            <a:schemeClr val="accent1"/>
+          </a:effectRef>
+          <a:fontRef idx="minor">
+            <a:schemeClr val="lt1"/>
+          </a:fontRef>
+        </p:style>
+        <p:txBody>
+          <a:bodyPr rtlCol="0" anchor="ctr"/>
+          <a:lstStyle/>
+          <a:p>
+            <a:pPr algn="ctr"/>
+          </a:p>
+        </p:txBody>
+      </p:sp>
+      <p:sp>
+        <p:nvSpPr>
+          <p:cNvPr id="10" name="TextBox 9"/>
+          <p:cNvSpPr txBox="1"/>
+          <p:nvPr/>
+        </p:nvSpPr>
+        <p:spPr>
+          <a:xfrm>
+            <a:off x="6355080" y="3611880"/>
+            <a:ext cx="4754880" cy="1280160"/>
+          </a:xfrm>
+          <a:prstGeom prst="rect">
+            <a:avLst/>
+          </a:prstGeom>
+          <a:noFill/>
+        </p:spPr>
+        <p:txBody>
+          <a:bodyPr wrap="square">
+            <a:spAutoFit/>
+          </a:bodyPr>
+          <a:lstStyle/>
+          <a:p>
+            <a:pPr algn="ctr"/>
+            <a:r>
+              <a:rPr sz="1400" b="1" i="0">
+                <a:solidFill>
+                  <a:srgbClr val="64748B"/>
+                </a:solidFill>
+                <a:latin typeface="Montserrat"/>
+              </a:rPr>
+              <a:t>IMAGEN</a:t>
+            </a:r>
+          </a:p>
+          <a:p>
+            <a:pPr algn="ctr"/>
+            <a:r>
+              <a:rPr sz="1100" b="0" i="1">
+                <a:solidFill>
+                  <a:srgbClr val="64748B"/>
+                </a:solidFill>
+                <a:latin typeface="Montserrat"/>
+              </a:rPr>
+              <a:t>gas installer signing inspection report</a:t>
+            </a:r>
+          </a:p>
+        </p:txBody>
+      </p:sp>
+    </p:spTree>
+  </p:cSld>
+  <p:clrMapOvr>
+    <a:masterClrMapping/>
+  </p:clrMapOvr>
+  <mc:AlternateContent xmlns:mc="http://schemas.openxmlformats.org/markup-compatibility/2006">
+    <mc:Choice xmlns:p14="http://schemas.microsoft.com/office/powerpoint/2010/main" Requires="p14">
+      <p:transition spd="med" p14:dur="700">
+        <p14:cube dir="r"/>
+      </p:transition>
+    </mc:Choice>
+    <mc:Fallback>
+      <p:transition spd="med">
+        <p:push dir="r"/>
+      </p:transition>
+    </mc:Fallback>
+  </mc:AlternateContent>
+</p:sld>
+</file>
+
+<file path=ppt/slides/slide27.xml><?xml version="1.0" encoding="utf-8"?>
+<p:sld xmlns:a="http://schemas.openxmlformats.org/drawingml/2006/main" xmlns:p="http://schemas.openxmlformats.org/presentationml/2006/main" xmlns:r="http://schemas.openxmlformats.org/officeDocument/2006/relationships">
+  <p:cSld>
+    <p:spTree>
+      <p:nvGrpSpPr>
+        <p:cNvPr id="1" name=""/>
+        <p:cNvGrpSpPr/>
+        <p:nvPr/>
+      </p:nvGrpSpPr>
+      <p:grpSpPr/>
+      <p:sp>
+        <p:nvSpPr>
+          <p:cNvPr id="2" name="Rectangle 1"/>
+          <p:cNvSpPr/>
+          <p:nvPr/>
+        </p:nvSpPr>
+        <p:spPr>
+          <a:xfrm>
+            <a:off x="0" y="0"/>
+            <a:ext cx="12191695" cy="6858000"/>
+          </a:xfrm>
+          <a:prstGeom prst="rect">
+            <a:avLst/>
+          </a:prstGeom>
+          <a:solidFill>
+            <a:srgbClr val="1E2761"/>
+          </a:solidFill>
+          <a:ln>
+            <a:noFill/>
+          </a:ln>
+          <a:effectLst/>
+        </p:spPr>
+        <p:style>
+          <a:lnRef idx="1">
+            <a:schemeClr val="accent1"/>
+          </a:lnRef>
+          <a:fillRef idx="3">
+            <a:schemeClr val="accent1"/>
+          </a:fillRef>
+          <a:effectRef idx="2">
+            <a:schemeClr val="accent1"/>
+          </a:effectRef>
+          <a:fontRef idx="minor">
+            <a:schemeClr val="lt1"/>
+          </a:fontRef>
+        </p:style>
+        <p:txBody>
+          <a:bodyPr rtlCol="0" anchor="ctr"/>
+          <a:lstStyle/>
+          <a:p>
+            <a:pPr algn="ctr"/>
+          </a:p>
+        </p:txBody>
+      </p:sp>
+      <p:sp>
+        <p:nvSpPr>
+          <p:cNvPr id="3" name="TextBox 2"/>
+          <p:cNvSpPr txBox="1"/>
+          <p:nvPr/>
+        </p:nvSpPr>
+        <p:spPr>
+          <a:xfrm>
+            <a:off x="822960" y="640080"/>
+            <a:ext cx="10515600" cy="457200"/>
+          </a:xfrm>
+          <a:prstGeom prst="rect">
+            <a:avLst/>
+          </a:prstGeom>
+          <a:noFill/>
+        </p:spPr>
+        <p:txBody>
+          <a:bodyPr wrap="square">
+            <a:spAutoFit/>
+          </a:bodyPr>
+          <a:lstStyle/>
+          <a:p>
+            <a:r>
+              <a:rPr sz="1400" b="1" i="0">
+                <a:solidFill>
+                  <a:srgbClr val="F4A24C"/>
+                </a:solidFill>
+                <a:latin typeface="Montserrat"/>
+              </a:rPr>
+              <a:t>LO QUE YA DOMINAS</a:t>
+            </a:r>
+          </a:p>
+        </p:txBody>
+      </p:sp>
+      <p:sp>
+        <p:nvSpPr>
+          <p:cNvPr id="4" name="Rectangle 3"/>
+          <p:cNvSpPr/>
+          <p:nvPr/>
+        </p:nvSpPr>
+        <p:spPr>
+          <a:xfrm>
+            <a:off x="868680" y="1051560"/>
+            <a:ext cx="1463040" cy="82296"/>
+          </a:xfrm>
+          <a:prstGeom prst="rect">
+            <a:avLst/>
+          </a:prstGeom>
+          <a:solidFill>
+            <a:srgbClr val="E8801A"/>
+          </a:solidFill>
+          <a:ln>
+            <a:noFill/>
+          </a:ln>
+          <a:effectLst/>
+        </p:spPr>
+        <p:style>
+          <a:lnRef idx="1">
+            <a:schemeClr val="accent1"/>
+          </a:lnRef>
+          <a:fillRef idx="3">
+            <a:schemeClr val="accent1"/>
+          </a:fillRef>
+          <a:effectRef idx="2">
+            <a:schemeClr val="accent1"/>
+          </a:effectRef>
+          <a:fontRef idx="minor">
+            <a:schemeClr val="lt1"/>
+          </a:fontRef>
+        </p:style>
+        <p:txBody>
+          <a:bodyPr rtlCol="0" anchor="ctr"/>
+          <a:lstStyle/>
+          <a:p>
+            <a:pPr algn="ctr"/>
+          </a:p>
+        </p:txBody>
+      </p:sp>
+      <p:sp>
+        <p:nvSpPr>
+          <p:cNvPr id="5" name="TextBox 4"/>
+          <p:cNvSpPr txBox="1"/>
+          <p:nvPr/>
+        </p:nvSpPr>
+        <p:spPr>
+          <a:xfrm>
+            <a:off x="822960" y="1234440"/>
+            <a:ext cx="10515600" cy="1097280"/>
+          </a:xfrm>
+          <a:prstGeom prst="rect">
+            <a:avLst/>
+          </a:prstGeom>
+          <a:noFill/>
+        </p:spPr>
+        <p:txBody>
+          <a:bodyPr wrap="square">
+            <a:spAutoFit/>
+          </a:bodyPr>
+          <a:lstStyle/>
+          <a:p>
+            <a:r>
+              <a:rPr sz="3400" b="1" i="0">
+                <a:solidFill>
+                  <a:srgbClr val="FFFFFF"/>
+                </a:solidFill>
+                <a:latin typeface="Montserrat"/>
+              </a:rPr>
+              <a:t>Ya sabes inspeccionar y poner nota</a:t>
+            </a:r>
+          </a:p>
+        </p:txBody>
+      </p:sp>
+      <p:sp>
+        <p:nvSpPr>
+          <p:cNvPr id="6" name="TextBox 5"/>
+          <p:cNvSpPr txBox="1"/>
+          <p:nvPr/>
+        </p:nvSpPr>
+        <p:spPr>
+          <a:xfrm>
+            <a:off x="822960" y="2606040"/>
+            <a:ext cx="10515600" cy="2743200"/>
+          </a:xfrm>
+          <a:prstGeom prst="rect">
+            <a:avLst/>
+          </a:prstGeom>
+          <a:noFill/>
+        </p:spPr>
+        <p:txBody>
+          <a:bodyPr wrap="square">
+            <a:spAutoFit/>
+          </a:bodyPr>
+          <a:lstStyle/>
+          <a:p>
+            <a:pPr>
+              <a:spcAft>
+                <a:spcPts val="1200"/>
+              </a:spcAft>
+            </a:pPr>
+            <a:r>
+              <a:rPr sz="2000" b="1" i="0">
+                <a:solidFill>
+                  <a:srgbClr val="F4A24C"/>
+                </a:solidFill>
+                <a:latin typeface="Montserrat"/>
+              </a:rPr>
+              <a:t>✓  </a:t>
+            </a:r>
+            <a:r>
+              <a:rPr sz="1900" b="0" i="0">
+                <a:solidFill>
+                  <a:srgbClr val="FFFFFF"/>
+                </a:solidFill>
+                <a:latin typeface="Montserrat"/>
+              </a:rPr>
+              <a:t>Dos papeles: certificado o informe</a:t>
+            </a:r>
+          </a:p>
+          <a:p>
+            <a:pPr>
+              <a:spcAft>
+                <a:spcPts val="1200"/>
+              </a:spcAft>
+            </a:pPr>
+            <a:r>
+              <a:rPr sz="2000" b="1" i="0">
+                <a:solidFill>
+                  <a:srgbClr val="F4A24C"/>
+                </a:solidFill>
+                <a:latin typeface="Montserrat"/>
+              </a:rPr>
+              <a:t>✓  </a:t>
+            </a:r>
+            <a:r>
+              <a:rPr sz="1900" b="0" i="0">
+                <a:solidFill>
+                  <a:srgbClr val="FFFFFF"/>
+                </a:solidFill>
+                <a:latin typeface="Montserrat"/>
+              </a:rPr>
+              <a:t>Principal corta; secundaria tiene plazo</a:t>
+            </a:r>
+          </a:p>
+          <a:p>
+            <a:pPr>
+              <a:spcAft>
+                <a:spcPts val="1200"/>
+              </a:spcAft>
+            </a:pPr>
+            <a:r>
+              <a:rPr sz="2000" b="1" i="0">
+                <a:solidFill>
+                  <a:srgbClr val="F4A24C"/>
+                </a:solidFill>
+                <a:latin typeface="Montserrat"/>
+              </a:rPr>
+              <a:t>✓  </a:t>
+            </a:r>
+            <a:r>
+              <a:rPr sz="1900" b="0" i="0">
+                <a:solidFill>
+                  <a:srgbClr val="FFFFFF"/>
+                </a:solidFill>
+                <a:latin typeface="Montserrat"/>
+              </a:rPr>
+              <a:t>Ni tipo A ni B en dormitorio o baño</a:t>
+            </a:r>
+          </a:p>
+          <a:p>
+            <a:pPr>
+              <a:spcAft>
+                <a:spcPts val="1200"/>
+              </a:spcAft>
+            </a:pPr>
+            <a:r>
+              <a:rPr sz="2000" b="1" i="0">
+                <a:solidFill>
+                  <a:srgbClr val="F4A24C"/>
+                </a:solidFill>
+                <a:latin typeface="Montserrat"/>
+              </a:rPr>
+              <a:t>✓  </a:t>
+            </a:r>
+            <a:r>
+              <a:rPr sz="1900" b="0" i="0">
+                <a:solidFill>
+                  <a:srgbClr val="FFFFFF"/>
+                </a:solidFill>
+                <a:latin typeface="Montserrat"/>
+              </a:rPr>
+              <a:t>El volumen de 8 m³ cambia la gravedad</a:t>
+            </a:r>
+          </a:p>
+        </p:txBody>
+      </p:sp>
+      <p:sp>
+        <p:nvSpPr>
+          <p:cNvPr id="7" name="Rounded Rectangle 6"/>
+          <p:cNvSpPr/>
+          <p:nvPr/>
+        </p:nvSpPr>
+        <p:spPr>
+          <a:xfrm>
+            <a:off x="822960" y="5532120"/>
+            <a:ext cx="10515600" cy="822960"/>
+          </a:xfrm>
+          <a:prstGeom prst="roundRect">
+            <a:avLst/>
+          </a:prstGeom>
+          <a:solidFill>
+            <a:srgbClr val="E8801A"/>
+          </a:solidFill>
+          <a:ln>
+            <a:noFill/>
+          </a:ln>
+          <a:effectLst/>
+        </p:spPr>
+        <p:style>
+          <a:lnRef idx="1">
+            <a:schemeClr val="accent1"/>
+          </a:lnRef>
+          <a:fillRef idx="3">
+            <a:schemeClr val="accent1"/>
+          </a:fillRef>
+          <a:effectRef idx="2">
+            <a:schemeClr val="accent1"/>
+          </a:effectRef>
+          <a:fontRef idx="minor">
+            <a:schemeClr val="lt1"/>
+          </a:fontRef>
+        </p:style>
+        <p:txBody>
+          <a:bodyPr rtlCol="0" anchor="ctr"/>
+          <a:lstStyle/>
+          <a:p>
+            <a:pPr algn="ctr"/>
+          </a:p>
+        </p:txBody>
+      </p:sp>
+      <p:sp>
+        <p:nvSpPr>
+          <p:cNvPr id="8" name="TextBox 7"/>
+          <p:cNvSpPr txBox="1"/>
+          <p:nvPr/>
+        </p:nvSpPr>
+        <p:spPr>
+          <a:xfrm>
+            <a:off x="1051560" y="5623560"/>
+            <a:ext cx="10058400" cy="640080"/>
+          </a:xfrm>
+          <a:prstGeom prst="rect">
+            <a:avLst/>
+          </a:prstGeom>
+          <a:noFill/>
+        </p:spPr>
+        <p:txBody>
+          <a:bodyPr wrap="square">
+            <a:spAutoFit/>
+          </a:bodyPr>
+          <a:lstStyle/>
+          <a:p>
+            <a:r>
+              <a:rPr sz="1500" b="1" i="1">
+                <a:solidFill>
+                  <a:srgbClr val="1E2761"/>
+                </a:solidFill>
+                <a:latin typeface="Montserrat"/>
+              </a:rPr>
+              <a:t>Ya lees una vivienda como un gasista de verdad. Ahora subimos a lo grande y al edificio.</a:t>
+            </a:r>
+          </a:p>
+        </p:txBody>
+      </p:sp>
+    </p:spTree>
+  </p:cSld>
+  <p:clrMapOvr>
+    <a:masterClrMapping/>
+  </p:clrMapOvr>
+  <mc:AlternateContent xmlns:mc="http://schemas.openxmlformats.org/markup-compatibility/2006">
+    <mc:Choice xmlns:p14="http://schemas.microsoft.com/office/powerpoint/2010/main" Requires="p14">
+      <p:transition spd="med" p14:dur="700">
+        <p14:cube dir="l"/>
+      </p:transition>
+    </mc:Choice>
+    <mc:Fallback>
+      <p:transition spd="med">
+        <p:push dir="l"/>
+      </p:transition>
+    </mc:Fallback>
+  </mc:AlternateContent>
 </p:sld>
 </file>
 
@@ -11388,7 +15533,7 @@
                 </a:solidFill>
                 <a:latin typeface="Montserrat"/>
               </a:rPr>
-              <a:t>003 / 021</a:t>
+              <a:t>003 / 027</a:t>
             </a:r>
           </a:p>
         </p:txBody>
@@ -11497,7 +15642,7 @@
       </p:sp>
       <p:sp>
         <p:nvSpPr>
-          <p:cNvPr id="7" name="Rounded Rectangle 6"/>
+          <p:cNvPr id="7" name="Rectangle 6"/>
           <p:cNvSpPr/>
           <p:nvPr/>
         </p:nvSpPr>
@@ -11506,7 +15651,7 @@
             <a:off x="868680" y="1673352"/>
             <a:ext cx="2011680" cy="73152"/>
           </a:xfrm>
-          <a:prstGeom prst="roundRect">
+          <a:prstGeom prst="rect">
             <a:avLst/>
           </a:prstGeom>
           <a:solidFill>
@@ -11617,6 +15762,18 @@
   <p:clrMapOvr>
     <a:masterClrMapping/>
   </p:clrMapOvr>
+  <mc:AlternateContent xmlns:mc="http://schemas.openxmlformats.org/markup-compatibility/2006">
+    <mc:Choice xmlns:p14="http://schemas.microsoft.com/office/powerpoint/2010/main" Requires="p14">
+      <p:transition spd="med" p14:dur="700">
+        <p14:cube dir="l"/>
+      </p:transition>
+    </mc:Choice>
+    <mc:Fallback>
+      <p:transition spd="med">
+        <p:push dir="l"/>
+      </p:transition>
+    </mc:Fallback>
+  </mc:AlternateContent>
 </p:sld>
 </file>
 
@@ -11704,7 +15861,7 @@
                 </a:solidFill>
                 <a:latin typeface="Montserrat"/>
               </a:rPr>
-              <a:t>004 / 021</a:t>
+              <a:t>004 / 027</a:t>
             </a:r>
           </a:p>
         </p:txBody>
@@ -11813,7 +15970,7 @@
       </p:sp>
       <p:sp>
         <p:nvSpPr>
-          <p:cNvPr id="7" name="Rounded Rectangle 6"/>
+          <p:cNvPr id="7" name="Rectangle 6"/>
           <p:cNvSpPr/>
           <p:nvPr/>
         </p:nvSpPr>
@@ -11822,7 +15979,7 @@
             <a:off x="868680" y="1627632"/>
             <a:ext cx="2011680" cy="73152"/>
           </a:xfrm>
-          <a:prstGeom prst="roundRect">
+          <a:prstGeom prst="rect">
             <a:avLst/>
           </a:prstGeom>
           <a:solidFill>
@@ -11864,7 +16021,7 @@
         <p:spPr>
           <a:xfrm>
             <a:off x="822960" y="1965960"/>
-            <a:ext cx="4983480" cy="4206240"/>
+            <a:ext cx="5029200" cy="4206240"/>
           </a:xfrm>
           <a:prstGeom prst="rect">
             <a:avLst/>
@@ -11961,8 +16118,8 @@
         </p:nvSpPr>
         <p:spPr>
           <a:xfrm>
-            <a:off x="5806440" y="1051560"/>
-            <a:ext cx="5298947" cy="4629150"/>
+            <a:off x="6080760" y="1965960"/>
+            <a:ext cx="5303520" cy="4572000"/>
           </a:xfrm>
           <a:prstGeom prst="roundRect">
             <a:avLst/>
@@ -12007,8 +16164,8 @@
         </p:nvSpPr>
         <p:spPr>
           <a:xfrm>
-            <a:off x="6080760" y="2726055"/>
-            <a:ext cx="4750307" cy="1280160"/>
+            <a:off x="6355080" y="3611880"/>
+            <a:ext cx="4754880" cy="1280160"/>
           </a:xfrm>
           <a:prstGeom prst="rect">
             <a:avLst/>
@@ -12029,7 +16186,7 @@
                 </a:solidFill>
                 <a:latin typeface="Montserrat"/>
               </a:rPr>
-              <a:t>IMAGEN REALISTA</a:t>
+              <a:t>IMAGEN</a:t>
             </a:r>
           </a:p>
           <a:p>
@@ -12051,6 +16208,18 @@
   <p:clrMapOvr>
     <a:masterClrMapping/>
   </p:clrMapOvr>
+  <mc:AlternateContent xmlns:mc="http://schemas.openxmlformats.org/markup-compatibility/2006">
+    <mc:Choice xmlns:p14="http://schemas.microsoft.com/office/powerpoint/2010/main" Requires="p14">
+      <p:transition spd="med" p14:dur="700">
+        <p14:cube dir="r"/>
+      </p:transition>
+    </mc:Choice>
+    <mc:Fallback>
+      <p:transition spd="med">
+        <p:push dir="r"/>
+      </p:transition>
+    </mc:Fallback>
+  </mc:AlternateContent>
 </p:sld>
 </file>
 
@@ -12138,7 +16307,7 @@
                 </a:solidFill>
                 <a:latin typeface="Montserrat"/>
               </a:rPr>
-              <a:t>005 / 021</a:t>
+              <a:t>005 / 027</a:t>
             </a:r>
           </a:p>
         </p:txBody>
@@ -12247,7 +16416,7 @@
       </p:sp>
       <p:sp>
         <p:nvSpPr>
-          <p:cNvPr id="7" name="Rounded Rectangle 6"/>
+          <p:cNvPr id="7" name="Rectangle 6"/>
           <p:cNvSpPr/>
           <p:nvPr/>
         </p:nvSpPr>
@@ -12256,7 +16425,7 @@
             <a:off x="868680" y="1627632"/>
             <a:ext cx="2011680" cy="73152"/>
           </a:xfrm>
-          <a:prstGeom prst="roundRect">
+          <a:prstGeom prst="rect">
             <a:avLst/>
           </a:prstGeom>
           <a:solidFill>
@@ -12297,8 +16466,8 @@
         </p:nvSpPr>
         <p:spPr>
           <a:xfrm>
-            <a:off x="822960" y="1965960"/>
-            <a:ext cx="4983480" cy="4206240"/>
+            <a:off x="6355080" y="1965960"/>
+            <a:ext cx="5029200" cy="4206240"/>
           </a:xfrm>
           <a:prstGeom prst="rect">
             <a:avLst/>
@@ -12420,8 +16589,8 @@
         </p:nvSpPr>
         <p:spPr>
           <a:xfrm>
-            <a:off x="5806440" y="1051560"/>
-            <a:ext cx="5298947" cy="4629150"/>
+            <a:off x="822960" y="1965960"/>
+            <a:ext cx="5303520" cy="4572000"/>
           </a:xfrm>
           <a:prstGeom prst="roundRect">
             <a:avLst/>
@@ -12466,8 +16635,8 @@
         </p:nvSpPr>
         <p:spPr>
           <a:xfrm>
-            <a:off x="6080760" y="2726055"/>
-            <a:ext cx="4750307" cy="1280160"/>
+            <a:off x="1097280" y="3611880"/>
+            <a:ext cx="4754880" cy="1280160"/>
           </a:xfrm>
           <a:prstGeom prst="rect">
             <a:avLst/>
@@ -12488,7 +16657,7 @@
                 </a:solidFill>
                 <a:latin typeface="Montserrat"/>
               </a:rPr>
-              <a:t>IMAGEN REALISTA</a:t>
+              <a:t>IMAGEN</a:t>
             </a:r>
           </a:p>
           <a:p>
@@ -12510,6 +16679,18 @@
   <p:clrMapOvr>
     <a:masterClrMapping/>
   </p:clrMapOvr>
+  <mc:AlternateContent xmlns:mc="http://schemas.openxmlformats.org/markup-compatibility/2006">
+    <mc:Choice xmlns:p14="http://schemas.microsoft.com/office/powerpoint/2010/main" Requires="p14">
+      <p:transition spd="med" p14:dur="700">
+        <p14:cube dir="l"/>
+      </p:transition>
+    </mc:Choice>
+    <mc:Fallback>
+      <p:transition spd="med">
+        <p:push dir="l"/>
+      </p:transition>
+    </mc:Fallback>
+  </mc:AlternateContent>
 </p:sld>
 </file>
 
@@ -12597,7 +16778,7 @@
                 </a:solidFill>
                 <a:latin typeface="Montserrat"/>
               </a:rPr>
-              <a:t>006 / 021</a:t>
+              <a:t>006 / 027</a:t>
             </a:r>
           </a:p>
         </p:txBody>
@@ -12706,7 +16887,7 @@
       </p:sp>
       <p:sp>
         <p:nvSpPr>
-          <p:cNvPr id="7" name="Rounded Rectangle 6"/>
+          <p:cNvPr id="7" name="Rectangle 6"/>
           <p:cNvSpPr/>
           <p:nvPr/>
         </p:nvSpPr>
@@ -12715,7 +16896,7 @@
             <a:off x="868680" y="1627632"/>
             <a:ext cx="2011680" cy="73152"/>
           </a:xfrm>
-          <a:prstGeom prst="roundRect">
+          <a:prstGeom prst="rect">
             <a:avLst/>
           </a:prstGeom>
           <a:solidFill>
@@ -12757,7 +16938,7 @@
         <p:spPr>
           <a:xfrm>
             <a:off x="822960" y="1965960"/>
-            <a:ext cx="4983480" cy="4206240"/>
+            <a:ext cx="5029200" cy="4206240"/>
           </a:xfrm>
           <a:prstGeom prst="rect">
             <a:avLst/>
@@ -12854,8 +17035,8 @@
         </p:nvSpPr>
         <p:spPr>
           <a:xfrm>
-            <a:off x="5806440" y="1051560"/>
-            <a:ext cx="5298947" cy="4629150"/>
+            <a:off x="6080760" y="1965960"/>
+            <a:ext cx="5303520" cy="4572000"/>
           </a:xfrm>
           <a:prstGeom prst="roundRect">
             <a:avLst/>
@@ -12900,8 +17081,8 @@
         </p:nvSpPr>
         <p:spPr>
           <a:xfrm>
-            <a:off x="6080760" y="2726055"/>
-            <a:ext cx="4750307" cy="1280160"/>
+            <a:off x="6355080" y="3611880"/>
+            <a:ext cx="4754880" cy="1280160"/>
           </a:xfrm>
           <a:prstGeom prst="rect">
             <a:avLst/>
@@ -12922,7 +17103,7 @@
                 </a:solidFill>
                 <a:latin typeface="Montserrat"/>
               </a:rPr>
-              <a:t>IMAGEN REALISTA</a:t>
+              <a:t>IMAGEN</a:t>
             </a:r>
           </a:p>
           <a:p>
@@ -12944,6 +17125,18 @@
   <p:clrMapOvr>
     <a:masterClrMapping/>
   </p:clrMapOvr>
+  <mc:AlternateContent xmlns:mc="http://schemas.openxmlformats.org/markup-compatibility/2006">
+    <mc:Choice xmlns:p14="http://schemas.microsoft.com/office/powerpoint/2010/main" Requires="p14">
+      <p:transition spd="med" p14:dur="700">
+        <p14:cube dir="r"/>
+      </p:transition>
+    </mc:Choice>
+    <mc:Fallback>
+      <p:transition spd="med">
+        <p:push dir="r"/>
+      </p:transition>
+    </mc:Fallback>
+  </mc:AlternateContent>
 </p:sld>
 </file>
 
@@ -13031,7 +17224,7 @@
                 </a:solidFill>
                 <a:latin typeface="Montserrat"/>
               </a:rPr>
-              <a:t>007 / 021</a:t>
+              <a:t>007 / 027</a:t>
             </a:r>
           </a:p>
         </p:txBody>
@@ -13140,7 +17333,7 @@
       </p:sp>
       <p:sp>
         <p:nvSpPr>
-          <p:cNvPr id="7" name="Rounded Rectangle 6"/>
+          <p:cNvPr id="7" name="Rectangle 6"/>
           <p:cNvSpPr/>
           <p:nvPr/>
         </p:nvSpPr>
@@ -13149,7 +17342,7 @@
             <a:off x="868680" y="1627632"/>
             <a:ext cx="2011680" cy="73152"/>
           </a:xfrm>
-          <a:prstGeom prst="roundRect">
+          <a:prstGeom prst="rect">
             <a:avLst/>
           </a:prstGeom>
           <a:solidFill>
@@ -13190,8 +17383,8 @@
         </p:nvSpPr>
         <p:spPr>
           <a:xfrm>
-            <a:off x="822960" y="1965960"/>
-            <a:ext cx="4983480" cy="4206240"/>
+            <a:off x="6355080" y="1965960"/>
+            <a:ext cx="5029200" cy="4206240"/>
           </a:xfrm>
           <a:prstGeom prst="rect">
             <a:avLst/>
@@ -13313,8 +17506,8 @@
         </p:nvSpPr>
         <p:spPr>
           <a:xfrm>
-            <a:off x="5806440" y="1051560"/>
-            <a:ext cx="5298947" cy="4629150"/>
+            <a:off x="822960" y="1965960"/>
+            <a:ext cx="5303520" cy="4572000"/>
           </a:xfrm>
           <a:prstGeom prst="roundRect">
             <a:avLst/>
@@ -13359,8 +17552,8 @@
         </p:nvSpPr>
         <p:spPr>
           <a:xfrm>
-            <a:off x="6080760" y="2726055"/>
-            <a:ext cx="4750307" cy="1280160"/>
+            <a:off x="1097280" y="3611880"/>
+            <a:ext cx="4754880" cy="1280160"/>
           </a:xfrm>
           <a:prstGeom prst="rect">
             <a:avLst/>
@@ -13381,7 +17574,7 @@
                 </a:solidFill>
                 <a:latin typeface="Montserrat"/>
               </a:rPr>
-              <a:t>IMAGEN REALISTA</a:t>
+              <a:t>IMAGEN</a:t>
             </a:r>
           </a:p>
           <a:p>
@@ -13403,6 +17596,18 @@
   <p:clrMapOvr>
     <a:masterClrMapping/>
   </p:clrMapOvr>
+  <mc:AlternateContent xmlns:mc="http://schemas.openxmlformats.org/markup-compatibility/2006">
+    <mc:Choice xmlns:p14="http://schemas.microsoft.com/office/powerpoint/2010/main" Requires="p14">
+      <p:transition spd="med" p14:dur="700">
+        <p14:cube dir="l"/>
+      </p:transition>
+    </mc:Choice>
+    <mc:Fallback>
+      <p:transition spd="med">
+        <p:push dir="l"/>
+      </p:transition>
+    </mc:Fallback>
+  </mc:AlternateContent>
 </p:sld>
 </file>
 
@@ -13490,7 +17695,7 @@
                 </a:solidFill>
                 <a:latin typeface="Montserrat"/>
               </a:rPr>
-              <a:t>008 / 021</a:t>
+              <a:t>008 / 027</a:t>
             </a:r>
           </a:p>
         </p:txBody>
@@ -13599,7 +17804,7 @@
       </p:sp>
       <p:sp>
         <p:nvSpPr>
-          <p:cNvPr id="7" name="Rounded Rectangle 6"/>
+          <p:cNvPr id="7" name="Rectangle 6"/>
           <p:cNvSpPr/>
           <p:nvPr/>
         </p:nvSpPr>
@@ -13608,7 +17813,7 @@
             <a:off x="868680" y="1627632"/>
             <a:ext cx="2011680" cy="73152"/>
           </a:xfrm>
-          <a:prstGeom prst="roundRect">
+          <a:prstGeom prst="rect">
             <a:avLst/>
           </a:prstGeom>
           <a:solidFill>
@@ -13650,7 +17855,7 @@
         <p:spPr>
           <a:xfrm>
             <a:off x="822960" y="1965960"/>
-            <a:ext cx="4983480" cy="4206240"/>
+            <a:ext cx="5029200" cy="4206240"/>
           </a:xfrm>
           <a:prstGeom prst="rect">
             <a:avLst/>
@@ -13747,8 +17952,8 @@
         </p:nvSpPr>
         <p:spPr>
           <a:xfrm>
-            <a:off x="5806440" y="1051560"/>
-            <a:ext cx="5298947" cy="4629150"/>
+            <a:off x="6080760" y="1965960"/>
+            <a:ext cx="5303520" cy="4572000"/>
           </a:xfrm>
           <a:prstGeom prst="roundRect">
             <a:avLst/>
@@ -13793,8 +17998,8 @@
         </p:nvSpPr>
         <p:spPr>
           <a:xfrm>
-            <a:off x="6080760" y="2726055"/>
-            <a:ext cx="4750307" cy="1280160"/>
+            <a:off x="6355080" y="3611880"/>
+            <a:ext cx="4754880" cy="1280160"/>
           </a:xfrm>
           <a:prstGeom prst="rect">
             <a:avLst/>
@@ -13815,7 +18020,7 @@
                 </a:solidFill>
                 <a:latin typeface="Montserrat"/>
               </a:rPr>
-              <a:t>IMAGEN REALISTA</a:t>
+              <a:t>IMAGEN</a:t>
             </a:r>
           </a:p>
           <a:p>
@@ -13837,6 +18042,18 @@
   <p:clrMapOvr>
     <a:masterClrMapping/>
   </p:clrMapOvr>
+  <mc:AlternateContent xmlns:mc="http://schemas.openxmlformats.org/markup-compatibility/2006">
+    <mc:Choice xmlns:p14="http://schemas.microsoft.com/office/powerpoint/2010/main" Requires="p14">
+      <p:transition spd="med" p14:dur="700">
+        <p14:cube dir="r"/>
+      </p:transition>
+    </mc:Choice>
+    <mc:Fallback>
+      <p:transition spd="med">
+        <p:push dir="r"/>
+      </p:transition>
+    </mc:Fallback>
+  </mc:AlternateContent>
 </p:sld>
 </file>
 
@@ -13924,7 +18141,7 @@
                 </a:solidFill>
                 <a:latin typeface="Montserrat"/>
               </a:rPr>
-              <a:t>009 / 021</a:t>
+              <a:t>009 / 027</a:t>
             </a:r>
           </a:p>
         </p:txBody>
@@ -13965,84 +18182,16 @@
       </p:sp>
       <p:sp>
         <p:nvSpPr>
-          <p:cNvPr id="5" name="TextBox 4"/>
-          <p:cNvSpPr txBox="1"/>
-          <p:nvPr/>
-        </p:nvSpPr>
-        <p:spPr>
-          <a:xfrm>
-            <a:off x="822960" y="457200"/>
-            <a:ext cx="10058400" cy="365760"/>
-          </a:xfrm>
-          <a:prstGeom prst="rect">
-            <a:avLst/>
-          </a:prstGeom>
-          <a:noFill/>
-        </p:spPr>
-        <p:txBody>
-          <a:bodyPr wrap="square">
-            <a:spAutoFit/>
-          </a:bodyPr>
-          <a:lstStyle/>
-          <a:p>
-            <a:r>
-              <a:rPr sz="1300" b="1" i="0">
-                <a:solidFill>
-                  <a:srgbClr val="E8801A"/>
-                </a:solidFill>
-                <a:latin typeface="Montserrat"/>
-              </a:rPr>
-              <a:t>PARTE 12 · APARTADO 3</a:t>
-            </a:r>
-          </a:p>
-        </p:txBody>
-      </p:sp>
-      <p:sp>
-        <p:nvSpPr>
-          <p:cNvPr id="6" name="TextBox 5"/>
-          <p:cNvSpPr txBox="1"/>
-          <p:nvPr/>
-        </p:nvSpPr>
-        <p:spPr>
-          <a:xfrm>
-            <a:off x="822960" y="868680"/>
-            <a:ext cx="10515600" cy="914400"/>
-          </a:xfrm>
-          <a:prstGeom prst="rect">
-            <a:avLst/>
-          </a:prstGeom>
-          <a:noFill/>
-        </p:spPr>
-        <p:txBody>
-          <a:bodyPr wrap="square">
-            <a:spAutoFit/>
-          </a:bodyPr>
-          <a:lstStyle/>
-          <a:p>
-            <a:r>
-              <a:rPr sz="2800" b="1" i="0">
-                <a:solidFill>
-                  <a:srgbClr val="1E2761"/>
-                </a:solidFill>
-                <a:latin typeface="Montserrat"/>
-              </a:rPr>
-              <a:t>Individuales ≤ 70 kW</a:t>
-            </a:r>
-          </a:p>
-        </p:txBody>
-      </p:sp>
-      <p:sp>
-        <p:nvSpPr>
-          <p:cNvPr id="7" name="Rounded Rectangle 6"/>
+          <p:cNvPr id="5" name="Rectangle 4"/>
           <p:cNvSpPr/>
           <p:nvPr/>
         </p:nvSpPr>
         <p:spPr>
           <a:xfrm>
-            <a:off x="868680" y="1627632"/>
-            <a:ext cx="2011680" cy="73152"/>
-          </a:xfrm>
-          <a:prstGeom prst="roundRect">
+            <a:off x="0" y="0"/>
+            <a:ext cx="12191695" cy="1143000"/>
+          </a:xfrm>
+          <a:prstGeom prst="rect">
             <a:avLst/>
           </a:prstGeom>
           <a:solidFill>
@@ -14077,14 +18226,14 @@
       </p:sp>
       <p:sp>
         <p:nvSpPr>
-          <p:cNvPr id="8" name="TextBox 7"/>
+          <p:cNvPr id="6" name="TextBox 5"/>
           <p:cNvSpPr txBox="1"/>
           <p:nvPr/>
         </p:nvSpPr>
         <p:spPr>
           <a:xfrm>
-            <a:off x="822960" y="1965960"/>
-            <a:ext cx="4983480" cy="4206240"/>
+            <a:off x="822960" y="274320"/>
+            <a:ext cx="10515600" cy="640080"/>
           </a:xfrm>
           <a:prstGeom prst="rect">
             <a:avLst/>
@@ -14097,92 +18246,62 @@
           </a:bodyPr>
           <a:lstStyle/>
           <a:p>
-            <a:pPr>
-              <a:spcAft>
-                <a:spcPts val="1100"/>
-              </a:spcAft>
-            </a:pPr>
-            <a:r>
-              <a:rPr sz="1600" b="1" i="0">
-                <a:solidFill>
-                  <a:srgbClr val="E8801A"/>
-                </a:solidFill>
-                <a:latin typeface="Montserrat"/>
-              </a:rPr>
-              <a:t>▸  </a:t>
-            </a:r>
-            <a:r>
-              <a:rPr sz="1600" b="0" i="0">
-                <a:solidFill>
-                  <a:srgbClr val="1B2330"/>
-                </a:solidFill>
-                <a:latin typeface="Montserrat"/>
-              </a:rPr>
-              <a:t>El caso doméstico habitual</a:t>
-            </a:r>
-          </a:p>
-          <a:p>
-            <a:pPr>
-              <a:spcAft>
-                <a:spcPts val="1100"/>
-              </a:spcAft>
-            </a:pPr>
-            <a:r>
-              <a:rPr sz="1600" b="1" i="0">
-                <a:solidFill>
-                  <a:srgbClr val="E8801A"/>
-                </a:solidFill>
-                <a:latin typeface="Montserrat"/>
-              </a:rPr>
-              <a:t>▸  </a:t>
-            </a:r>
-            <a:r>
-              <a:rPr sz="1600" b="0" i="0">
-                <a:solidFill>
-                  <a:srgbClr val="1B2330"/>
-                </a:solidFill>
-                <a:latin typeface="Montserrat"/>
-              </a:rPr>
-              <a:t>Códigos IPa: anomalías principales</a:t>
-            </a:r>
-          </a:p>
-          <a:p>
-            <a:pPr>
-              <a:spcAft>
-                <a:spcPts val="1100"/>
-              </a:spcAft>
-            </a:pPr>
-            <a:r>
-              <a:rPr sz="1600" b="1" i="0">
-                <a:solidFill>
-                  <a:srgbClr val="E8801A"/>
-                </a:solidFill>
-                <a:latin typeface="Montserrat"/>
-              </a:rPr>
-              <a:t>▸  </a:t>
-            </a:r>
-            <a:r>
-              <a:rPr sz="1600" b="0" i="0">
-                <a:solidFill>
-                  <a:srgbClr val="1B2330"/>
-                </a:solidFill>
-                <a:latin typeface="Montserrat"/>
-              </a:rPr>
-              <a:t>Códigos ISa: anomalías secundarias</a:t>
-            </a:r>
-          </a:p>
-        </p:txBody>
-      </p:sp>
-      <p:sp>
-        <p:nvSpPr>
-          <p:cNvPr id="9" name="imgph" descr="IMGQ:domestic gas boiler wall mounted apartment"/>
+            <a:r>
+              <a:rPr sz="2400" b="1" i="0">
+                <a:solidFill>
+                  <a:srgbClr val="FFFFFF"/>
+                </a:solidFill>
+                <a:latin typeface="Montserrat"/>
+              </a:rPr>
+              <a:t>⚡  PREGUNTA RÁPIDA</a:t>
+            </a:r>
+          </a:p>
+        </p:txBody>
+      </p:sp>
+      <p:sp>
+        <p:nvSpPr>
+          <p:cNvPr id="7" name="TextBox 6"/>
+          <p:cNvSpPr txBox="1"/>
+          <p:nvPr/>
+        </p:nvSpPr>
+        <p:spPr>
+          <a:xfrm>
+            <a:off x="822960" y="1508760"/>
+            <a:ext cx="10515600" cy="1371600"/>
+          </a:xfrm>
+          <a:prstGeom prst="rect">
+            <a:avLst/>
+          </a:prstGeom>
+          <a:noFill/>
+        </p:spPr>
+        <p:txBody>
+          <a:bodyPr wrap="square">
+            <a:spAutoFit/>
+          </a:bodyPr>
+          <a:lstStyle/>
+          <a:p>
+            <a:r>
+              <a:rPr sz="2400" b="1" i="0">
+                <a:solidFill>
+                  <a:srgbClr val="1E2761"/>
+                </a:solidFill>
+                <a:latin typeface="Montserrat"/>
+              </a:rPr>
+              <a:t>Una anomalía secundaria consistente en una falta de estanquidad (fuga). ¿En qué plazo debe corregirse?</a:t>
+            </a:r>
+          </a:p>
+        </p:txBody>
+      </p:sp>
+      <p:sp>
+        <p:nvSpPr>
+          <p:cNvPr id="8" name="Rounded Rectangle 7"/>
           <p:cNvSpPr/>
           <p:nvPr/>
         </p:nvSpPr>
         <p:spPr>
           <a:xfrm>
-            <a:off x="5806440" y="1051560"/>
-            <a:ext cx="5298947" cy="4629150"/>
+            <a:off x="822960" y="3291840"/>
+            <a:ext cx="4983480" cy="1143000"/>
           </a:xfrm>
           <a:prstGeom prst="roundRect">
             <a:avLst/>
@@ -14221,14 +18340,58 @@
       </p:sp>
       <p:sp>
         <p:nvSpPr>
+          <p:cNvPr id="9" name="Rectangle 8"/>
+          <p:cNvSpPr/>
+          <p:nvPr/>
+        </p:nvSpPr>
+        <p:spPr>
+          <a:xfrm>
+            <a:off x="822960" y="3291840"/>
+            <a:ext cx="640080" cy="1143000"/>
+          </a:xfrm>
+          <a:prstGeom prst="rect">
+            <a:avLst/>
+          </a:prstGeom>
+          <a:solidFill>
+            <a:srgbClr val="1E2761"/>
+          </a:solidFill>
+          <a:ln>
+            <a:noFill/>
+          </a:ln>
+          <a:effectLst/>
+        </p:spPr>
+        <p:style>
+          <a:lnRef idx="1">
+            <a:schemeClr val="accent1"/>
+          </a:lnRef>
+          <a:fillRef idx="3">
+            <a:schemeClr val="accent1"/>
+          </a:fillRef>
+          <a:effectRef idx="2">
+            <a:schemeClr val="accent1"/>
+          </a:effectRef>
+          <a:fontRef idx="minor">
+            <a:schemeClr val="lt1"/>
+          </a:fontRef>
+        </p:style>
+        <p:txBody>
+          <a:bodyPr rtlCol="0" anchor="ctr"/>
+          <a:lstStyle/>
+          <a:p>
+            <a:pPr algn="ctr"/>
+          </a:p>
+        </p:txBody>
+      </p:sp>
+      <p:sp>
+        <p:nvSpPr>
           <p:cNvPr id="10" name="TextBox 9"/>
           <p:cNvSpPr txBox="1"/>
           <p:nvPr/>
         </p:nvSpPr>
         <p:spPr>
           <a:xfrm>
-            <a:off x="6080760" y="2726055"/>
-            <a:ext cx="4750307" cy="1280160"/>
+            <a:off x="822960" y="3611880"/>
+            <a:ext cx="640080" cy="548640"/>
           </a:xfrm>
           <a:prstGeom prst="rect">
             <a:avLst/>
@@ -14243,25 +18406,524 @@
           <a:p>
             <a:pPr algn="ctr"/>
             <a:r>
-              <a:rPr sz="1400" b="1" i="0">
-                <a:solidFill>
-                  <a:srgbClr val="64748B"/>
-                </a:solidFill>
-                <a:latin typeface="Montserrat"/>
-              </a:rPr>
-              <a:t>IMAGEN REALISTA</a:t>
-            </a:r>
-          </a:p>
+              <a:rPr sz="2200" b="1" i="0">
+                <a:solidFill>
+                  <a:srgbClr val="FFFFFF"/>
+                </a:solidFill>
+                <a:latin typeface="Montserrat"/>
+              </a:rPr>
+              <a:t>A</a:t>
+            </a:r>
+          </a:p>
+        </p:txBody>
+      </p:sp>
+      <p:sp>
+        <p:nvSpPr>
+          <p:cNvPr id="11" name="TextBox 10"/>
+          <p:cNvSpPr txBox="1"/>
+          <p:nvPr/>
+        </p:nvSpPr>
+        <p:spPr>
+          <a:xfrm>
+            <a:off x="1600200" y="3474720"/>
+            <a:ext cx="4114800" cy="868680"/>
+          </a:xfrm>
+          <a:prstGeom prst="rect">
+            <a:avLst/>
+          </a:prstGeom>
+          <a:noFill/>
+        </p:spPr>
+        <p:txBody>
+          <a:bodyPr wrap="square">
+            <a:spAutoFit/>
+          </a:bodyPr>
+          <a:lstStyle/>
+          <a:p>
+            <a:r>
+              <a:rPr sz="1400" b="0" i="0">
+                <a:solidFill>
+                  <a:srgbClr val="1B2330"/>
+                </a:solidFill>
+                <a:latin typeface="Montserrat"/>
+              </a:rPr>
+              <a:t>En un máximo de seis meses</a:t>
+            </a:r>
+          </a:p>
+        </p:txBody>
+      </p:sp>
+      <p:sp>
+        <p:nvSpPr>
+          <p:cNvPr id="12" name="Rounded Rectangle 11"/>
+          <p:cNvSpPr/>
+          <p:nvPr/>
+        </p:nvSpPr>
+        <p:spPr>
+          <a:xfrm>
+            <a:off x="6355080" y="3291840"/>
+            <a:ext cx="4983480" cy="1143000"/>
+          </a:xfrm>
+          <a:prstGeom prst="roundRect">
+            <a:avLst/>
+          </a:prstGeom>
+          <a:solidFill>
+            <a:srgbClr val="F3F6FB"/>
+          </a:solidFill>
+          <a:ln w="12700">
+            <a:solidFill>
+              <a:srgbClr val="C7D2E6"/>
+            </a:solidFill>
+          </a:ln>
+          <a:effectLst/>
+        </p:spPr>
+        <p:style>
+          <a:lnRef idx="1">
+            <a:schemeClr val="accent1"/>
+          </a:lnRef>
+          <a:fillRef idx="3">
+            <a:schemeClr val="accent1"/>
+          </a:fillRef>
+          <a:effectRef idx="2">
+            <a:schemeClr val="accent1"/>
+          </a:effectRef>
+          <a:fontRef idx="minor">
+            <a:schemeClr val="lt1"/>
+          </a:fontRef>
+        </p:style>
+        <p:txBody>
+          <a:bodyPr rtlCol="0" anchor="ctr"/>
+          <a:lstStyle/>
           <a:p>
             <a:pPr algn="ctr"/>
-            <a:r>
-              <a:rPr sz="1100" b="0" i="1">
-                <a:solidFill>
-                  <a:srgbClr val="64748B"/>
-                </a:solidFill>
-                <a:latin typeface="Montserrat"/>
-              </a:rPr>
-              <a:t>domestic gas boiler wall mounted apartment</a:t>
+          </a:p>
+        </p:txBody>
+      </p:sp>
+      <p:sp>
+        <p:nvSpPr>
+          <p:cNvPr id="13" name="Rectangle 12"/>
+          <p:cNvSpPr/>
+          <p:nvPr/>
+        </p:nvSpPr>
+        <p:spPr>
+          <a:xfrm>
+            <a:off x="6355080" y="3291840"/>
+            <a:ext cx="640080" cy="1143000"/>
+          </a:xfrm>
+          <a:prstGeom prst="rect">
+            <a:avLst/>
+          </a:prstGeom>
+          <a:solidFill>
+            <a:srgbClr val="1E2761"/>
+          </a:solidFill>
+          <a:ln>
+            <a:noFill/>
+          </a:ln>
+          <a:effectLst/>
+        </p:spPr>
+        <p:style>
+          <a:lnRef idx="1">
+            <a:schemeClr val="accent1"/>
+          </a:lnRef>
+          <a:fillRef idx="3">
+            <a:schemeClr val="accent1"/>
+          </a:fillRef>
+          <a:effectRef idx="2">
+            <a:schemeClr val="accent1"/>
+          </a:effectRef>
+          <a:fontRef idx="minor">
+            <a:schemeClr val="lt1"/>
+          </a:fontRef>
+        </p:style>
+        <p:txBody>
+          <a:bodyPr rtlCol="0" anchor="ctr"/>
+          <a:lstStyle/>
+          <a:p>
+            <a:pPr algn="ctr"/>
+          </a:p>
+        </p:txBody>
+      </p:sp>
+      <p:sp>
+        <p:nvSpPr>
+          <p:cNvPr id="14" name="TextBox 13"/>
+          <p:cNvSpPr txBox="1"/>
+          <p:nvPr/>
+        </p:nvSpPr>
+        <p:spPr>
+          <a:xfrm>
+            <a:off x="6355080" y="3611880"/>
+            <a:ext cx="640080" cy="548640"/>
+          </a:xfrm>
+          <a:prstGeom prst="rect">
+            <a:avLst/>
+          </a:prstGeom>
+          <a:noFill/>
+        </p:spPr>
+        <p:txBody>
+          <a:bodyPr wrap="square">
+            <a:spAutoFit/>
+          </a:bodyPr>
+          <a:lstStyle/>
+          <a:p>
+            <a:pPr algn="ctr"/>
+            <a:r>
+              <a:rPr sz="2200" b="1" i="0">
+                <a:solidFill>
+                  <a:srgbClr val="FFFFFF"/>
+                </a:solidFill>
+                <a:latin typeface="Montserrat"/>
+              </a:rPr>
+              <a:t>B</a:t>
+            </a:r>
+          </a:p>
+        </p:txBody>
+      </p:sp>
+      <p:sp>
+        <p:nvSpPr>
+          <p:cNvPr id="15" name="TextBox 14"/>
+          <p:cNvSpPr txBox="1"/>
+          <p:nvPr/>
+        </p:nvSpPr>
+        <p:spPr>
+          <a:xfrm>
+            <a:off x="7132320" y="3474720"/>
+            <a:ext cx="4114800" cy="868680"/>
+          </a:xfrm>
+          <a:prstGeom prst="rect">
+            <a:avLst/>
+          </a:prstGeom>
+          <a:noFill/>
+        </p:spPr>
+        <p:txBody>
+          <a:bodyPr wrap="square">
+            <a:spAutoFit/>
+          </a:bodyPr>
+          <a:lstStyle/>
+          <a:p>
+            <a:r>
+              <a:rPr sz="1400" b="0" i="0">
+                <a:solidFill>
+                  <a:srgbClr val="1B2330"/>
+                </a:solidFill>
+                <a:latin typeface="Montserrat"/>
+              </a:rPr>
+              <a:t>En menos de quince días naturales</a:t>
+            </a:r>
+          </a:p>
+        </p:txBody>
+      </p:sp>
+      <p:sp>
+        <p:nvSpPr>
+          <p:cNvPr id="16" name="Rounded Rectangle 15"/>
+          <p:cNvSpPr/>
+          <p:nvPr/>
+        </p:nvSpPr>
+        <p:spPr>
+          <a:xfrm>
+            <a:off x="822960" y="4617720"/>
+            <a:ext cx="4983480" cy="1143000"/>
+          </a:xfrm>
+          <a:prstGeom prst="roundRect">
+            <a:avLst/>
+          </a:prstGeom>
+          <a:solidFill>
+            <a:srgbClr val="F3F6FB"/>
+          </a:solidFill>
+          <a:ln w="12700">
+            <a:solidFill>
+              <a:srgbClr val="C7D2E6"/>
+            </a:solidFill>
+          </a:ln>
+          <a:effectLst/>
+        </p:spPr>
+        <p:style>
+          <a:lnRef idx="1">
+            <a:schemeClr val="accent1"/>
+          </a:lnRef>
+          <a:fillRef idx="3">
+            <a:schemeClr val="accent1"/>
+          </a:fillRef>
+          <a:effectRef idx="2">
+            <a:schemeClr val="accent1"/>
+          </a:effectRef>
+          <a:fontRef idx="minor">
+            <a:schemeClr val="lt1"/>
+          </a:fontRef>
+        </p:style>
+        <p:txBody>
+          <a:bodyPr rtlCol="0" anchor="ctr"/>
+          <a:lstStyle/>
+          <a:p>
+            <a:pPr algn="ctr"/>
+          </a:p>
+        </p:txBody>
+      </p:sp>
+      <p:sp>
+        <p:nvSpPr>
+          <p:cNvPr id="17" name="Rectangle 16"/>
+          <p:cNvSpPr/>
+          <p:nvPr/>
+        </p:nvSpPr>
+        <p:spPr>
+          <a:xfrm>
+            <a:off x="822960" y="4617720"/>
+            <a:ext cx="640080" cy="1143000"/>
+          </a:xfrm>
+          <a:prstGeom prst="rect">
+            <a:avLst/>
+          </a:prstGeom>
+          <a:solidFill>
+            <a:srgbClr val="1E2761"/>
+          </a:solidFill>
+          <a:ln>
+            <a:noFill/>
+          </a:ln>
+          <a:effectLst/>
+        </p:spPr>
+        <p:style>
+          <a:lnRef idx="1">
+            <a:schemeClr val="accent1"/>
+          </a:lnRef>
+          <a:fillRef idx="3">
+            <a:schemeClr val="accent1"/>
+          </a:fillRef>
+          <a:effectRef idx="2">
+            <a:schemeClr val="accent1"/>
+          </a:effectRef>
+          <a:fontRef idx="minor">
+            <a:schemeClr val="lt1"/>
+          </a:fontRef>
+        </p:style>
+        <p:txBody>
+          <a:bodyPr rtlCol="0" anchor="ctr"/>
+          <a:lstStyle/>
+          <a:p>
+            <a:pPr algn="ctr"/>
+          </a:p>
+        </p:txBody>
+      </p:sp>
+      <p:sp>
+        <p:nvSpPr>
+          <p:cNvPr id="18" name="TextBox 17"/>
+          <p:cNvSpPr txBox="1"/>
+          <p:nvPr/>
+        </p:nvSpPr>
+        <p:spPr>
+          <a:xfrm>
+            <a:off x="822960" y="4937760"/>
+            <a:ext cx="640080" cy="548640"/>
+          </a:xfrm>
+          <a:prstGeom prst="rect">
+            <a:avLst/>
+          </a:prstGeom>
+          <a:noFill/>
+        </p:spPr>
+        <p:txBody>
+          <a:bodyPr wrap="square">
+            <a:spAutoFit/>
+          </a:bodyPr>
+          <a:lstStyle/>
+          <a:p>
+            <a:pPr algn="ctr"/>
+            <a:r>
+              <a:rPr sz="2200" b="1" i="0">
+                <a:solidFill>
+                  <a:srgbClr val="FFFFFF"/>
+                </a:solidFill>
+                <a:latin typeface="Montserrat"/>
+              </a:rPr>
+              <a:t>C</a:t>
+            </a:r>
+          </a:p>
+        </p:txBody>
+      </p:sp>
+      <p:sp>
+        <p:nvSpPr>
+          <p:cNvPr id="19" name="TextBox 18"/>
+          <p:cNvSpPr txBox="1"/>
+          <p:nvPr/>
+        </p:nvSpPr>
+        <p:spPr>
+          <a:xfrm>
+            <a:off x="1600200" y="4800600"/>
+            <a:ext cx="4114800" cy="868680"/>
+          </a:xfrm>
+          <a:prstGeom prst="rect">
+            <a:avLst/>
+          </a:prstGeom>
+          <a:noFill/>
+        </p:spPr>
+        <p:txBody>
+          <a:bodyPr wrap="square">
+            <a:spAutoFit/>
+          </a:bodyPr>
+          <a:lstStyle/>
+          <a:p>
+            <a:r>
+              <a:rPr sz="1400" b="0" i="0">
+                <a:solidFill>
+                  <a:srgbClr val="1B2330"/>
+                </a:solidFill>
+                <a:latin typeface="Montserrat"/>
+              </a:rPr>
+              <a:t>En el mismo acto o se corta</a:t>
+            </a:r>
+          </a:p>
+        </p:txBody>
+      </p:sp>
+      <p:sp>
+        <p:nvSpPr>
+          <p:cNvPr id="20" name="Rounded Rectangle 19"/>
+          <p:cNvSpPr/>
+          <p:nvPr/>
+        </p:nvSpPr>
+        <p:spPr>
+          <a:xfrm>
+            <a:off x="6355080" y="4617720"/>
+            <a:ext cx="4983480" cy="1143000"/>
+          </a:xfrm>
+          <a:prstGeom prst="roundRect">
+            <a:avLst/>
+          </a:prstGeom>
+          <a:solidFill>
+            <a:srgbClr val="F3F6FB"/>
+          </a:solidFill>
+          <a:ln w="12700">
+            <a:solidFill>
+              <a:srgbClr val="C7D2E6"/>
+            </a:solidFill>
+          </a:ln>
+          <a:effectLst/>
+        </p:spPr>
+        <p:style>
+          <a:lnRef idx="1">
+            <a:schemeClr val="accent1"/>
+          </a:lnRef>
+          <a:fillRef idx="3">
+            <a:schemeClr val="accent1"/>
+          </a:fillRef>
+          <a:effectRef idx="2">
+            <a:schemeClr val="accent1"/>
+          </a:effectRef>
+          <a:fontRef idx="minor">
+            <a:schemeClr val="lt1"/>
+          </a:fontRef>
+        </p:style>
+        <p:txBody>
+          <a:bodyPr rtlCol="0" anchor="ctr"/>
+          <a:lstStyle/>
+          <a:p>
+            <a:pPr algn="ctr"/>
+          </a:p>
+        </p:txBody>
+      </p:sp>
+      <p:sp>
+        <p:nvSpPr>
+          <p:cNvPr id="21" name="Rectangle 20"/>
+          <p:cNvSpPr/>
+          <p:nvPr/>
+        </p:nvSpPr>
+        <p:spPr>
+          <a:xfrm>
+            <a:off x="6355080" y="4617720"/>
+            <a:ext cx="640080" cy="1143000"/>
+          </a:xfrm>
+          <a:prstGeom prst="rect">
+            <a:avLst/>
+          </a:prstGeom>
+          <a:solidFill>
+            <a:srgbClr val="1E2761"/>
+          </a:solidFill>
+          <a:ln>
+            <a:noFill/>
+          </a:ln>
+          <a:effectLst/>
+        </p:spPr>
+        <p:style>
+          <a:lnRef idx="1">
+            <a:schemeClr val="accent1"/>
+          </a:lnRef>
+          <a:fillRef idx="3">
+            <a:schemeClr val="accent1"/>
+          </a:fillRef>
+          <a:effectRef idx="2">
+            <a:schemeClr val="accent1"/>
+          </a:effectRef>
+          <a:fontRef idx="minor">
+            <a:schemeClr val="lt1"/>
+          </a:fontRef>
+        </p:style>
+        <p:txBody>
+          <a:bodyPr rtlCol="0" anchor="ctr"/>
+          <a:lstStyle/>
+          <a:p>
+            <a:pPr algn="ctr"/>
+          </a:p>
+        </p:txBody>
+      </p:sp>
+      <p:sp>
+        <p:nvSpPr>
+          <p:cNvPr id="22" name="TextBox 21"/>
+          <p:cNvSpPr txBox="1"/>
+          <p:nvPr/>
+        </p:nvSpPr>
+        <p:spPr>
+          <a:xfrm>
+            <a:off x="6355080" y="4937760"/>
+            <a:ext cx="640080" cy="548640"/>
+          </a:xfrm>
+          <a:prstGeom prst="rect">
+            <a:avLst/>
+          </a:prstGeom>
+          <a:noFill/>
+        </p:spPr>
+        <p:txBody>
+          <a:bodyPr wrap="square">
+            <a:spAutoFit/>
+          </a:bodyPr>
+          <a:lstStyle/>
+          <a:p>
+            <a:pPr algn="ctr"/>
+            <a:r>
+              <a:rPr sz="2200" b="1" i="0">
+                <a:solidFill>
+                  <a:srgbClr val="FFFFFF"/>
+                </a:solidFill>
+                <a:latin typeface="Montserrat"/>
+              </a:rPr>
+              <a:t>D</a:t>
+            </a:r>
+          </a:p>
+        </p:txBody>
+      </p:sp>
+      <p:sp>
+        <p:nvSpPr>
+          <p:cNvPr id="23" name="TextBox 22"/>
+          <p:cNvSpPr txBox="1"/>
+          <p:nvPr/>
+        </p:nvSpPr>
+        <p:spPr>
+          <a:xfrm>
+            <a:off x="7132320" y="4800600"/>
+            <a:ext cx="4114800" cy="868680"/>
+          </a:xfrm>
+          <a:prstGeom prst="rect">
+            <a:avLst/>
+          </a:prstGeom>
+          <a:noFill/>
+        </p:spPr>
+        <p:txBody>
+          <a:bodyPr wrap="square">
+            <a:spAutoFit/>
+          </a:bodyPr>
+          <a:lstStyle/>
+          <a:p>
+            <a:r>
+              <a:rPr sz="1400" b="0" i="0">
+                <a:solidFill>
+                  <a:srgbClr val="1B2330"/>
+                </a:solidFill>
+                <a:latin typeface="Montserrat"/>
+              </a:rPr>
+              <a:t>En un plazo de un año</a:t>
             </a:r>
           </a:p>
         </p:txBody>
@@ -14271,6 +18933,18 @@
   <p:clrMapOvr>
     <a:masterClrMapping/>
   </p:clrMapOvr>
+  <mc:AlternateContent xmlns:mc="http://schemas.openxmlformats.org/markup-compatibility/2006">
+    <mc:Choice xmlns:p14="http://schemas.microsoft.com/office/powerpoint/2010/main" Requires="p14">
+      <p:transition spd="med" p14:dur="700">
+        <p14:cube dir="l"/>
+      </p:transition>
+    </mc:Choice>
+    <mc:Fallback>
+      <p:transition spd="med">
+        <p:push dir="l"/>
+      </p:transition>
+    </mc:Fallback>
+  </mc:AlternateContent>
 </p:sld>
 </file>
 

--- a/Curso Gas B/16 - UNE 60670 - Instalaciones en servicio y control periodico/16 - UNE 60670 - Instalaciones en servicio y control periodico - Vídeo 2.pptx
+++ b/Curso Gas B/16 - UNE 60670 - Instalaciones en servicio y control periodico/16 - UNE 60670 - Instalaciones en servicio y control periodico - Vídeo 2.pptx
@@ -613,12 +613,12 @@
           <a:lstStyle/>
           <a:p>
             <a:r>
-              <a:t>N1: ¿Por qué quince días y no seis meses?</a:t>
-            </a:r>
-          </a:p>
-          <a:p>
-            <a:r>
-              <a:t>N2: Porque una fuga, aunque sea secundaria, es gas escapando, y eso no admite medio año de espera. Chuleta completa: principal, ya o se corta; secundaria general, seis meses; secundaria que es fuga, menos de quince días naturales, que cuentan fines de semana y festivos.</a:t>
+              <a:t>N2: La respuesta correcta es la opción B: en menos de quince días naturales. Una fuga, aunque sea secundaria, es gas escapando, y eso no admite medio año de espera. Chuleta completa: principal, ya o se corta; secundaria general, seis meses; secundaria que es fuga, menos de quince días naturales, que cuentan fines de semana y festivos.</a:t>
+            </a:r>
+          </a:p>
+          <a:p>
+            <a:r>
+              <a:t>N1: Días naturales, ojo, no laborables.</a:t>
             </a:r>
           </a:p>
         </p:txBody>
@@ -943,7 +943,7 @@
           <a:lstStyle/>
           <a:p>
             <a:r>
-              <a:t>N1: Una de las que más caen y más matan. ¿Qué aparato puede ir en un baño o un dormitorio?</a:t>
+              <a:t>N1: Una de las que más caen y más matan. Escucha la pregunta y las cuatro opciones. ¿Qué tipo de aparato de gas sí puede instalarse en un cuarto de baño? Opción A, un aparato de tipo A; opción B, un aparato de tipo B de tiro natural; opción C, un aparato de tipo C, estanco; opción D, ninguno, está prohibido cualquiera. Párate a pensarlo.</a:t>
             </a:r>
           </a:p>
           <a:p>
@@ -1018,12 +1018,12 @@
           <a:lstStyle/>
           <a:p>
             <a:r>
-              <a:t>N1: ¿Por qué el tipo C sí y los otros no?</a:t>
-            </a:r>
-          </a:p>
-          <a:p>
-            <a:r>
-              <a:t>N2: Porque el tipo C es estanco: toma el aire del exterior y expulsa los humos al exterior, no toca el aire del cuarto. El tipo A y el tipo B respiran con el local, y en un sitio cerrado donde duermes o te encierras el monóxido te intoxica sin que te des cuenta. Por eso la caldera estanca moderna sí puede ir en un baño y el viejo calentador de tiro natural no.</a:t>
+              <a:t>N2: La respuesta correcta es la opción C: un aparato de tipo C, estanco. El tipo C toma el aire del exterior y expulsa los humos al exterior, no toca el aire del cuarto, así que no puede intoxicar. El tipo A y el tipo B respiran con el local, y en un sitio cerrado donde duermes o te encierras el monóxido te intoxica sin que te des cuenta. Por eso la caldera estanca moderna sí puede ir en un baño y el viejo calentador de tiro natural no.</a:t>
+            </a:r>
+          </a:p>
+          <a:p>
+            <a:r>
+              <a:t>N1: Estanco, sí; los que respiran el cuarto, no.</a:t>
             </a:r>
           </a:p>
         </p:txBody>
@@ -1508,7 +1508,7 @@
           <a:lstStyle/>
           <a:p>
             <a:r>
-              <a:t>N1: Del número de oro del vídeo. Tipo B mal ventilado en un cuartito de ocho metros cúbicos o menos. ¿Principal o secundaria?</a:t>
+              <a:t>N1: Del número de oro del vídeo. Escucha la pregunta y las cuatro opciones. Un aparato de tipo B mal ventilado en un local de ocho metros cúbicos o menos, ¿qué anomalía es? Opción A, secundaria, con seis meses de plazo; opción B, principal, se corta el suministro; opción C, sin importancia, solo recomendación; opción D, principal solo si además hay fuga. Tómate un momento.</a:t>
             </a:r>
           </a:p>
           <a:p>
@@ -1583,12 +1583,12 @@
           <a:lstStyle/>
           <a:p>
             <a:r>
-              <a:t>N1: ¿Por qué principal en el local pequeño?</a:t>
-            </a:r>
-          </a:p>
-          <a:p>
-            <a:r>
-              <a:t>N2: Porque en un cuartito de ocho metros cúbicos o menos, mal ventilado, el monóxido se acumula deprisa y mata; por eso es principal y se corta. Si el local fuera grande, de más de ocho, el mismo defecto sería solo secundario. Mismo defecto, distinta gravedad según el volumen.</a:t>
+              <a:t>N2: La respuesta correcta es la opción B: principal, se corta el suministro. En un cuartito de ocho metros cúbicos o menos, mal ventilado, el monóxido se acumula deprisa y mata, así que es principal. Si el local fuera grande, de más de ocho, el mismo defecto sería solo secundario. Mismo defecto, distinta gravedad según el volumen.</a:t>
+            </a:r>
+          </a:p>
+          <a:p>
+            <a:r>
+              <a:t>N1: Ocho metros cúbicos, la frontera de oro.</a:t>
             </a:r>
           </a:p>
         </p:txBody>
@@ -2659,7 +2659,7 @@
           <a:lstStyle/>
           <a:p>
             <a:r>
-              <a:t>N1: De plazos, que son de examen seguro. Una anomalía secundaria, pero que resulta ser una fuga. ¿Cuánto margen hay?</a:t>
+              <a:t>N1: De plazos, que son de examen seguro. Escucha la pregunta y las cuatro opciones. Una anomalía secundaria que consiste en una falta de estanquidad, es decir, una fuga, ¿en qué plazo debe corregirse? Opción A, en un máximo de seis meses; opción B, en menos de quince días naturales; opción C, en el mismo acto o se corta; opción D, en un plazo de un año. Piénsalo un momento.</a:t>
             </a:r>
           </a:p>
           <a:p>
